--- a/slides/parallelcc-part1.pptx
+++ b/slides/parallelcc-part1.pptx
@@ -16536,7 +16536,7 @@
                 </a:solidFill>
                 <a:latin typeface="Calibri"/>
               </a:rPr>
-              <a:t>Round 0:  parfor (u = v) ∈ E: Union(u, v)        Work ← terms of E</a:t>
+              <a:t>Round 0:  parfor (u = v) ∈ E: Union(u, v)        seed Frontier ← all compound terms</a:t>
             </a:r>
           </a:p>
         </p:txBody>
@@ -16658,7 +16658,7 @@
                 </a:solidFill>
                 <a:latin typeface="Calibri"/>
               </a:rPr>
-              <a:t>fold parent lists into new roots;</a:t>
+              <a:t>seed round: all compound terms</a:t>
             </a:r>
           </a:p>
           <a:p>
@@ -16670,7 +16670,7 @@
                 </a:solidFill>
                 <a:latin typeface="Calibri"/>
               </a:rPr>
-              <a:t>parents of the changed classes</a:t>
+              <a:t>later: parents of the changed classes</a:t>
             </a:r>
           </a:p>
         </p:txBody>
@@ -20559,7 +20559,7 @@
                 </a:solidFill>
                 <a:latin typeface="Calibri"/>
               </a:rPr>
-              <a:t>parents of the changed classes</a:t>
+              <a:t>seed round: every compound term</a:t>
             </a:r>
           </a:p>
           <a:p>
@@ -29556,7 +29556,16 @@
                 </a:solidFill>
                 <a:latin typeface="Consolas"/>
               </a:rPr>
-              <a:t>        Frontier ← ⋃ Parents[Find(c)] for c ∈ Work</a:t>
+              <a:t>        Frontier ← all compound terms          on round 0   </a:t>
+            </a:r>
+            <a:r>
+              <a:rPr sz="1350" b="0" i="0">
+                <a:solidFill>
+                  <a:srgbClr val="6B717A"/>
+                </a:solidFill>
+                <a:latin typeface="Consolas"/>
+              </a:rPr>
+              <a:t>▹ seed round</a:t>
             </a:r>
           </a:p>
           <a:p>
@@ -29572,16 +29581,32 @@
                 </a:solidFill>
                 <a:latin typeface="Consolas"/>
               </a:rPr>
-              <a:t>        groups ← GroupBy(Congruent, Frontier)             </a:t>
-            </a:r>
+              <a:t>        Frontier ← ⋃ Parents[Find(c)] for c ∈ Work   otherwise</a:t>
+            </a:r>
+          </a:p>
+          <a:p>
+            <a:pPr>
+              <a:spcAft>
+                <a:spcPts val="150"/>
+              </a:spcAft>
+            </a:pPr>
             <a:r>
               <a:rPr sz="1350" b="0" i="0">
                 <a:solidFill>
+                  <a:srgbClr val="2B2F36"/>
+                </a:solidFill>
+                <a:latin typeface="Consolas"/>
+              </a:rPr>
+              <a:t>        groups ← GroupBy(Congruent, Frontier)          </a:t>
+            </a:r>
+            <a:r>
+              <a:rPr sz="1350" b="0" i="0">
+                <a:solidFill>
                   <a:srgbClr val="6B717A"/>
                 </a:solidFill>
                 <a:latin typeface="Consolas"/>
               </a:rPr>
-              <a:t>▹ semisort on signatures</a:t>
+              <a:t>▹ semisort on sigs</a:t>
             </a:r>
           </a:p>
           <a:p>
@@ -29807,6 +29832,55 @@
                 <a:latin typeface="Calibri"/>
               </a:rPr>
               <a:t>signatures use a union-find no thread is modifying</a:t>
+            </a:r>
+          </a:p>
+          <a:p>
+            <a:pPr marL="274320" indent="-237744">
+              <a:spcBef>
+                <a:spcPts val="800"/>
+              </a:spcBef>
+              <a:buClr>
+                <a:srgbClr val="6B717A"/>
+              </a:buClr>
+              <a:buChar char="•"/>
+            </a:pPr>
+            <a:r>
+              <a:rPr sz="1500" b="1" i="0">
+                <a:solidFill>
+                  <a:srgbClr val="2B2F36"/>
+                </a:solidFill>
+                <a:latin typeface="Calibri"/>
+              </a:rPr>
+              <a:t>round 0</a:t>
+            </a:r>
+            <a:r>
+              <a:rPr sz="1500" b="0" i="0">
+                <a:solidFill>
+                  <a:srgbClr val="2B2F36"/>
+                </a:solidFill>
+                <a:latin typeface="Calibri"/>
+              </a:rPr>
+              <a:t> examines every compound term</a:t>
+            </a:r>
+          </a:p>
+          <a:p>
+            <a:pPr marL="585216" indent="-237744">
+              <a:spcBef>
+                <a:spcPts val="200"/>
+              </a:spcBef>
+              <a:buClr>
+                <a:srgbClr val="6B717A"/>
+              </a:buClr>
+              <a:buChar char="–"/>
+            </a:pPr>
+            <a:r>
+              <a:rPr sz="1200" b="0" i="0">
+                <a:solidFill>
+                  <a:srgbClr val="2B2F36"/>
+                </a:solidFill>
+                <a:latin typeface="Calibri"/>
+              </a:rPr>
+              <a:t>terms can be congruent before any union</a:t>
             </a:r>
           </a:p>
           <a:p>
@@ -30600,6 +30674,26 @@
                 </a:solidFill>
                 <a:latin typeface="Calibri"/>
               </a:rPr>
+              <a:t>no such merge exists when the children coincide: the seed round covers that case</a:t>
+            </a:r>
+          </a:p>
+          <a:p>
+            <a:pPr marL="274320" indent="-237744">
+              <a:spcBef>
+                <a:spcPts val="800"/>
+              </a:spcBef>
+              <a:buClr>
+                <a:srgbClr val="6B717A"/>
+              </a:buClr>
+              <a:buChar char="•"/>
+            </a:pPr>
+            <a:r>
+              <a:rPr sz="1400" b="0" i="0">
+                <a:solidFill>
+                  <a:srgbClr val="2B2F36"/>
+                </a:solidFill>
+                <a:latin typeface="Calibri"/>
+              </a:rPr>
               <a:t>equal signatures there ⇒ merged; classes never shrink</a:t>
             </a:r>
           </a:p>
@@ -30846,6 +30940,35 @@
                 </a:solidFill>
                 <a:latin typeface="Calibri"/>
               </a:rPr>
+              <a:t>round 0</a:t>
+            </a:r>
+            <a:r>
+              <a:rPr sz="1900" b="0" i="0">
+                <a:solidFill>
+                  <a:srgbClr val="2B2F36"/>
+                </a:solidFill>
+                <a:latin typeface="Calibri"/>
+              </a:rPr>
+              <a:t>: every compound term dirty, as in ParentCC</a:t>
+            </a:r>
+          </a:p>
+          <a:p>
+            <a:pPr marL="274320" indent="-237744">
+              <a:spcBef>
+                <a:spcPts val="800"/>
+              </a:spcBef>
+              <a:buClr>
+                <a:srgbClr val="6B717A"/>
+              </a:buClr>
+              <a:buChar char="•"/>
+            </a:pPr>
+            <a:r>
+              <a:rPr sz="1900" b="1" i="0">
+                <a:solidFill>
+                  <a:srgbClr val="2B2F36"/>
+                </a:solidFill>
+                <a:latin typeface="Calibri"/>
+              </a:rPr>
               <a:t>Frontier</a:t>
             </a:r>
             <a:r>
@@ -33402,7 +33525,16 @@
                 </a:solidFill>
                 <a:latin typeface="Calibri"/>
               </a:rPr>
-              <a:t>dirty ← classes merged in round 0</a:t>
+              <a:t>seed round: </a:t>
+            </a:r>
+            <a:r>
+              <a:rPr sz="1600" b="1" i="0">
+                <a:solidFill>
+                  <a:srgbClr val="2B2F36"/>
+                </a:solidFill>
+                <a:latin typeface="Calibri"/>
+              </a:rPr>
+              <a:t>every compound term is dirty</a:t>
             </a:r>
           </a:p>
           <a:p>
@@ -33416,22 +33548,13 @@
               <a:buChar char="•"/>
             </a:pPr>
             <a:r>
-              <a:rPr sz="1600" b="1" i="0">
-                <a:solidFill>
-                  <a:srgbClr val="2B2F36"/>
-                </a:solidFill>
-                <a:latin typeface="Calibri"/>
-              </a:rPr>
-              <a:t>filter all 16 terms</a:t>
-            </a:r>
-            <a:r>
               <a:rPr sz="1600" b="0" i="0">
                 <a:solidFill>
                   <a:srgbClr val="2B2F36"/>
                 </a:solidFill>
                 <a:latin typeface="Calibri"/>
               </a:rPr>
-              <a:t>: keep t with a child in a dirty class</a:t>
+              <a:t>later rounds filter for a child in a dirty class</a:t>
             </a:r>
           </a:p>
           <a:p>

--- a/slides/parallelcc-part1.pptx
+++ b/slides/parallelcc-part1.pptx
@@ -1091,7 +1091,7 @@
           <a:lstStyle/>
           <a:p>
             <a:r>
-              <a:t>Replace the worklist with rounds. Work holds the representatives dethroned by the previous round. Fold their parent lists into the new roots, take the parents as the frontier, group the frontier by signature with semisort, merge every group that spans more than one class, and the dethroned roots form the next Work. Stop when Work is empty.</a:t>
+              <a:t>Replace the worklist with rounds. Work holds the pre-merge roots of the classes merged in the previous round. Fold their parent lists into the new roots, take the parents as the frontier, group the frontier by signature with semisort, merge every group that spans more than one class, and all pre-merge roots of merged groups form the next Work. Stop when Work is empty.</a:t>
             </a:r>
           </a:p>
         </p:txBody>
@@ -1511,7 +1511,7 @@
           <a:lstStyle/>
           <a:p>
             <a:r>
-              <a:t>One union; m2 is dethroned.</a:t>
+              <a:t>One union; both pre-merge roots enter Work.</a:t>
             </a:r>
           </a:p>
         </p:txBody>
@@ -1721,7 +1721,7 @@
           <a:lstStyle/>
           <a:p>
             <a:r>
-              <a:t>Four short arguments. Determinism per round follows from linearizability plus order-independence of the partition generated by a set of unions. Termination: each term is dethroned at most once. Soundness by the invariant that union-find classes sit inside congruence classes. Completeness: the last merge among child pairs puts both parents on the next frontier.</a:t>
+              <a:t>Four short arguments. Determinism per round follows from linearizability plus order-independence of the partition generated by a set of unions. Termination: each productive round reduces the class count. Soundness by the invariant that union-find classes sit inside congruence classes. Completeness: the last merge among child pairs puts both parents on the next frontier.</a:t>
             </a:r>
           </a:p>
         </p:txBody>
@@ -16591,7 +16591,7 @@
                 </a:solidFill>
                 <a:latin typeface="Calibri"/>
               </a:rPr>
-              <a:t>representatives dethroned</a:t>
+              <a:t>pre-merge roots of the classes</a:t>
             </a:r>
           </a:p>
           <a:p>
@@ -16603,7 +16603,7 @@
                 </a:solidFill>
                 <a:latin typeface="Calibri"/>
               </a:rPr>
-              <a:t>by the previous round</a:t>
+              <a:t>merged in the previous round</a:t>
             </a:r>
           </a:p>
         </p:txBody>
@@ -16979,8 +16979,8 @@
         </p:nvSpPr>
         <p:spPr>
           <a:xfrm>
-            <a:off x="2898648" y="3703320"/>
-            <a:ext cx="2011680" cy="640080"/>
+            <a:off x="2898648" y="3657600"/>
+            <a:ext cx="2194560" cy="640080"/>
           </a:xfrm>
           <a:prstGeom prst="rect">
             <a:avLst/>
@@ -17001,7 +17001,7 @@
                 </a:solidFill>
                 <a:latin typeface="Calibri"/>
               </a:rPr>
-              <a:t>dethroned roots</a:t>
+              <a:t>pre-merge roots of</a:t>
             </a:r>
           </a:p>
           <a:p>
@@ -17013,7 +17013,7 @@
                 </a:solidFill>
                 <a:latin typeface="Calibri"/>
               </a:rPr>
-              <a:t>→ next Work</a:t>
+              <a:t>merged groups → next Work</a:t>
             </a:r>
           </a:p>
         </p:txBody>
@@ -23257,7 +23257,7 @@
                 </a:solidFill>
                 <a:latin typeface="Calibri"/>
               </a:rPr>
-              <a:t>dethroned roots: a₂, x₂</a:t>
+              <a:t>pre-merge roots of both groups: a₁, a₂, x₁, x₂</a:t>
             </a:r>
           </a:p>
           <a:p>
@@ -23277,7 +23277,7 @@
                 </a:solidFill>
                 <a:latin typeface="Calibri"/>
               </a:rPr>
-              <a:t>Work ← {a₂, x₂}</a:t>
+              <a:t>Work ← {a₁, a₂, x₁, x₂}</a:t>
             </a:r>
           </a:p>
         </p:txBody>
@@ -27159,7 +27159,7 @@
                 </a:solidFill>
                 <a:latin typeface="Calibri"/>
               </a:rPr>
-              <a:t>Work ← {m₂}</a:t>
+              <a:t>Work ← {m₁, m₂}</a:t>
             </a:r>
           </a:p>
         </p:txBody>
@@ -29007,7 +29007,7 @@
                 </a:solidFill>
                 <a:latin typeface="Calibri"/>
               </a:rPr>
-              <a:t>fold: Parents[m₂] = ∅</a:t>
+              <a:t>fold: Parents[m₂] = ∅; m₁ is its own root</a:t>
             </a:r>
           </a:p>
           <a:p>
@@ -29679,7 +29679,7 @@
                 </a:solidFill>
                 <a:latin typeface="Consolas"/>
               </a:rPr>
-              <a:t>            Work ← Work ∪ (pre-merge roots of g) \ {rep}</a:t>
+              <a:t>            Work ← Work ∪ pre-merge roots of g</a:t>
             </a:r>
           </a:p>
           <a:p>
@@ -30334,7 +30334,7 @@
                 </a:solidFill>
                 <a:latin typeface="Calibri"/>
               </a:rPr>
-              <a:t>a term enters Work only when dethroned</a:t>
+              <a:t>a spanning group forces at least one successful union</a:t>
             </a:r>
           </a:p>
           <a:p>
@@ -30354,7 +30354,7 @@
                 </a:solidFill>
                 <a:latin typeface="Calibri"/>
               </a:rPr>
-              <a:t>each term dethroned at most once</a:t>
+              <a:t>so every productive round reduces the class count</a:t>
             </a:r>
           </a:p>
           <a:p>
@@ -30374,7 +30374,7 @@
                 </a:solidFill>
                 <a:latin typeface="Calibri"/>
               </a:rPr>
-              <a:t>at most |T| − 1 entries over the whole run</a:t>
+              <a:t>at most |T| − 1 productive rounds</a:t>
             </a:r>
           </a:p>
         </p:txBody>
@@ -30634,7 +30634,7 @@
                 </a:solidFill>
                 <a:latin typeface="Calibri"/>
               </a:rPr>
-              <a:t>let Mᵢ ~ Nᵢ for all children; take the round of the last such merge</a:t>
+              <a:t>children already equivalent at round 0: both parents are in the seed frontier</a:t>
             </a:r>
           </a:p>
           <a:p>
@@ -30654,7 +30654,7 @@
                 </a:solidFill>
                 <a:latin typeface="Calibri"/>
               </a:rPr>
-              <a:t>its losers enter Work, so both parents are in the next frontier</a:t>
+              <a:t>else take the round of the last merge among the children</a:t>
             </a:r>
           </a:p>
           <a:p>
@@ -30674,7 +30674,7 @@
                 </a:solidFill>
                 <a:latin typeface="Calibri"/>
               </a:rPr>
-              <a:t>no such merge exists when the children coincide: the seed round covers that case</a:t>
+              <a:t>all its pre-merge roots enter Work, so both parents are in the next frontier</a:t>
             </a:r>
           </a:p>
           <a:p>

--- a/slides/parallelcc-part1.pptx
+++ b/slides/parallelcc-part1.pptx
@@ -6303,7 +6303,7 @@
                 </a:solidFill>
                 <a:latin typeface="Calibri"/>
               </a:rPr>
-              <a:t>Reading the diagram: one node, one term</a:t>
+              <a:t>Reading the diagram</a:t>
             </a:r>
           </a:p>
         </p:txBody>
@@ -7723,7 +7723,7 @@
                 </a:solidFill>
                 <a:latin typeface="Calibri"/>
               </a:rPr>
-              <a:t>Reading the diagram: parent and children</a:t>
+              <a:t>Reading the diagram</a:t>
             </a:r>
           </a:p>
         </p:txBody>
@@ -9217,7 +9217,7 @@
                 </a:solidFill>
                 <a:latin typeface="Calibri"/>
               </a:rPr>
-              <a:t>Congruence closure by hand: step 0</a:t>
+              <a:t>Congruence closure by hand</a:t>
             </a:r>
           </a:p>
         </p:txBody>
@@ -10743,7 +10743,7 @@
                 </a:solidFill>
                 <a:latin typeface="Calibri"/>
               </a:rPr>
-              <a:t>Congruence closure by hand: step 0</a:t>
+              <a:t>Congruence closure by hand</a:t>
             </a:r>
           </a:p>
         </p:txBody>
@@ -12444,7 +12444,7 @@
                 </a:solidFill>
                 <a:latin typeface="Calibri"/>
               </a:rPr>
-              <a:t>Congruence closure by hand: step 1</a:t>
+              <a:t>Congruence closure by hand</a:t>
             </a:r>
           </a:p>
         </p:txBody>
@@ -13970,7 +13970,7 @@
                 </a:solidFill>
                 <a:latin typeface="Calibri"/>
               </a:rPr>
-              <a:t>Congruence closure by hand: step 1</a:t>
+              <a:t>Congruence closure by hand</a:t>
             </a:r>
           </a:p>
         </p:txBody>
@@ -15566,7 +15566,7 @@
                 </a:solidFill>
                 <a:latin typeface="Calibri"/>
               </a:rPr>
-              <a:t>Congruence closure by hand: step 2</a:t>
+              <a:t>Congruence closure by hand</a:t>
             </a:r>
           </a:p>
         </p:txBody>
@@ -17127,7 +17127,7 @@
                 </a:solidFill>
                 <a:latin typeface="Calibri"/>
               </a:rPr>
-              <a:t>Congruence closure by hand: step 2</a:t>
+              <a:t>Congruence closure by hand</a:t>
             </a:r>
           </a:p>
         </p:txBody>
@@ -18758,7 +18758,7 @@
                 </a:solidFill>
                 <a:latin typeface="Calibri"/>
               </a:rPr>
-              <a:t>Congruence closure by hand: step 3</a:t>
+              <a:t>Congruence closure by hand</a:t>
             </a:r>
           </a:p>
         </p:txBody>
@@ -20354,7 +20354,7 @@
                 </a:solidFill>
                 <a:latin typeface="Calibri"/>
               </a:rPr>
-              <a:t>Congruence closure by hand: step 3</a:t>
+              <a:t>Congruence closure by hand</a:t>
             </a:r>
           </a:p>
         </p:txBody>
@@ -22537,7 +22537,7 @@
                 </a:solidFill>
                 <a:latin typeface="Calibri"/>
               </a:rPr>
-              <a:t>Congruence closure by hand: query answered</a:t>
+              <a:t>Congruence closure by hand</a:t>
             </a:r>
           </a:p>
         </p:txBody>
@@ -24238,7 +24238,7 @@
                 </a:solidFill>
                 <a:latin typeface="Calibri"/>
               </a:rPr>
-              <a:t>Observation: what does a merge wait on?</a:t>
+              <a:t>Observation</a:t>
             </a:r>
           </a:p>
         </p:txBody>
@@ -25914,7 +25914,7 @@
                 </a:solidFill>
                 <a:latin typeface="Calibri"/>
               </a:rPr>
-              <a:t>Observation: unrelated merges do not wait</a:t>
+              <a:t>Observation</a:t>
             </a:r>
           </a:p>
         </p:txBody>
@@ -32752,7 +32752,7 @@
                 </a:solidFill>
                 <a:latin typeface="Calibri"/>
               </a:rPr>
-              <a:t>ParentCC on the example: round 1</a:t>
+              <a:t>ParentCC on the example</a:t>
             </a:r>
           </a:p>
         </p:txBody>
@@ -34550,7 +34550,7 @@
                 </a:solidFill>
                 <a:latin typeface="Calibri"/>
               </a:rPr>
-              <a:t>ParentCC on the example: round 1</a:t>
+              <a:t>ParentCC on the example</a:t>
             </a:r>
           </a:p>
         </p:txBody>
@@ -36216,7 +36216,7 @@
                 </a:solidFill>
                 <a:latin typeface="Calibri"/>
               </a:rPr>
-              <a:t>ParentCC on the example: round 2</a:t>
+              <a:t>ParentCC on the example</a:t>
             </a:r>
           </a:p>
         </p:txBody>
@@ -40202,7 +40202,7 @@
                 </a:solidFill>
                 <a:latin typeface="Calibri"/>
               </a:rPr>
-              <a:t>FilterCC on the example: round 1</a:t>
+              <a:t>FilterCC on the example</a:t>
             </a:r>
           </a:p>
         </p:txBody>
@@ -42075,7 +42075,7 @@
                 </a:solidFill>
                 <a:latin typeface="Calibri"/>
               </a:rPr>
-              <a:t>FilterCC on the example: round 2</a:t>
+              <a:t>FilterCC on the example</a:t>
             </a:r>
           </a:p>
         </p:txBody>
@@ -47533,7 +47533,7 @@
                 </a:solidFill>
                 <a:latin typeface="Calibri"/>
               </a:rPr>
-              <a:t>Running example: the query</a:t>
+              <a:t>Running example: a miter</a:t>
             </a:r>
           </a:p>
         </p:txBody>
@@ -48954,7 +48954,7 @@
                 </a:solidFill>
                 <a:latin typeface="Calibri"/>
               </a:rPr>
-              <a:t>Running example: input equalities</a:t>
+              <a:t>Running example: a miter</a:t>
             </a:r>
           </a:p>
         </p:txBody>

--- a/slides/parallelcc-part1.pptx
+++ b/slides/parallelcc-part1.pptx
@@ -1393,7 +1393,7 @@
           <a:lstStyle/>
           <a:p>
             <a:r>
-              <a:t>Assert that the two outputs differ. If that is unsatisfiable the circuits are equivalent. The query is the only thing on the slide, sitting between the two output gates.</a:t>
+              <a:t>Assert that the two outputs differ. If that is unsatisfiable the circuits are equivalent. The query is the only thing on the slide, sitting between the two output gates. The point of the miter for us: once the gate structure is recovered from the CNF, congruence closure alone often decides the instance, which is why Biere et al. run it inside a SAT solver.</a:t>
             </a:r>
           </a:p>
         </p:txBody>
@@ -2233,7 +2233,7 @@
           <a:lstStyle/>
           <a:p>
             <a:r>
-              <a:t>The outputs are in one class, so the query m1 differs from m2 is unsatisfiable: the circuits are equivalent.</a:t>
+              <a:t>The outputs are in one class, so the query m1 differs from m2 is unsatisfiable: the circuits are equivalent. Count what we did: eight merges, one at a time. That is exactly the sequential worklist algorithm, and it is the baseline the parallel version has to beat.</a:t>
             </a:r>
           </a:p>
         </p:txBody>
@@ -2653,7 +2653,7 @@
           <a:lstStyle/>
           <a:p>
             <a:r>
-              <a:t>Two names for the evaluation. Depth is the number of rounds, width the merges available in one round. Here both are 2. On the circuit benchmarks width reaches millions while depth stays small, and Amar will show that width is what predicts speedup.</a:t>
+              <a:t>Two names for the evaluation. Depth is the number of congruence rounds after the input round, here 2. Width is the most merges any one round offers, here 5, in round 0. Depth is what we cannot parallelize; width is what we can. On the circuit benchmarks width reaches millions while depth stays small, and Amar will show that width predicts speedup.</a:t>
             </a:r>
           </a:p>
         </p:txBody>
@@ -3003,7 +3003,7 @@
           <a:lstStyle/>
           <a:p>
             <a:r>
-              <a:t>Repeat while a round merged something. The very first round has no previous merges to look at, so it considers every term; that also catches terms that were congruent before any equality was applied.</a:t>
+              <a:t>Repeat while a round merged something. The very first round has no previous merges to look at, so it considers every term; that also catches terms that were congruent before any equality was applied. The barrier between phases is what makes the parallelism safe: while we compute signatures nobody is merging, so every thread reads the same classes, and while we merge nobody is reading signatures.</a:t>
             </a:r>
           </a:p>
         </p:txBody>
@@ -3143,7 +3143,7 @@
           <a:lstStyle/>
           <a:p>
             <a:r>
-              <a:t>Round 1. Phase one, candidates: the first round considers every gate, in amber. Phase two, group them by signature: symbol plus the class of each child, written in brackets above each purple group. The ANDs share a key, the XORs share a key, the ITEs do not yet because a1 and a2 are still in different classes. The grouping is the semisort.</a:t>
+              <a:t>Round 1. Phase one, candidates: the first round considers every gate, in amber. Phase two, group them by signature: symbol plus the class of each child, written in brackets above each purple group. The ANDs share a key, the XORs share a key, the ITEs do not yet because a1 and a2 are still in different classes. The grouping is a semisort. This is the step that changes: the sequential algorithm looks each signature up in a hash table, one at a time; here all the signatures of the round are sorted together, in one data-parallel step.</a:t>
             </a:r>
           </a:p>
         </p:txBody>
@@ -7574,7 +7574,7 @@
                 </a:solidFill>
                 <a:latin typeface="Calibri"/>
               </a:rPr>
-              <a:t>Despite ubiquity, algorithms used in practice </a:t>
+              <a:t>Practice: every implementation </a:t>
             </a:r>
             <a:r>
               <a:rPr sz="2600" b="1" i="0">
@@ -7584,6 +7584,24 @@
                 <a:latin typeface="Calibri"/>
               </a:rPr>
               <a:t>fully sequential</a:t>
+            </a:r>
+            <a:r>
+              <a:rPr sz="2600" b="0" i="0">
+                <a:solidFill>
+                  <a:srgbClr val="2B2F36"/>
+                </a:solidFill>
+                <a:latin typeface="Calibri"/>
+              </a:rPr>
+              <a:t>, on machines with </a:t>
+            </a:r>
+            <a:r>
+              <a:rPr sz="2600" b="1" i="0">
+                <a:solidFill>
+                  <a:srgbClr val="2B2F36"/>
+                </a:solidFill>
+                <a:latin typeface="Calibri"/>
+              </a:rPr>
+              <a:t>96 cores</a:t>
             </a:r>
           </a:p>
           <a:p>
@@ -7603,7 +7621,7 @@
                 </a:solidFill>
                 <a:latin typeface="Calibri"/>
               </a:rPr>
-              <a:t>Unfortunately, congruence closure is </a:t>
+              <a:t>Theory: congruence closure is </a:t>
             </a:r>
             <a:r>
               <a:rPr sz="2600" b="1" i="0">
@@ -7632,7 +7650,7 @@
                 </a:solidFill>
                 <a:latin typeface="Calibri"/>
               </a:rPr>
-              <a:t>Likely </a:t>
+              <a:t>Worst case: likely </a:t>
             </a:r>
             <a:r>
               <a:rPr sz="2600" b="1" i="0">
@@ -7641,7 +7659,7 @@
                 </a:solidFill>
                 <a:latin typeface="Calibri"/>
               </a:rPr>
-              <a:t>inherently sequential in the worst case</a:t>
+              <a:t>inherently sequential</a:t>
             </a:r>
           </a:p>
         </p:txBody>
@@ -7717,7 +7735,7 @@
                 </a:solidFill>
                 <a:latin typeface="Calibri"/>
               </a:rPr>
-              <a:t>Question: do practical instances expose enough</a:t>
+              <a:t>Question: worst case is sequential.</a:t>
             </a:r>
           </a:p>
           <a:p>
@@ -7729,7 +7747,7 @@
                 </a:solidFill>
                 <a:latin typeface="Calibri"/>
               </a:rPr>
-              <a:t>independent merges for real speedups?</a:t>
+              <a:t>Are the instances people actually solve?</a:t>
             </a:r>
           </a:p>
         </p:txBody>
@@ -14287,6 +14305,47 @@
           </a:p>
         </p:txBody>
       </p:sp>
+      <p:sp>
+        <p:nvSpPr>
+          <p:cNvPr id="44" name="Rounded Rectangle 43"/>
+          <p:cNvSpPr/>
+          <p:nvPr/>
+        </p:nvSpPr>
+        <p:spPr>
+          <a:xfrm>
+            <a:off x="548640" y="5596128"/>
+            <a:ext cx="11064240" cy="694944"/>
+          </a:xfrm>
+          <a:prstGeom prst="roundRect">
+            <a:avLst>
+              <a:gd name="adj" fmla="val 15000"/>
+            </a:avLst>
+          </a:prstGeom>
+          <a:solidFill>
+            <a:srgbClr val="1F2A44"/>
+          </a:solidFill>
+          <a:ln>
+            <a:noFill/>
+          </a:ln>
+          <a:effectLst/>
+        </p:spPr>
+        <p:txBody>
+          <a:bodyPr rtlCol="0" anchor="ctr" lIns="54864" rIns="54864" tIns="27432" bIns="27432" wrap="square"/>
+          <a:lstStyle/>
+          <a:p>
+            <a:pPr algn="ctr"/>
+            <a:r>
+              <a:rPr sz="2200" b="1" i="0">
+                <a:solidFill>
+                  <a:srgbClr val="FFFFFF"/>
+                </a:solidFill>
+                <a:latin typeface="Calibri"/>
+              </a:rPr>
+              <a:t>Often decided by congruence closure alone   (Biere et al., SAT 2024)</a:t>
+            </a:r>
+          </a:p>
+        </p:txBody>
+      </p:sp>
     </p:spTree>
   </p:cSld>
   <p:clrMapOvr>
@@ -32144,6 +32203,47 @@
           </a:p>
         </p:txBody>
       </p:sp>
+      <p:sp>
+        <p:nvSpPr>
+          <p:cNvPr id="52" name="Rounded Rectangle 51"/>
+          <p:cNvSpPr/>
+          <p:nvPr/>
+        </p:nvSpPr>
+        <p:spPr>
+          <a:xfrm>
+            <a:off x="548640" y="5596128"/>
+            <a:ext cx="11064240" cy="694944"/>
+          </a:xfrm>
+          <a:prstGeom prst="roundRect">
+            <a:avLst>
+              <a:gd name="adj" fmla="val 15000"/>
+            </a:avLst>
+          </a:prstGeom>
+          <a:solidFill>
+            <a:srgbClr val="1F2A44"/>
+          </a:solidFill>
+          <a:ln>
+            <a:noFill/>
+          </a:ln>
+          <a:effectLst/>
+        </p:spPr>
+        <p:txBody>
+          <a:bodyPr rtlCol="0" anchor="ctr" lIns="54864" rIns="54864" tIns="27432" bIns="27432" wrap="square"/>
+          <a:lstStyle/>
+          <a:p>
+            <a:pPr algn="ctr"/>
+            <a:r>
+              <a:rPr sz="2600" b="1" i="0">
+                <a:solidFill>
+                  <a:srgbClr val="FFFFFF"/>
+                </a:solidFill>
+                <a:latin typeface="Calibri"/>
+              </a:rPr>
+              <a:t>Equivalent.  8 merges, one at a time</a:t>
+            </a:r>
+          </a:p>
+        </p:txBody>
+      </p:sp>
     </p:spTree>
   </p:cSld>
   <p:clrMapOvr>
@@ -42857,7 +42957,7 @@
                 </a:solidFill>
                 <a:latin typeface="Calibri"/>
               </a:rPr>
-              <a:t>depth: number of rounds        width: merges per round</a:t>
+              <a:t>depth: congruence rounds (2)      width: most merges in a round (5)</a:t>
             </a:r>
           </a:p>
         </p:txBody>
@@ -45543,6 +45643,41 @@
           </a:p>
         </p:txBody>
       </p:sp>
+      <p:sp>
+        <p:nvSpPr>
+          <p:cNvPr id="25" name="TextBox 24"/>
+          <p:cNvSpPr txBox="1"/>
+          <p:nvPr/>
+        </p:nvSpPr>
+        <p:spPr>
+          <a:xfrm>
+            <a:off x="685800" y="5486400"/>
+            <a:ext cx="10789920" cy="365760"/>
+          </a:xfrm>
+          <a:prstGeom prst="rect">
+            <a:avLst/>
+          </a:prstGeom>
+          <a:noFill/>
+        </p:spPr>
+        <p:txBody>
+          <a:bodyPr wrap="square" anchor="t" lIns="45720" rIns="45720" tIns="27432" bIns="27432">
+            <a:spAutoFit/>
+          </a:bodyPr>
+          <a:lstStyle/>
+          <a:p>
+            <a:pPr algn="ctr"/>
+            <a:r>
+              <a:rPr sz="1500" b="0" i="0">
+                <a:solidFill>
+                  <a:srgbClr val="6B717A"/>
+                </a:solidFill>
+                <a:latin typeface="Calibri"/>
+              </a:rPr>
+              <a:t>barrier between phases: signatures read a union-find nobody is writing</a:t>
+            </a:r>
+          </a:p>
+        </p:txBody>
+      </p:sp>
     </p:spTree>
   </p:cSld>
   <p:clrMapOvr>
@@ -49245,7 +49380,48 @@
       </p:sp>
       <p:sp>
         <p:nvSpPr>
-          <p:cNvPr id="55" name="TextBox 54"/>
+          <p:cNvPr id="55" name="Rounded Rectangle 54"/>
+          <p:cNvSpPr/>
+          <p:nvPr/>
+        </p:nvSpPr>
+        <p:spPr>
+          <a:xfrm>
+            <a:off x="548640" y="5596128"/>
+            <a:ext cx="11064240" cy="694944"/>
+          </a:xfrm>
+          <a:prstGeom prst="roundRect">
+            <a:avLst>
+              <a:gd name="adj" fmla="val 15000"/>
+            </a:avLst>
+          </a:prstGeom>
+          <a:solidFill>
+            <a:srgbClr val="1F2A44"/>
+          </a:solidFill>
+          <a:ln>
+            <a:noFill/>
+          </a:ln>
+          <a:effectLst/>
+        </p:spPr>
+        <p:txBody>
+          <a:bodyPr rtlCol="0" anchor="ctr" lIns="54864" rIns="54864" tIns="27432" bIns="27432" wrap="square"/>
+          <a:lstStyle/>
+          <a:p>
+            <a:pPr algn="ctr"/>
+            <a:r>
+              <a:rPr sz="2200" b="1" i="0">
+                <a:solidFill>
+                  <a:srgbClr val="FFFFFF"/>
+                </a:solidFill>
+                <a:latin typeface="Calibri"/>
+              </a:rPr>
+              <a:t>grouping by signature = a semisort: one parallel step, no table lookups</a:t>
+            </a:r>
+          </a:p>
+        </p:txBody>
+      </p:sp>
+      <p:sp>
+        <p:nvSpPr>
+          <p:cNvPr id="56" name="TextBox 55"/>
           <p:cNvSpPr txBox="1"/>
           <p:nvPr/>
         </p:nvSpPr>
@@ -49280,7 +49456,7 @@
       </p:sp>
       <p:sp>
         <p:nvSpPr>
-          <p:cNvPr id="56" name="TextBox 55"/>
+          <p:cNvPr id="57" name="TextBox 56"/>
           <p:cNvSpPr txBox="1"/>
           <p:nvPr/>
         </p:nvSpPr>
@@ -49315,7 +49491,7 @@
       </p:sp>
       <p:sp>
         <p:nvSpPr>
-          <p:cNvPr id="57" name="TextBox 56"/>
+          <p:cNvPr id="58" name="TextBox 57"/>
           <p:cNvSpPr txBox="1"/>
           <p:nvPr/>
         </p:nvSpPr>
@@ -49350,7 +49526,7 @@
       </p:sp>
       <p:sp>
         <p:nvSpPr>
-          <p:cNvPr id="58" name="TextBox 57"/>
+          <p:cNvPr id="59" name="TextBox 58"/>
           <p:cNvSpPr txBox="1"/>
           <p:nvPr/>
         </p:nvSpPr>
@@ -49385,7 +49561,7 @@
       </p:sp>
       <p:sp>
         <p:nvSpPr>
-          <p:cNvPr id="59" name="Rounded Rectangle 58"/>
+          <p:cNvPr id="60" name="Rounded Rectangle 59"/>
           <p:cNvSpPr/>
           <p:nvPr/>
         </p:nvSpPr>
@@ -49419,7 +49595,7 @@
       </p:sp>
       <p:sp>
         <p:nvSpPr>
-          <p:cNvPr id="60" name="TextBox 59"/>
+          <p:cNvPr id="61" name="TextBox 60"/>
           <p:cNvSpPr txBox="1"/>
           <p:nvPr/>
         </p:nvSpPr>
@@ -49454,7 +49630,7 @@
       </p:sp>
       <p:sp>
         <p:nvSpPr>
-          <p:cNvPr id="61" name="Rounded Rectangle 60"/>
+          <p:cNvPr id="62" name="Rounded Rectangle 61"/>
           <p:cNvSpPr/>
           <p:nvPr/>
         </p:nvSpPr>
@@ -49487,7 +49663,7 @@
       </p:sp>
       <p:sp>
         <p:nvSpPr>
-          <p:cNvPr id="62" name="TextBox 61"/>
+          <p:cNvPr id="63" name="TextBox 62"/>
           <p:cNvSpPr txBox="1"/>
           <p:nvPr/>
         </p:nvSpPr>
@@ -49522,7 +49698,7 @@
       </p:sp>
       <p:sp>
         <p:nvSpPr>
-          <p:cNvPr id="63" name="Rounded Rectangle 62"/>
+          <p:cNvPr id="64" name="Rounded Rectangle 63"/>
           <p:cNvSpPr/>
           <p:nvPr/>
         </p:nvSpPr>
@@ -49555,7 +49731,7 @@
       </p:sp>
       <p:sp>
         <p:nvSpPr>
-          <p:cNvPr id="64" name="TextBox 63"/>
+          <p:cNvPr id="65" name="TextBox 64"/>
           <p:cNvSpPr txBox="1"/>
           <p:nvPr/>
         </p:nvSpPr>
@@ -57478,7 +57654,7 @@
                 </a:solidFill>
                 <a:latin typeface="Calibri"/>
               </a:rPr>
-              <a:t>Round 3: no candidates, done.  Same schedule as before</a:t>
+              <a:t>Done: 8 merges in 3 rounds, the schedule from before</a:t>
             </a:r>
           </a:p>
         </p:txBody>
@@ -59666,6 +59842,41 @@
           <a:p>
             <a:pPr algn="l"/>
             <a:r>
+              <a:rPr sz="2600" b="1" i="0">
+                <a:solidFill>
+                  <a:srgbClr val="FFFFFF"/>
+                </a:solidFill>
+                <a:latin typeface="Calibri"/>
+              </a:rPr>
+              <a:t>Do real instances have width?</a:t>
+            </a:r>
+          </a:p>
+        </p:txBody>
+      </p:sp>
+      <p:sp>
+        <p:nvSpPr>
+          <p:cNvPr id="6" name="TextBox 5"/>
+          <p:cNvSpPr txBox="1"/>
+          <p:nvPr/>
+        </p:nvSpPr>
+        <p:spPr>
+          <a:xfrm>
+            <a:off x="777240" y="4023360"/>
+            <a:ext cx="10058400" cy="548640"/>
+          </a:xfrm>
+          <a:prstGeom prst="rect">
+            <a:avLst/>
+          </a:prstGeom>
+          <a:noFill/>
+        </p:spPr>
+        <p:txBody>
+          <a:bodyPr wrap="square" anchor="t" lIns="45720" rIns="45720" tIns="27432" bIns="27432">
+            <a:spAutoFit/>
+          </a:bodyPr>
+          <a:lstStyle/>
+          <a:p>
+            <a:pPr algn="l"/>
+            <a:r>
               <a:rPr sz="2200" b="0" i="0">
                 <a:solidFill>
                   <a:srgbClr val="C9D3E6"/>
@@ -62478,7 +62689,7 @@
                 </a:solidFill>
                 <a:latin typeface="Calibri"/>
               </a:rPr>
-              <a:t>Called repeatedly over a solver run, so its cost adds up</a:t>
+              <a:t>Called repeatedly per solver run: the cost adds up</a:t>
             </a:r>
           </a:p>
         </p:txBody>

--- a/slides/parallelcc-part1.pptx
+++ b/slides/parallelcc-part1.pptx
@@ -57,6 +57,7 @@
     <p:sldId id="305" r:id="rId57"/>
     <p:sldId id="306" r:id="rId58"/>
     <p:sldId id="307" r:id="rId59"/>
+    <p:sldId id="308" r:id="rId60"/>
   </p:sldIdLst>
   <p:sldSz cx="12191695" cy="6858000" type="screen4x3"/>
   <p:notesSz cx="6858000" cy="9144000"/>
@@ -3143,7 +3144,7 @@
           <a:lstStyle/>
           <a:p>
             <a:r>
-              <a:t>Round 1. Phase one, candidates: the first round considers every gate, in amber. Phase two, group them by signature: symbol plus the class of each child, written in brackets above each purple group. The ANDs share a key, the XORs share a key, the ITEs do not yet because a1 and a2 are still in different classes. The grouping is a semisort. This is the step that changes: the sequential algorithm looks each signature up in a hash table, one at a time; here all the signatures of the round are sorted together, in one data-parallel step.</a:t>
+              <a:t>Round 1. Phase one, candidates: the first round considers every gate, in amber.</a:t>
             </a:r>
           </a:p>
         </p:txBody>
@@ -3213,7 +3214,7 @@
           <a:lstStyle/>
           <a:p>
             <a:r>
-              <a:t>Phase three, merge: both two-member groups merge, concurrently. This is where the parallel run differs from the hand trace: two unions in one round.</a:t>
+              <a:t>Phase two, group them by signature: symbol plus the class of each child, written in brackets above each purple group. The ANDs share a key, the XORs share a key, the ITEs do not yet because a1 and a2 are still in different classes. The grouping is a semisort. Say out loud that this is the step that changes: the sequential algorithm looks each signature up in a hash table, one at a time; here all the signatures of the round are sorted together, in one data-parallel step.</a:t>
             </a:r>
           </a:p>
         </p:txBody>
@@ -3283,7 +3284,7 @@
           <a:lstStyle/>
           <a:p>
             <a:r>
-              <a:t>Round 2. Candidates are the parents of what just merged: the two ITEs. Their keys now agree, so they form one group.</a:t>
+              <a:t>Phase three, merge: both two-member groups merge, concurrently. This is where the parallel run differs from the hand trace: two unions in one round.</a:t>
             </a:r>
           </a:p>
         </p:txBody>
@@ -3353,7 +3354,7 @@
           <a:lstStyle/>
           <a:p>
             <a:r>
-              <a:t>Merge them. One union.</a:t>
+              <a:t>Round 2. Candidates are the parents of what just merged: the two ITEs. Their keys now agree, so they form one group.</a:t>
             </a:r>
           </a:p>
         </p:txBody>
@@ -3423,7 +3424,7 @@
           <a:lstStyle/>
           <a:p>
             <a:r>
-              <a:t>The ITEs have no parents, so round 3 has no candidates and the loop stops. Eight merges in three rounds, and the rings are exactly the bulk-synchronous schedule from before: ParentCC found all of the available parallelism.</a:t>
+              <a:t>Merge them. One union.</a:t>
             </a:r>
           </a:p>
         </p:txBody>
@@ -3493,7 +3494,7 @@
           <a:lstStyle/>
           <a:p>
             <a:r>
-              <a:t>One line each; the paper has the proofs. Sound: every group has equal symbol and equal child classes, so each merge is an instance of the congruence rule. Complete: when the last of a pair’s children merge, both parents are candidates next round. Terminates: a round that merges anything reduces the number of classes.</a:t>
+              <a:t>The ITEs have no parents, so round 3 has no candidates and the loop stops. Eight merges in three rounds, and the rings are exactly the bulk-synchronous schedule from before: ParentCC found all of the available parallelism.</a:t>
             </a:r>
           </a:p>
         </p:txBody>
@@ -3563,7 +3564,7 @@
           <a:lstStyle/>
           <a:p>
             <a:r>
-              <a:t>One slide on the second algorithm. ParentCC finds candidates through parent lists, one per class, and every merge appends to them: allocation on the hot path. FilterCC drops the lists. A merge just sets a dirty bit on its classes, and the next round filters all terms for a child in a dirty class. Threads racing to set the same bit is harmless, setting a bit is idempotent. The price is a scan of every term each round, so FilterCC wins when rounds are few and ParentCC when they are many; Amar has the numbers.</a:t>
+              <a:t>One line each; the paper has the proofs. Sound: every group has equal symbol and equal child classes, so each merge is an instance of the congruence rule. Complete: when the last of a pair’s children merge, both parents are candidates next round. Terminates: a round that merges anything reduces the number of classes.</a:t>
             </a:r>
           </a:p>
         </p:txBody>
@@ -3703,7 +3704,7 @@
           <a:lstStyle/>
           <a:p>
             <a:r>
-              <a:t>Grouping: ParlayLib integer sort on the signature hashes followed by a bucket pass per hash, which beat the library semisort on the small buckets we see. Merging a group: divide and conquer unions. The baseline is the classical worklist algorithm in the Nieuwenhuis and Oliveras variant, which is what the hand trace did: one merge at a time, each merge re-examining the parents of the losing class. We tried a topological-sort fixpoint and Downey-Sethi-Tarjan as well; the worklist was fastest. It got the same tuning care as the parallel code, so speedups are against a strong baseline.</a:t>
+              <a:t>One slide on the second algorithm. ParentCC finds candidates through parent lists, one per class, and every merge appends to them: allocation on the hot path. FilterCC drops the lists. A merge just sets a dirty bit on its classes, and the next round filters all terms for a child in a dirty class. Threads racing to set the same bit is harmless, setting a bit is idempotent. The price is a scan of every term each round, so FilterCC wins when rounds are few and ParentCC when they are many; Amar has the numbers.</a:t>
             </a:r>
           </a:p>
         </p:txBody>
@@ -3773,7 +3774,7 @@
           <a:lstStyle/>
           <a:p>
             <a:r>
-              <a:t>Hand off to Amar for the evaluation.</a:t>
+              <a:t>Grouping: ParlayLib integer sort on the signature hashes followed by a bucket pass per hash, which beat the library semisort on the small buckets we see. Merging a group: divide and conquer unions. The baseline is the classical worklist algorithm in the Nieuwenhuis and Oliveras variant, which is what the hand trace did: one merge at a time, each merge re-examining the parents of the losing class. We tried a topological-sort fixpoint and Downey-Sethi-Tarjan as well; the worklist was fastest. It got the same tuning care as the parallel code, so speedups are against a strong baseline.</a:t>
             </a:r>
           </a:p>
         </p:txBody>
@@ -3799,6 +3800,76 @@
 </file>
 
 <file path=ppt/notesSlides/notesSlide52.xml><?xml version="1.0" encoding="utf-8"?>
+<p:notes xmlns:a="http://schemas.openxmlformats.org/drawingml/2006/main" xmlns:p="http://schemas.openxmlformats.org/presentationml/2006/main" xmlns:r="http://schemas.openxmlformats.org/officeDocument/2006/relationships">
+  <p:cSld>
+    <p:spTree>
+      <p:nvGrpSpPr>
+        <p:cNvPr id="1" name=""/>
+        <p:cNvGrpSpPr/>
+        <p:nvPr/>
+      </p:nvGrpSpPr>
+      <p:grpSpPr>
+        <a:xfrm>
+          <a:off x="0" y="0"/>
+          <a:ext cx="0" cy="0"/>
+          <a:chOff x="0" y="0"/>
+          <a:chExt cx="0" cy="0"/>
+        </a:xfrm>
+      </p:grpSpPr>
+      <p:sp>
+        <p:nvSpPr>
+          <p:cNvPr id="2" name="Slide Image Placeholder 1"/>
+          <p:cNvSpPr>
+            <a:spLocks noGrp="1"/>
+          </p:cNvSpPr>
+          <p:nvPr>
+            <p:ph type="sldImg" idx="2"/>
+          </p:nvPr>
+        </p:nvSpPr>
+        <p:spPr/>
+      </p:sp>
+      <p:sp>
+        <p:nvSpPr>
+          <p:cNvPr id="3" name="Notes Placeholder 2"/>
+          <p:cNvSpPr>
+            <a:spLocks noGrp="1"/>
+          </p:cNvSpPr>
+          <p:nvPr>
+            <p:ph type="body" idx="3" sz="quarter"/>
+          </p:nvPr>
+        </p:nvSpPr>
+        <p:spPr/>
+        <p:txBody>
+          <a:bodyPr/>
+          <a:lstStyle/>
+          <a:p>
+            <a:r>
+              <a:t>Hand off to Amar for the evaluation.</a:t>
+            </a:r>
+          </a:p>
+        </p:txBody>
+      </p:sp>
+      <p:sp>
+        <p:nvSpPr>
+          <p:cNvPr id="4" name="Slide Number Placeholder 3"/>
+          <p:cNvSpPr>
+            <a:spLocks noGrp="1"/>
+          </p:cNvSpPr>
+          <p:nvPr>
+            <p:ph type="sldNum" idx="5" sz="quarter"/>
+          </p:nvPr>
+        </p:nvSpPr>
+        <p:spPr/>
+      </p:sp>
+    </p:spTree>
+  </p:cSld>
+  <p:clrMapOvr>
+    <a:masterClrMapping/>
+  </p:clrMapOvr>
+</p:notes>
+</file>
+
+<file path=ppt/notesSlides/notesSlide53.xml><?xml version="1.0" encoding="utf-8"?>
 <p:notes xmlns:a="http://schemas.openxmlformats.org/drawingml/2006/main" xmlns:p="http://schemas.openxmlformats.org/presentationml/2006/main" xmlns:r="http://schemas.openxmlformats.org/officeDocument/2006/relationships">
   <p:cSld>
     <p:spTree>
@@ -14305,47 +14376,6 @@
           </a:p>
         </p:txBody>
       </p:sp>
-      <p:sp>
-        <p:nvSpPr>
-          <p:cNvPr id="44" name="Rounded Rectangle 43"/>
-          <p:cNvSpPr/>
-          <p:nvPr/>
-        </p:nvSpPr>
-        <p:spPr>
-          <a:xfrm>
-            <a:off x="548640" y="5596128"/>
-            <a:ext cx="11064240" cy="694944"/>
-          </a:xfrm>
-          <a:prstGeom prst="roundRect">
-            <a:avLst>
-              <a:gd name="adj" fmla="val 15000"/>
-            </a:avLst>
-          </a:prstGeom>
-          <a:solidFill>
-            <a:srgbClr val="1F2A44"/>
-          </a:solidFill>
-          <a:ln>
-            <a:noFill/>
-          </a:ln>
-          <a:effectLst/>
-        </p:spPr>
-        <p:txBody>
-          <a:bodyPr rtlCol="0" anchor="ctr" lIns="54864" rIns="54864" tIns="27432" bIns="27432" wrap="square"/>
-          <a:lstStyle/>
-          <a:p>
-            <a:pPr algn="ctr"/>
-            <a:r>
-              <a:rPr sz="2200" b="1" i="0">
-                <a:solidFill>
-                  <a:srgbClr val="FFFFFF"/>
-                </a:solidFill>
-                <a:latin typeface="Calibri"/>
-              </a:rPr>
-              <a:t>Often decided by congruence closure alone   (Biere et al., SAT 2024)</a:t>
-            </a:r>
-          </a:p>
-        </p:txBody>
-      </p:sp>
     </p:spTree>
   </p:cSld>
   <p:clrMapOvr>
@@ -32203,47 +32233,6 @@
           </a:p>
         </p:txBody>
       </p:sp>
-      <p:sp>
-        <p:nvSpPr>
-          <p:cNvPr id="52" name="Rounded Rectangle 51"/>
-          <p:cNvSpPr/>
-          <p:nvPr/>
-        </p:nvSpPr>
-        <p:spPr>
-          <a:xfrm>
-            <a:off x="548640" y="5596128"/>
-            <a:ext cx="11064240" cy="694944"/>
-          </a:xfrm>
-          <a:prstGeom prst="roundRect">
-            <a:avLst>
-              <a:gd name="adj" fmla="val 15000"/>
-            </a:avLst>
-          </a:prstGeom>
-          <a:solidFill>
-            <a:srgbClr val="1F2A44"/>
-          </a:solidFill>
-          <a:ln>
-            <a:noFill/>
-          </a:ln>
-          <a:effectLst/>
-        </p:spPr>
-        <p:txBody>
-          <a:bodyPr rtlCol="0" anchor="ctr" lIns="54864" rIns="54864" tIns="27432" bIns="27432" wrap="square"/>
-          <a:lstStyle/>
-          <a:p>
-            <a:pPr algn="ctr"/>
-            <a:r>
-              <a:rPr sz="2600" b="1" i="0">
-                <a:solidFill>
-                  <a:srgbClr val="FFFFFF"/>
-                </a:solidFill>
-                <a:latin typeface="Calibri"/>
-              </a:rPr>
-              <a:t>Equivalent.  8 merges, one at a time</a:t>
-            </a:r>
-          </a:p>
-        </p:txBody>
-      </p:sp>
     </p:spTree>
   </p:cSld>
   <p:clrMapOvr>
@@ -45643,41 +45632,6 @@
           </a:p>
         </p:txBody>
       </p:sp>
-      <p:sp>
-        <p:nvSpPr>
-          <p:cNvPr id="25" name="TextBox 24"/>
-          <p:cNvSpPr txBox="1"/>
-          <p:nvPr/>
-        </p:nvSpPr>
-        <p:spPr>
-          <a:xfrm>
-            <a:off x="685800" y="5486400"/>
-            <a:ext cx="10789920" cy="365760"/>
-          </a:xfrm>
-          <a:prstGeom prst="rect">
-            <a:avLst/>
-          </a:prstGeom>
-          <a:noFill/>
-        </p:spPr>
-        <p:txBody>
-          <a:bodyPr wrap="square" anchor="t" lIns="45720" rIns="45720" tIns="27432" bIns="27432">
-            <a:spAutoFit/>
-          </a:bodyPr>
-          <a:lstStyle/>
-          <a:p>
-            <a:pPr algn="ctr"/>
-            <a:r>
-              <a:rPr sz="1500" b="0" i="0">
-                <a:solidFill>
-                  <a:srgbClr val="6B717A"/>
-                </a:solidFill>
-                <a:latin typeface="Calibri"/>
-              </a:rPr>
-              <a:t>barrier between phases: signatures read a union-find nobody is writing</a:t>
-            </a:r>
-          </a:p>
-        </p:txBody>
-      </p:sp>
     </p:spTree>
   </p:cSld>
   <p:clrMapOvr>
@@ -47904,138 +47858,94 @@
           </a:p>
         </p:txBody>
       </p:sp>
-      <p:sp>
-        <p:nvSpPr>
-          <p:cNvPr id="11" name="Rounded Rectangle 10"/>
-          <p:cNvSpPr/>
-          <p:nvPr/>
-        </p:nvSpPr>
-        <p:spPr>
-          <a:xfrm>
-            <a:off x="2866644" y="2907791"/>
-            <a:ext cx="2011680" cy="950976"/>
-          </a:xfrm>
-          <a:prstGeom prst="roundRect">
-            <a:avLst>
-              <a:gd name="adj" fmla="val 30000"/>
-            </a:avLst>
-          </a:prstGeom>
-          <a:noFill/>
-          <a:ln w="22225">
-            <a:solidFill>
-              <a:srgbClr val="7B4FB5"/>
-            </a:solidFill>
-            <a:prstDash val="sysDot"/>
-          </a:ln>
-          <a:effectLst/>
-        </p:spPr>
-        <p:txBody>
-          <a:bodyPr rtlCol="0" anchor="ctr" lIns="54864" rIns="54864" tIns="27432" bIns="27432" wrap="square"/>
-          <a:lstStyle/>
-          <a:p>
-            <a:pPr algn="ctr"/>
-          </a:p>
-        </p:txBody>
-      </p:sp>
-      <p:sp>
-        <p:nvSpPr>
-          <p:cNvPr id="12" name="Rounded Rectangle 11"/>
-          <p:cNvSpPr/>
-          <p:nvPr/>
-        </p:nvSpPr>
-        <p:spPr>
-          <a:xfrm>
-            <a:off x="7301483" y="2907791"/>
-            <a:ext cx="2011680" cy="950976"/>
-          </a:xfrm>
-          <a:prstGeom prst="roundRect">
-            <a:avLst>
-              <a:gd name="adj" fmla="val 30000"/>
-            </a:avLst>
-          </a:prstGeom>
-          <a:noFill/>
-          <a:ln w="22225">
-            <a:solidFill>
-              <a:srgbClr val="7B4FB5"/>
-            </a:solidFill>
-            <a:prstDash val="sysDot"/>
-          </a:ln>
-          <a:effectLst/>
-        </p:spPr>
-        <p:txBody>
-          <a:bodyPr rtlCol="0" anchor="ctr" lIns="54864" rIns="54864" tIns="27432" bIns="27432" wrap="square"/>
-          <a:lstStyle/>
-          <a:p>
-            <a:pPr algn="ctr"/>
-          </a:p>
-        </p:txBody>
-      </p:sp>
-      <p:sp>
-        <p:nvSpPr>
-          <p:cNvPr id="13" name="Rounded Rectangle 12"/>
-          <p:cNvSpPr/>
-          <p:nvPr/>
-        </p:nvSpPr>
-        <p:spPr>
-          <a:xfrm>
-            <a:off x="4768596" y="1581912"/>
-            <a:ext cx="1252728" cy="676656"/>
-          </a:xfrm>
-          <a:prstGeom prst="roundRect">
-            <a:avLst>
-              <a:gd name="adj" fmla="val 30000"/>
-            </a:avLst>
-          </a:prstGeom>
-          <a:noFill/>
-          <a:ln w="22225">
-            <a:solidFill>
-              <a:srgbClr val="7B4FB5"/>
-            </a:solidFill>
-            <a:prstDash val="sysDot"/>
-          </a:ln>
-          <a:effectLst/>
-        </p:spPr>
-        <p:txBody>
-          <a:bodyPr rtlCol="0" anchor="ctr" lIns="54864" rIns="54864" tIns="27432" bIns="27432" wrap="square"/>
-          <a:lstStyle/>
-          <a:p>
-            <a:pPr algn="ctr"/>
-          </a:p>
-        </p:txBody>
-      </p:sp>
-      <p:sp>
-        <p:nvSpPr>
-          <p:cNvPr id="14" name="Rounded Rectangle 13"/>
-          <p:cNvSpPr/>
-          <p:nvPr/>
-        </p:nvSpPr>
-        <p:spPr>
-          <a:xfrm>
-            <a:off x="6432804" y="1581912"/>
-            <a:ext cx="1252728" cy="676656"/>
-          </a:xfrm>
-          <a:prstGeom prst="roundRect">
-            <a:avLst>
-              <a:gd name="adj" fmla="val 30000"/>
-            </a:avLst>
-          </a:prstGeom>
-          <a:noFill/>
-          <a:ln w="22225">
-            <a:solidFill>
-              <a:srgbClr val="7B4FB5"/>
-            </a:solidFill>
-            <a:prstDash val="sysDot"/>
-          </a:ln>
-          <a:effectLst/>
-        </p:spPr>
-        <p:txBody>
-          <a:bodyPr rtlCol="0" anchor="ctr" lIns="54864" rIns="54864" tIns="27432" bIns="27432" wrap="square"/>
-          <a:lstStyle/>
-          <a:p>
-            <a:pPr algn="ctr"/>
-          </a:p>
-        </p:txBody>
-      </p:sp>
+      <p:cxnSp>
+        <p:nvCxnSpPr>
+          <p:cNvPr id="11" name="Connector 10"/>
+          <p:cNvCxnSpPr/>
+          <p:nvPr/>
+        </p:nvCxnSpPr>
+        <p:spPr>
+          <a:xfrm flipH="1">
+            <a:off x="2784348" y="3803903"/>
+            <a:ext cx="539496" cy="1106425"/>
+          </a:xfrm>
+          <a:prstGeom prst="line">
+            <a:avLst/>
+          </a:prstGeom>
+          <a:ln w="15875">
+            <a:solidFill>
+              <a:srgbClr val="8A8F98"/>
+            </a:solidFill>
+          </a:ln>
+          <a:effectLst/>
+        </p:spPr>
+      </p:cxnSp>
+      <p:cxnSp>
+        <p:nvCxnSpPr>
+          <p:cNvPr id="12" name="Connector 11"/>
+          <p:cNvCxnSpPr/>
+          <p:nvPr/>
+        </p:nvCxnSpPr>
+        <p:spPr>
+          <a:xfrm>
+            <a:off x="3323844" y="3803903"/>
+            <a:ext cx="960120" cy="1106425"/>
+          </a:xfrm>
+          <a:prstGeom prst="line">
+            <a:avLst/>
+          </a:prstGeom>
+          <a:ln w="15875">
+            <a:solidFill>
+              <a:srgbClr val="8A8F98"/>
+            </a:solidFill>
+          </a:ln>
+          <a:effectLst/>
+        </p:spPr>
+      </p:cxnSp>
+      <p:cxnSp>
+        <p:nvCxnSpPr>
+          <p:cNvPr id="13" name="Connector 12"/>
+          <p:cNvCxnSpPr/>
+          <p:nvPr/>
+        </p:nvCxnSpPr>
+        <p:spPr>
+          <a:xfrm flipH="1">
+            <a:off x="3406139" y="3803903"/>
+            <a:ext cx="1014985" cy="1106425"/>
+          </a:xfrm>
+          <a:prstGeom prst="line">
+            <a:avLst/>
+          </a:prstGeom>
+          <a:ln w="15875">
+            <a:solidFill>
+              <a:srgbClr val="8A8F98"/>
+            </a:solidFill>
+          </a:ln>
+          <a:effectLst/>
+        </p:spPr>
+      </p:cxnSp>
+      <p:cxnSp>
+        <p:nvCxnSpPr>
+          <p:cNvPr id="14" name="Connector 13"/>
+          <p:cNvCxnSpPr/>
+          <p:nvPr/>
+        </p:nvCxnSpPr>
+        <p:spPr>
+          <a:xfrm>
+            <a:off x="4421124" y="3803903"/>
+            <a:ext cx="484632" cy="1106425"/>
+          </a:xfrm>
+          <a:prstGeom prst="line">
+            <a:avLst/>
+          </a:prstGeom>
+          <a:ln w="15875">
+            <a:solidFill>
+              <a:srgbClr val="8A8F98"/>
+            </a:solidFill>
+          </a:ln>
+          <a:effectLst/>
+        </p:spPr>
+      </p:cxnSp>
       <p:cxnSp>
         <p:nvCxnSpPr>
           <p:cNvPr id="15" name="Connector 14"/>
@@ -48044,8 +47954,8 @@
         </p:nvCxnSpPr>
         <p:spPr>
           <a:xfrm flipH="1">
-            <a:off x="2784348" y="3803903"/>
-            <a:ext cx="539496" cy="1106425"/>
+            <a:off x="7283196" y="3803903"/>
+            <a:ext cx="475487" cy="1106425"/>
           </a:xfrm>
           <a:prstGeom prst="line">
             <a:avLst/>
@@ -48066,8 +47976,8 @@
         </p:nvCxnSpPr>
         <p:spPr>
           <a:xfrm>
-            <a:off x="3323844" y="3803903"/>
-            <a:ext cx="960120" cy="1106425"/>
+            <a:off x="7758683" y="3803903"/>
+            <a:ext cx="1024129" cy="1106425"/>
           </a:xfrm>
           <a:prstGeom prst="line">
             <a:avLst/>
@@ -48088,8 +47998,8 @@
         </p:nvCxnSpPr>
         <p:spPr>
           <a:xfrm flipH="1">
-            <a:off x="3406139" y="3803903"/>
-            <a:ext cx="1014985" cy="1106425"/>
+            <a:off x="7904988" y="3803903"/>
+            <a:ext cx="950975" cy="1106425"/>
           </a:xfrm>
           <a:prstGeom prst="line">
             <a:avLst/>
@@ -48110,8 +48020,8 @@
         </p:nvCxnSpPr>
         <p:spPr>
           <a:xfrm>
-            <a:off x="4421124" y="3803903"/>
-            <a:ext cx="484632" cy="1106425"/>
+            <a:off x="8855963" y="3803903"/>
+            <a:ext cx="548641" cy="1106425"/>
           </a:xfrm>
           <a:prstGeom prst="line">
             <a:avLst/>
@@ -48131,9 +48041,9 @@
           <p:nvPr/>
         </p:nvCxnSpPr>
         <p:spPr>
-          <a:xfrm flipH="1">
-            <a:off x="7283196" y="3803903"/>
-            <a:ext cx="475487" cy="1106425"/>
+          <a:xfrm>
+            <a:off x="5564124" y="2203704"/>
+            <a:ext cx="219455" cy="2706624"/>
           </a:xfrm>
           <a:prstGeom prst="line">
             <a:avLst/>
@@ -48153,9 +48063,9 @@
           <p:nvPr/>
         </p:nvCxnSpPr>
         <p:spPr>
-          <a:xfrm>
-            <a:off x="7758683" y="3803903"/>
-            <a:ext cx="1024129" cy="1106425"/>
+          <a:xfrm flipH="1">
+            <a:off x="3323844" y="2203704"/>
+            <a:ext cx="2240280" cy="749807"/>
           </a:xfrm>
           <a:prstGeom prst="line">
             <a:avLst/>
@@ -48175,9 +48085,9 @@
           <p:nvPr/>
         </p:nvCxnSpPr>
         <p:spPr>
-          <a:xfrm flipH="1">
-            <a:off x="7904988" y="3803903"/>
-            <a:ext cx="950975" cy="1106425"/>
+          <a:xfrm>
+            <a:off x="5564124" y="2203704"/>
+            <a:ext cx="2194559" cy="749807"/>
           </a:xfrm>
           <a:prstGeom prst="line">
             <a:avLst/>
@@ -48197,9 +48107,9 @@
           <p:nvPr/>
         </p:nvCxnSpPr>
         <p:spPr>
-          <a:xfrm>
-            <a:off x="8855963" y="3803903"/>
-            <a:ext cx="548641" cy="1106425"/>
+          <a:xfrm flipH="1">
+            <a:off x="6405372" y="2203704"/>
+            <a:ext cx="484632" cy="2706624"/>
           </a:xfrm>
           <a:prstGeom prst="line">
             <a:avLst/>
@@ -48219,9 +48129,9 @@
           <p:nvPr/>
         </p:nvCxnSpPr>
         <p:spPr>
-          <a:xfrm>
-            <a:off x="5564124" y="2203704"/>
-            <a:ext cx="219455" cy="2706624"/>
+          <a:xfrm flipH="1">
+            <a:off x="4421124" y="2203704"/>
+            <a:ext cx="2468880" cy="749807"/>
           </a:xfrm>
           <a:prstGeom prst="line">
             <a:avLst/>
@@ -48241,94 +48151,6 @@
           <p:nvPr/>
         </p:nvCxnSpPr>
         <p:spPr>
-          <a:xfrm flipH="1">
-            <a:off x="3323844" y="2203704"/>
-            <a:ext cx="2240280" cy="749807"/>
-          </a:xfrm>
-          <a:prstGeom prst="line">
-            <a:avLst/>
-          </a:prstGeom>
-          <a:ln w="15875">
-            <a:solidFill>
-              <a:srgbClr val="8A8F98"/>
-            </a:solidFill>
-          </a:ln>
-          <a:effectLst/>
-        </p:spPr>
-      </p:cxnSp>
-      <p:cxnSp>
-        <p:nvCxnSpPr>
-          <p:cNvPr id="25" name="Connector 24"/>
-          <p:cNvCxnSpPr/>
-          <p:nvPr/>
-        </p:nvCxnSpPr>
-        <p:spPr>
-          <a:xfrm>
-            <a:off x="5564124" y="2203704"/>
-            <a:ext cx="2194559" cy="749807"/>
-          </a:xfrm>
-          <a:prstGeom prst="line">
-            <a:avLst/>
-          </a:prstGeom>
-          <a:ln w="15875">
-            <a:solidFill>
-              <a:srgbClr val="8A8F98"/>
-            </a:solidFill>
-          </a:ln>
-          <a:effectLst/>
-        </p:spPr>
-      </p:cxnSp>
-      <p:cxnSp>
-        <p:nvCxnSpPr>
-          <p:cNvPr id="26" name="Connector 25"/>
-          <p:cNvCxnSpPr/>
-          <p:nvPr/>
-        </p:nvCxnSpPr>
-        <p:spPr>
-          <a:xfrm flipH="1">
-            <a:off x="6405372" y="2203704"/>
-            <a:ext cx="484632" cy="2706624"/>
-          </a:xfrm>
-          <a:prstGeom prst="line">
-            <a:avLst/>
-          </a:prstGeom>
-          <a:ln w="15875">
-            <a:solidFill>
-              <a:srgbClr val="8A8F98"/>
-            </a:solidFill>
-          </a:ln>
-          <a:effectLst/>
-        </p:spPr>
-      </p:cxnSp>
-      <p:cxnSp>
-        <p:nvCxnSpPr>
-          <p:cNvPr id="27" name="Connector 26"/>
-          <p:cNvCxnSpPr/>
-          <p:nvPr/>
-        </p:nvCxnSpPr>
-        <p:spPr>
-          <a:xfrm flipH="1">
-            <a:off x="4421124" y="2203704"/>
-            <a:ext cx="2468880" cy="749807"/>
-          </a:xfrm>
-          <a:prstGeom prst="line">
-            <a:avLst/>
-          </a:prstGeom>
-          <a:ln w="15875">
-            <a:solidFill>
-              <a:srgbClr val="8A8F98"/>
-            </a:solidFill>
-          </a:ln>
-          <a:effectLst/>
-        </p:spPr>
-      </p:cxnSp>
-      <p:cxnSp>
-        <p:nvCxnSpPr>
-          <p:cNvPr id="28" name="Connector 27"/>
-          <p:cNvCxnSpPr/>
-          <p:nvPr/>
-        </p:nvCxnSpPr>
-        <p:spPr>
           <a:xfrm>
             <a:off x="6890004" y="2203704"/>
             <a:ext cx="1965959" cy="749807"/>
@@ -48346,7 +48168,7 @@
       </p:cxnSp>
       <p:sp>
         <p:nvSpPr>
-          <p:cNvPr id="29" name="Rounded Rectangle 28"/>
+          <p:cNvPr id="25" name="Rounded Rectangle 24"/>
           <p:cNvSpPr/>
           <p:nvPr/>
         </p:nvSpPr>
@@ -48389,7 +48211,7 @@
       </p:sp>
       <p:sp>
         <p:nvSpPr>
-          <p:cNvPr id="30" name="Rounded Rectangle 29"/>
+          <p:cNvPr id="26" name="Rounded Rectangle 25"/>
           <p:cNvSpPr/>
           <p:nvPr/>
         </p:nvSpPr>
@@ -48432,7 +48254,7 @@
       </p:sp>
       <p:sp>
         <p:nvSpPr>
-          <p:cNvPr id="31" name="Rounded Rectangle 30"/>
+          <p:cNvPr id="27" name="Rounded Rectangle 26"/>
           <p:cNvSpPr/>
           <p:nvPr/>
         </p:nvSpPr>
@@ -48475,7 +48297,7 @@
       </p:sp>
       <p:sp>
         <p:nvSpPr>
-          <p:cNvPr id="32" name="Rounded Rectangle 31"/>
+          <p:cNvPr id="28" name="Rounded Rectangle 27"/>
           <p:cNvSpPr/>
           <p:nvPr/>
         </p:nvSpPr>
@@ -48518,7 +48340,7 @@
       </p:sp>
       <p:sp>
         <p:nvSpPr>
-          <p:cNvPr id="33" name="Rounded Rectangle 32"/>
+          <p:cNvPr id="29" name="Rounded Rectangle 28"/>
           <p:cNvSpPr/>
           <p:nvPr/>
         </p:nvSpPr>
@@ -48561,7 +48383,7 @@
       </p:sp>
       <p:sp>
         <p:nvSpPr>
-          <p:cNvPr id="34" name="Rounded Rectangle 33"/>
+          <p:cNvPr id="30" name="Rounded Rectangle 29"/>
           <p:cNvSpPr/>
           <p:nvPr/>
         </p:nvSpPr>
@@ -48604,7 +48426,7 @@
       </p:sp>
       <p:sp>
         <p:nvSpPr>
-          <p:cNvPr id="35" name="Rounded Rectangle 34"/>
+          <p:cNvPr id="31" name="Rounded Rectangle 30"/>
           <p:cNvSpPr/>
           <p:nvPr/>
         </p:nvSpPr>
@@ -48647,7 +48469,7 @@
       </p:sp>
       <p:sp>
         <p:nvSpPr>
-          <p:cNvPr id="36" name="Rounded Rectangle 35"/>
+          <p:cNvPr id="32" name="Rounded Rectangle 31"/>
           <p:cNvSpPr/>
           <p:nvPr/>
         </p:nvSpPr>
@@ -48690,7 +48512,7 @@
       </p:sp>
       <p:sp>
         <p:nvSpPr>
-          <p:cNvPr id="37" name="Rounded Rectangle 36"/>
+          <p:cNvPr id="33" name="Rounded Rectangle 32"/>
           <p:cNvSpPr/>
           <p:nvPr/>
         </p:nvSpPr>
@@ -48733,7 +48555,7 @@
       </p:sp>
       <p:sp>
         <p:nvSpPr>
-          <p:cNvPr id="38" name="Rounded Rectangle 37"/>
+          <p:cNvPr id="34" name="Rounded Rectangle 33"/>
           <p:cNvSpPr/>
           <p:nvPr/>
         </p:nvSpPr>
@@ -48776,7 +48598,7 @@
       </p:sp>
       <p:sp>
         <p:nvSpPr>
-          <p:cNvPr id="39" name="Rounded Rectangle 38"/>
+          <p:cNvPr id="35" name="Rounded Rectangle 34"/>
           <p:cNvSpPr/>
           <p:nvPr/>
         </p:nvSpPr>
@@ -48819,7 +48641,7 @@
       </p:sp>
       <p:sp>
         <p:nvSpPr>
-          <p:cNvPr id="40" name="TextBox 39"/>
+          <p:cNvPr id="36" name="TextBox 35"/>
           <p:cNvSpPr txBox="1"/>
           <p:nvPr/>
         </p:nvSpPr>
@@ -48854,7 +48676,7 @@
       </p:sp>
       <p:sp>
         <p:nvSpPr>
-          <p:cNvPr id="41" name="Rounded Rectangle 40"/>
+          <p:cNvPr id="37" name="Rounded Rectangle 36"/>
           <p:cNvSpPr/>
           <p:nvPr/>
         </p:nvSpPr>
@@ -48897,7 +48719,7 @@
       </p:sp>
       <p:sp>
         <p:nvSpPr>
-          <p:cNvPr id="42" name="TextBox 41"/>
+          <p:cNvPr id="38" name="TextBox 37"/>
           <p:cNvSpPr txBox="1"/>
           <p:nvPr/>
         </p:nvSpPr>
@@ -48932,7 +48754,7 @@
       </p:sp>
       <p:sp>
         <p:nvSpPr>
-          <p:cNvPr id="43" name="Rounded Rectangle 42"/>
+          <p:cNvPr id="39" name="Rounded Rectangle 38"/>
           <p:cNvSpPr/>
           <p:nvPr/>
         </p:nvSpPr>
@@ -48975,7 +48797,7 @@
       </p:sp>
       <p:sp>
         <p:nvSpPr>
-          <p:cNvPr id="44" name="TextBox 43"/>
+          <p:cNvPr id="40" name="TextBox 39"/>
           <p:cNvSpPr txBox="1"/>
           <p:nvPr/>
         </p:nvSpPr>
@@ -49010,7 +48832,7 @@
       </p:sp>
       <p:sp>
         <p:nvSpPr>
-          <p:cNvPr id="45" name="Rounded Rectangle 44"/>
+          <p:cNvPr id="41" name="Rounded Rectangle 40"/>
           <p:cNvSpPr/>
           <p:nvPr/>
         </p:nvSpPr>
@@ -49053,7 +48875,7 @@
       </p:sp>
       <p:sp>
         <p:nvSpPr>
-          <p:cNvPr id="46" name="TextBox 45"/>
+          <p:cNvPr id="42" name="TextBox 41"/>
           <p:cNvSpPr txBox="1"/>
           <p:nvPr/>
         </p:nvSpPr>
@@ -49088,7 +48910,7 @@
       </p:sp>
       <p:sp>
         <p:nvSpPr>
-          <p:cNvPr id="47" name="Rounded Rectangle 46"/>
+          <p:cNvPr id="43" name="Rounded Rectangle 42"/>
           <p:cNvSpPr/>
           <p:nvPr/>
         </p:nvSpPr>
@@ -49131,7 +48953,7 @@
       </p:sp>
       <p:sp>
         <p:nvSpPr>
-          <p:cNvPr id="48" name="TextBox 47"/>
+          <p:cNvPr id="44" name="TextBox 43"/>
           <p:cNvSpPr txBox="1"/>
           <p:nvPr/>
         </p:nvSpPr>
@@ -49166,7 +48988,7 @@
       </p:sp>
       <p:sp>
         <p:nvSpPr>
-          <p:cNvPr id="49" name="Rounded Rectangle 48"/>
+          <p:cNvPr id="45" name="Rounded Rectangle 44"/>
           <p:cNvSpPr/>
           <p:nvPr/>
         </p:nvSpPr>
@@ -49209,7 +49031,7 @@
       </p:sp>
       <p:sp>
         <p:nvSpPr>
-          <p:cNvPr id="50" name="TextBox 49"/>
+          <p:cNvPr id="46" name="TextBox 45"/>
           <p:cNvSpPr txBox="1"/>
           <p:nvPr/>
         </p:nvSpPr>
@@ -49244,7 +49066,7 @@
       </p:sp>
       <p:sp>
         <p:nvSpPr>
-          <p:cNvPr id="51" name="Rounded Rectangle 50"/>
+          <p:cNvPr id="47" name="Rounded Rectangle 46"/>
           <p:cNvSpPr/>
           <p:nvPr/>
         </p:nvSpPr>
@@ -49277,7 +49099,7 @@
       </p:sp>
       <p:sp>
         <p:nvSpPr>
-          <p:cNvPr id="52" name="TextBox 51"/>
+          <p:cNvPr id="48" name="TextBox 47"/>
           <p:cNvSpPr txBox="1"/>
           <p:nvPr/>
         </p:nvSpPr>
@@ -49312,7 +49134,7 @@
       </p:sp>
       <p:sp>
         <p:nvSpPr>
-          <p:cNvPr id="53" name="Rounded Rectangle 52"/>
+          <p:cNvPr id="49" name="Rounded Rectangle 48"/>
           <p:cNvSpPr/>
           <p:nvPr/>
         </p:nvSpPr>
@@ -49345,7 +49167,7 @@
       </p:sp>
       <p:sp>
         <p:nvSpPr>
-          <p:cNvPr id="54" name="TextBox 53"/>
+          <p:cNvPr id="50" name="TextBox 49"/>
           <p:cNvSpPr txBox="1"/>
           <p:nvPr/>
         </p:nvSpPr>
@@ -49380,14 +49202,14 @@
       </p:sp>
       <p:sp>
         <p:nvSpPr>
-          <p:cNvPr id="55" name="Rounded Rectangle 54"/>
-          <p:cNvSpPr/>
-          <p:nvPr/>
-        </p:nvSpPr>
-        <p:spPr>
-          <a:xfrm>
-            <a:off x="548640" y="5596128"/>
-            <a:ext cx="11064240" cy="694944"/>
+          <p:cNvPr id="51" name="Rounded Rectangle 50"/>
+          <p:cNvSpPr/>
+          <p:nvPr/>
+        </p:nvSpPr>
+        <p:spPr>
+          <a:xfrm>
+            <a:off x="502920" y="1645920"/>
+            <a:ext cx="329184" cy="219456"/>
           </a:xfrm>
           <a:prstGeom prst="roundRect">
             <a:avLst>
@@ -49395,10 +49217,12 @@
             </a:avLst>
           </a:prstGeom>
           <a:solidFill>
-            <a:srgbClr val="1F2A44"/>
-          </a:solidFill>
-          <a:ln>
-            <a:noFill/>
+            <a:srgbClr val="FFF3CC"/>
+          </a:solidFill>
+          <a:ln w="25400">
+            <a:solidFill>
+              <a:srgbClr val="E0A300"/>
+            </a:solidFill>
           </a:ln>
           <a:effectLst/>
         </p:spPr>
@@ -49407,28 +49231,19 @@
           <a:lstStyle/>
           <a:p>
             <a:pPr algn="ctr"/>
-            <a:r>
-              <a:rPr sz="2200" b="1" i="0">
-                <a:solidFill>
-                  <a:srgbClr val="FFFFFF"/>
-                </a:solidFill>
-                <a:latin typeface="Calibri"/>
-              </a:rPr>
-              <a:t>grouping by signature = a semisort: one parallel step, no table lookups</a:t>
-            </a:r>
-          </a:p>
-        </p:txBody>
-      </p:sp>
-      <p:sp>
-        <p:nvSpPr>
-          <p:cNvPr id="56" name="TextBox 55"/>
+          </a:p>
+        </p:txBody>
+      </p:sp>
+      <p:sp>
+        <p:nvSpPr>
+          <p:cNvPr id="52" name="TextBox 51"/>
           <p:cNvSpPr txBox="1"/>
           <p:nvPr/>
         </p:nvSpPr>
         <p:spPr>
           <a:xfrm>
-            <a:off x="2775203" y="2340863"/>
-            <a:ext cx="2194560" cy="274320"/>
+            <a:off x="905256" y="1600200"/>
+            <a:ext cx="1563624" cy="320040"/>
           </a:xfrm>
           <a:prstGeom prst="rect">
             <a:avLst/>
@@ -49441,180 +49256,6 @@
           </a:bodyPr>
           <a:lstStyle/>
           <a:p>
-            <a:pPr algn="ctr"/>
-            <a:r>
-              <a:rPr sz="1150" b="1" i="0">
-                <a:solidFill>
-                  <a:srgbClr val="7B4FB5"/>
-                </a:solidFill>
-                <a:latin typeface="Calibri"/>
-              </a:rPr>
-              <a:t>AND([r], [s])</a:t>
-            </a:r>
-          </a:p>
-        </p:txBody>
-      </p:sp>
-      <p:sp>
-        <p:nvSpPr>
-          <p:cNvPr id="57" name="TextBox 56"/>
-          <p:cNvSpPr txBox="1"/>
-          <p:nvPr/>
-        </p:nvSpPr>
-        <p:spPr>
-          <a:xfrm>
-            <a:off x="7210044" y="2340863"/>
-            <a:ext cx="2194560" cy="274320"/>
-          </a:xfrm>
-          <a:prstGeom prst="rect">
-            <a:avLst/>
-          </a:prstGeom>
-          <a:noFill/>
-        </p:spPr>
-        <p:txBody>
-          <a:bodyPr wrap="square" anchor="ctr" lIns="45720" rIns="45720" tIns="27432" bIns="27432">
-            <a:spAutoFit/>
-          </a:bodyPr>
-          <a:lstStyle/>
-          <a:p>
-            <a:pPr algn="ctr"/>
-            <a:r>
-              <a:rPr sz="1150" b="1" i="0">
-                <a:solidFill>
-                  <a:srgbClr val="7B4FB5"/>
-                </a:solidFill>
-                <a:latin typeface="Calibri"/>
-              </a:rPr>
-              <a:t>XOR([u], [v])</a:t>
-            </a:r>
-          </a:p>
-        </p:txBody>
-      </p:sp>
-      <p:sp>
-        <p:nvSpPr>
-          <p:cNvPr id="58" name="TextBox 57"/>
-          <p:cNvSpPr txBox="1"/>
-          <p:nvPr/>
-        </p:nvSpPr>
-        <p:spPr>
-          <a:xfrm>
-            <a:off x="4297680" y="1307592"/>
-            <a:ext cx="2194560" cy="274320"/>
-          </a:xfrm>
-          <a:prstGeom prst="rect">
-            <a:avLst/>
-          </a:prstGeom>
-          <a:noFill/>
-        </p:spPr>
-        <p:txBody>
-          <a:bodyPr wrap="square" anchor="ctr" lIns="45720" rIns="45720" tIns="27432" bIns="27432">
-            <a:spAutoFit/>
-          </a:bodyPr>
-          <a:lstStyle/>
-          <a:p>
-            <a:pPr algn="ctr"/>
-            <a:r>
-              <a:rPr sz="1150" b="1" i="0">
-                <a:solidFill>
-                  <a:srgbClr val="7B4FB5"/>
-                </a:solidFill>
-                <a:latin typeface="Calibri"/>
-              </a:rPr>
-              <a:t>ITE([c], [a₁], [x₁])</a:t>
-            </a:r>
-          </a:p>
-        </p:txBody>
-      </p:sp>
-      <p:sp>
-        <p:nvSpPr>
-          <p:cNvPr id="59" name="TextBox 58"/>
-          <p:cNvSpPr txBox="1"/>
-          <p:nvPr/>
-        </p:nvSpPr>
-        <p:spPr>
-          <a:xfrm>
-            <a:off x="5961888" y="1307592"/>
-            <a:ext cx="2194560" cy="274320"/>
-          </a:xfrm>
-          <a:prstGeom prst="rect">
-            <a:avLst/>
-          </a:prstGeom>
-          <a:noFill/>
-        </p:spPr>
-        <p:txBody>
-          <a:bodyPr wrap="square" anchor="ctr" lIns="45720" rIns="45720" tIns="27432" bIns="27432">
-            <a:spAutoFit/>
-          </a:bodyPr>
-          <a:lstStyle/>
-          <a:p>
-            <a:pPr algn="ctr"/>
-            <a:r>
-              <a:rPr sz="1150" b="1" i="0">
-                <a:solidFill>
-                  <a:srgbClr val="7B4FB5"/>
-                </a:solidFill>
-                <a:latin typeface="Calibri"/>
-              </a:rPr>
-              <a:t>ITE([c], [a₂], [x₂])</a:t>
-            </a:r>
-          </a:p>
-        </p:txBody>
-      </p:sp>
-      <p:sp>
-        <p:nvSpPr>
-          <p:cNvPr id="60" name="Rounded Rectangle 59"/>
-          <p:cNvSpPr/>
-          <p:nvPr/>
-        </p:nvSpPr>
-        <p:spPr>
-          <a:xfrm>
-            <a:off x="502920" y="1645920"/>
-            <a:ext cx="329184" cy="219456"/>
-          </a:xfrm>
-          <a:prstGeom prst="roundRect">
-            <a:avLst>
-              <a:gd name="adj" fmla="val 15000"/>
-            </a:avLst>
-          </a:prstGeom>
-          <a:solidFill>
-            <a:srgbClr val="FFF3CC"/>
-          </a:solidFill>
-          <a:ln w="25400">
-            <a:solidFill>
-              <a:srgbClr val="E0A300"/>
-            </a:solidFill>
-          </a:ln>
-          <a:effectLst/>
-        </p:spPr>
-        <p:txBody>
-          <a:bodyPr rtlCol="0" anchor="ctr" lIns="54864" rIns="54864" tIns="27432" bIns="27432" wrap="square"/>
-          <a:lstStyle/>
-          <a:p>
-            <a:pPr algn="ctr"/>
-          </a:p>
-        </p:txBody>
-      </p:sp>
-      <p:sp>
-        <p:nvSpPr>
-          <p:cNvPr id="61" name="TextBox 60"/>
-          <p:cNvSpPr txBox="1"/>
-          <p:nvPr/>
-        </p:nvSpPr>
-        <p:spPr>
-          <a:xfrm>
-            <a:off x="905256" y="1600200"/>
-            <a:ext cx="1563624" cy="320040"/>
-          </a:xfrm>
-          <a:prstGeom prst="rect">
-            <a:avLst/>
-          </a:prstGeom>
-          <a:noFill/>
-        </p:spPr>
-        <p:txBody>
-          <a:bodyPr wrap="square" anchor="ctr" lIns="45720" rIns="45720" tIns="27432" bIns="27432">
-            <a:spAutoFit/>
-          </a:bodyPr>
-          <a:lstStyle/>
-          <a:p>
             <a:pPr algn="l"/>
             <a:r>
               <a:rPr sz="1200" b="0" i="0">
@@ -49630,7 +49271,7 @@
       </p:sp>
       <p:sp>
         <p:nvSpPr>
-          <p:cNvPr id="62" name="Rounded Rectangle 61"/>
+          <p:cNvPr id="53" name="Rounded Rectangle 52"/>
           <p:cNvSpPr/>
           <p:nvPr/>
         </p:nvSpPr>
@@ -49645,11 +49286,11 @@
             </a:avLst>
           </a:prstGeom>
           <a:noFill/>
-          <a:ln w="22225">
-            <a:solidFill>
-              <a:srgbClr val="7B4FB5"/>
-            </a:solidFill>
-            <a:prstDash val="sysDot"/>
+          <a:ln w="28575">
+            <a:solidFill>
+              <a:srgbClr val="1F2A44"/>
+            </a:solidFill>
+            <a:prstDash val="lgDash"/>
           </a:ln>
           <a:effectLst/>
         </p:spPr>
@@ -49663,81 +49304,13 @@
       </p:sp>
       <p:sp>
         <p:nvSpPr>
-          <p:cNvPr id="63" name="TextBox 62"/>
+          <p:cNvPr id="54" name="TextBox 53"/>
           <p:cNvSpPr txBox="1"/>
           <p:nvPr/>
         </p:nvSpPr>
         <p:spPr>
           <a:xfrm>
             <a:off x="905256" y="2020824"/>
-            <a:ext cx="1563624" cy="320040"/>
-          </a:xfrm>
-          <a:prstGeom prst="rect">
-            <a:avLst/>
-          </a:prstGeom>
-          <a:noFill/>
-        </p:spPr>
-        <p:txBody>
-          <a:bodyPr wrap="square" anchor="ctr" lIns="45720" rIns="45720" tIns="27432" bIns="27432">
-            <a:spAutoFit/>
-          </a:bodyPr>
-          <a:lstStyle/>
-          <a:p>
-            <a:pPr algn="l"/>
-            <a:r>
-              <a:rPr sz="1200" b="0" i="0">
-                <a:solidFill>
-                  <a:srgbClr val="6B717A"/>
-                </a:solidFill>
-                <a:latin typeface="Calibri"/>
-              </a:rPr>
-              <a:t>signature group</a:t>
-            </a:r>
-          </a:p>
-        </p:txBody>
-      </p:sp>
-      <p:sp>
-        <p:nvSpPr>
-          <p:cNvPr id="64" name="Rounded Rectangle 63"/>
-          <p:cNvSpPr/>
-          <p:nvPr/>
-        </p:nvSpPr>
-        <p:spPr>
-          <a:xfrm>
-            <a:off x="502920" y="2487168"/>
-            <a:ext cx="329184" cy="219456"/>
-          </a:xfrm>
-          <a:prstGeom prst="roundRect">
-            <a:avLst>
-              <a:gd name="adj" fmla="val 15000"/>
-            </a:avLst>
-          </a:prstGeom>
-          <a:noFill/>
-          <a:ln w="28575">
-            <a:solidFill>
-              <a:srgbClr val="1F2A44"/>
-            </a:solidFill>
-            <a:prstDash val="lgDash"/>
-          </a:ln>
-          <a:effectLst/>
-        </p:spPr>
-        <p:txBody>
-          <a:bodyPr rtlCol="0" anchor="ctr" lIns="54864" rIns="54864" tIns="27432" bIns="27432" wrap="square"/>
-          <a:lstStyle/>
-          <a:p>
-            <a:pPr algn="ctr"/>
-          </a:p>
-        </p:txBody>
-      </p:sp>
-      <p:sp>
-        <p:nvSpPr>
-          <p:cNvPr id="65" name="TextBox 64"/>
-          <p:cNvSpPr txBox="1"/>
-          <p:nvPr/>
-        </p:nvSpPr>
-        <p:spPr>
-          <a:xfrm>
-            <a:off x="905256" y="2441448"/>
             <a:ext cx="1563624" cy="320040"/>
           </a:xfrm>
           <a:prstGeom prst="rect">
@@ -50092,22 +49665,20 @@
         </p:nvSpPr>
         <p:spPr>
           <a:xfrm>
-            <a:off x="2802636" y="2843783"/>
-            <a:ext cx="2139696" cy="1078992"/>
-          </a:xfrm>
-          <a:prstGeom prst="roundRect">
-            <a:avLst>
-              <a:gd name="adj" fmla="val 25000"/>
-            </a:avLst>
-          </a:prstGeom>
-          <a:solidFill>
-            <a:srgbClr val="DCEAF8"/>
-          </a:solidFill>
-          <a:ln w="19050">
-            <a:solidFill>
-              <a:srgbClr val="2E6FB0"/>
-            </a:solidFill>
-            <a:prstDash val="dash"/>
+            <a:off x="2866644" y="2907791"/>
+            <a:ext cx="2011680" cy="950976"/>
+          </a:xfrm>
+          <a:prstGeom prst="roundRect">
+            <a:avLst>
+              <a:gd name="adj" fmla="val 30000"/>
+            </a:avLst>
+          </a:prstGeom>
+          <a:noFill/>
+          <a:ln w="22225">
+            <a:solidFill>
+              <a:srgbClr val="7B4FB5"/>
+            </a:solidFill>
+            <a:prstDash val="sysDot"/>
           </a:ln>
           <a:effectLst/>
         </p:spPr>
@@ -50127,22 +49698,20 @@
         </p:nvSpPr>
         <p:spPr>
           <a:xfrm>
-            <a:off x="7237475" y="2843783"/>
-            <a:ext cx="2139696" cy="1078992"/>
-          </a:xfrm>
-          <a:prstGeom prst="roundRect">
-            <a:avLst>
-              <a:gd name="adj" fmla="val 25000"/>
-            </a:avLst>
-          </a:prstGeom>
-          <a:solidFill>
-            <a:srgbClr val="DDF1E2"/>
-          </a:solidFill>
-          <a:ln w="19050">
-            <a:solidFill>
-              <a:srgbClr val="3A9A5B"/>
-            </a:solidFill>
-            <a:prstDash val="dash"/>
+            <a:off x="7301483" y="2907791"/>
+            <a:ext cx="2011680" cy="950976"/>
+          </a:xfrm>
+          <a:prstGeom prst="roundRect">
+            <a:avLst>
+              <a:gd name="adj" fmla="val 30000"/>
+            </a:avLst>
+          </a:prstGeom>
+          <a:noFill/>
+          <a:ln w="22225">
+            <a:solidFill>
+              <a:srgbClr val="7B4FB5"/>
+            </a:solidFill>
+            <a:prstDash val="sysDot"/>
           </a:ln>
           <a:effectLst/>
         </p:spPr>
@@ -50154,50 +49723,72 @@
           </a:p>
         </p:txBody>
       </p:sp>
-      <p:cxnSp>
-        <p:nvCxnSpPr>
-          <p:cNvPr id="13" name="Connector 12"/>
-          <p:cNvCxnSpPr/>
-          <p:nvPr/>
-        </p:nvCxnSpPr>
-        <p:spPr>
-          <a:xfrm flipH="1">
-            <a:off x="2784348" y="3803903"/>
-            <a:ext cx="539496" cy="1106425"/>
-          </a:xfrm>
-          <a:prstGeom prst="line">
-            <a:avLst/>
-          </a:prstGeom>
-          <a:ln w="15875">
-            <a:solidFill>
-              <a:srgbClr val="8A8F98"/>
-            </a:solidFill>
-          </a:ln>
-          <a:effectLst/>
-        </p:spPr>
-      </p:cxnSp>
-      <p:cxnSp>
-        <p:nvCxnSpPr>
-          <p:cNvPr id="14" name="Connector 13"/>
-          <p:cNvCxnSpPr/>
-          <p:nvPr/>
-        </p:nvCxnSpPr>
-        <p:spPr>
-          <a:xfrm>
-            <a:off x="3323844" y="3803903"/>
-            <a:ext cx="960120" cy="1106425"/>
-          </a:xfrm>
-          <a:prstGeom prst="line">
-            <a:avLst/>
-          </a:prstGeom>
-          <a:ln w="15875">
-            <a:solidFill>
-              <a:srgbClr val="8A8F98"/>
-            </a:solidFill>
-          </a:ln>
-          <a:effectLst/>
-        </p:spPr>
-      </p:cxnSp>
+      <p:sp>
+        <p:nvSpPr>
+          <p:cNvPr id="13" name="Rounded Rectangle 12"/>
+          <p:cNvSpPr/>
+          <p:nvPr/>
+        </p:nvSpPr>
+        <p:spPr>
+          <a:xfrm>
+            <a:off x="4768596" y="1581912"/>
+            <a:ext cx="1252728" cy="676656"/>
+          </a:xfrm>
+          <a:prstGeom prst="roundRect">
+            <a:avLst>
+              <a:gd name="adj" fmla="val 30000"/>
+            </a:avLst>
+          </a:prstGeom>
+          <a:noFill/>
+          <a:ln w="22225">
+            <a:solidFill>
+              <a:srgbClr val="7B4FB5"/>
+            </a:solidFill>
+            <a:prstDash val="sysDot"/>
+          </a:ln>
+          <a:effectLst/>
+        </p:spPr>
+        <p:txBody>
+          <a:bodyPr rtlCol="0" anchor="ctr" lIns="54864" rIns="54864" tIns="27432" bIns="27432" wrap="square"/>
+          <a:lstStyle/>
+          <a:p>
+            <a:pPr algn="ctr"/>
+          </a:p>
+        </p:txBody>
+      </p:sp>
+      <p:sp>
+        <p:nvSpPr>
+          <p:cNvPr id="14" name="Rounded Rectangle 13"/>
+          <p:cNvSpPr/>
+          <p:nvPr/>
+        </p:nvSpPr>
+        <p:spPr>
+          <a:xfrm>
+            <a:off x="6432804" y="1581912"/>
+            <a:ext cx="1252728" cy="676656"/>
+          </a:xfrm>
+          <a:prstGeom prst="roundRect">
+            <a:avLst>
+              <a:gd name="adj" fmla="val 30000"/>
+            </a:avLst>
+          </a:prstGeom>
+          <a:noFill/>
+          <a:ln w="22225">
+            <a:solidFill>
+              <a:srgbClr val="7B4FB5"/>
+            </a:solidFill>
+            <a:prstDash val="sysDot"/>
+          </a:ln>
+          <a:effectLst/>
+        </p:spPr>
+        <p:txBody>
+          <a:bodyPr rtlCol="0" anchor="ctr" lIns="54864" rIns="54864" tIns="27432" bIns="27432" wrap="square"/>
+          <a:lstStyle/>
+          <a:p>
+            <a:pPr algn="ctr"/>
+          </a:p>
+        </p:txBody>
+      </p:sp>
       <p:cxnSp>
         <p:nvCxnSpPr>
           <p:cNvPr id="15" name="Connector 14"/>
@@ -50206,8 +49797,8 @@
         </p:nvCxnSpPr>
         <p:spPr>
           <a:xfrm flipH="1">
-            <a:off x="3406139" y="3803903"/>
-            <a:ext cx="1014985" cy="1106425"/>
+            <a:off x="2784348" y="3803903"/>
+            <a:ext cx="539496" cy="1106425"/>
           </a:xfrm>
           <a:prstGeom prst="line">
             <a:avLst/>
@@ -50228,8 +49819,8 @@
         </p:nvCxnSpPr>
         <p:spPr>
           <a:xfrm>
-            <a:off x="4421124" y="3803903"/>
-            <a:ext cx="484632" cy="1106425"/>
+            <a:off x="3323844" y="3803903"/>
+            <a:ext cx="960120" cy="1106425"/>
           </a:xfrm>
           <a:prstGeom prst="line">
             <a:avLst/>
@@ -50250,8 +49841,8 @@
         </p:nvCxnSpPr>
         <p:spPr>
           <a:xfrm flipH="1">
-            <a:off x="7283196" y="3803903"/>
-            <a:ext cx="475487" cy="1106425"/>
+            <a:off x="3406139" y="3803903"/>
+            <a:ext cx="1014985" cy="1106425"/>
           </a:xfrm>
           <a:prstGeom prst="line">
             <a:avLst/>
@@ -50272,8 +49863,8 @@
         </p:nvCxnSpPr>
         <p:spPr>
           <a:xfrm>
-            <a:off x="7758683" y="3803903"/>
-            <a:ext cx="1024129" cy="1106425"/>
+            <a:off x="4421124" y="3803903"/>
+            <a:ext cx="484632" cy="1106425"/>
           </a:xfrm>
           <a:prstGeom prst="line">
             <a:avLst/>
@@ -50294,8 +49885,8 @@
         </p:nvCxnSpPr>
         <p:spPr>
           <a:xfrm flipH="1">
-            <a:off x="7904988" y="3803903"/>
-            <a:ext cx="950975" cy="1106425"/>
+            <a:off x="7283196" y="3803903"/>
+            <a:ext cx="475487" cy="1106425"/>
           </a:xfrm>
           <a:prstGeom prst="line">
             <a:avLst/>
@@ -50316,8 +49907,8 @@
         </p:nvCxnSpPr>
         <p:spPr>
           <a:xfrm>
-            <a:off x="8855963" y="3803903"/>
-            <a:ext cx="548641" cy="1106425"/>
+            <a:off x="7758683" y="3803903"/>
+            <a:ext cx="1024129" cy="1106425"/>
           </a:xfrm>
           <a:prstGeom prst="line">
             <a:avLst/>
@@ -50337,9 +49928,9 @@
           <p:nvPr/>
         </p:nvCxnSpPr>
         <p:spPr>
-          <a:xfrm>
-            <a:off x="5564124" y="2203704"/>
-            <a:ext cx="219455" cy="2706624"/>
+          <a:xfrm flipH="1">
+            <a:off x="7904988" y="3803903"/>
+            <a:ext cx="950975" cy="1106425"/>
           </a:xfrm>
           <a:prstGeom prst="line">
             <a:avLst/>
@@ -50359,9 +49950,9 @@
           <p:nvPr/>
         </p:nvCxnSpPr>
         <p:spPr>
-          <a:xfrm flipH="1">
-            <a:off x="3323844" y="2203704"/>
-            <a:ext cx="2240280" cy="749807"/>
+          <a:xfrm>
+            <a:off x="8855963" y="3803903"/>
+            <a:ext cx="548641" cy="1106425"/>
           </a:xfrm>
           <a:prstGeom prst="line">
             <a:avLst/>
@@ -50383,7 +49974,7 @@
         <p:spPr>
           <a:xfrm>
             <a:off x="5564124" y="2203704"/>
-            <a:ext cx="2194559" cy="749807"/>
+            <a:ext cx="219455" cy="2706624"/>
           </a:xfrm>
           <a:prstGeom prst="line">
             <a:avLst/>
@@ -50404,8 +49995,8 @@
         </p:nvCxnSpPr>
         <p:spPr>
           <a:xfrm flipH="1">
-            <a:off x="6405372" y="2203704"/>
-            <a:ext cx="484632" cy="2706624"/>
+            <a:off x="3323844" y="2203704"/>
+            <a:ext cx="2240280" cy="749807"/>
           </a:xfrm>
           <a:prstGeom prst="line">
             <a:avLst/>
@@ -50425,9 +50016,9 @@
           <p:nvPr/>
         </p:nvCxnSpPr>
         <p:spPr>
-          <a:xfrm flipH="1">
-            <a:off x="4421124" y="2203704"/>
-            <a:ext cx="2468880" cy="749807"/>
+          <a:xfrm>
+            <a:off x="5564124" y="2203704"/>
+            <a:ext cx="2194559" cy="749807"/>
           </a:xfrm>
           <a:prstGeom prst="line">
             <a:avLst/>
@@ -50447,6 +50038,50 @@
           <p:nvPr/>
         </p:nvCxnSpPr>
         <p:spPr>
+          <a:xfrm flipH="1">
+            <a:off x="6405372" y="2203704"/>
+            <a:ext cx="484632" cy="2706624"/>
+          </a:xfrm>
+          <a:prstGeom prst="line">
+            <a:avLst/>
+          </a:prstGeom>
+          <a:ln w="15875">
+            <a:solidFill>
+              <a:srgbClr val="8A8F98"/>
+            </a:solidFill>
+          </a:ln>
+          <a:effectLst/>
+        </p:spPr>
+      </p:cxnSp>
+      <p:cxnSp>
+        <p:nvCxnSpPr>
+          <p:cNvPr id="27" name="Connector 26"/>
+          <p:cNvCxnSpPr/>
+          <p:nvPr/>
+        </p:nvCxnSpPr>
+        <p:spPr>
+          <a:xfrm flipH="1">
+            <a:off x="4421124" y="2203704"/>
+            <a:ext cx="2468880" cy="749807"/>
+          </a:xfrm>
+          <a:prstGeom prst="line">
+            <a:avLst/>
+          </a:prstGeom>
+          <a:ln w="15875">
+            <a:solidFill>
+              <a:srgbClr val="8A8F98"/>
+            </a:solidFill>
+          </a:ln>
+          <a:effectLst/>
+        </p:spPr>
+      </p:cxnSp>
+      <p:cxnSp>
+        <p:nvCxnSpPr>
+          <p:cNvPr id="28" name="Connector 27"/>
+          <p:cNvCxnSpPr/>
+          <p:nvPr/>
+        </p:nvCxnSpPr>
+        <p:spPr>
           <a:xfrm>
             <a:off x="6890004" y="2203704"/>
             <a:ext cx="1965959" cy="749807"/>
@@ -50464,7 +50099,7 @@
       </p:cxnSp>
       <p:sp>
         <p:nvSpPr>
-          <p:cNvPr id="27" name="Rounded Rectangle 26"/>
+          <p:cNvPr id="29" name="Rounded Rectangle 28"/>
           <p:cNvSpPr/>
           <p:nvPr/>
         </p:nvSpPr>
@@ -50507,7 +50142,7 @@
       </p:sp>
       <p:sp>
         <p:nvSpPr>
-          <p:cNvPr id="28" name="Rounded Rectangle 27"/>
+          <p:cNvPr id="30" name="Rounded Rectangle 29"/>
           <p:cNvSpPr/>
           <p:nvPr/>
         </p:nvSpPr>
@@ -50550,7 +50185,7 @@
       </p:sp>
       <p:sp>
         <p:nvSpPr>
-          <p:cNvPr id="29" name="Rounded Rectangle 28"/>
+          <p:cNvPr id="31" name="Rounded Rectangle 30"/>
           <p:cNvSpPr/>
           <p:nvPr/>
         </p:nvSpPr>
@@ -50593,7 +50228,7 @@
       </p:sp>
       <p:sp>
         <p:nvSpPr>
-          <p:cNvPr id="30" name="Rounded Rectangle 29"/>
+          <p:cNvPr id="32" name="Rounded Rectangle 31"/>
           <p:cNvSpPr/>
           <p:nvPr/>
         </p:nvSpPr>
@@ -50636,7 +50271,7 @@
       </p:sp>
       <p:sp>
         <p:nvSpPr>
-          <p:cNvPr id="31" name="Rounded Rectangle 30"/>
+          <p:cNvPr id="33" name="Rounded Rectangle 32"/>
           <p:cNvSpPr/>
           <p:nvPr/>
         </p:nvSpPr>
@@ -50679,7 +50314,7 @@
       </p:sp>
       <p:sp>
         <p:nvSpPr>
-          <p:cNvPr id="32" name="Rounded Rectangle 31"/>
+          <p:cNvPr id="34" name="Rounded Rectangle 33"/>
           <p:cNvSpPr/>
           <p:nvPr/>
         </p:nvSpPr>
@@ -50722,7 +50357,7 @@
       </p:sp>
       <p:sp>
         <p:nvSpPr>
-          <p:cNvPr id="33" name="Rounded Rectangle 32"/>
+          <p:cNvPr id="35" name="Rounded Rectangle 34"/>
           <p:cNvSpPr/>
           <p:nvPr/>
         </p:nvSpPr>
@@ -50765,7 +50400,7 @@
       </p:sp>
       <p:sp>
         <p:nvSpPr>
-          <p:cNvPr id="34" name="Rounded Rectangle 33"/>
+          <p:cNvPr id="36" name="Rounded Rectangle 35"/>
           <p:cNvSpPr/>
           <p:nvPr/>
         </p:nvSpPr>
@@ -50808,7 +50443,7 @@
       </p:sp>
       <p:sp>
         <p:nvSpPr>
-          <p:cNvPr id="35" name="Rounded Rectangle 34"/>
+          <p:cNvPr id="37" name="Rounded Rectangle 36"/>
           <p:cNvSpPr/>
           <p:nvPr/>
         </p:nvSpPr>
@@ -50851,7 +50486,7 @@
       </p:sp>
       <p:sp>
         <p:nvSpPr>
-          <p:cNvPr id="36" name="Rounded Rectangle 35"/>
+          <p:cNvPr id="38" name="Rounded Rectangle 37"/>
           <p:cNvSpPr/>
           <p:nvPr/>
         </p:nvSpPr>
@@ -50894,7 +50529,7 @@
       </p:sp>
       <p:sp>
         <p:nvSpPr>
-          <p:cNvPr id="37" name="Rounded Rectangle 36"/>
+          <p:cNvPr id="39" name="Rounded Rectangle 38"/>
           <p:cNvSpPr/>
           <p:nvPr/>
         </p:nvSpPr>
@@ -50937,7 +50572,7 @@
       </p:sp>
       <p:sp>
         <p:nvSpPr>
-          <p:cNvPr id="38" name="TextBox 37"/>
+          <p:cNvPr id="40" name="TextBox 39"/>
           <p:cNvSpPr txBox="1"/>
           <p:nvPr/>
         </p:nvSpPr>
@@ -50972,7 +50607,7 @@
       </p:sp>
       <p:sp>
         <p:nvSpPr>
-          <p:cNvPr id="39" name="Rounded Rectangle 38"/>
+          <p:cNvPr id="41" name="Rounded Rectangle 40"/>
           <p:cNvSpPr/>
           <p:nvPr/>
         </p:nvSpPr>
@@ -51015,7 +50650,7 @@
       </p:sp>
       <p:sp>
         <p:nvSpPr>
-          <p:cNvPr id="40" name="TextBox 39"/>
+          <p:cNvPr id="42" name="TextBox 41"/>
           <p:cNvSpPr txBox="1"/>
           <p:nvPr/>
         </p:nvSpPr>
@@ -51050,7 +50685,7 @@
       </p:sp>
       <p:sp>
         <p:nvSpPr>
-          <p:cNvPr id="41" name="Rounded Rectangle 40"/>
+          <p:cNvPr id="43" name="Rounded Rectangle 42"/>
           <p:cNvSpPr/>
           <p:nvPr/>
         </p:nvSpPr>
@@ -51093,7 +50728,7 @@
       </p:sp>
       <p:sp>
         <p:nvSpPr>
-          <p:cNvPr id="42" name="TextBox 41"/>
+          <p:cNvPr id="44" name="TextBox 43"/>
           <p:cNvSpPr txBox="1"/>
           <p:nvPr/>
         </p:nvSpPr>
@@ -51128,7 +50763,7 @@
       </p:sp>
       <p:sp>
         <p:nvSpPr>
-          <p:cNvPr id="43" name="Rounded Rectangle 42"/>
+          <p:cNvPr id="45" name="Rounded Rectangle 44"/>
           <p:cNvSpPr/>
           <p:nvPr/>
         </p:nvSpPr>
@@ -51171,7 +50806,7 @@
       </p:sp>
       <p:sp>
         <p:nvSpPr>
-          <p:cNvPr id="44" name="TextBox 43"/>
+          <p:cNvPr id="46" name="TextBox 45"/>
           <p:cNvSpPr txBox="1"/>
           <p:nvPr/>
         </p:nvSpPr>
@@ -51206,7 +50841,7 @@
       </p:sp>
       <p:sp>
         <p:nvSpPr>
-          <p:cNvPr id="45" name="Rounded Rectangle 44"/>
+          <p:cNvPr id="47" name="Rounded Rectangle 46"/>
           <p:cNvSpPr/>
           <p:nvPr/>
         </p:nvSpPr>
@@ -51221,11 +50856,11 @@
             </a:avLst>
           </a:prstGeom>
           <a:solidFill>
-            <a:srgbClr val="FFFFFF"/>
-          </a:solidFill>
-          <a:ln w="12700">
-            <a:solidFill>
-              <a:srgbClr val="4A4F57"/>
+            <a:srgbClr val="FFF3CC"/>
+          </a:solidFill>
+          <a:ln w="34925">
+            <a:solidFill>
+              <a:srgbClr val="E0A300"/>
             </a:solidFill>
           </a:ln>
           <a:effectLst/>
@@ -51249,7 +50884,7 @@
       </p:sp>
       <p:sp>
         <p:nvSpPr>
-          <p:cNvPr id="46" name="TextBox 45"/>
+          <p:cNvPr id="48" name="TextBox 47"/>
           <p:cNvSpPr txBox="1"/>
           <p:nvPr/>
         </p:nvSpPr>
@@ -51284,7 +50919,7 @@
       </p:sp>
       <p:sp>
         <p:nvSpPr>
-          <p:cNvPr id="47" name="Rounded Rectangle 46"/>
+          <p:cNvPr id="49" name="Rounded Rectangle 48"/>
           <p:cNvSpPr/>
           <p:nvPr/>
         </p:nvSpPr>
@@ -51299,11 +50934,11 @@
             </a:avLst>
           </a:prstGeom>
           <a:solidFill>
-            <a:srgbClr val="FFFFFF"/>
-          </a:solidFill>
-          <a:ln w="12700">
-            <a:solidFill>
-              <a:srgbClr val="4A4F57"/>
+            <a:srgbClr val="FFF3CC"/>
+          </a:solidFill>
+          <a:ln w="34925">
+            <a:solidFill>
+              <a:srgbClr val="E0A300"/>
             </a:solidFill>
           </a:ln>
           <a:effectLst/>
@@ -51327,7 +50962,7 @@
       </p:sp>
       <p:sp>
         <p:nvSpPr>
-          <p:cNvPr id="48" name="TextBox 47"/>
+          <p:cNvPr id="50" name="TextBox 49"/>
           <p:cNvSpPr txBox="1"/>
           <p:nvPr/>
         </p:nvSpPr>
@@ -51362,7 +50997,7 @@
       </p:sp>
       <p:sp>
         <p:nvSpPr>
-          <p:cNvPr id="49" name="Rounded Rectangle 48"/>
+          <p:cNvPr id="51" name="Rounded Rectangle 50"/>
           <p:cNvSpPr/>
           <p:nvPr/>
         </p:nvSpPr>
@@ -51395,7 +51030,7 @@
       </p:sp>
       <p:sp>
         <p:nvSpPr>
-          <p:cNvPr id="50" name="TextBox 49"/>
+          <p:cNvPr id="52" name="TextBox 51"/>
           <p:cNvSpPr txBox="1"/>
           <p:nvPr/>
         </p:nvSpPr>
@@ -51430,7 +51065,7 @@
       </p:sp>
       <p:sp>
         <p:nvSpPr>
-          <p:cNvPr id="51" name="Rounded Rectangle 50"/>
+          <p:cNvPr id="53" name="Rounded Rectangle 52"/>
           <p:cNvSpPr/>
           <p:nvPr/>
         </p:nvSpPr>
@@ -51463,7 +51098,7 @@
       </p:sp>
       <p:sp>
         <p:nvSpPr>
-          <p:cNvPr id="52" name="TextBox 51"/>
+          <p:cNvPr id="54" name="TextBox 53"/>
           <p:cNvSpPr txBox="1"/>
           <p:nvPr/>
         </p:nvSpPr>
@@ -51498,14 +51133,14 @@
       </p:sp>
       <p:sp>
         <p:nvSpPr>
-          <p:cNvPr id="53" name="TextBox 52"/>
+          <p:cNvPr id="55" name="TextBox 54"/>
           <p:cNvSpPr txBox="1"/>
           <p:nvPr/>
         </p:nvSpPr>
         <p:spPr>
           <a:xfrm>
-            <a:off x="3506723" y="3246120"/>
-            <a:ext cx="731520" cy="548640"/>
+            <a:off x="2775203" y="2340863"/>
+            <a:ext cx="2194560" cy="274320"/>
           </a:xfrm>
           <a:prstGeom prst="rect">
             <a:avLst/>
@@ -51520,27 +51155,27 @@
           <a:p>
             <a:pPr algn="ctr"/>
             <a:r>
-              <a:rPr sz="2200" b="1" i="0">
-                <a:solidFill>
-                  <a:srgbClr val="C8501E"/>
-                </a:solidFill>
-                <a:latin typeface="Calibri"/>
-              </a:rPr>
-              <a:t>∪</a:t>
-            </a:r>
-          </a:p>
-        </p:txBody>
-      </p:sp>
-      <p:sp>
-        <p:nvSpPr>
-          <p:cNvPr id="54" name="TextBox 53"/>
+              <a:rPr sz="1150" b="1" i="0">
+                <a:solidFill>
+                  <a:srgbClr val="7B4FB5"/>
+                </a:solidFill>
+                <a:latin typeface="Calibri"/>
+              </a:rPr>
+              <a:t>AND([r], [s])</a:t>
+            </a:r>
+          </a:p>
+        </p:txBody>
+      </p:sp>
+      <p:sp>
+        <p:nvSpPr>
+          <p:cNvPr id="56" name="TextBox 55"/>
           <p:cNvSpPr txBox="1"/>
           <p:nvPr/>
         </p:nvSpPr>
         <p:spPr>
           <a:xfrm>
-            <a:off x="7941563" y="3246120"/>
-            <a:ext cx="731520" cy="548640"/>
+            <a:off x="7210044" y="2340863"/>
+            <a:ext cx="2194560" cy="274320"/>
           </a:xfrm>
           <a:prstGeom prst="rect">
             <a:avLst/>
@@ -51555,61 +51190,27 @@
           <a:p>
             <a:pPr algn="ctr"/>
             <a:r>
-              <a:rPr sz="2200" b="1" i="0">
-                <a:solidFill>
-                  <a:srgbClr val="C8501E"/>
-                </a:solidFill>
-                <a:latin typeface="Calibri"/>
-              </a:rPr>
-              <a:t>∪</a:t>
-            </a:r>
-          </a:p>
-        </p:txBody>
-      </p:sp>
-      <p:sp>
-        <p:nvSpPr>
-          <p:cNvPr id="55" name="Rounded Rectangle 54"/>
-          <p:cNvSpPr/>
-          <p:nvPr/>
-        </p:nvSpPr>
-        <p:spPr>
-          <a:xfrm>
-            <a:off x="502920" y="1645920"/>
-            <a:ext cx="329184" cy="219456"/>
-          </a:xfrm>
-          <a:prstGeom prst="roundRect">
-            <a:avLst>
-              <a:gd name="adj" fmla="val 15000"/>
-            </a:avLst>
-          </a:prstGeom>
-          <a:solidFill>
-            <a:srgbClr val="FFF3CC"/>
-          </a:solidFill>
-          <a:ln w="25400">
-            <a:solidFill>
-              <a:srgbClr val="E0A300"/>
-            </a:solidFill>
-          </a:ln>
-          <a:effectLst/>
-        </p:spPr>
-        <p:txBody>
-          <a:bodyPr rtlCol="0" anchor="ctr" lIns="54864" rIns="54864" tIns="27432" bIns="27432" wrap="square"/>
-          <a:lstStyle/>
-          <a:p>
-            <a:pPr algn="ctr"/>
-          </a:p>
-        </p:txBody>
-      </p:sp>
-      <p:sp>
-        <p:nvSpPr>
-          <p:cNvPr id="56" name="TextBox 55"/>
+              <a:rPr sz="1150" b="1" i="0">
+                <a:solidFill>
+                  <a:srgbClr val="7B4FB5"/>
+                </a:solidFill>
+                <a:latin typeface="Calibri"/>
+              </a:rPr>
+              <a:t>XOR([u], [v])</a:t>
+            </a:r>
+          </a:p>
+        </p:txBody>
+      </p:sp>
+      <p:sp>
+        <p:nvSpPr>
+          <p:cNvPr id="57" name="TextBox 56"/>
           <p:cNvSpPr txBox="1"/>
           <p:nvPr/>
         </p:nvSpPr>
         <p:spPr>
           <a:xfrm>
-            <a:off x="905256" y="1600200"/>
-            <a:ext cx="1563624" cy="320040"/>
+            <a:off x="4297680" y="1307592"/>
+            <a:ext cx="2194560" cy="274320"/>
           </a:xfrm>
           <a:prstGeom prst="rect">
             <a:avLst/>
@@ -51622,6 +51223,110 @@
           </a:bodyPr>
           <a:lstStyle/>
           <a:p>
+            <a:pPr algn="ctr"/>
+            <a:r>
+              <a:rPr sz="1150" b="1" i="0">
+                <a:solidFill>
+                  <a:srgbClr val="7B4FB5"/>
+                </a:solidFill>
+                <a:latin typeface="Calibri"/>
+              </a:rPr>
+              <a:t>ITE([c], [a₁], [x₁])</a:t>
+            </a:r>
+          </a:p>
+        </p:txBody>
+      </p:sp>
+      <p:sp>
+        <p:nvSpPr>
+          <p:cNvPr id="58" name="TextBox 57"/>
+          <p:cNvSpPr txBox="1"/>
+          <p:nvPr/>
+        </p:nvSpPr>
+        <p:spPr>
+          <a:xfrm>
+            <a:off x="5961888" y="1307592"/>
+            <a:ext cx="2194560" cy="274320"/>
+          </a:xfrm>
+          <a:prstGeom prst="rect">
+            <a:avLst/>
+          </a:prstGeom>
+          <a:noFill/>
+        </p:spPr>
+        <p:txBody>
+          <a:bodyPr wrap="square" anchor="ctr" lIns="45720" rIns="45720" tIns="27432" bIns="27432">
+            <a:spAutoFit/>
+          </a:bodyPr>
+          <a:lstStyle/>
+          <a:p>
+            <a:pPr algn="ctr"/>
+            <a:r>
+              <a:rPr sz="1150" b="1" i="0">
+                <a:solidFill>
+                  <a:srgbClr val="7B4FB5"/>
+                </a:solidFill>
+                <a:latin typeface="Calibri"/>
+              </a:rPr>
+              <a:t>ITE([c], [a₂], [x₂])</a:t>
+            </a:r>
+          </a:p>
+        </p:txBody>
+      </p:sp>
+      <p:sp>
+        <p:nvSpPr>
+          <p:cNvPr id="59" name="Rounded Rectangle 58"/>
+          <p:cNvSpPr/>
+          <p:nvPr/>
+        </p:nvSpPr>
+        <p:spPr>
+          <a:xfrm>
+            <a:off x="502920" y="1645920"/>
+            <a:ext cx="329184" cy="219456"/>
+          </a:xfrm>
+          <a:prstGeom prst="roundRect">
+            <a:avLst>
+              <a:gd name="adj" fmla="val 15000"/>
+            </a:avLst>
+          </a:prstGeom>
+          <a:solidFill>
+            <a:srgbClr val="FFF3CC"/>
+          </a:solidFill>
+          <a:ln w="25400">
+            <a:solidFill>
+              <a:srgbClr val="E0A300"/>
+            </a:solidFill>
+          </a:ln>
+          <a:effectLst/>
+        </p:spPr>
+        <p:txBody>
+          <a:bodyPr rtlCol="0" anchor="ctr" lIns="54864" rIns="54864" tIns="27432" bIns="27432" wrap="square"/>
+          <a:lstStyle/>
+          <a:p>
+            <a:pPr algn="ctr"/>
+          </a:p>
+        </p:txBody>
+      </p:sp>
+      <p:sp>
+        <p:nvSpPr>
+          <p:cNvPr id="60" name="TextBox 59"/>
+          <p:cNvSpPr txBox="1"/>
+          <p:nvPr/>
+        </p:nvSpPr>
+        <p:spPr>
+          <a:xfrm>
+            <a:off x="905256" y="1600200"/>
+            <a:ext cx="1563624" cy="320040"/>
+          </a:xfrm>
+          <a:prstGeom prst="rect">
+            <a:avLst/>
+          </a:prstGeom>
+          <a:noFill/>
+        </p:spPr>
+        <p:txBody>
+          <a:bodyPr wrap="square" anchor="ctr" lIns="45720" rIns="45720" tIns="27432" bIns="27432">
+            <a:spAutoFit/>
+          </a:bodyPr>
+          <a:lstStyle/>
+          <a:p>
             <a:pPr algn="l"/>
             <a:r>
               <a:rPr sz="1200" b="0" i="0">
@@ -51630,14 +51335,14 @@
                 </a:solidFill>
                 <a:latin typeface="Calibri"/>
               </a:rPr>
-              <a:t>merged this round</a:t>
-            </a:r>
-          </a:p>
-        </p:txBody>
-      </p:sp>
-      <p:sp>
-        <p:nvSpPr>
-          <p:cNvPr id="57" name="Rounded Rectangle 56"/>
+              <a:t>candidate</a:t>
+            </a:r>
+          </a:p>
+        </p:txBody>
+      </p:sp>
+      <p:sp>
+        <p:nvSpPr>
+          <p:cNvPr id="61" name="Rounded Rectangle 60"/>
           <p:cNvSpPr/>
           <p:nvPr/>
         </p:nvSpPr>
@@ -51652,6 +51357,74 @@
             </a:avLst>
           </a:prstGeom>
           <a:noFill/>
+          <a:ln w="22225">
+            <a:solidFill>
+              <a:srgbClr val="7B4FB5"/>
+            </a:solidFill>
+            <a:prstDash val="sysDot"/>
+          </a:ln>
+          <a:effectLst/>
+        </p:spPr>
+        <p:txBody>
+          <a:bodyPr rtlCol="0" anchor="ctr" lIns="54864" rIns="54864" tIns="27432" bIns="27432" wrap="square"/>
+          <a:lstStyle/>
+          <a:p>
+            <a:pPr algn="ctr"/>
+          </a:p>
+        </p:txBody>
+      </p:sp>
+      <p:sp>
+        <p:nvSpPr>
+          <p:cNvPr id="62" name="TextBox 61"/>
+          <p:cNvSpPr txBox="1"/>
+          <p:nvPr/>
+        </p:nvSpPr>
+        <p:spPr>
+          <a:xfrm>
+            <a:off x="905256" y="2020824"/>
+            <a:ext cx="1563624" cy="320040"/>
+          </a:xfrm>
+          <a:prstGeom prst="rect">
+            <a:avLst/>
+          </a:prstGeom>
+          <a:noFill/>
+        </p:spPr>
+        <p:txBody>
+          <a:bodyPr wrap="square" anchor="ctr" lIns="45720" rIns="45720" tIns="27432" bIns="27432">
+            <a:spAutoFit/>
+          </a:bodyPr>
+          <a:lstStyle/>
+          <a:p>
+            <a:pPr algn="l"/>
+            <a:r>
+              <a:rPr sz="1200" b="0" i="0">
+                <a:solidFill>
+                  <a:srgbClr val="6B717A"/>
+                </a:solidFill>
+                <a:latin typeface="Calibri"/>
+              </a:rPr>
+              <a:t>signature group</a:t>
+            </a:r>
+          </a:p>
+        </p:txBody>
+      </p:sp>
+      <p:sp>
+        <p:nvSpPr>
+          <p:cNvPr id="63" name="Rounded Rectangle 62"/>
+          <p:cNvSpPr/>
+          <p:nvPr/>
+        </p:nvSpPr>
+        <p:spPr>
+          <a:xfrm>
+            <a:off x="502920" y="2487168"/>
+            <a:ext cx="329184" cy="219456"/>
+          </a:xfrm>
+          <a:prstGeom prst="roundRect">
+            <a:avLst>
+              <a:gd name="adj" fmla="val 15000"/>
+            </a:avLst>
+          </a:prstGeom>
+          <a:noFill/>
           <a:ln w="28575">
             <a:solidFill>
               <a:srgbClr val="1F2A44"/>
@@ -51670,13 +51443,13 @@
       </p:sp>
       <p:sp>
         <p:nvSpPr>
-          <p:cNvPr id="58" name="TextBox 57"/>
+          <p:cNvPr id="64" name="TextBox 63"/>
           <p:cNvSpPr txBox="1"/>
           <p:nvPr/>
         </p:nvSpPr>
         <p:spPr>
           <a:xfrm>
-            <a:off x="905256" y="2020824"/>
+            <a:off x="905256" y="2441448"/>
             <a:ext cx="1563624" cy="320040"/>
           </a:xfrm>
           <a:prstGeom prst="rect">
@@ -51751,7 +51524,7 @@
                 </a:solidFill>
                 <a:latin typeface="Calibri"/>
               </a:rPr>
-              <a:t>ParentCC on the example: round 2</a:t>
+              <a:t>ParentCC on the example: round 1</a:t>
             </a:r>
           </a:p>
         </p:txBody>
@@ -52093,39 +51866,28 @@
           </a:p>
         </p:txBody>
       </p:sp>
-      <p:sp>
-        <p:nvSpPr>
-          <p:cNvPr id="13" name="Rounded Rectangle 12"/>
-          <p:cNvSpPr/>
-          <p:nvPr/>
-        </p:nvSpPr>
-        <p:spPr>
-          <a:xfrm>
-            <a:off x="4768596" y="1581912"/>
-            <a:ext cx="2916936" cy="676656"/>
-          </a:xfrm>
-          <a:prstGeom prst="roundRect">
-            <a:avLst>
-              <a:gd name="adj" fmla="val 30000"/>
-            </a:avLst>
-          </a:prstGeom>
-          <a:noFill/>
-          <a:ln w="22225">
-            <a:solidFill>
-              <a:srgbClr val="7B4FB5"/>
-            </a:solidFill>
-            <a:prstDash val="sysDot"/>
-          </a:ln>
-          <a:effectLst/>
-        </p:spPr>
-        <p:txBody>
-          <a:bodyPr rtlCol="0" anchor="ctr" lIns="54864" rIns="54864" tIns="27432" bIns="27432" wrap="square"/>
-          <a:lstStyle/>
-          <a:p>
-            <a:pPr algn="ctr"/>
-          </a:p>
-        </p:txBody>
-      </p:sp>
+      <p:cxnSp>
+        <p:nvCxnSpPr>
+          <p:cNvPr id="13" name="Connector 12"/>
+          <p:cNvCxnSpPr/>
+          <p:nvPr/>
+        </p:nvCxnSpPr>
+        <p:spPr>
+          <a:xfrm flipH="1">
+            <a:off x="2784348" y="3803903"/>
+            <a:ext cx="539496" cy="1106425"/>
+          </a:xfrm>
+          <a:prstGeom prst="line">
+            <a:avLst/>
+          </a:prstGeom>
+          <a:ln w="15875">
+            <a:solidFill>
+              <a:srgbClr val="8A8F98"/>
+            </a:solidFill>
+          </a:ln>
+          <a:effectLst/>
+        </p:spPr>
+      </p:cxnSp>
       <p:cxnSp>
         <p:nvCxnSpPr>
           <p:cNvPr id="14" name="Connector 13"/>
@@ -52133,9 +51895,9 @@
           <p:nvPr/>
         </p:nvCxnSpPr>
         <p:spPr>
-          <a:xfrm flipH="1">
-            <a:off x="2784348" y="3803903"/>
-            <a:ext cx="539496" cy="1106425"/>
+          <a:xfrm>
+            <a:off x="3323844" y="3803903"/>
+            <a:ext cx="960120" cy="1106425"/>
           </a:xfrm>
           <a:prstGeom prst="line">
             <a:avLst/>
@@ -52155,9 +51917,9 @@
           <p:nvPr/>
         </p:nvCxnSpPr>
         <p:spPr>
-          <a:xfrm>
-            <a:off x="3323844" y="3803903"/>
-            <a:ext cx="960120" cy="1106425"/>
+          <a:xfrm flipH="1">
+            <a:off x="3406139" y="3803903"/>
+            <a:ext cx="1014985" cy="1106425"/>
           </a:xfrm>
           <a:prstGeom prst="line">
             <a:avLst/>
@@ -52177,9 +51939,9 @@
           <p:nvPr/>
         </p:nvCxnSpPr>
         <p:spPr>
-          <a:xfrm flipH="1">
-            <a:off x="3406139" y="3803903"/>
-            <a:ext cx="1014985" cy="1106425"/>
+          <a:xfrm>
+            <a:off x="4421124" y="3803903"/>
+            <a:ext cx="484632" cy="1106425"/>
           </a:xfrm>
           <a:prstGeom prst="line">
             <a:avLst/>
@@ -52199,9 +51961,9 @@
           <p:nvPr/>
         </p:nvCxnSpPr>
         <p:spPr>
-          <a:xfrm>
-            <a:off x="4421124" y="3803903"/>
-            <a:ext cx="484632" cy="1106425"/>
+          <a:xfrm flipH="1">
+            <a:off x="7283196" y="3803903"/>
+            <a:ext cx="475487" cy="1106425"/>
           </a:xfrm>
           <a:prstGeom prst="line">
             <a:avLst/>
@@ -52221,9 +51983,9 @@
           <p:nvPr/>
         </p:nvCxnSpPr>
         <p:spPr>
-          <a:xfrm flipH="1">
-            <a:off x="7283196" y="3803903"/>
-            <a:ext cx="475487" cy="1106425"/>
+          <a:xfrm>
+            <a:off x="7758683" y="3803903"/>
+            <a:ext cx="1024129" cy="1106425"/>
           </a:xfrm>
           <a:prstGeom prst="line">
             <a:avLst/>
@@ -52243,9 +52005,9 @@
           <p:nvPr/>
         </p:nvCxnSpPr>
         <p:spPr>
-          <a:xfrm>
-            <a:off x="7758683" y="3803903"/>
-            <a:ext cx="1024129" cy="1106425"/>
+          <a:xfrm flipH="1">
+            <a:off x="7904988" y="3803903"/>
+            <a:ext cx="950975" cy="1106425"/>
           </a:xfrm>
           <a:prstGeom prst="line">
             <a:avLst/>
@@ -52265,9 +52027,9 @@
           <p:nvPr/>
         </p:nvCxnSpPr>
         <p:spPr>
-          <a:xfrm flipH="1">
-            <a:off x="7904988" y="3803903"/>
-            <a:ext cx="950975" cy="1106425"/>
+          <a:xfrm>
+            <a:off x="8855963" y="3803903"/>
+            <a:ext cx="548641" cy="1106425"/>
           </a:xfrm>
           <a:prstGeom prst="line">
             <a:avLst/>
@@ -52288,8 +52050,8 @@
         </p:nvCxnSpPr>
         <p:spPr>
           <a:xfrm>
-            <a:off x="8855963" y="3803903"/>
-            <a:ext cx="548641" cy="1106425"/>
+            <a:off x="5564124" y="2203704"/>
+            <a:ext cx="219455" cy="2706624"/>
           </a:xfrm>
           <a:prstGeom prst="line">
             <a:avLst/>
@@ -52309,9 +52071,9 @@
           <p:nvPr/>
         </p:nvCxnSpPr>
         <p:spPr>
-          <a:xfrm>
-            <a:off x="5564124" y="2203704"/>
-            <a:ext cx="219455" cy="2706624"/>
+          <a:xfrm flipH="1">
+            <a:off x="3323844" y="2203704"/>
+            <a:ext cx="2240280" cy="749807"/>
           </a:xfrm>
           <a:prstGeom prst="line">
             <a:avLst/>
@@ -52331,9 +52093,9 @@
           <p:nvPr/>
         </p:nvCxnSpPr>
         <p:spPr>
-          <a:xfrm flipH="1">
-            <a:off x="3323844" y="2203704"/>
-            <a:ext cx="2240280" cy="749807"/>
+          <a:xfrm>
+            <a:off x="5564124" y="2203704"/>
+            <a:ext cx="2194559" cy="749807"/>
           </a:xfrm>
           <a:prstGeom prst="line">
             <a:avLst/>
@@ -52353,9 +52115,9 @@
           <p:nvPr/>
         </p:nvCxnSpPr>
         <p:spPr>
-          <a:xfrm>
-            <a:off x="5564124" y="2203704"/>
-            <a:ext cx="2194559" cy="749807"/>
+          <a:xfrm flipH="1">
+            <a:off x="6405372" y="2203704"/>
+            <a:ext cx="484632" cy="2706624"/>
           </a:xfrm>
           <a:prstGeom prst="line">
             <a:avLst/>
@@ -52376,8 +52138,8 @@
         </p:nvCxnSpPr>
         <p:spPr>
           <a:xfrm flipH="1">
-            <a:off x="6405372" y="2203704"/>
-            <a:ext cx="484632" cy="2706624"/>
+            <a:off x="4421124" y="2203704"/>
+            <a:ext cx="2468880" cy="749807"/>
           </a:xfrm>
           <a:prstGeom prst="line">
             <a:avLst/>
@@ -52397,28 +52159,6 @@
           <p:nvPr/>
         </p:nvCxnSpPr>
         <p:spPr>
-          <a:xfrm flipH="1">
-            <a:off x="4421124" y="2203704"/>
-            <a:ext cx="2468880" cy="749807"/>
-          </a:xfrm>
-          <a:prstGeom prst="line">
-            <a:avLst/>
-          </a:prstGeom>
-          <a:ln w="15875">
-            <a:solidFill>
-              <a:srgbClr val="8A8F98"/>
-            </a:solidFill>
-          </a:ln>
-          <a:effectLst/>
-        </p:spPr>
-      </p:cxnSp>
-      <p:cxnSp>
-        <p:nvCxnSpPr>
-          <p:cNvPr id="27" name="Connector 26"/>
-          <p:cNvCxnSpPr/>
-          <p:nvPr/>
-        </p:nvCxnSpPr>
-        <p:spPr>
           <a:xfrm>
             <a:off x="6890004" y="2203704"/>
             <a:ext cx="1965959" cy="749807"/>
@@ -52436,7 +52176,7 @@
       </p:cxnSp>
       <p:sp>
         <p:nvSpPr>
-          <p:cNvPr id="28" name="Rounded Rectangle 27"/>
+          <p:cNvPr id="27" name="Rounded Rectangle 26"/>
           <p:cNvSpPr/>
           <p:nvPr/>
         </p:nvSpPr>
@@ -52479,7 +52219,7 @@
       </p:sp>
       <p:sp>
         <p:nvSpPr>
-          <p:cNvPr id="29" name="Rounded Rectangle 28"/>
+          <p:cNvPr id="28" name="Rounded Rectangle 27"/>
           <p:cNvSpPr/>
           <p:nvPr/>
         </p:nvSpPr>
@@ -52522,7 +52262,7 @@
       </p:sp>
       <p:sp>
         <p:nvSpPr>
-          <p:cNvPr id="30" name="Rounded Rectangle 29"/>
+          <p:cNvPr id="29" name="Rounded Rectangle 28"/>
           <p:cNvSpPr/>
           <p:nvPr/>
         </p:nvSpPr>
@@ -52565,7 +52305,7 @@
       </p:sp>
       <p:sp>
         <p:nvSpPr>
-          <p:cNvPr id="31" name="Rounded Rectangle 30"/>
+          <p:cNvPr id="30" name="Rounded Rectangle 29"/>
           <p:cNvSpPr/>
           <p:nvPr/>
         </p:nvSpPr>
@@ -52608,7 +52348,7 @@
       </p:sp>
       <p:sp>
         <p:nvSpPr>
-          <p:cNvPr id="32" name="Rounded Rectangle 31"/>
+          <p:cNvPr id="31" name="Rounded Rectangle 30"/>
           <p:cNvSpPr/>
           <p:nvPr/>
         </p:nvSpPr>
@@ -52651,7 +52391,7 @@
       </p:sp>
       <p:sp>
         <p:nvSpPr>
-          <p:cNvPr id="33" name="Rounded Rectangle 32"/>
+          <p:cNvPr id="32" name="Rounded Rectangle 31"/>
           <p:cNvSpPr/>
           <p:nvPr/>
         </p:nvSpPr>
@@ -52694,7 +52434,7 @@
       </p:sp>
       <p:sp>
         <p:nvSpPr>
-          <p:cNvPr id="34" name="Rounded Rectangle 33"/>
+          <p:cNvPr id="33" name="Rounded Rectangle 32"/>
           <p:cNvSpPr/>
           <p:nvPr/>
         </p:nvSpPr>
@@ -52737,7 +52477,7 @@
       </p:sp>
       <p:sp>
         <p:nvSpPr>
-          <p:cNvPr id="35" name="Rounded Rectangle 34"/>
+          <p:cNvPr id="34" name="Rounded Rectangle 33"/>
           <p:cNvSpPr/>
           <p:nvPr/>
         </p:nvSpPr>
@@ -52780,7 +52520,7 @@
       </p:sp>
       <p:sp>
         <p:nvSpPr>
-          <p:cNvPr id="36" name="Rounded Rectangle 35"/>
+          <p:cNvPr id="35" name="Rounded Rectangle 34"/>
           <p:cNvSpPr/>
           <p:nvPr/>
         </p:nvSpPr>
@@ -52823,7 +52563,7 @@
       </p:sp>
       <p:sp>
         <p:nvSpPr>
-          <p:cNvPr id="37" name="Rounded Rectangle 36"/>
+          <p:cNvPr id="36" name="Rounded Rectangle 35"/>
           <p:cNvSpPr/>
           <p:nvPr/>
         </p:nvSpPr>
@@ -52866,7 +52606,7 @@
       </p:sp>
       <p:sp>
         <p:nvSpPr>
-          <p:cNvPr id="38" name="Rounded Rectangle 37"/>
+          <p:cNvPr id="37" name="Rounded Rectangle 36"/>
           <p:cNvSpPr/>
           <p:nvPr/>
         </p:nvSpPr>
@@ -52881,11 +52621,11 @@
             </a:avLst>
           </a:prstGeom>
           <a:solidFill>
-            <a:srgbClr val="FFFFFF"/>
-          </a:solidFill>
-          <a:ln w="12700">
-            <a:solidFill>
-              <a:srgbClr val="4A4F57"/>
+            <a:srgbClr val="FFF3CC"/>
+          </a:solidFill>
+          <a:ln w="34925">
+            <a:solidFill>
+              <a:srgbClr val="E0A300"/>
             </a:solidFill>
           </a:ln>
           <a:effectLst/>
@@ -52909,7 +52649,7 @@
       </p:sp>
       <p:sp>
         <p:nvSpPr>
-          <p:cNvPr id="39" name="TextBox 38"/>
+          <p:cNvPr id="38" name="TextBox 37"/>
           <p:cNvSpPr txBox="1"/>
           <p:nvPr/>
         </p:nvSpPr>
@@ -52944,7 +52684,7 @@
       </p:sp>
       <p:sp>
         <p:nvSpPr>
-          <p:cNvPr id="40" name="Rounded Rectangle 39"/>
+          <p:cNvPr id="39" name="Rounded Rectangle 38"/>
           <p:cNvSpPr/>
           <p:nvPr/>
         </p:nvSpPr>
@@ -52959,11 +52699,11 @@
             </a:avLst>
           </a:prstGeom>
           <a:solidFill>
-            <a:srgbClr val="FFFFFF"/>
-          </a:solidFill>
-          <a:ln w="12700">
-            <a:solidFill>
-              <a:srgbClr val="4A4F57"/>
+            <a:srgbClr val="FFF3CC"/>
+          </a:solidFill>
+          <a:ln w="34925">
+            <a:solidFill>
+              <a:srgbClr val="E0A300"/>
             </a:solidFill>
           </a:ln>
           <a:effectLst/>
@@ -52987,7 +52727,7 @@
       </p:sp>
       <p:sp>
         <p:nvSpPr>
-          <p:cNvPr id="41" name="TextBox 40"/>
+          <p:cNvPr id="40" name="TextBox 39"/>
           <p:cNvSpPr txBox="1"/>
           <p:nvPr/>
         </p:nvSpPr>
@@ -53022,7 +52762,7 @@
       </p:sp>
       <p:sp>
         <p:nvSpPr>
-          <p:cNvPr id="42" name="Rounded Rectangle 41"/>
+          <p:cNvPr id="41" name="Rounded Rectangle 40"/>
           <p:cNvSpPr/>
           <p:nvPr/>
         </p:nvSpPr>
@@ -53037,11 +52777,11 @@
             </a:avLst>
           </a:prstGeom>
           <a:solidFill>
-            <a:srgbClr val="FFFFFF"/>
-          </a:solidFill>
-          <a:ln w="12700">
-            <a:solidFill>
-              <a:srgbClr val="4A4F57"/>
+            <a:srgbClr val="FFF3CC"/>
+          </a:solidFill>
+          <a:ln w="34925">
+            <a:solidFill>
+              <a:srgbClr val="E0A300"/>
             </a:solidFill>
           </a:ln>
           <a:effectLst/>
@@ -53065,7 +52805,7 @@
       </p:sp>
       <p:sp>
         <p:nvSpPr>
-          <p:cNvPr id="43" name="TextBox 42"/>
+          <p:cNvPr id="42" name="TextBox 41"/>
           <p:cNvSpPr txBox="1"/>
           <p:nvPr/>
         </p:nvSpPr>
@@ -53100,7 +52840,7 @@
       </p:sp>
       <p:sp>
         <p:nvSpPr>
-          <p:cNvPr id="44" name="Rounded Rectangle 43"/>
+          <p:cNvPr id="43" name="Rounded Rectangle 42"/>
           <p:cNvSpPr/>
           <p:nvPr/>
         </p:nvSpPr>
@@ -53115,11 +52855,11 @@
             </a:avLst>
           </a:prstGeom>
           <a:solidFill>
-            <a:srgbClr val="FFFFFF"/>
-          </a:solidFill>
-          <a:ln w="12700">
-            <a:solidFill>
-              <a:srgbClr val="4A4F57"/>
+            <a:srgbClr val="FFF3CC"/>
+          </a:solidFill>
+          <a:ln w="34925">
+            <a:solidFill>
+              <a:srgbClr val="E0A300"/>
             </a:solidFill>
           </a:ln>
           <a:effectLst/>
@@ -53143,7 +52883,7 @@
       </p:sp>
       <p:sp>
         <p:nvSpPr>
-          <p:cNvPr id="45" name="TextBox 44"/>
+          <p:cNvPr id="44" name="TextBox 43"/>
           <p:cNvSpPr txBox="1"/>
           <p:nvPr/>
         </p:nvSpPr>
@@ -53178,7 +52918,7 @@
       </p:sp>
       <p:sp>
         <p:nvSpPr>
-          <p:cNvPr id="46" name="Rounded Rectangle 45"/>
+          <p:cNvPr id="45" name="Rounded Rectangle 44"/>
           <p:cNvSpPr/>
           <p:nvPr/>
         </p:nvSpPr>
@@ -53193,11 +52933,11 @@
             </a:avLst>
           </a:prstGeom>
           <a:solidFill>
-            <a:srgbClr val="FFF3CC"/>
-          </a:solidFill>
-          <a:ln w="34925">
-            <a:solidFill>
-              <a:srgbClr val="E0A300"/>
+            <a:srgbClr val="FFFFFF"/>
+          </a:solidFill>
+          <a:ln w="12700">
+            <a:solidFill>
+              <a:srgbClr val="4A4F57"/>
             </a:solidFill>
           </a:ln>
           <a:effectLst/>
@@ -53221,7 +52961,7 @@
       </p:sp>
       <p:sp>
         <p:nvSpPr>
-          <p:cNvPr id="47" name="TextBox 46"/>
+          <p:cNvPr id="46" name="TextBox 45"/>
           <p:cNvSpPr txBox="1"/>
           <p:nvPr/>
         </p:nvSpPr>
@@ -53256,7 +52996,7 @@
       </p:sp>
       <p:sp>
         <p:nvSpPr>
-          <p:cNvPr id="48" name="Rounded Rectangle 47"/>
+          <p:cNvPr id="47" name="Rounded Rectangle 46"/>
           <p:cNvSpPr/>
           <p:nvPr/>
         </p:nvSpPr>
@@ -53271,11 +53011,11 @@
             </a:avLst>
           </a:prstGeom>
           <a:solidFill>
-            <a:srgbClr val="FFF3CC"/>
-          </a:solidFill>
-          <a:ln w="34925">
-            <a:solidFill>
-              <a:srgbClr val="E0A300"/>
+            <a:srgbClr val="FFFFFF"/>
+          </a:solidFill>
+          <a:ln w="12700">
+            <a:solidFill>
+              <a:srgbClr val="4A4F57"/>
             </a:solidFill>
           </a:ln>
           <a:effectLst/>
@@ -53299,7 +53039,7 @@
       </p:sp>
       <p:sp>
         <p:nvSpPr>
-          <p:cNvPr id="49" name="TextBox 48"/>
+          <p:cNvPr id="48" name="TextBox 47"/>
           <p:cNvSpPr txBox="1"/>
           <p:nvPr/>
         </p:nvSpPr>
@@ -53334,7 +53074,7 @@
       </p:sp>
       <p:sp>
         <p:nvSpPr>
-          <p:cNvPr id="50" name="Rounded Rectangle 49"/>
+          <p:cNvPr id="49" name="Rounded Rectangle 48"/>
           <p:cNvSpPr/>
           <p:nvPr/>
         </p:nvSpPr>
@@ -53367,7 +53107,7 @@
       </p:sp>
       <p:sp>
         <p:nvSpPr>
-          <p:cNvPr id="51" name="TextBox 50"/>
+          <p:cNvPr id="50" name="TextBox 49"/>
           <p:cNvSpPr txBox="1"/>
           <p:nvPr/>
         </p:nvSpPr>
@@ -53402,7 +53142,7 @@
       </p:sp>
       <p:sp>
         <p:nvSpPr>
-          <p:cNvPr id="52" name="Rounded Rectangle 51"/>
+          <p:cNvPr id="51" name="Rounded Rectangle 50"/>
           <p:cNvSpPr/>
           <p:nvPr/>
         </p:nvSpPr>
@@ -53435,7 +53175,7 @@
       </p:sp>
       <p:sp>
         <p:nvSpPr>
-          <p:cNvPr id="53" name="TextBox 52"/>
+          <p:cNvPr id="52" name="TextBox 51"/>
           <p:cNvSpPr txBox="1"/>
           <p:nvPr/>
         </p:nvSpPr>
@@ -53470,47 +53210,14 @@
       </p:sp>
       <p:sp>
         <p:nvSpPr>
-          <p:cNvPr id="54" name="Rounded Rectangle 53"/>
-          <p:cNvSpPr/>
-          <p:nvPr/>
-        </p:nvSpPr>
-        <p:spPr>
-          <a:xfrm>
-            <a:off x="4576572" y="1389888"/>
-            <a:ext cx="3300984" cy="1060704"/>
-          </a:xfrm>
-          <a:prstGeom prst="roundRect">
-            <a:avLst>
-              <a:gd name="adj" fmla="val 35000"/>
-            </a:avLst>
-          </a:prstGeom>
-          <a:noFill/>
-          <a:ln w="28575">
-            <a:solidFill>
-              <a:srgbClr val="1F2A44"/>
-            </a:solidFill>
-            <a:prstDash val="lgDash"/>
-          </a:ln>
-          <a:effectLst/>
-        </p:spPr>
-        <p:txBody>
-          <a:bodyPr rtlCol="0" anchor="ctr" lIns="54864" rIns="54864" tIns="27432" bIns="27432" wrap="square"/>
-          <a:lstStyle/>
-          <a:p>
-            <a:pPr algn="ctr"/>
-          </a:p>
-        </p:txBody>
-      </p:sp>
-      <p:sp>
-        <p:nvSpPr>
-          <p:cNvPr id="55" name="TextBox 54"/>
+          <p:cNvPr id="53" name="TextBox 52"/>
           <p:cNvSpPr txBox="1"/>
           <p:nvPr/>
         </p:nvSpPr>
         <p:spPr>
           <a:xfrm>
-            <a:off x="7968996" y="1737360"/>
-            <a:ext cx="1188720" cy="365760"/>
+            <a:off x="3506723" y="3246120"/>
+            <a:ext cx="731520" cy="548640"/>
           </a:xfrm>
           <a:prstGeom prst="rect">
             <a:avLst/>
@@ -53523,29 +53230,29 @@
           </a:bodyPr>
           <a:lstStyle/>
           <a:p>
-            <a:pPr algn="l"/>
-            <a:r>
-              <a:rPr sz="1600" b="1" i="0">
-                <a:solidFill>
-                  <a:srgbClr val="1F2A44"/>
-                </a:solidFill>
-                <a:latin typeface="Calibri"/>
-              </a:rPr>
-              <a:t>round 2</a:t>
-            </a:r>
-          </a:p>
-        </p:txBody>
-      </p:sp>
-      <p:sp>
-        <p:nvSpPr>
-          <p:cNvPr id="56" name="TextBox 55"/>
+            <a:pPr algn="ctr"/>
+            <a:r>
+              <a:rPr sz="2200" b="1" i="0">
+                <a:solidFill>
+                  <a:srgbClr val="C8501E"/>
+                </a:solidFill>
+                <a:latin typeface="Calibri"/>
+              </a:rPr>
+              <a:t>∪</a:t>
+            </a:r>
+          </a:p>
+        </p:txBody>
+      </p:sp>
+      <p:sp>
+        <p:nvSpPr>
+          <p:cNvPr id="54" name="TextBox 53"/>
           <p:cNvSpPr txBox="1"/>
           <p:nvPr/>
         </p:nvSpPr>
         <p:spPr>
           <a:xfrm>
-            <a:off x="5129784" y="1014983"/>
-            <a:ext cx="2194560" cy="274320"/>
+            <a:off x="7941563" y="3246120"/>
+            <a:ext cx="731520" cy="548640"/>
           </a:xfrm>
           <a:prstGeom prst="rect">
             <a:avLst/>
@@ -53560,20 +53267,20 @@
           <a:p>
             <a:pPr algn="ctr"/>
             <a:r>
-              <a:rPr sz="1150" b="1" i="0">
-                <a:solidFill>
-                  <a:srgbClr val="7B4FB5"/>
-                </a:solidFill>
-                <a:latin typeface="Calibri"/>
-              </a:rPr>
-              <a:t>ITE([c], [a₁], [x₁])</a:t>
-            </a:r>
-          </a:p>
-        </p:txBody>
-      </p:sp>
-      <p:sp>
-        <p:nvSpPr>
-          <p:cNvPr id="57" name="Rounded Rectangle 56"/>
+              <a:rPr sz="2200" b="1" i="0">
+                <a:solidFill>
+                  <a:srgbClr val="C8501E"/>
+                </a:solidFill>
+                <a:latin typeface="Calibri"/>
+              </a:rPr>
+              <a:t>∪</a:t>
+            </a:r>
+          </a:p>
+        </p:txBody>
+      </p:sp>
+      <p:sp>
+        <p:nvSpPr>
+          <p:cNvPr id="55" name="Rounded Rectangle 54"/>
           <p:cNvSpPr/>
           <p:nvPr/>
         </p:nvSpPr>
@@ -53607,7 +53314,7 @@
       </p:sp>
       <p:sp>
         <p:nvSpPr>
-          <p:cNvPr id="58" name="TextBox 57"/>
+          <p:cNvPr id="56" name="TextBox 55"/>
           <p:cNvSpPr txBox="1"/>
           <p:nvPr/>
         </p:nvSpPr>
@@ -53635,14 +53342,14 @@
                 </a:solidFill>
                 <a:latin typeface="Calibri"/>
               </a:rPr>
-              <a:t>candidate</a:t>
-            </a:r>
-          </a:p>
-        </p:txBody>
-      </p:sp>
-      <p:sp>
-        <p:nvSpPr>
-          <p:cNvPr id="59" name="Rounded Rectangle 58"/>
+              <a:t>merged this round</a:t>
+            </a:r>
+          </a:p>
+        </p:txBody>
+      </p:sp>
+      <p:sp>
+        <p:nvSpPr>
+          <p:cNvPr id="57" name="Rounded Rectangle 56"/>
           <p:cNvSpPr/>
           <p:nvPr/>
         </p:nvSpPr>
@@ -53657,11 +53364,11 @@
             </a:avLst>
           </a:prstGeom>
           <a:noFill/>
-          <a:ln w="22225">
-            <a:solidFill>
-              <a:srgbClr val="7B4FB5"/>
-            </a:solidFill>
-            <a:prstDash val="sysDot"/>
+          <a:ln w="28575">
+            <a:solidFill>
+              <a:srgbClr val="1F2A44"/>
+            </a:solidFill>
+            <a:prstDash val="lgDash"/>
           </a:ln>
           <a:effectLst/>
         </p:spPr>
@@ -53675,81 +53382,13 @@
       </p:sp>
       <p:sp>
         <p:nvSpPr>
-          <p:cNvPr id="60" name="TextBox 59"/>
+          <p:cNvPr id="58" name="TextBox 57"/>
           <p:cNvSpPr txBox="1"/>
           <p:nvPr/>
         </p:nvSpPr>
         <p:spPr>
           <a:xfrm>
             <a:off x="905256" y="2020824"/>
-            <a:ext cx="1563624" cy="320040"/>
-          </a:xfrm>
-          <a:prstGeom prst="rect">
-            <a:avLst/>
-          </a:prstGeom>
-          <a:noFill/>
-        </p:spPr>
-        <p:txBody>
-          <a:bodyPr wrap="square" anchor="ctr" lIns="45720" rIns="45720" tIns="27432" bIns="27432">
-            <a:spAutoFit/>
-          </a:bodyPr>
-          <a:lstStyle/>
-          <a:p>
-            <a:pPr algn="l"/>
-            <a:r>
-              <a:rPr sz="1200" b="0" i="0">
-                <a:solidFill>
-                  <a:srgbClr val="6B717A"/>
-                </a:solidFill>
-                <a:latin typeface="Calibri"/>
-              </a:rPr>
-              <a:t>signature group</a:t>
-            </a:r>
-          </a:p>
-        </p:txBody>
-      </p:sp>
-      <p:sp>
-        <p:nvSpPr>
-          <p:cNvPr id="61" name="Rounded Rectangle 60"/>
-          <p:cNvSpPr/>
-          <p:nvPr/>
-        </p:nvSpPr>
-        <p:spPr>
-          <a:xfrm>
-            <a:off x="502920" y="2487168"/>
-            <a:ext cx="329184" cy="219456"/>
-          </a:xfrm>
-          <a:prstGeom prst="roundRect">
-            <a:avLst>
-              <a:gd name="adj" fmla="val 15000"/>
-            </a:avLst>
-          </a:prstGeom>
-          <a:noFill/>
-          <a:ln w="28575">
-            <a:solidFill>
-              <a:srgbClr val="1F2A44"/>
-            </a:solidFill>
-            <a:prstDash val="lgDash"/>
-          </a:ln>
-          <a:effectLst/>
-        </p:spPr>
-        <p:txBody>
-          <a:bodyPr rtlCol="0" anchor="ctr" lIns="54864" rIns="54864" tIns="27432" bIns="27432" wrap="square"/>
-          <a:lstStyle/>
-          <a:p>
-            <a:pPr algn="ctr"/>
-          </a:p>
-        </p:txBody>
-      </p:sp>
-      <p:sp>
-        <p:nvSpPr>
-          <p:cNvPr id="62" name="TextBox 61"/>
-          <p:cNvSpPr txBox="1"/>
-          <p:nvPr/>
-        </p:nvSpPr>
-        <p:spPr>
-          <a:xfrm>
-            <a:off x="905256" y="2441448"/>
             <a:ext cx="1563624" cy="320040"/>
           </a:xfrm>
           <a:prstGeom prst="rect">
@@ -54174,22 +53813,20 @@
         </p:nvSpPr>
         <p:spPr>
           <a:xfrm>
-            <a:off x="4704588" y="1517904"/>
-            <a:ext cx="3044952" cy="804672"/>
-          </a:xfrm>
-          <a:prstGeom prst="roundRect">
-            <a:avLst>
-              <a:gd name="adj" fmla="val 25000"/>
-            </a:avLst>
-          </a:prstGeom>
-          <a:solidFill>
-            <a:srgbClr val="FBE4D3"/>
-          </a:solidFill>
-          <a:ln w="19050">
-            <a:solidFill>
-              <a:srgbClr val="C8501E"/>
-            </a:solidFill>
-            <a:prstDash val="dash"/>
+            <a:off x="4768596" y="1581912"/>
+            <a:ext cx="2916936" cy="676656"/>
+          </a:xfrm>
+          <a:prstGeom prst="roundRect">
+            <a:avLst>
+              <a:gd name="adj" fmla="val 30000"/>
+            </a:avLst>
+          </a:prstGeom>
+          <a:noFill/>
+          <a:ln w="22225">
+            <a:solidFill>
+              <a:srgbClr val="7B4FB5"/>
+            </a:solidFill>
+            <a:prstDash val="sysDot"/>
           </a:ln>
           <a:effectLst/>
         </p:spPr>
@@ -55619,8 +55256,8 @@
         </p:nvSpPr>
         <p:spPr>
           <a:xfrm>
-            <a:off x="5861304" y="1645920"/>
-            <a:ext cx="731520" cy="548640"/>
+            <a:off x="5129784" y="1014983"/>
+            <a:ext cx="2194560" cy="274320"/>
           </a:xfrm>
           <a:prstGeom prst="rect">
             <a:avLst/>
@@ -55635,13 +55272,13 @@
           <a:p>
             <a:pPr algn="ctr"/>
             <a:r>
-              <a:rPr sz="2200" b="1" i="0">
-                <a:solidFill>
-                  <a:srgbClr val="C8501E"/>
-                </a:solidFill>
-                <a:latin typeface="Calibri"/>
-              </a:rPr>
-              <a:t>∪</a:t>
+              <a:rPr sz="1150" b="1" i="0">
+                <a:solidFill>
+                  <a:srgbClr val="7B4FB5"/>
+                </a:solidFill>
+                <a:latin typeface="Calibri"/>
+              </a:rPr>
+              <a:t>ITE([c], [a₁], [x₁])</a:t>
             </a:r>
           </a:p>
         </p:txBody>
@@ -55710,7 +55347,7 @@
                 </a:solidFill>
                 <a:latin typeface="Calibri"/>
               </a:rPr>
-              <a:t>merged this round</a:t>
+              <a:t>candidate</a:t>
             </a:r>
           </a:p>
         </p:txBody>
@@ -55732,11 +55369,11 @@
             </a:avLst>
           </a:prstGeom>
           <a:noFill/>
-          <a:ln w="28575">
-            <a:solidFill>
-              <a:srgbClr val="1F2A44"/>
-            </a:solidFill>
-            <a:prstDash val="lgDash"/>
+          <a:ln w="22225">
+            <a:solidFill>
+              <a:srgbClr val="7B4FB5"/>
+            </a:solidFill>
+            <a:prstDash val="sysDot"/>
           </a:ln>
           <a:effectLst/>
         </p:spPr>
@@ -55757,6 +55394,74 @@
         <p:spPr>
           <a:xfrm>
             <a:off x="905256" y="2020824"/>
+            <a:ext cx="1563624" cy="320040"/>
+          </a:xfrm>
+          <a:prstGeom prst="rect">
+            <a:avLst/>
+          </a:prstGeom>
+          <a:noFill/>
+        </p:spPr>
+        <p:txBody>
+          <a:bodyPr wrap="square" anchor="ctr" lIns="45720" rIns="45720" tIns="27432" bIns="27432">
+            <a:spAutoFit/>
+          </a:bodyPr>
+          <a:lstStyle/>
+          <a:p>
+            <a:pPr algn="l"/>
+            <a:r>
+              <a:rPr sz="1200" b="0" i="0">
+                <a:solidFill>
+                  <a:srgbClr val="6B717A"/>
+                </a:solidFill>
+                <a:latin typeface="Calibri"/>
+              </a:rPr>
+              <a:t>signature group</a:t>
+            </a:r>
+          </a:p>
+        </p:txBody>
+      </p:sp>
+      <p:sp>
+        <p:nvSpPr>
+          <p:cNvPr id="61" name="Rounded Rectangle 60"/>
+          <p:cNvSpPr/>
+          <p:nvPr/>
+        </p:nvSpPr>
+        <p:spPr>
+          <a:xfrm>
+            <a:off x="502920" y="2487168"/>
+            <a:ext cx="329184" cy="219456"/>
+          </a:xfrm>
+          <a:prstGeom prst="roundRect">
+            <a:avLst>
+              <a:gd name="adj" fmla="val 15000"/>
+            </a:avLst>
+          </a:prstGeom>
+          <a:noFill/>
+          <a:ln w="28575">
+            <a:solidFill>
+              <a:srgbClr val="1F2A44"/>
+            </a:solidFill>
+            <a:prstDash val="lgDash"/>
+          </a:ln>
+          <a:effectLst/>
+        </p:spPr>
+        <p:txBody>
+          <a:bodyPr rtlCol="0" anchor="ctr" lIns="54864" rIns="54864" tIns="27432" bIns="27432" wrap="square"/>
+          <a:lstStyle/>
+          <a:p>
+            <a:pPr algn="ctr"/>
+          </a:p>
+        </p:txBody>
+      </p:sp>
+      <p:sp>
+        <p:nvSpPr>
+          <p:cNvPr id="62" name="TextBox 61"/>
+          <p:cNvSpPr txBox="1"/>
+          <p:nvPr/>
+        </p:nvSpPr>
+        <p:spPr>
+          <a:xfrm>
+            <a:off x="905256" y="2441448"/>
             <a:ext cx="1563624" cy="320040"/>
           </a:xfrm>
           <a:prstGeom prst="rect">
@@ -55831,7 +55536,7 @@
                 </a:solidFill>
                 <a:latin typeface="Calibri"/>
               </a:rPr>
-              <a:t>ParentCC on the example: done</a:t>
+              <a:t>ParentCC on the example: round 2</a:t>
             </a:r>
           </a:p>
         </p:txBody>
@@ -57275,11 +56980,11 @@
             </a:avLst>
           </a:prstGeom>
           <a:solidFill>
-            <a:srgbClr val="FFFFFF"/>
-          </a:solidFill>
-          <a:ln w="12700">
-            <a:solidFill>
-              <a:srgbClr val="4A4F57"/>
+            <a:srgbClr val="FFF3CC"/>
+          </a:solidFill>
+          <a:ln w="34925">
+            <a:solidFill>
+              <a:srgbClr val="E0A300"/>
             </a:solidFill>
           </a:ln>
           <a:effectLst/>
@@ -57353,11 +57058,11 @@
             </a:avLst>
           </a:prstGeom>
           <a:solidFill>
-            <a:srgbClr val="FFFFFF"/>
-          </a:solidFill>
-          <a:ln w="12700">
-            <a:solidFill>
-              <a:srgbClr val="4A4F57"/>
+            <a:srgbClr val="FFF3CC"/>
+          </a:solidFill>
+          <a:ln w="34925">
+            <a:solidFill>
+              <a:srgbClr val="E0A300"/>
             </a:solidFill>
           </a:ln>
           <a:effectLst/>
@@ -57620,14 +57325,49 @@
       </p:sp>
       <p:sp>
         <p:nvSpPr>
-          <p:cNvPr id="56" name="Rounded Rectangle 55"/>
-          <p:cNvSpPr/>
-          <p:nvPr/>
-        </p:nvSpPr>
-        <p:spPr>
-          <a:xfrm>
-            <a:off x="548640" y="5596128"/>
-            <a:ext cx="11064240" cy="694944"/>
+          <p:cNvPr id="56" name="TextBox 55"/>
+          <p:cNvSpPr txBox="1"/>
+          <p:nvPr/>
+        </p:nvSpPr>
+        <p:spPr>
+          <a:xfrm>
+            <a:off x="5861304" y="1645920"/>
+            <a:ext cx="731520" cy="548640"/>
+          </a:xfrm>
+          <a:prstGeom prst="rect">
+            <a:avLst/>
+          </a:prstGeom>
+          <a:noFill/>
+        </p:spPr>
+        <p:txBody>
+          <a:bodyPr wrap="square" anchor="ctr" lIns="45720" rIns="45720" tIns="27432" bIns="27432">
+            <a:spAutoFit/>
+          </a:bodyPr>
+          <a:lstStyle/>
+          <a:p>
+            <a:pPr algn="ctr"/>
+            <a:r>
+              <a:rPr sz="2200" b="1" i="0">
+                <a:solidFill>
+                  <a:srgbClr val="C8501E"/>
+                </a:solidFill>
+                <a:latin typeface="Calibri"/>
+              </a:rPr>
+              <a:t>∪</a:t>
+            </a:r>
+          </a:p>
+        </p:txBody>
+      </p:sp>
+      <p:sp>
+        <p:nvSpPr>
+          <p:cNvPr id="57" name="Rounded Rectangle 56"/>
+          <p:cNvSpPr/>
+          <p:nvPr/>
+        </p:nvSpPr>
+        <p:spPr>
+          <a:xfrm>
+            <a:off x="502920" y="1645920"/>
+            <a:ext cx="329184" cy="219456"/>
           </a:xfrm>
           <a:prstGeom prst="roundRect">
             <a:avLst>
@@ -57635,10 +57375,12 @@
             </a:avLst>
           </a:prstGeom>
           <a:solidFill>
-            <a:srgbClr val="1F2A44"/>
-          </a:solidFill>
-          <a:ln>
-            <a:noFill/>
+            <a:srgbClr val="FFF3CC"/>
+          </a:solidFill>
+          <a:ln w="25400">
+            <a:solidFill>
+              <a:srgbClr val="E0A300"/>
+            </a:solidFill>
           </a:ln>
           <a:effectLst/>
         </p:spPr>
@@ -57647,14 +57389,108 @@
           <a:lstStyle/>
           <a:p>
             <a:pPr algn="ctr"/>
-            <a:r>
-              <a:rPr sz="2400" b="1" i="0">
-                <a:solidFill>
-                  <a:srgbClr val="FFFFFF"/>
-                </a:solidFill>
-                <a:latin typeface="Calibri"/>
-              </a:rPr>
-              <a:t>Done: 8 merges in 3 rounds, the schedule from before</a:t>
+          </a:p>
+        </p:txBody>
+      </p:sp>
+      <p:sp>
+        <p:nvSpPr>
+          <p:cNvPr id="58" name="TextBox 57"/>
+          <p:cNvSpPr txBox="1"/>
+          <p:nvPr/>
+        </p:nvSpPr>
+        <p:spPr>
+          <a:xfrm>
+            <a:off x="905256" y="1600200"/>
+            <a:ext cx="1563624" cy="320040"/>
+          </a:xfrm>
+          <a:prstGeom prst="rect">
+            <a:avLst/>
+          </a:prstGeom>
+          <a:noFill/>
+        </p:spPr>
+        <p:txBody>
+          <a:bodyPr wrap="square" anchor="ctr" lIns="45720" rIns="45720" tIns="27432" bIns="27432">
+            <a:spAutoFit/>
+          </a:bodyPr>
+          <a:lstStyle/>
+          <a:p>
+            <a:pPr algn="l"/>
+            <a:r>
+              <a:rPr sz="1200" b="0" i="0">
+                <a:solidFill>
+                  <a:srgbClr val="6B717A"/>
+                </a:solidFill>
+                <a:latin typeface="Calibri"/>
+              </a:rPr>
+              <a:t>merged this round</a:t>
+            </a:r>
+          </a:p>
+        </p:txBody>
+      </p:sp>
+      <p:sp>
+        <p:nvSpPr>
+          <p:cNvPr id="59" name="Rounded Rectangle 58"/>
+          <p:cNvSpPr/>
+          <p:nvPr/>
+        </p:nvSpPr>
+        <p:spPr>
+          <a:xfrm>
+            <a:off x="502920" y="2066543"/>
+            <a:ext cx="329184" cy="219456"/>
+          </a:xfrm>
+          <a:prstGeom prst="roundRect">
+            <a:avLst>
+              <a:gd name="adj" fmla="val 15000"/>
+            </a:avLst>
+          </a:prstGeom>
+          <a:noFill/>
+          <a:ln w="28575">
+            <a:solidFill>
+              <a:srgbClr val="1F2A44"/>
+            </a:solidFill>
+            <a:prstDash val="lgDash"/>
+          </a:ln>
+          <a:effectLst/>
+        </p:spPr>
+        <p:txBody>
+          <a:bodyPr rtlCol="0" anchor="ctr" lIns="54864" rIns="54864" tIns="27432" bIns="27432" wrap="square"/>
+          <a:lstStyle/>
+          <a:p>
+            <a:pPr algn="ctr"/>
+          </a:p>
+        </p:txBody>
+      </p:sp>
+      <p:sp>
+        <p:nvSpPr>
+          <p:cNvPr id="60" name="TextBox 59"/>
+          <p:cNvSpPr txBox="1"/>
+          <p:nvPr/>
+        </p:nvSpPr>
+        <p:spPr>
+          <a:xfrm>
+            <a:off x="905256" y="2020824"/>
+            <a:ext cx="1563624" cy="320040"/>
+          </a:xfrm>
+          <a:prstGeom prst="rect">
+            <a:avLst/>
+          </a:prstGeom>
+          <a:noFill/>
+        </p:spPr>
+        <p:txBody>
+          <a:bodyPr wrap="square" anchor="ctr" lIns="45720" rIns="45720" tIns="27432" bIns="27432">
+            <a:spAutoFit/>
+          </a:bodyPr>
+          <a:lstStyle/>
+          <a:p>
+            <a:pPr algn="l"/>
+            <a:r>
+              <a:rPr sz="1200" b="0" i="0">
+                <a:solidFill>
+                  <a:srgbClr val="6B717A"/>
+                </a:solidFill>
+                <a:latin typeface="Calibri"/>
+              </a:rPr>
+              <a:t>round</a:t>
             </a:r>
           </a:p>
         </p:txBody>
@@ -57707,7 +57543,7 @@
                 </a:solidFill>
                 <a:latin typeface="Calibri"/>
               </a:rPr>
-              <a:t>Correctness</a:t>
+              <a:t>ParentCC on the example: done</a:t>
             </a:r>
           </a:p>
         </p:txBody>
@@ -57812,8 +57648,1698 @@
         </p:nvSpPr>
         <p:spPr>
           <a:xfrm>
-            <a:off x="731520" y="2148840"/>
-            <a:ext cx="3108960" cy="914400"/>
+            <a:off x="2391156" y="4791456"/>
+            <a:ext cx="1408176" cy="658368"/>
+          </a:xfrm>
+          <a:prstGeom prst="roundRect">
+            <a:avLst>
+              <a:gd name="adj" fmla="val 25000"/>
+            </a:avLst>
+          </a:prstGeom>
+          <a:solidFill>
+            <a:srgbClr val="EEF0F3"/>
+          </a:solidFill>
+          <a:ln w="19050">
+            <a:solidFill>
+              <a:srgbClr val="9AA0A8"/>
+            </a:solidFill>
+            <a:prstDash val="dash"/>
+          </a:ln>
+          <a:effectLst/>
+        </p:spPr>
+        <p:txBody>
+          <a:bodyPr rtlCol="0" anchor="ctr" lIns="54864" rIns="54864" tIns="27432" bIns="27432" wrap="square"/>
+          <a:lstStyle/>
+          <a:p>
+            <a:pPr algn="ctr"/>
+          </a:p>
+        </p:txBody>
+      </p:sp>
+      <p:sp>
+        <p:nvSpPr>
+          <p:cNvPr id="7" name="Rounded Rectangle 6"/>
+          <p:cNvSpPr/>
+          <p:nvPr/>
+        </p:nvSpPr>
+        <p:spPr>
+          <a:xfrm>
+            <a:off x="3890771" y="4791456"/>
+            <a:ext cx="1408176" cy="658368"/>
+          </a:xfrm>
+          <a:prstGeom prst="roundRect">
+            <a:avLst>
+              <a:gd name="adj" fmla="val 25000"/>
+            </a:avLst>
+          </a:prstGeom>
+          <a:solidFill>
+            <a:srgbClr val="EEF0F3"/>
+          </a:solidFill>
+          <a:ln w="19050">
+            <a:solidFill>
+              <a:srgbClr val="9AA0A8"/>
+            </a:solidFill>
+            <a:prstDash val="dash"/>
+          </a:ln>
+          <a:effectLst/>
+        </p:spPr>
+        <p:txBody>
+          <a:bodyPr rtlCol="0" anchor="ctr" lIns="54864" rIns="54864" tIns="27432" bIns="27432" wrap="square"/>
+          <a:lstStyle/>
+          <a:p>
+            <a:pPr algn="ctr"/>
+          </a:p>
+        </p:txBody>
+      </p:sp>
+      <p:sp>
+        <p:nvSpPr>
+          <p:cNvPr id="8" name="Rounded Rectangle 7"/>
+          <p:cNvSpPr/>
+          <p:nvPr/>
+        </p:nvSpPr>
+        <p:spPr>
+          <a:xfrm>
+            <a:off x="5390388" y="4791456"/>
+            <a:ext cx="1408175" cy="658368"/>
+          </a:xfrm>
+          <a:prstGeom prst="roundRect">
+            <a:avLst>
+              <a:gd name="adj" fmla="val 25000"/>
+            </a:avLst>
+          </a:prstGeom>
+          <a:solidFill>
+            <a:srgbClr val="EEF0F3"/>
+          </a:solidFill>
+          <a:ln w="19050">
+            <a:solidFill>
+              <a:srgbClr val="9AA0A8"/>
+            </a:solidFill>
+            <a:prstDash val="dash"/>
+          </a:ln>
+          <a:effectLst/>
+        </p:spPr>
+        <p:txBody>
+          <a:bodyPr rtlCol="0" anchor="ctr" lIns="54864" rIns="54864" tIns="27432" bIns="27432" wrap="square"/>
+          <a:lstStyle/>
+          <a:p>
+            <a:pPr algn="ctr"/>
+          </a:p>
+        </p:txBody>
+      </p:sp>
+      <p:sp>
+        <p:nvSpPr>
+          <p:cNvPr id="9" name="Rounded Rectangle 8"/>
+          <p:cNvSpPr/>
+          <p:nvPr/>
+        </p:nvSpPr>
+        <p:spPr>
+          <a:xfrm>
+            <a:off x="6890004" y="4791456"/>
+            <a:ext cx="1408175" cy="658368"/>
+          </a:xfrm>
+          <a:prstGeom prst="roundRect">
+            <a:avLst>
+              <a:gd name="adj" fmla="val 25000"/>
+            </a:avLst>
+          </a:prstGeom>
+          <a:solidFill>
+            <a:srgbClr val="EEF0F3"/>
+          </a:solidFill>
+          <a:ln w="19050">
+            <a:solidFill>
+              <a:srgbClr val="9AA0A8"/>
+            </a:solidFill>
+            <a:prstDash val="dash"/>
+          </a:ln>
+          <a:effectLst/>
+        </p:spPr>
+        <p:txBody>
+          <a:bodyPr rtlCol="0" anchor="ctr" lIns="54864" rIns="54864" tIns="27432" bIns="27432" wrap="square"/>
+          <a:lstStyle/>
+          <a:p>
+            <a:pPr algn="ctr"/>
+          </a:p>
+        </p:txBody>
+      </p:sp>
+      <p:sp>
+        <p:nvSpPr>
+          <p:cNvPr id="10" name="Rounded Rectangle 9"/>
+          <p:cNvSpPr/>
+          <p:nvPr/>
+        </p:nvSpPr>
+        <p:spPr>
+          <a:xfrm>
+            <a:off x="8389620" y="4791456"/>
+            <a:ext cx="1408176" cy="658368"/>
+          </a:xfrm>
+          <a:prstGeom prst="roundRect">
+            <a:avLst>
+              <a:gd name="adj" fmla="val 25000"/>
+            </a:avLst>
+          </a:prstGeom>
+          <a:solidFill>
+            <a:srgbClr val="EEF0F3"/>
+          </a:solidFill>
+          <a:ln w="19050">
+            <a:solidFill>
+              <a:srgbClr val="9AA0A8"/>
+            </a:solidFill>
+            <a:prstDash val="dash"/>
+          </a:ln>
+          <a:effectLst/>
+        </p:spPr>
+        <p:txBody>
+          <a:bodyPr rtlCol="0" anchor="ctr" lIns="54864" rIns="54864" tIns="27432" bIns="27432" wrap="square"/>
+          <a:lstStyle/>
+          <a:p>
+            <a:pPr algn="ctr"/>
+          </a:p>
+        </p:txBody>
+      </p:sp>
+      <p:sp>
+        <p:nvSpPr>
+          <p:cNvPr id="11" name="Rounded Rectangle 10"/>
+          <p:cNvSpPr/>
+          <p:nvPr/>
+        </p:nvSpPr>
+        <p:spPr>
+          <a:xfrm>
+            <a:off x="2802636" y="2843783"/>
+            <a:ext cx="2139696" cy="1078992"/>
+          </a:xfrm>
+          <a:prstGeom prst="roundRect">
+            <a:avLst>
+              <a:gd name="adj" fmla="val 25000"/>
+            </a:avLst>
+          </a:prstGeom>
+          <a:solidFill>
+            <a:srgbClr val="DCEAF8"/>
+          </a:solidFill>
+          <a:ln w="19050">
+            <a:solidFill>
+              <a:srgbClr val="2E6FB0"/>
+            </a:solidFill>
+            <a:prstDash val="dash"/>
+          </a:ln>
+          <a:effectLst/>
+        </p:spPr>
+        <p:txBody>
+          <a:bodyPr rtlCol="0" anchor="ctr" lIns="54864" rIns="54864" tIns="27432" bIns="27432" wrap="square"/>
+          <a:lstStyle/>
+          <a:p>
+            <a:pPr algn="ctr"/>
+          </a:p>
+        </p:txBody>
+      </p:sp>
+      <p:sp>
+        <p:nvSpPr>
+          <p:cNvPr id="12" name="Rounded Rectangle 11"/>
+          <p:cNvSpPr/>
+          <p:nvPr/>
+        </p:nvSpPr>
+        <p:spPr>
+          <a:xfrm>
+            <a:off x="7237475" y="2843783"/>
+            <a:ext cx="2139696" cy="1078992"/>
+          </a:xfrm>
+          <a:prstGeom prst="roundRect">
+            <a:avLst>
+              <a:gd name="adj" fmla="val 25000"/>
+            </a:avLst>
+          </a:prstGeom>
+          <a:solidFill>
+            <a:srgbClr val="DDF1E2"/>
+          </a:solidFill>
+          <a:ln w="19050">
+            <a:solidFill>
+              <a:srgbClr val="3A9A5B"/>
+            </a:solidFill>
+            <a:prstDash val="dash"/>
+          </a:ln>
+          <a:effectLst/>
+        </p:spPr>
+        <p:txBody>
+          <a:bodyPr rtlCol="0" anchor="ctr" lIns="54864" rIns="54864" tIns="27432" bIns="27432" wrap="square"/>
+          <a:lstStyle/>
+          <a:p>
+            <a:pPr algn="ctr"/>
+          </a:p>
+        </p:txBody>
+      </p:sp>
+      <p:sp>
+        <p:nvSpPr>
+          <p:cNvPr id="13" name="Rounded Rectangle 12"/>
+          <p:cNvSpPr/>
+          <p:nvPr/>
+        </p:nvSpPr>
+        <p:spPr>
+          <a:xfrm>
+            <a:off x="4704588" y="1517904"/>
+            <a:ext cx="3044952" cy="804672"/>
+          </a:xfrm>
+          <a:prstGeom prst="roundRect">
+            <a:avLst>
+              <a:gd name="adj" fmla="val 25000"/>
+            </a:avLst>
+          </a:prstGeom>
+          <a:solidFill>
+            <a:srgbClr val="FBE4D3"/>
+          </a:solidFill>
+          <a:ln w="19050">
+            <a:solidFill>
+              <a:srgbClr val="C8501E"/>
+            </a:solidFill>
+            <a:prstDash val="dash"/>
+          </a:ln>
+          <a:effectLst/>
+        </p:spPr>
+        <p:txBody>
+          <a:bodyPr rtlCol="0" anchor="ctr" lIns="54864" rIns="54864" tIns="27432" bIns="27432" wrap="square"/>
+          <a:lstStyle/>
+          <a:p>
+            <a:pPr algn="ctr"/>
+          </a:p>
+        </p:txBody>
+      </p:sp>
+      <p:cxnSp>
+        <p:nvCxnSpPr>
+          <p:cNvPr id="14" name="Connector 13"/>
+          <p:cNvCxnSpPr/>
+          <p:nvPr/>
+        </p:nvCxnSpPr>
+        <p:spPr>
+          <a:xfrm flipH="1">
+            <a:off x="2784348" y="3803903"/>
+            <a:ext cx="539496" cy="1106425"/>
+          </a:xfrm>
+          <a:prstGeom prst="line">
+            <a:avLst/>
+          </a:prstGeom>
+          <a:ln w="15875">
+            <a:solidFill>
+              <a:srgbClr val="8A8F98"/>
+            </a:solidFill>
+          </a:ln>
+          <a:effectLst/>
+        </p:spPr>
+      </p:cxnSp>
+      <p:cxnSp>
+        <p:nvCxnSpPr>
+          <p:cNvPr id="15" name="Connector 14"/>
+          <p:cNvCxnSpPr/>
+          <p:nvPr/>
+        </p:nvCxnSpPr>
+        <p:spPr>
+          <a:xfrm>
+            <a:off x="3323844" y="3803903"/>
+            <a:ext cx="960120" cy="1106425"/>
+          </a:xfrm>
+          <a:prstGeom prst="line">
+            <a:avLst/>
+          </a:prstGeom>
+          <a:ln w="15875">
+            <a:solidFill>
+              <a:srgbClr val="8A8F98"/>
+            </a:solidFill>
+          </a:ln>
+          <a:effectLst/>
+        </p:spPr>
+      </p:cxnSp>
+      <p:cxnSp>
+        <p:nvCxnSpPr>
+          <p:cNvPr id="16" name="Connector 15"/>
+          <p:cNvCxnSpPr/>
+          <p:nvPr/>
+        </p:nvCxnSpPr>
+        <p:spPr>
+          <a:xfrm flipH="1">
+            <a:off x="3406139" y="3803903"/>
+            <a:ext cx="1014985" cy="1106425"/>
+          </a:xfrm>
+          <a:prstGeom prst="line">
+            <a:avLst/>
+          </a:prstGeom>
+          <a:ln w="15875">
+            <a:solidFill>
+              <a:srgbClr val="8A8F98"/>
+            </a:solidFill>
+          </a:ln>
+          <a:effectLst/>
+        </p:spPr>
+      </p:cxnSp>
+      <p:cxnSp>
+        <p:nvCxnSpPr>
+          <p:cNvPr id="17" name="Connector 16"/>
+          <p:cNvCxnSpPr/>
+          <p:nvPr/>
+        </p:nvCxnSpPr>
+        <p:spPr>
+          <a:xfrm>
+            <a:off x="4421124" y="3803903"/>
+            <a:ext cx="484632" cy="1106425"/>
+          </a:xfrm>
+          <a:prstGeom prst="line">
+            <a:avLst/>
+          </a:prstGeom>
+          <a:ln w="15875">
+            <a:solidFill>
+              <a:srgbClr val="8A8F98"/>
+            </a:solidFill>
+          </a:ln>
+          <a:effectLst/>
+        </p:spPr>
+      </p:cxnSp>
+      <p:cxnSp>
+        <p:nvCxnSpPr>
+          <p:cNvPr id="18" name="Connector 17"/>
+          <p:cNvCxnSpPr/>
+          <p:nvPr/>
+        </p:nvCxnSpPr>
+        <p:spPr>
+          <a:xfrm flipH="1">
+            <a:off x="7283196" y="3803903"/>
+            <a:ext cx="475487" cy="1106425"/>
+          </a:xfrm>
+          <a:prstGeom prst="line">
+            <a:avLst/>
+          </a:prstGeom>
+          <a:ln w="15875">
+            <a:solidFill>
+              <a:srgbClr val="8A8F98"/>
+            </a:solidFill>
+          </a:ln>
+          <a:effectLst/>
+        </p:spPr>
+      </p:cxnSp>
+      <p:cxnSp>
+        <p:nvCxnSpPr>
+          <p:cNvPr id="19" name="Connector 18"/>
+          <p:cNvCxnSpPr/>
+          <p:nvPr/>
+        </p:nvCxnSpPr>
+        <p:spPr>
+          <a:xfrm>
+            <a:off x="7758683" y="3803903"/>
+            <a:ext cx="1024129" cy="1106425"/>
+          </a:xfrm>
+          <a:prstGeom prst="line">
+            <a:avLst/>
+          </a:prstGeom>
+          <a:ln w="15875">
+            <a:solidFill>
+              <a:srgbClr val="8A8F98"/>
+            </a:solidFill>
+          </a:ln>
+          <a:effectLst/>
+        </p:spPr>
+      </p:cxnSp>
+      <p:cxnSp>
+        <p:nvCxnSpPr>
+          <p:cNvPr id="20" name="Connector 19"/>
+          <p:cNvCxnSpPr/>
+          <p:nvPr/>
+        </p:nvCxnSpPr>
+        <p:spPr>
+          <a:xfrm flipH="1">
+            <a:off x="7904988" y="3803903"/>
+            <a:ext cx="950975" cy="1106425"/>
+          </a:xfrm>
+          <a:prstGeom prst="line">
+            <a:avLst/>
+          </a:prstGeom>
+          <a:ln w="15875">
+            <a:solidFill>
+              <a:srgbClr val="8A8F98"/>
+            </a:solidFill>
+          </a:ln>
+          <a:effectLst/>
+        </p:spPr>
+      </p:cxnSp>
+      <p:cxnSp>
+        <p:nvCxnSpPr>
+          <p:cNvPr id="21" name="Connector 20"/>
+          <p:cNvCxnSpPr/>
+          <p:nvPr/>
+        </p:nvCxnSpPr>
+        <p:spPr>
+          <a:xfrm>
+            <a:off x="8855963" y="3803903"/>
+            <a:ext cx="548641" cy="1106425"/>
+          </a:xfrm>
+          <a:prstGeom prst="line">
+            <a:avLst/>
+          </a:prstGeom>
+          <a:ln w="15875">
+            <a:solidFill>
+              <a:srgbClr val="8A8F98"/>
+            </a:solidFill>
+          </a:ln>
+          <a:effectLst/>
+        </p:spPr>
+      </p:cxnSp>
+      <p:cxnSp>
+        <p:nvCxnSpPr>
+          <p:cNvPr id="22" name="Connector 21"/>
+          <p:cNvCxnSpPr/>
+          <p:nvPr/>
+        </p:nvCxnSpPr>
+        <p:spPr>
+          <a:xfrm>
+            <a:off x="5564124" y="2203704"/>
+            <a:ext cx="219455" cy="2706624"/>
+          </a:xfrm>
+          <a:prstGeom prst="line">
+            <a:avLst/>
+          </a:prstGeom>
+          <a:ln w="15875">
+            <a:solidFill>
+              <a:srgbClr val="8A8F98"/>
+            </a:solidFill>
+          </a:ln>
+          <a:effectLst/>
+        </p:spPr>
+      </p:cxnSp>
+      <p:cxnSp>
+        <p:nvCxnSpPr>
+          <p:cNvPr id="23" name="Connector 22"/>
+          <p:cNvCxnSpPr/>
+          <p:nvPr/>
+        </p:nvCxnSpPr>
+        <p:spPr>
+          <a:xfrm flipH="1">
+            <a:off x="3323844" y="2203704"/>
+            <a:ext cx="2240280" cy="749807"/>
+          </a:xfrm>
+          <a:prstGeom prst="line">
+            <a:avLst/>
+          </a:prstGeom>
+          <a:ln w="15875">
+            <a:solidFill>
+              <a:srgbClr val="8A8F98"/>
+            </a:solidFill>
+          </a:ln>
+          <a:effectLst/>
+        </p:spPr>
+      </p:cxnSp>
+      <p:cxnSp>
+        <p:nvCxnSpPr>
+          <p:cNvPr id="24" name="Connector 23"/>
+          <p:cNvCxnSpPr/>
+          <p:nvPr/>
+        </p:nvCxnSpPr>
+        <p:spPr>
+          <a:xfrm>
+            <a:off x="5564124" y="2203704"/>
+            <a:ext cx="2194559" cy="749807"/>
+          </a:xfrm>
+          <a:prstGeom prst="line">
+            <a:avLst/>
+          </a:prstGeom>
+          <a:ln w="15875">
+            <a:solidFill>
+              <a:srgbClr val="8A8F98"/>
+            </a:solidFill>
+          </a:ln>
+          <a:effectLst/>
+        </p:spPr>
+      </p:cxnSp>
+      <p:cxnSp>
+        <p:nvCxnSpPr>
+          <p:cNvPr id="25" name="Connector 24"/>
+          <p:cNvCxnSpPr/>
+          <p:nvPr/>
+        </p:nvCxnSpPr>
+        <p:spPr>
+          <a:xfrm flipH="1">
+            <a:off x="6405372" y="2203704"/>
+            <a:ext cx="484632" cy="2706624"/>
+          </a:xfrm>
+          <a:prstGeom prst="line">
+            <a:avLst/>
+          </a:prstGeom>
+          <a:ln w="15875">
+            <a:solidFill>
+              <a:srgbClr val="8A8F98"/>
+            </a:solidFill>
+          </a:ln>
+          <a:effectLst/>
+        </p:spPr>
+      </p:cxnSp>
+      <p:cxnSp>
+        <p:nvCxnSpPr>
+          <p:cNvPr id="26" name="Connector 25"/>
+          <p:cNvCxnSpPr/>
+          <p:nvPr/>
+        </p:nvCxnSpPr>
+        <p:spPr>
+          <a:xfrm flipH="1">
+            <a:off x="4421124" y="2203704"/>
+            <a:ext cx="2468880" cy="749807"/>
+          </a:xfrm>
+          <a:prstGeom prst="line">
+            <a:avLst/>
+          </a:prstGeom>
+          <a:ln w="15875">
+            <a:solidFill>
+              <a:srgbClr val="8A8F98"/>
+            </a:solidFill>
+          </a:ln>
+          <a:effectLst/>
+        </p:spPr>
+      </p:cxnSp>
+      <p:cxnSp>
+        <p:nvCxnSpPr>
+          <p:cNvPr id="27" name="Connector 26"/>
+          <p:cNvCxnSpPr/>
+          <p:nvPr/>
+        </p:nvCxnSpPr>
+        <p:spPr>
+          <a:xfrm>
+            <a:off x="6890004" y="2203704"/>
+            <a:ext cx="1965959" cy="749807"/>
+          </a:xfrm>
+          <a:prstGeom prst="line">
+            <a:avLst/>
+          </a:prstGeom>
+          <a:ln w="15875">
+            <a:solidFill>
+              <a:srgbClr val="8A8F98"/>
+            </a:solidFill>
+          </a:ln>
+          <a:effectLst/>
+        </p:spPr>
+      </p:cxnSp>
+      <p:sp>
+        <p:nvSpPr>
+          <p:cNvPr id="28" name="Rounded Rectangle 27"/>
+          <p:cNvSpPr/>
+          <p:nvPr/>
+        </p:nvSpPr>
+        <p:spPr>
+          <a:xfrm>
+            <a:off x="2510028" y="4910327"/>
+            <a:ext cx="548640" cy="420624"/>
+          </a:xfrm>
+          <a:prstGeom prst="roundRect">
+            <a:avLst>
+              <a:gd name="adj" fmla="val 20000"/>
+            </a:avLst>
+          </a:prstGeom>
+          <a:solidFill>
+            <a:srgbClr val="FFFFFF"/>
+          </a:solidFill>
+          <a:ln w="12700">
+            <a:solidFill>
+              <a:srgbClr val="4A4F57"/>
+            </a:solidFill>
+          </a:ln>
+          <a:effectLst/>
+        </p:spPr>
+        <p:txBody>
+          <a:bodyPr rtlCol="0" anchor="ctr" lIns="54864" rIns="54864" tIns="0" bIns="0" wrap="square"/>
+          <a:lstStyle/>
+          <a:p>
+            <a:pPr algn="ctr"/>
+            <a:r>
+              <a:rPr sz="1400" b="1" i="0">
+                <a:solidFill>
+                  <a:srgbClr val="2B2F36"/>
+                </a:solidFill>
+                <a:latin typeface="Calibri"/>
+              </a:rPr>
+              <a:t>r</a:t>
+            </a:r>
+          </a:p>
+        </p:txBody>
+      </p:sp>
+      <p:sp>
+        <p:nvSpPr>
+          <p:cNvPr id="29" name="Rounded Rectangle 28"/>
+          <p:cNvSpPr/>
+          <p:nvPr/>
+        </p:nvSpPr>
+        <p:spPr>
+          <a:xfrm>
+            <a:off x="3131820" y="4910327"/>
+            <a:ext cx="548640" cy="420624"/>
+          </a:xfrm>
+          <a:prstGeom prst="roundRect">
+            <a:avLst>
+              <a:gd name="adj" fmla="val 20000"/>
+            </a:avLst>
+          </a:prstGeom>
+          <a:solidFill>
+            <a:srgbClr val="FFFFFF"/>
+          </a:solidFill>
+          <a:ln w="12700">
+            <a:solidFill>
+              <a:srgbClr val="4A4F57"/>
+            </a:solidFill>
+          </a:ln>
+          <a:effectLst/>
+        </p:spPr>
+        <p:txBody>
+          <a:bodyPr rtlCol="0" anchor="ctr" lIns="54864" rIns="54864" tIns="0" bIns="0" wrap="square"/>
+          <a:lstStyle/>
+          <a:p>
+            <a:pPr algn="ctr"/>
+            <a:r>
+              <a:rPr sz="1400" b="1" i="0">
+                <a:solidFill>
+                  <a:srgbClr val="2B2F36"/>
+                </a:solidFill>
+                <a:latin typeface="Calibri"/>
+              </a:rPr>
+              <a:t>r′</a:t>
+            </a:r>
+          </a:p>
+        </p:txBody>
+      </p:sp>
+      <p:sp>
+        <p:nvSpPr>
+          <p:cNvPr id="30" name="Rounded Rectangle 29"/>
+          <p:cNvSpPr/>
+          <p:nvPr/>
+        </p:nvSpPr>
+        <p:spPr>
+          <a:xfrm>
+            <a:off x="4009644" y="4910327"/>
+            <a:ext cx="548640" cy="420624"/>
+          </a:xfrm>
+          <a:prstGeom prst="roundRect">
+            <a:avLst>
+              <a:gd name="adj" fmla="val 20000"/>
+            </a:avLst>
+          </a:prstGeom>
+          <a:solidFill>
+            <a:srgbClr val="FFFFFF"/>
+          </a:solidFill>
+          <a:ln w="12700">
+            <a:solidFill>
+              <a:srgbClr val="4A4F57"/>
+            </a:solidFill>
+          </a:ln>
+          <a:effectLst/>
+        </p:spPr>
+        <p:txBody>
+          <a:bodyPr rtlCol="0" anchor="ctr" lIns="54864" rIns="54864" tIns="0" bIns="0" wrap="square"/>
+          <a:lstStyle/>
+          <a:p>
+            <a:pPr algn="ctr"/>
+            <a:r>
+              <a:rPr sz="1400" b="1" i="0">
+                <a:solidFill>
+                  <a:srgbClr val="2B2F36"/>
+                </a:solidFill>
+                <a:latin typeface="Calibri"/>
+              </a:rPr>
+              <a:t>s</a:t>
+            </a:r>
+          </a:p>
+        </p:txBody>
+      </p:sp>
+      <p:sp>
+        <p:nvSpPr>
+          <p:cNvPr id="31" name="Rounded Rectangle 30"/>
+          <p:cNvSpPr/>
+          <p:nvPr/>
+        </p:nvSpPr>
+        <p:spPr>
+          <a:xfrm>
+            <a:off x="4631436" y="4910327"/>
+            <a:ext cx="548640" cy="420624"/>
+          </a:xfrm>
+          <a:prstGeom prst="roundRect">
+            <a:avLst>
+              <a:gd name="adj" fmla="val 20000"/>
+            </a:avLst>
+          </a:prstGeom>
+          <a:solidFill>
+            <a:srgbClr val="FFFFFF"/>
+          </a:solidFill>
+          <a:ln w="12700">
+            <a:solidFill>
+              <a:srgbClr val="4A4F57"/>
+            </a:solidFill>
+          </a:ln>
+          <a:effectLst/>
+        </p:spPr>
+        <p:txBody>
+          <a:bodyPr rtlCol="0" anchor="ctr" lIns="54864" rIns="54864" tIns="0" bIns="0" wrap="square"/>
+          <a:lstStyle/>
+          <a:p>
+            <a:pPr algn="ctr"/>
+            <a:r>
+              <a:rPr sz="1400" b="1" i="0">
+                <a:solidFill>
+                  <a:srgbClr val="2B2F36"/>
+                </a:solidFill>
+                <a:latin typeface="Calibri"/>
+              </a:rPr>
+              <a:t>s′</a:t>
+            </a:r>
+          </a:p>
+        </p:txBody>
+      </p:sp>
+      <p:sp>
+        <p:nvSpPr>
+          <p:cNvPr id="32" name="Rounded Rectangle 31"/>
+          <p:cNvSpPr/>
+          <p:nvPr/>
+        </p:nvSpPr>
+        <p:spPr>
+          <a:xfrm>
+            <a:off x="5509259" y="4910327"/>
+            <a:ext cx="548640" cy="420624"/>
+          </a:xfrm>
+          <a:prstGeom prst="roundRect">
+            <a:avLst>
+              <a:gd name="adj" fmla="val 20000"/>
+            </a:avLst>
+          </a:prstGeom>
+          <a:solidFill>
+            <a:srgbClr val="FFFFFF"/>
+          </a:solidFill>
+          <a:ln w="12700">
+            <a:solidFill>
+              <a:srgbClr val="4A4F57"/>
+            </a:solidFill>
+          </a:ln>
+          <a:effectLst/>
+        </p:spPr>
+        <p:txBody>
+          <a:bodyPr rtlCol="0" anchor="ctr" lIns="54864" rIns="54864" tIns="0" bIns="0" wrap="square"/>
+          <a:lstStyle/>
+          <a:p>
+            <a:pPr algn="ctr"/>
+            <a:r>
+              <a:rPr sz="1400" b="1" i="0">
+                <a:solidFill>
+                  <a:srgbClr val="2B2F36"/>
+                </a:solidFill>
+                <a:latin typeface="Calibri"/>
+              </a:rPr>
+              <a:t>c</a:t>
+            </a:r>
+          </a:p>
+        </p:txBody>
+      </p:sp>
+      <p:sp>
+        <p:nvSpPr>
+          <p:cNvPr id="33" name="Rounded Rectangle 32"/>
+          <p:cNvSpPr/>
+          <p:nvPr/>
+        </p:nvSpPr>
+        <p:spPr>
+          <a:xfrm>
+            <a:off x="6131052" y="4910327"/>
+            <a:ext cx="548640" cy="420624"/>
+          </a:xfrm>
+          <a:prstGeom prst="roundRect">
+            <a:avLst>
+              <a:gd name="adj" fmla="val 20000"/>
+            </a:avLst>
+          </a:prstGeom>
+          <a:solidFill>
+            <a:srgbClr val="FFFFFF"/>
+          </a:solidFill>
+          <a:ln w="12700">
+            <a:solidFill>
+              <a:srgbClr val="4A4F57"/>
+            </a:solidFill>
+          </a:ln>
+          <a:effectLst/>
+        </p:spPr>
+        <p:txBody>
+          <a:bodyPr rtlCol="0" anchor="ctr" lIns="54864" rIns="54864" tIns="0" bIns="0" wrap="square"/>
+          <a:lstStyle/>
+          <a:p>
+            <a:pPr algn="ctr"/>
+            <a:r>
+              <a:rPr sz="1400" b="1" i="0">
+                <a:solidFill>
+                  <a:srgbClr val="2B2F36"/>
+                </a:solidFill>
+                <a:latin typeface="Calibri"/>
+              </a:rPr>
+              <a:t>c′</a:t>
+            </a:r>
+          </a:p>
+        </p:txBody>
+      </p:sp>
+      <p:sp>
+        <p:nvSpPr>
+          <p:cNvPr id="34" name="Rounded Rectangle 33"/>
+          <p:cNvSpPr/>
+          <p:nvPr/>
+        </p:nvSpPr>
+        <p:spPr>
+          <a:xfrm>
+            <a:off x="7008876" y="4910327"/>
+            <a:ext cx="548640" cy="420624"/>
+          </a:xfrm>
+          <a:prstGeom prst="roundRect">
+            <a:avLst>
+              <a:gd name="adj" fmla="val 20000"/>
+            </a:avLst>
+          </a:prstGeom>
+          <a:solidFill>
+            <a:srgbClr val="FFFFFF"/>
+          </a:solidFill>
+          <a:ln w="12700">
+            <a:solidFill>
+              <a:srgbClr val="4A4F57"/>
+            </a:solidFill>
+          </a:ln>
+          <a:effectLst/>
+        </p:spPr>
+        <p:txBody>
+          <a:bodyPr rtlCol="0" anchor="ctr" lIns="54864" rIns="54864" tIns="0" bIns="0" wrap="square"/>
+          <a:lstStyle/>
+          <a:p>
+            <a:pPr algn="ctr"/>
+            <a:r>
+              <a:rPr sz="1400" b="1" i="0">
+                <a:solidFill>
+                  <a:srgbClr val="2B2F36"/>
+                </a:solidFill>
+                <a:latin typeface="Calibri"/>
+              </a:rPr>
+              <a:t>u</a:t>
+            </a:r>
+          </a:p>
+        </p:txBody>
+      </p:sp>
+      <p:sp>
+        <p:nvSpPr>
+          <p:cNvPr id="35" name="Rounded Rectangle 34"/>
+          <p:cNvSpPr/>
+          <p:nvPr/>
+        </p:nvSpPr>
+        <p:spPr>
+          <a:xfrm>
+            <a:off x="7630667" y="4910327"/>
+            <a:ext cx="548640" cy="420624"/>
+          </a:xfrm>
+          <a:prstGeom prst="roundRect">
+            <a:avLst>
+              <a:gd name="adj" fmla="val 20000"/>
+            </a:avLst>
+          </a:prstGeom>
+          <a:solidFill>
+            <a:srgbClr val="FFFFFF"/>
+          </a:solidFill>
+          <a:ln w="12700">
+            <a:solidFill>
+              <a:srgbClr val="4A4F57"/>
+            </a:solidFill>
+          </a:ln>
+          <a:effectLst/>
+        </p:spPr>
+        <p:txBody>
+          <a:bodyPr rtlCol="0" anchor="ctr" lIns="54864" rIns="54864" tIns="0" bIns="0" wrap="square"/>
+          <a:lstStyle/>
+          <a:p>
+            <a:pPr algn="ctr"/>
+            <a:r>
+              <a:rPr sz="1400" b="1" i="0">
+                <a:solidFill>
+                  <a:srgbClr val="2B2F36"/>
+                </a:solidFill>
+                <a:latin typeface="Calibri"/>
+              </a:rPr>
+              <a:t>u′</a:t>
+            </a:r>
+          </a:p>
+        </p:txBody>
+      </p:sp>
+      <p:sp>
+        <p:nvSpPr>
+          <p:cNvPr id="36" name="Rounded Rectangle 35"/>
+          <p:cNvSpPr/>
+          <p:nvPr/>
+        </p:nvSpPr>
+        <p:spPr>
+          <a:xfrm>
+            <a:off x="8508492" y="4910327"/>
+            <a:ext cx="548640" cy="420624"/>
+          </a:xfrm>
+          <a:prstGeom prst="roundRect">
+            <a:avLst>
+              <a:gd name="adj" fmla="val 20000"/>
+            </a:avLst>
+          </a:prstGeom>
+          <a:solidFill>
+            <a:srgbClr val="FFFFFF"/>
+          </a:solidFill>
+          <a:ln w="12700">
+            <a:solidFill>
+              <a:srgbClr val="4A4F57"/>
+            </a:solidFill>
+          </a:ln>
+          <a:effectLst/>
+        </p:spPr>
+        <p:txBody>
+          <a:bodyPr rtlCol="0" anchor="ctr" lIns="54864" rIns="54864" tIns="0" bIns="0" wrap="square"/>
+          <a:lstStyle/>
+          <a:p>
+            <a:pPr algn="ctr"/>
+            <a:r>
+              <a:rPr sz="1400" b="1" i="0">
+                <a:solidFill>
+                  <a:srgbClr val="2B2F36"/>
+                </a:solidFill>
+                <a:latin typeface="Calibri"/>
+              </a:rPr>
+              <a:t>v</a:t>
+            </a:r>
+          </a:p>
+        </p:txBody>
+      </p:sp>
+      <p:sp>
+        <p:nvSpPr>
+          <p:cNvPr id="37" name="Rounded Rectangle 36"/>
+          <p:cNvSpPr/>
+          <p:nvPr/>
+        </p:nvSpPr>
+        <p:spPr>
+          <a:xfrm>
+            <a:off x="9130284" y="4910327"/>
+            <a:ext cx="548640" cy="420624"/>
+          </a:xfrm>
+          <a:prstGeom prst="roundRect">
+            <a:avLst>
+              <a:gd name="adj" fmla="val 20000"/>
+            </a:avLst>
+          </a:prstGeom>
+          <a:solidFill>
+            <a:srgbClr val="FFFFFF"/>
+          </a:solidFill>
+          <a:ln w="12700">
+            <a:solidFill>
+              <a:srgbClr val="4A4F57"/>
+            </a:solidFill>
+          </a:ln>
+          <a:effectLst/>
+        </p:spPr>
+        <p:txBody>
+          <a:bodyPr rtlCol="0" anchor="ctr" lIns="54864" rIns="54864" tIns="0" bIns="0" wrap="square"/>
+          <a:lstStyle/>
+          <a:p>
+            <a:pPr algn="ctr"/>
+            <a:r>
+              <a:rPr sz="1400" b="1" i="0">
+                <a:solidFill>
+                  <a:srgbClr val="2B2F36"/>
+                </a:solidFill>
+                <a:latin typeface="Calibri"/>
+              </a:rPr>
+              <a:t>v′</a:t>
+            </a:r>
+          </a:p>
+        </p:txBody>
+      </p:sp>
+      <p:sp>
+        <p:nvSpPr>
+          <p:cNvPr id="38" name="Rounded Rectangle 37"/>
+          <p:cNvSpPr/>
+          <p:nvPr/>
+        </p:nvSpPr>
+        <p:spPr>
+          <a:xfrm>
+            <a:off x="2921508" y="3236975"/>
+            <a:ext cx="804672" cy="566928"/>
+          </a:xfrm>
+          <a:prstGeom prst="roundRect">
+            <a:avLst>
+              <a:gd name="adj" fmla="val 20000"/>
+            </a:avLst>
+          </a:prstGeom>
+          <a:solidFill>
+            <a:srgbClr val="FFFFFF"/>
+          </a:solidFill>
+          <a:ln w="12700">
+            <a:solidFill>
+              <a:srgbClr val="4A4F57"/>
+            </a:solidFill>
+          </a:ln>
+          <a:effectLst/>
+        </p:spPr>
+        <p:txBody>
+          <a:bodyPr rtlCol="0" anchor="ctr" lIns="54864" rIns="54864" tIns="0" bIns="0" wrap="square"/>
+          <a:lstStyle/>
+          <a:p>
+            <a:pPr algn="ctr"/>
+            <a:r>
+              <a:rPr sz="1600" b="1" i="0">
+                <a:solidFill>
+                  <a:srgbClr val="2B2F36"/>
+                </a:solidFill>
+                <a:latin typeface="Calibri"/>
+              </a:rPr>
+              <a:t>AND</a:t>
+            </a:r>
+          </a:p>
+        </p:txBody>
+      </p:sp>
+      <p:sp>
+        <p:nvSpPr>
+          <p:cNvPr id="39" name="TextBox 38"/>
+          <p:cNvSpPr txBox="1"/>
+          <p:nvPr/>
+        </p:nvSpPr>
+        <p:spPr>
+          <a:xfrm>
+            <a:off x="2912363" y="2971799"/>
+            <a:ext cx="822960" cy="256032"/>
+          </a:xfrm>
+          <a:prstGeom prst="rect">
+            <a:avLst/>
+          </a:prstGeom>
+          <a:noFill/>
+        </p:spPr>
+        <p:txBody>
+          <a:bodyPr wrap="square" anchor="ctr" lIns="45720" rIns="45720" tIns="27432" bIns="27432">
+            <a:spAutoFit/>
+          </a:bodyPr>
+          <a:lstStyle/>
+          <a:p>
+            <a:pPr algn="ctr"/>
+            <a:r>
+              <a:rPr sz="1300" b="1" i="0">
+                <a:solidFill>
+                  <a:srgbClr val="2B2F36"/>
+                </a:solidFill>
+                <a:latin typeface="Calibri"/>
+              </a:rPr>
+              <a:t>a₁</a:t>
+            </a:r>
+          </a:p>
+        </p:txBody>
+      </p:sp>
+      <p:sp>
+        <p:nvSpPr>
+          <p:cNvPr id="40" name="Rounded Rectangle 39"/>
+          <p:cNvSpPr/>
+          <p:nvPr/>
+        </p:nvSpPr>
+        <p:spPr>
+          <a:xfrm>
+            <a:off x="4018787" y="3236975"/>
+            <a:ext cx="804672" cy="566928"/>
+          </a:xfrm>
+          <a:prstGeom prst="roundRect">
+            <a:avLst>
+              <a:gd name="adj" fmla="val 20000"/>
+            </a:avLst>
+          </a:prstGeom>
+          <a:solidFill>
+            <a:srgbClr val="FFFFFF"/>
+          </a:solidFill>
+          <a:ln w="12700">
+            <a:solidFill>
+              <a:srgbClr val="4A4F57"/>
+            </a:solidFill>
+          </a:ln>
+          <a:effectLst/>
+        </p:spPr>
+        <p:txBody>
+          <a:bodyPr rtlCol="0" anchor="ctr" lIns="54864" rIns="54864" tIns="0" bIns="0" wrap="square"/>
+          <a:lstStyle/>
+          <a:p>
+            <a:pPr algn="ctr"/>
+            <a:r>
+              <a:rPr sz="1600" b="1" i="0">
+                <a:solidFill>
+                  <a:srgbClr val="2B2F36"/>
+                </a:solidFill>
+                <a:latin typeface="Calibri"/>
+              </a:rPr>
+              <a:t>AND</a:t>
+            </a:r>
+          </a:p>
+        </p:txBody>
+      </p:sp>
+      <p:sp>
+        <p:nvSpPr>
+          <p:cNvPr id="41" name="TextBox 40"/>
+          <p:cNvSpPr txBox="1"/>
+          <p:nvPr/>
+        </p:nvSpPr>
+        <p:spPr>
+          <a:xfrm>
+            <a:off x="4009644" y="2971799"/>
+            <a:ext cx="822960" cy="256032"/>
+          </a:xfrm>
+          <a:prstGeom prst="rect">
+            <a:avLst/>
+          </a:prstGeom>
+          <a:noFill/>
+        </p:spPr>
+        <p:txBody>
+          <a:bodyPr wrap="square" anchor="ctr" lIns="45720" rIns="45720" tIns="27432" bIns="27432">
+            <a:spAutoFit/>
+          </a:bodyPr>
+          <a:lstStyle/>
+          <a:p>
+            <a:pPr algn="ctr"/>
+            <a:r>
+              <a:rPr sz="1300" b="1" i="0">
+                <a:solidFill>
+                  <a:srgbClr val="2B2F36"/>
+                </a:solidFill>
+                <a:latin typeface="Calibri"/>
+              </a:rPr>
+              <a:t>a₂</a:t>
+            </a:r>
+          </a:p>
+        </p:txBody>
+      </p:sp>
+      <p:sp>
+        <p:nvSpPr>
+          <p:cNvPr id="42" name="Rounded Rectangle 41"/>
+          <p:cNvSpPr/>
+          <p:nvPr/>
+        </p:nvSpPr>
+        <p:spPr>
+          <a:xfrm>
+            <a:off x="7356348" y="3236975"/>
+            <a:ext cx="804672" cy="566928"/>
+          </a:xfrm>
+          <a:prstGeom prst="roundRect">
+            <a:avLst>
+              <a:gd name="adj" fmla="val 20000"/>
+            </a:avLst>
+          </a:prstGeom>
+          <a:solidFill>
+            <a:srgbClr val="FFFFFF"/>
+          </a:solidFill>
+          <a:ln w="12700">
+            <a:solidFill>
+              <a:srgbClr val="4A4F57"/>
+            </a:solidFill>
+          </a:ln>
+          <a:effectLst/>
+        </p:spPr>
+        <p:txBody>
+          <a:bodyPr rtlCol="0" anchor="ctr" lIns="54864" rIns="54864" tIns="0" bIns="0" wrap="square"/>
+          <a:lstStyle/>
+          <a:p>
+            <a:pPr algn="ctr"/>
+            <a:r>
+              <a:rPr sz="1600" b="1" i="0">
+                <a:solidFill>
+                  <a:srgbClr val="2B2F36"/>
+                </a:solidFill>
+                <a:latin typeface="Calibri"/>
+              </a:rPr>
+              <a:t>XOR</a:t>
+            </a:r>
+          </a:p>
+        </p:txBody>
+      </p:sp>
+      <p:sp>
+        <p:nvSpPr>
+          <p:cNvPr id="43" name="TextBox 42"/>
+          <p:cNvSpPr txBox="1"/>
+          <p:nvPr/>
+        </p:nvSpPr>
+        <p:spPr>
+          <a:xfrm>
+            <a:off x="7347204" y="2971799"/>
+            <a:ext cx="822960" cy="256032"/>
+          </a:xfrm>
+          <a:prstGeom prst="rect">
+            <a:avLst/>
+          </a:prstGeom>
+          <a:noFill/>
+        </p:spPr>
+        <p:txBody>
+          <a:bodyPr wrap="square" anchor="ctr" lIns="45720" rIns="45720" tIns="27432" bIns="27432">
+            <a:spAutoFit/>
+          </a:bodyPr>
+          <a:lstStyle/>
+          <a:p>
+            <a:pPr algn="ctr"/>
+            <a:r>
+              <a:rPr sz="1300" b="1" i="0">
+                <a:solidFill>
+                  <a:srgbClr val="2B2F36"/>
+                </a:solidFill>
+                <a:latin typeface="Calibri"/>
+              </a:rPr>
+              <a:t>x₁</a:t>
+            </a:r>
+          </a:p>
+        </p:txBody>
+      </p:sp>
+      <p:sp>
+        <p:nvSpPr>
+          <p:cNvPr id="44" name="Rounded Rectangle 43"/>
+          <p:cNvSpPr/>
+          <p:nvPr/>
+        </p:nvSpPr>
+        <p:spPr>
+          <a:xfrm>
+            <a:off x="8453628" y="3236975"/>
+            <a:ext cx="804672" cy="566928"/>
+          </a:xfrm>
+          <a:prstGeom prst="roundRect">
+            <a:avLst>
+              <a:gd name="adj" fmla="val 20000"/>
+            </a:avLst>
+          </a:prstGeom>
+          <a:solidFill>
+            <a:srgbClr val="FFFFFF"/>
+          </a:solidFill>
+          <a:ln w="12700">
+            <a:solidFill>
+              <a:srgbClr val="4A4F57"/>
+            </a:solidFill>
+          </a:ln>
+          <a:effectLst/>
+        </p:spPr>
+        <p:txBody>
+          <a:bodyPr rtlCol="0" anchor="ctr" lIns="54864" rIns="54864" tIns="0" bIns="0" wrap="square"/>
+          <a:lstStyle/>
+          <a:p>
+            <a:pPr algn="ctr"/>
+            <a:r>
+              <a:rPr sz="1600" b="1" i="0">
+                <a:solidFill>
+                  <a:srgbClr val="2B2F36"/>
+                </a:solidFill>
+                <a:latin typeface="Calibri"/>
+              </a:rPr>
+              <a:t>XOR</a:t>
+            </a:r>
+          </a:p>
+        </p:txBody>
+      </p:sp>
+      <p:sp>
+        <p:nvSpPr>
+          <p:cNvPr id="45" name="TextBox 44"/>
+          <p:cNvSpPr txBox="1"/>
+          <p:nvPr/>
+        </p:nvSpPr>
+        <p:spPr>
+          <a:xfrm>
+            <a:off x="8444484" y="2971799"/>
+            <a:ext cx="822960" cy="256032"/>
+          </a:xfrm>
+          <a:prstGeom prst="rect">
+            <a:avLst/>
+          </a:prstGeom>
+          <a:noFill/>
+        </p:spPr>
+        <p:txBody>
+          <a:bodyPr wrap="square" anchor="ctr" lIns="45720" rIns="45720" tIns="27432" bIns="27432">
+            <a:spAutoFit/>
+          </a:bodyPr>
+          <a:lstStyle/>
+          <a:p>
+            <a:pPr algn="ctr"/>
+            <a:r>
+              <a:rPr sz="1300" b="1" i="0">
+                <a:solidFill>
+                  <a:srgbClr val="2B2F36"/>
+                </a:solidFill>
+                <a:latin typeface="Calibri"/>
+              </a:rPr>
+              <a:t>x₂</a:t>
+            </a:r>
+          </a:p>
+        </p:txBody>
+      </p:sp>
+      <p:sp>
+        <p:nvSpPr>
+          <p:cNvPr id="46" name="Rounded Rectangle 45"/>
+          <p:cNvSpPr/>
+          <p:nvPr/>
+        </p:nvSpPr>
+        <p:spPr>
+          <a:xfrm>
+            <a:off x="5161788" y="1636776"/>
+            <a:ext cx="804672" cy="566928"/>
+          </a:xfrm>
+          <a:prstGeom prst="roundRect">
+            <a:avLst>
+              <a:gd name="adj" fmla="val 20000"/>
+            </a:avLst>
+          </a:prstGeom>
+          <a:solidFill>
+            <a:srgbClr val="FFFFFF"/>
+          </a:solidFill>
+          <a:ln w="12700">
+            <a:solidFill>
+              <a:srgbClr val="4A4F57"/>
+            </a:solidFill>
+          </a:ln>
+          <a:effectLst/>
+        </p:spPr>
+        <p:txBody>
+          <a:bodyPr rtlCol="0" anchor="ctr" lIns="54864" rIns="54864" tIns="0" bIns="0" wrap="square"/>
+          <a:lstStyle/>
+          <a:p>
+            <a:pPr algn="ctr"/>
+            <a:r>
+              <a:rPr sz="1600" b="1" i="0">
+                <a:solidFill>
+                  <a:srgbClr val="2B2F36"/>
+                </a:solidFill>
+                <a:latin typeface="Calibri"/>
+              </a:rPr>
+              <a:t>ITE</a:t>
+            </a:r>
+          </a:p>
+        </p:txBody>
+      </p:sp>
+      <p:sp>
+        <p:nvSpPr>
+          <p:cNvPr id="47" name="TextBox 46"/>
+          <p:cNvSpPr txBox="1"/>
+          <p:nvPr/>
+        </p:nvSpPr>
+        <p:spPr>
+          <a:xfrm>
+            <a:off x="4832603" y="1783080"/>
+            <a:ext cx="320040" cy="274320"/>
+          </a:xfrm>
+          <a:prstGeom prst="rect">
+            <a:avLst/>
+          </a:prstGeom>
+          <a:noFill/>
+        </p:spPr>
+        <p:txBody>
+          <a:bodyPr wrap="square" anchor="ctr" lIns="45720" rIns="45720" tIns="27432" bIns="27432">
+            <a:spAutoFit/>
+          </a:bodyPr>
+          <a:lstStyle/>
+          <a:p>
+            <a:pPr algn="r"/>
+            <a:r>
+              <a:rPr sz="1300" b="1" i="0">
+                <a:solidFill>
+                  <a:srgbClr val="2B2F36"/>
+                </a:solidFill>
+                <a:latin typeface="Calibri"/>
+              </a:rPr>
+              <a:t>m₁</a:t>
+            </a:r>
+          </a:p>
+        </p:txBody>
+      </p:sp>
+      <p:sp>
+        <p:nvSpPr>
+          <p:cNvPr id="48" name="Rounded Rectangle 47"/>
+          <p:cNvSpPr/>
+          <p:nvPr/>
+        </p:nvSpPr>
+        <p:spPr>
+          <a:xfrm>
+            <a:off x="6487668" y="1636776"/>
+            <a:ext cx="804672" cy="566928"/>
+          </a:xfrm>
+          <a:prstGeom prst="roundRect">
+            <a:avLst>
+              <a:gd name="adj" fmla="val 20000"/>
+            </a:avLst>
+          </a:prstGeom>
+          <a:solidFill>
+            <a:srgbClr val="FFFFFF"/>
+          </a:solidFill>
+          <a:ln w="12700">
+            <a:solidFill>
+              <a:srgbClr val="4A4F57"/>
+            </a:solidFill>
+          </a:ln>
+          <a:effectLst/>
+        </p:spPr>
+        <p:txBody>
+          <a:bodyPr rtlCol="0" anchor="ctr" lIns="54864" rIns="54864" tIns="0" bIns="0" wrap="square"/>
+          <a:lstStyle/>
+          <a:p>
+            <a:pPr algn="ctr"/>
+            <a:r>
+              <a:rPr sz="1600" b="1" i="0">
+                <a:solidFill>
+                  <a:srgbClr val="2B2F36"/>
+                </a:solidFill>
+                <a:latin typeface="Calibri"/>
+              </a:rPr>
+              <a:t>ITE</a:t>
+            </a:r>
+          </a:p>
+        </p:txBody>
+      </p:sp>
+      <p:sp>
+        <p:nvSpPr>
+          <p:cNvPr id="49" name="TextBox 48"/>
+          <p:cNvSpPr txBox="1"/>
+          <p:nvPr/>
+        </p:nvSpPr>
+        <p:spPr>
+          <a:xfrm>
+            <a:off x="7310628" y="1783080"/>
+            <a:ext cx="320040" cy="274320"/>
+          </a:xfrm>
+          <a:prstGeom prst="rect">
+            <a:avLst/>
+          </a:prstGeom>
+          <a:noFill/>
+        </p:spPr>
+        <p:txBody>
+          <a:bodyPr wrap="square" anchor="ctr" lIns="45720" rIns="45720" tIns="27432" bIns="27432">
+            <a:spAutoFit/>
+          </a:bodyPr>
+          <a:lstStyle/>
+          <a:p>
+            <a:pPr algn="l"/>
+            <a:r>
+              <a:rPr sz="1300" b="1" i="0">
+                <a:solidFill>
+                  <a:srgbClr val="2B2F36"/>
+                </a:solidFill>
+                <a:latin typeface="Calibri"/>
+              </a:rPr>
+              <a:t>m₂</a:t>
+            </a:r>
+          </a:p>
+        </p:txBody>
+      </p:sp>
+      <p:sp>
+        <p:nvSpPr>
+          <p:cNvPr id="50" name="Rounded Rectangle 49"/>
+          <p:cNvSpPr/>
+          <p:nvPr/>
+        </p:nvSpPr>
+        <p:spPr>
+          <a:xfrm>
+            <a:off x="2263139" y="4663440"/>
+            <a:ext cx="7662672" cy="914400"/>
+          </a:xfrm>
+          <a:prstGeom prst="roundRect">
+            <a:avLst>
+              <a:gd name="adj" fmla="val 35000"/>
+            </a:avLst>
+          </a:prstGeom>
+          <a:noFill/>
+          <a:ln w="28575">
+            <a:solidFill>
+              <a:srgbClr val="1F2A44"/>
+            </a:solidFill>
+            <a:prstDash val="lgDash"/>
+          </a:ln>
+          <a:effectLst/>
+        </p:spPr>
+        <p:txBody>
+          <a:bodyPr rtlCol="0" anchor="ctr" lIns="54864" rIns="54864" tIns="27432" bIns="27432" wrap="square"/>
+          <a:lstStyle/>
+          <a:p>
+            <a:pPr algn="ctr"/>
+          </a:p>
+        </p:txBody>
+      </p:sp>
+      <p:sp>
+        <p:nvSpPr>
+          <p:cNvPr id="51" name="TextBox 50"/>
+          <p:cNvSpPr txBox="1"/>
+          <p:nvPr/>
+        </p:nvSpPr>
+        <p:spPr>
+          <a:xfrm>
+            <a:off x="10017252" y="4937759"/>
+            <a:ext cx="1188720" cy="365760"/>
+          </a:xfrm>
+          <a:prstGeom prst="rect">
+            <a:avLst/>
+          </a:prstGeom>
+          <a:noFill/>
+        </p:spPr>
+        <p:txBody>
+          <a:bodyPr wrap="square" anchor="ctr" lIns="45720" rIns="45720" tIns="27432" bIns="27432">
+            <a:spAutoFit/>
+          </a:bodyPr>
+          <a:lstStyle/>
+          <a:p>
+            <a:pPr algn="l"/>
+            <a:r>
+              <a:rPr sz="1600" b="1" i="0">
+                <a:solidFill>
+                  <a:srgbClr val="1F2A44"/>
+                </a:solidFill>
+                <a:latin typeface="Calibri"/>
+              </a:rPr>
+              <a:t>round 0</a:t>
+            </a:r>
+          </a:p>
+        </p:txBody>
+      </p:sp>
+      <p:sp>
+        <p:nvSpPr>
+          <p:cNvPr id="52" name="Rounded Rectangle 51"/>
+          <p:cNvSpPr/>
+          <p:nvPr/>
+        </p:nvSpPr>
+        <p:spPr>
+          <a:xfrm>
+            <a:off x="2674620" y="2715768"/>
+            <a:ext cx="6830568" cy="1335024"/>
+          </a:xfrm>
+          <a:prstGeom prst="roundRect">
+            <a:avLst>
+              <a:gd name="adj" fmla="val 35000"/>
+            </a:avLst>
+          </a:prstGeom>
+          <a:noFill/>
+          <a:ln w="28575">
+            <a:solidFill>
+              <a:srgbClr val="1F2A44"/>
+            </a:solidFill>
+            <a:prstDash val="lgDash"/>
+          </a:ln>
+          <a:effectLst/>
+        </p:spPr>
+        <p:txBody>
+          <a:bodyPr rtlCol="0" anchor="ctr" lIns="54864" rIns="54864" tIns="27432" bIns="27432" wrap="square"/>
+          <a:lstStyle/>
+          <a:p>
+            <a:pPr algn="ctr"/>
+          </a:p>
+        </p:txBody>
+      </p:sp>
+      <p:sp>
+        <p:nvSpPr>
+          <p:cNvPr id="53" name="TextBox 52"/>
+          <p:cNvSpPr txBox="1"/>
+          <p:nvPr/>
+        </p:nvSpPr>
+        <p:spPr>
+          <a:xfrm>
+            <a:off x="9596628" y="3200399"/>
+            <a:ext cx="1188720" cy="365760"/>
+          </a:xfrm>
+          <a:prstGeom prst="rect">
+            <a:avLst/>
+          </a:prstGeom>
+          <a:noFill/>
+        </p:spPr>
+        <p:txBody>
+          <a:bodyPr wrap="square" anchor="ctr" lIns="45720" rIns="45720" tIns="27432" bIns="27432">
+            <a:spAutoFit/>
+          </a:bodyPr>
+          <a:lstStyle/>
+          <a:p>
+            <a:pPr algn="l"/>
+            <a:r>
+              <a:rPr sz="1600" b="1" i="0">
+                <a:solidFill>
+                  <a:srgbClr val="1F2A44"/>
+                </a:solidFill>
+                <a:latin typeface="Calibri"/>
+              </a:rPr>
+              <a:t>round 1</a:t>
+            </a:r>
+          </a:p>
+        </p:txBody>
+      </p:sp>
+      <p:sp>
+        <p:nvSpPr>
+          <p:cNvPr id="54" name="Rounded Rectangle 53"/>
+          <p:cNvSpPr/>
+          <p:nvPr/>
+        </p:nvSpPr>
+        <p:spPr>
+          <a:xfrm>
+            <a:off x="4576572" y="1389888"/>
+            <a:ext cx="3300984" cy="1060704"/>
+          </a:xfrm>
+          <a:prstGeom prst="roundRect">
+            <a:avLst>
+              <a:gd name="adj" fmla="val 35000"/>
+            </a:avLst>
+          </a:prstGeom>
+          <a:noFill/>
+          <a:ln w="28575">
+            <a:solidFill>
+              <a:srgbClr val="1F2A44"/>
+            </a:solidFill>
+            <a:prstDash val="lgDash"/>
+          </a:ln>
+          <a:effectLst/>
+        </p:spPr>
+        <p:txBody>
+          <a:bodyPr rtlCol="0" anchor="ctr" lIns="54864" rIns="54864" tIns="27432" bIns="27432" wrap="square"/>
+          <a:lstStyle/>
+          <a:p>
+            <a:pPr algn="ctr"/>
+          </a:p>
+        </p:txBody>
+      </p:sp>
+      <p:sp>
+        <p:nvSpPr>
+          <p:cNvPr id="55" name="TextBox 54"/>
+          <p:cNvSpPr txBox="1"/>
+          <p:nvPr/>
+        </p:nvSpPr>
+        <p:spPr>
+          <a:xfrm>
+            <a:off x="7968996" y="1737360"/>
+            <a:ext cx="1188720" cy="365760"/>
+          </a:xfrm>
+          <a:prstGeom prst="rect">
+            <a:avLst/>
+          </a:prstGeom>
+          <a:noFill/>
+        </p:spPr>
+        <p:txBody>
+          <a:bodyPr wrap="square" anchor="ctr" lIns="45720" rIns="45720" tIns="27432" bIns="27432">
+            <a:spAutoFit/>
+          </a:bodyPr>
+          <a:lstStyle/>
+          <a:p>
+            <a:pPr algn="l"/>
+            <a:r>
+              <a:rPr sz="1600" b="1" i="0">
+                <a:solidFill>
+                  <a:srgbClr val="1F2A44"/>
+                </a:solidFill>
+                <a:latin typeface="Calibri"/>
+              </a:rPr>
+              <a:t>round 2</a:t>
+            </a:r>
+          </a:p>
+        </p:txBody>
+      </p:sp>
+      <p:sp>
+        <p:nvSpPr>
+          <p:cNvPr id="56" name="Rounded Rectangle 55"/>
+          <p:cNvSpPr/>
+          <p:nvPr/>
+        </p:nvSpPr>
+        <p:spPr>
+          <a:xfrm>
+            <a:off x="548640" y="5596128"/>
+            <a:ext cx="11064240" cy="694944"/>
           </a:xfrm>
           <a:prstGeom prst="roundRect">
             <a:avLst>
@@ -57834,212 +59360,13 @@
           <a:p>
             <a:pPr algn="ctr"/>
             <a:r>
-              <a:rPr sz="2200" b="1" i="0">
+              <a:rPr sz="2600" b="1" i="0">
                 <a:solidFill>
                   <a:srgbClr val="FFFFFF"/>
                 </a:solidFill>
                 <a:latin typeface="Calibri"/>
               </a:rPr>
-              <a:t>Soundness</a:t>
-            </a:r>
-          </a:p>
-        </p:txBody>
-      </p:sp>
-      <p:sp>
-        <p:nvSpPr>
-          <p:cNvPr id="7" name="Rectangle 6"/>
-          <p:cNvSpPr/>
-          <p:nvPr/>
-        </p:nvSpPr>
-        <p:spPr>
-          <a:xfrm>
-            <a:off x="3840480" y="2148840"/>
-            <a:ext cx="7589520" cy="914400"/>
-          </a:xfrm>
-          <a:prstGeom prst="rect">
-            <a:avLst/>
-          </a:prstGeom>
-          <a:solidFill>
-            <a:srgbClr val="F4F5F7"/>
-          </a:solidFill>
-          <a:ln>
-            <a:noFill/>
-          </a:ln>
-          <a:effectLst/>
-        </p:spPr>
-        <p:txBody>
-          <a:bodyPr rtlCol="0" anchor="ctr" lIns="54864" rIns="54864" tIns="27432" bIns="27432" wrap="square"/>
-          <a:lstStyle/>
-          <a:p>
-            <a:pPr algn="ctr"/>
-            <a:r>
-              <a:rPr sz="2000" b="0" i="0">
-                <a:solidFill>
-                  <a:srgbClr val="2B2F36"/>
-                </a:solidFill>
-                <a:latin typeface="Calibri"/>
-              </a:rPr>
-              <a:t>each merge is an instance of the congruence rule</a:t>
-            </a:r>
-          </a:p>
-        </p:txBody>
-      </p:sp>
-      <p:sp>
-        <p:nvSpPr>
-          <p:cNvPr id="8" name="Rounded Rectangle 7"/>
-          <p:cNvSpPr/>
-          <p:nvPr/>
-        </p:nvSpPr>
-        <p:spPr>
-          <a:xfrm>
-            <a:off x="731520" y="3337560"/>
-            <a:ext cx="3108960" cy="914400"/>
-          </a:xfrm>
-          <a:prstGeom prst="roundRect">
-            <a:avLst>
-              <a:gd name="adj" fmla="val 15000"/>
-            </a:avLst>
-          </a:prstGeom>
-          <a:solidFill>
-            <a:srgbClr val="1F2A44"/>
-          </a:solidFill>
-          <a:ln>
-            <a:noFill/>
-          </a:ln>
-          <a:effectLst/>
-        </p:spPr>
-        <p:txBody>
-          <a:bodyPr rtlCol="0" anchor="ctr" lIns="54864" rIns="54864" tIns="27432" bIns="27432" wrap="square"/>
-          <a:lstStyle/>
-          <a:p>
-            <a:pPr algn="ctr"/>
-            <a:r>
-              <a:rPr sz="2200" b="1" i="0">
-                <a:solidFill>
-                  <a:srgbClr val="FFFFFF"/>
-                </a:solidFill>
-                <a:latin typeface="Calibri"/>
-              </a:rPr>
-              <a:t>Completeness</a:t>
-            </a:r>
-          </a:p>
-        </p:txBody>
-      </p:sp>
-      <p:sp>
-        <p:nvSpPr>
-          <p:cNvPr id="9" name="Rectangle 8"/>
-          <p:cNvSpPr/>
-          <p:nvPr/>
-        </p:nvSpPr>
-        <p:spPr>
-          <a:xfrm>
-            <a:off x="3840480" y="3337560"/>
-            <a:ext cx="7589520" cy="914400"/>
-          </a:xfrm>
-          <a:prstGeom prst="rect">
-            <a:avLst/>
-          </a:prstGeom>
-          <a:solidFill>
-            <a:srgbClr val="F4F5F7"/>
-          </a:solidFill>
-          <a:ln>
-            <a:noFill/>
-          </a:ln>
-          <a:effectLst/>
-        </p:spPr>
-        <p:txBody>
-          <a:bodyPr rtlCol="0" anchor="ctr" lIns="54864" rIns="54864" tIns="27432" bIns="27432" wrap="square"/>
-          <a:lstStyle/>
-          <a:p>
-            <a:pPr algn="ctr"/>
-            <a:r>
-              <a:rPr sz="2000" b="0" i="0">
-                <a:solidFill>
-                  <a:srgbClr val="2B2F36"/>
-                </a:solidFill>
-                <a:latin typeface="Calibri"/>
-              </a:rPr>
-              <a:t>a newly congruent pair is a candidate next round</a:t>
-            </a:r>
-          </a:p>
-        </p:txBody>
-      </p:sp>
-      <p:sp>
-        <p:nvSpPr>
-          <p:cNvPr id="10" name="Rounded Rectangle 9"/>
-          <p:cNvSpPr/>
-          <p:nvPr/>
-        </p:nvSpPr>
-        <p:spPr>
-          <a:xfrm>
-            <a:off x="731520" y="4526280"/>
-            <a:ext cx="3108960" cy="914400"/>
-          </a:xfrm>
-          <a:prstGeom prst="roundRect">
-            <a:avLst>
-              <a:gd name="adj" fmla="val 15000"/>
-            </a:avLst>
-          </a:prstGeom>
-          <a:solidFill>
-            <a:srgbClr val="1F2A44"/>
-          </a:solidFill>
-          <a:ln>
-            <a:noFill/>
-          </a:ln>
-          <a:effectLst/>
-        </p:spPr>
-        <p:txBody>
-          <a:bodyPr rtlCol="0" anchor="ctr" lIns="54864" rIns="54864" tIns="27432" bIns="27432" wrap="square"/>
-          <a:lstStyle/>
-          <a:p>
-            <a:pPr algn="ctr"/>
-            <a:r>
-              <a:rPr sz="2200" b="1" i="0">
-                <a:solidFill>
-                  <a:srgbClr val="FFFFFF"/>
-                </a:solidFill>
-                <a:latin typeface="Calibri"/>
-              </a:rPr>
-              <a:t>Termination</a:t>
-            </a:r>
-          </a:p>
-        </p:txBody>
-      </p:sp>
-      <p:sp>
-        <p:nvSpPr>
-          <p:cNvPr id="11" name="Rectangle 10"/>
-          <p:cNvSpPr/>
-          <p:nvPr/>
-        </p:nvSpPr>
-        <p:spPr>
-          <a:xfrm>
-            <a:off x="3840480" y="4526280"/>
-            <a:ext cx="7589520" cy="914400"/>
-          </a:xfrm>
-          <a:prstGeom prst="rect">
-            <a:avLst/>
-          </a:prstGeom>
-          <a:solidFill>
-            <a:srgbClr val="F4F5F7"/>
-          </a:solidFill>
-          <a:ln>
-            <a:noFill/>
-          </a:ln>
-          <a:effectLst/>
-        </p:spPr>
-        <p:txBody>
-          <a:bodyPr rtlCol="0" anchor="ctr" lIns="54864" rIns="54864" tIns="27432" bIns="27432" wrap="square"/>
-          <a:lstStyle/>
-          <a:p>
-            <a:pPr algn="ctr"/>
-            <a:r>
-              <a:rPr sz="2000" b="0" i="0">
-                <a:solidFill>
-                  <a:srgbClr val="2B2F36"/>
-                </a:solidFill>
-                <a:latin typeface="Calibri"/>
-              </a:rPr>
-              <a:t>every productive round removes a class</a:t>
+              <a:t>Round 3: no candidates.  Done</a:t>
             </a:r>
           </a:p>
         </p:txBody>
@@ -58092,7 +59419,7 @@
                 </a:solidFill>
                 <a:latin typeface="Calibri"/>
               </a:rPr>
-              <a:t>FilterCC: same rounds, no parent lists</a:t>
+              <a:t>Correctness</a:t>
             </a:r>
           </a:p>
         </p:txBody>
@@ -58197,8 +59524,8 @@
         </p:nvSpPr>
         <p:spPr>
           <a:xfrm>
-            <a:off x="548640" y="1371600"/>
-            <a:ext cx="5486400" cy="2514600"/>
+            <a:off x="731520" y="2148840"/>
+            <a:ext cx="3108960" cy="914400"/>
           </a:xfrm>
           <a:prstGeom prst="roundRect">
             <a:avLst>
@@ -58206,7 +59533,7 @@
             </a:avLst>
           </a:prstGeom>
           <a:solidFill>
-            <a:srgbClr val="F4F5F7"/>
+            <a:srgbClr val="1F2A44"/>
           </a:solidFill>
           <a:ln>
             <a:noFill/>
@@ -58218,142 +59545,31 @@
           <a:lstStyle/>
           <a:p>
             <a:pPr algn="ctr"/>
-          </a:p>
-        </p:txBody>
-      </p:sp>
-      <p:sp>
-        <p:nvSpPr>
-          <p:cNvPr id="7" name="TextBox 6"/>
-          <p:cNvSpPr txBox="1"/>
-          <p:nvPr/>
-        </p:nvSpPr>
-        <p:spPr>
-          <a:xfrm>
-            <a:off x="731520" y="1463040"/>
-            <a:ext cx="5120640" cy="411480"/>
+            <a:r>
+              <a:rPr sz="2200" b="1" i="0">
+                <a:solidFill>
+                  <a:srgbClr val="FFFFFF"/>
+                </a:solidFill>
+                <a:latin typeface="Calibri"/>
+              </a:rPr>
+              <a:t>Soundness</a:t>
+            </a:r>
+          </a:p>
+        </p:txBody>
+      </p:sp>
+      <p:sp>
+        <p:nvSpPr>
+          <p:cNvPr id="7" name="Rectangle 6"/>
+          <p:cNvSpPr/>
+          <p:nvPr/>
+        </p:nvSpPr>
+        <p:spPr>
+          <a:xfrm>
+            <a:off x="3840480" y="2148840"/>
+            <a:ext cx="7589520" cy="914400"/>
           </a:xfrm>
           <a:prstGeom prst="rect">
             <a:avLst/>
-          </a:prstGeom>
-          <a:noFill/>
-        </p:spPr>
-        <p:txBody>
-          <a:bodyPr wrap="square" anchor="t" lIns="45720" rIns="45720" tIns="27432" bIns="27432">
-            <a:spAutoFit/>
-          </a:bodyPr>
-          <a:lstStyle/>
-          <a:p>
-            <a:pPr algn="l"/>
-            <a:r>
-              <a:rPr sz="2100" b="1" i="0">
-                <a:solidFill>
-                  <a:srgbClr val="1F2A44"/>
-                </a:solidFill>
-                <a:latin typeface="Calibri"/>
-              </a:rPr>
-              <a:t>ParentCC</a:t>
-            </a:r>
-          </a:p>
-        </p:txBody>
-      </p:sp>
-      <p:sp>
-        <p:nvSpPr>
-          <p:cNvPr id="8" name="TextBox 7"/>
-          <p:cNvSpPr txBox="1"/>
-          <p:nvPr/>
-        </p:nvSpPr>
-        <p:spPr>
-          <a:xfrm>
-            <a:off x="640080" y="2057400"/>
-            <a:ext cx="5303520" cy="2194560"/>
-          </a:xfrm>
-          <a:prstGeom prst="rect">
-            <a:avLst/>
-          </a:prstGeom>
-          <a:noFill/>
-        </p:spPr>
-        <p:txBody>
-          <a:bodyPr wrap="square" lIns="45720" rIns="45720">
-            <a:spAutoFit/>
-          </a:bodyPr>
-          <a:lstStyle/>
-          <a:p>
-            <a:pPr marL="274320" indent="-237744">
-              <a:spcBef>
-                <a:spcPts val="1000"/>
-              </a:spcBef>
-              <a:buClr>
-                <a:srgbClr val="6B717A"/>
-              </a:buClr>
-              <a:buChar char="•"/>
-            </a:pPr>
-            <a:r>
-              <a:rPr sz="1800" b="1" i="0">
-                <a:solidFill>
-                  <a:srgbClr val="2B2F36"/>
-                </a:solidFill>
-                <a:latin typeface="Calibri"/>
-              </a:rPr>
-              <a:t>parent list per class</a:t>
-            </a:r>
-          </a:p>
-          <a:p>
-            <a:pPr marL="274320" indent="-237744">
-              <a:spcBef>
-                <a:spcPts val="1000"/>
-              </a:spcBef>
-              <a:buClr>
-                <a:srgbClr val="6B717A"/>
-              </a:buClr>
-              <a:buChar char="•"/>
-            </a:pPr>
-            <a:r>
-              <a:rPr sz="1800" b="0" i="0">
-                <a:solidFill>
-                  <a:srgbClr val="2B2F36"/>
-                </a:solidFill>
-                <a:latin typeface="Calibri"/>
-              </a:rPr>
-              <a:t>every merge appends: allocation</a:t>
-            </a:r>
-          </a:p>
-          <a:p>
-            <a:pPr marL="274320" indent="-237744">
-              <a:spcBef>
-                <a:spcPts val="1000"/>
-              </a:spcBef>
-              <a:buClr>
-                <a:srgbClr val="6B717A"/>
-              </a:buClr>
-              <a:buChar char="•"/>
-            </a:pPr>
-            <a:r>
-              <a:rPr sz="1800" b="0" i="0">
-                <a:solidFill>
-                  <a:srgbClr val="2B2F36"/>
-                </a:solidFill>
-                <a:latin typeface="Calibri"/>
-              </a:rPr>
-              <a:t>candidates: parents of merged classes</a:t>
-            </a:r>
-          </a:p>
-        </p:txBody>
-      </p:sp>
-      <p:sp>
-        <p:nvSpPr>
-          <p:cNvPr id="9" name="Rounded Rectangle 8"/>
-          <p:cNvSpPr/>
-          <p:nvPr/>
-        </p:nvSpPr>
-        <p:spPr>
-          <a:xfrm>
-            <a:off x="6263640" y="1371600"/>
-            <a:ext cx="5394960" cy="2514600"/>
-          </a:xfrm>
-          <a:prstGeom prst="roundRect">
-            <a:avLst>
-              <a:gd name="adj" fmla="val 15000"/>
-            </a:avLst>
           </a:prstGeom>
           <a:solidFill>
             <a:srgbClr val="F4F5F7"/>
@@ -58368,192 +59584,28 @@
           <a:lstStyle/>
           <a:p>
             <a:pPr algn="ctr"/>
-          </a:p>
-        </p:txBody>
-      </p:sp>
-      <p:sp>
-        <p:nvSpPr>
-          <p:cNvPr id="10" name="TextBox 9"/>
-          <p:cNvSpPr txBox="1"/>
-          <p:nvPr/>
-        </p:nvSpPr>
-        <p:spPr>
-          <a:xfrm>
-            <a:off x="6446520" y="1463040"/>
-            <a:ext cx="5029200" cy="411480"/>
-          </a:xfrm>
-          <a:prstGeom prst="rect">
-            <a:avLst/>
-          </a:prstGeom>
-          <a:noFill/>
-        </p:spPr>
-        <p:txBody>
-          <a:bodyPr wrap="square" anchor="t" lIns="45720" rIns="45720" tIns="27432" bIns="27432">
-            <a:spAutoFit/>
-          </a:bodyPr>
-          <a:lstStyle/>
-          <a:p>
-            <a:pPr algn="l"/>
-            <a:r>
-              <a:rPr sz="2100" b="1" i="0">
-                <a:solidFill>
-                  <a:srgbClr val="1F2A44"/>
-                </a:solidFill>
-                <a:latin typeface="Calibri"/>
-              </a:rPr>
-              <a:t>FilterCC</a:t>
-            </a:r>
-          </a:p>
-        </p:txBody>
-      </p:sp>
-      <p:sp>
-        <p:nvSpPr>
-          <p:cNvPr id="11" name="TextBox 10"/>
-          <p:cNvSpPr txBox="1"/>
-          <p:nvPr/>
-        </p:nvSpPr>
-        <p:spPr>
-          <a:xfrm>
-            <a:off x="6355080" y="2057400"/>
-            <a:ext cx="5212080" cy="2194560"/>
-          </a:xfrm>
-          <a:prstGeom prst="rect">
-            <a:avLst/>
-          </a:prstGeom>
-          <a:noFill/>
-        </p:spPr>
-        <p:txBody>
-          <a:bodyPr wrap="square" lIns="45720" rIns="45720">
-            <a:spAutoFit/>
-          </a:bodyPr>
-          <a:lstStyle/>
-          <a:p>
-            <a:pPr marL="274320" indent="-237744">
-              <a:spcBef>
-                <a:spcPts val="1000"/>
-              </a:spcBef>
-              <a:buClr>
-                <a:srgbClr val="6B717A"/>
-              </a:buClr>
-              <a:buChar char="•"/>
-            </a:pPr>
-            <a:r>
-              <a:rPr sz="1800" b="1" i="0">
-                <a:solidFill>
-                  <a:srgbClr val="2B2F36"/>
-                </a:solidFill>
-                <a:latin typeface="Calibri"/>
-              </a:rPr>
-              <a:t>one dirty bit per class</a:t>
-            </a:r>
-          </a:p>
-          <a:p>
-            <a:pPr marL="274320" indent="-237744">
-              <a:spcBef>
-                <a:spcPts val="1000"/>
-              </a:spcBef>
-              <a:buClr>
-                <a:srgbClr val="6B717A"/>
-              </a:buClr>
-              <a:buChar char="•"/>
-            </a:pPr>
-            <a:r>
-              <a:rPr sz="1800" b="0" i="0">
-                <a:solidFill>
-                  <a:srgbClr val="2B2F36"/>
-                </a:solidFill>
-                <a:latin typeface="Calibri"/>
-              </a:rPr>
-              <a:t>a merge marks its classes dirty</a:t>
-            </a:r>
-          </a:p>
-          <a:p>
-            <a:pPr marL="274320" indent="-237744">
-              <a:spcBef>
-                <a:spcPts val="1000"/>
-              </a:spcBef>
-              <a:buClr>
-                <a:srgbClr val="6B717A"/>
-              </a:buClr>
-              <a:buChar char="•"/>
-            </a:pPr>
-            <a:r>
-              <a:rPr sz="1800" b="0" i="0">
-                <a:solidFill>
-                  <a:srgbClr val="2B2F36"/>
-                </a:solidFill>
-                <a:latin typeface="Calibri"/>
-              </a:rPr>
-              <a:t>candidates: filter all terms for a dirty child</a:t>
-            </a:r>
-          </a:p>
-          <a:p>
-            <a:pPr marL="274320" indent="-237744">
-              <a:spcBef>
-                <a:spcPts val="1000"/>
-              </a:spcBef>
-              <a:buClr>
-                <a:srgbClr val="6B717A"/>
-              </a:buClr>
-              <a:buChar char="•"/>
-            </a:pPr>
-            <a:r>
-              <a:rPr sz="1800" b="0" i="0">
-                <a:solidFill>
-                  <a:srgbClr val="2B2F36"/>
-                </a:solidFill>
-                <a:latin typeface="Calibri"/>
-              </a:rPr>
-              <a:t>racing marks are fine: setting a bit is idempotent</a:t>
-            </a:r>
-          </a:p>
-        </p:txBody>
-      </p:sp>
-      <p:sp>
-        <p:nvSpPr>
-          <p:cNvPr id="12" name="TextBox 11"/>
-          <p:cNvSpPr txBox="1"/>
-          <p:nvPr/>
-        </p:nvSpPr>
-        <p:spPr>
-          <a:xfrm>
-            <a:off x="548640" y="4114800"/>
-            <a:ext cx="11155680" cy="411480"/>
-          </a:xfrm>
-          <a:prstGeom prst="rect">
-            <a:avLst/>
-          </a:prstGeom>
-          <a:noFill/>
-        </p:spPr>
-        <p:txBody>
-          <a:bodyPr wrap="square" anchor="t" lIns="45720" rIns="45720" tIns="27432" bIns="27432">
-            <a:spAutoFit/>
-          </a:bodyPr>
-          <a:lstStyle/>
-          <a:p>
-            <a:pPr algn="l"/>
-            <a:r>
-              <a:rPr sz="1800" b="0" i="0">
-                <a:solidFill>
-                  <a:srgbClr val="6B717A"/>
-                </a:solidFill>
-                <a:latin typeface="Calibri"/>
-              </a:rPr>
-              <a:t>Same candidates every round, same merges, same proofs</a:t>
-            </a:r>
-          </a:p>
-        </p:txBody>
-      </p:sp>
-      <p:sp>
-        <p:nvSpPr>
-          <p:cNvPr id="13" name="Rounded Rectangle 12"/>
-          <p:cNvSpPr/>
-          <p:nvPr/>
-        </p:nvSpPr>
-        <p:spPr>
-          <a:xfrm>
-            <a:off x="548640" y="5596128"/>
-            <a:ext cx="11064240" cy="694944"/>
+            <a:r>
+              <a:rPr sz="2000" b="0" i="0">
+                <a:solidFill>
+                  <a:srgbClr val="2B2F36"/>
+                </a:solidFill>
+                <a:latin typeface="Calibri"/>
+              </a:rPr>
+              <a:t>each merge is an instance of the congruence rule</a:t>
+            </a:r>
+          </a:p>
+        </p:txBody>
+      </p:sp>
+      <p:sp>
+        <p:nvSpPr>
+          <p:cNvPr id="8" name="Rounded Rectangle 7"/>
+          <p:cNvSpPr/>
+          <p:nvPr/>
+        </p:nvSpPr>
+        <p:spPr>
+          <a:xfrm>
+            <a:off x="731520" y="3337560"/>
+            <a:ext cx="3108960" cy="914400"/>
           </a:xfrm>
           <a:prstGeom prst="roundRect">
             <a:avLst>
@@ -58580,7 +59632,126 @@
                 </a:solidFill>
                 <a:latin typeface="Calibri"/>
               </a:rPr>
-              <a:t>no allocation, but a scan of every term per round: wins when rounds are few</a:t>
+              <a:t>Completeness</a:t>
+            </a:r>
+          </a:p>
+        </p:txBody>
+      </p:sp>
+      <p:sp>
+        <p:nvSpPr>
+          <p:cNvPr id="9" name="Rectangle 8"/>
+          <p:cNvSpPr/>
+          <p:nvPr/>
+        </p:nvSpPr>
+        <p:spPr>
+          <a:xfrm>
+            <a:off x="3840480" y="3337560"/>
+            <a:ext cx="7589520" cy="914400"/>
+          </a:xfrm>
+          <a:prstGeom prst="rect">
+            <a:avLst/>
+          </a:prstGeom>
+          <a:solidFill>
+            <a:srgbClr val="F4F5F7"/>
+          </a:solidFill>
+          <a:ln>
+            <a:noFill/>
+          </a:ln>
+          <a:effectLst/>
+        </p:spPr>
+        <p:txBody>
+          <a:bodyPr rtlCol="0" anchor="ctr" lIns="54864" rIns="54864" tIns="27432" bIns="27432" wrap="square"/>
+          <a:lstStyle/>
+          <a:p>
+            <a:pPr algn="ctr"/>
+            <a:r>
+              <a:rPr sz="2000" b="0" i="0">
+                <a:solidFill>
+                  <a:srgbClr val="2B2F36"/>
+                </a:solidFill>
+                <a:latin typeface="Calibri"/>
+              </a:rPr>
+              <a:t>a newly congruent pair is a candidate next round</a:t>
+            </a:r>
+          </a:p>
+        </p:txBody>
+      </p:sp>
+      <p:sp>
+        <p:nvSpPr>
+          <p:cNvPr id="10" name="Rounded Rectangle 9"/>
+          <p:cNvSpPr/>
+          <p:nvPr/>
+        </p:nvSpPr>
+        <p:spPr>
+          <a:xfrm>
+            <a:off x="731520" y="4526280"/>
+            <a:ext cx="3108960" cy="914400"/>
+          </a:xfrm>
+          <a:prstGeom prst="roundRect">
+            <a:avLst>
+              <a:gd name="adj" fmla="val 15000"/>
+            </a:avLst>
+          </a:prstGeom>
+          <a:solidFill>
+            <a:srgbClr val="1F2A44"/>
+          </a:solidFill>
+          <a:ln>
+            <a:noFill/>
+          </a:ln>
+          <a:effectLst/>
+        </p:spPr>
+        <p:txBody>
+          <a:bodyPr rtlCol="0" anchor="ctr" lIns="54864" rIns="54864" tIns="27432" bIns="27432" wrap="square"/>
+          <a:lstStyle/>
+          <a:p>
+            <a:pPr algn="ctr"/>
+            <a:r>
+              <a:rPr sz="2200" b="1" i="0">
+                <a:solidFill>
+                  <a:srgbClr val="FFFFFF"/>
+                </a:solidFill>
+                <a:latin typeface="Calibri"/>
+              </a:rPr>
+              <a:t>Termination</a:t>
+            </a:r>
+          </a:p>
+        </p:txBody>
+      </p:sp>
+      <p:sp>
+        <p:nvSpPr>
+          <p:cNvPr id="11" name="Rectangle 10"/>
+          <p:cNvSpPr/>
+          <p:nvPr/>
+        </p:nvSpPr>
+        <p:spPr>
+          <a:xfrm>
+            <a:off x="3840480" y="4526280"/>
+            <a:ext cx="7589520" cy="914400"/>
+          </a:xfrm>
+          <a:prstGeom prst="rect">
+            <a:avLst/>
+          </a:prstGeom>
+          <a:solidFill>
+            <a:srgbClr val="F4F5F7"/>
+          </a:solidFill>
+          <a:ln>
+            <a:noFill/>
+          </a:ln>
+          <a:effectLst/>
+        </p:spPr>
+        <p:txBody>
+          <a:bodyPr rtlCol="0" anchor="ctr" lIns="54864" rIns="54864" tIns="27432" bIns="27432" wrap="square"/>
+          <a:lstStyle/>
+          <a:p>
+            <a:pPr algn="ctr"/>
+            <a:r>
+              <a:rPr sz="2000" b="0" i="0">
+                <a:solidFill>
+                  <a:srgbClr val="2B2F36"/>
+                </a:solidFill>
+                <a:latin typeface="Calibri"/>
+              </a:rPr>
+              <a:t>every productive round removes a class</a:t>
             </a:r>
           </a:p>
         </p:txBody>
@@ -59210,7 +60381,7 @@
                 </a:solidFill>
                 <a:latin typeface="Calibri"/>
               </a:rPr>
-              <a:t>Implementation</a:t>
+              <a:t>FilterCC: same rounds, no parent lists</a:t>
             </a:r>
           </a:p>
         </p:txBody>
@@ -59316,7 +60487,7 @@
         <p:spPr>
           <a:xfrm>
             <a:off x="548640" y="1371600"/>
-            <a:ext cx="5486400" cy="2377440"/>
+            <a:ext cx="5486400" cy="2514600"/>
           </a:xfrm>
           <a:prstGeom prst="roundRect">
             <a:avLst>
@@ -59369,7 +60540,7 @@
                 </a:solidFill>
                 <a:latin typeface="Calibri"/>
               </a:rPr>
-              <a:t>Parallel algorithms</a:t>
+              <a:t>ParentCC</a:t>
             </a:r>
           </a:p>
         </p:txBody>
@@ -59383,7 +60554,7 @@
         <p:spPr>
           <a:xfrm>
             <a:off x="640080" y="2057400"/>
-            <a:ext cx="5303520" cy="3108960"/>
+            <a:ext cx="5303520" cy="2194560"/>
           </a:xfrm>
           <a:prstGeom prst="rect">
             <a:avLst/>
@@ -59412,16 +60583,7 @@
                 </a:solidFill>
                 <a:latin typeface="Calibri"/>
               </a:rPr>
-              <a:t>grouping</a:t>
-            </a:r>
-            <a:r>
-              <a:rPr sz="1800" b="0" i="0">
-                <a:solidFill>
-                  <a:srgbClr val="2B2F36"/>
-                </a:solidFill>
-                <a:latin typeface="Calibri"/>
-              </a:rPr>
-              <a:t>: integer sort on signature hashes</a:t>
+              <a:t>parent list per class</a:t>
             </a:r>
           </a:p>
           <a:p>
@@ -59435,22 +60597,13 @@
               <a:buChar char="•"/>
             </a:pPr>
             <a:r>
-              <a:rPr sz="1800" b="1" i="0">
-                <a:solidFill>
-                  <a:srgbClr val="2B2F36"/>
-                </a:solidFill>
-                <a:latin typeface="Calibri"/>
-              </a:rPr>
-              <a:t>merging a group</a:t>
-            </a:r>
-            <a:r>
               <a:rPr sz="1800" b="0" i="0">
                 <a:solidFill>
                   <a:srgbClr val="2B2F36"/>
                 </a:solidFill>
                 <a:latin typeface="Calibri"/>
               </a:rPr>
-              <a:t>: divide-and-conquer unions</a:t>
+              <a:t>every merge appends: allocation</a:t>
             </a:r>
           </a:p>
           <a:p>
@@ -59464,22 +60617,13 @@
               <a:buChar char="•"/>
             </a:pPr>
             <a:r>
-              <a:rPr sz="1800" b="1" i="0">
-                <a:solidFill>
-                  <a:srgbClr val="2B2F36"/>
-                </a:solidFill>
-                <a:latin typeface="Calibri"/>
-              </a:rPr>
-              <a:t>ParlayLib</a:t>
-            </a:r>
-            <a:r>
               <a:rPr sz="1800" b="0" i="0">
                 <a:solidFill>
                   <a:srgbClr val="2B2F36"/>
                 </a:solidFill>
                 <a:latin typeface="Calibri"/>
               </a:rPr>
-              <a:t> for scheduling and primitives</a:t>
+              <a:t>candidates: parents of merged classes</a:t>
             </a:r>
           </a:p>
         </p:txBody>
@@ -59493,7 +60637,7 @@
         <p:spPr>
           <a:xfrm>
             <a:off x="6263640" y="1371600"/>
-            <a:ext cx="5394960" cy="2377440"/>
+            <a:ext cx="5394960" cy="2514600"/>
           </a:xfrm>
           <a:prstGeom prst="roundRect">
             <a:avLst>
@@ -59546,7 +60690,7 @@
                 </a:solidFill>
                 <a:latin typeface="Calibri"/>
               </a:rPr>
-              <a:t>Sequential baseline, tuned</a:t>
+              <a:t>FilterCC</a:t>
             </a:r>
           </a:p>
         </p:txBody>
@@ -59560,7 +60704,7 @@
         <p:spPr>
           <a:xfrm>
             <a:off x="6355080" y="2057400"/>
-            <a:ext cx="5212080" cy="3108960"/>
+            <a:ext cx="5212080" cy="2194560"/>
           </a:xfrm>
           <a:prstGeom prst="rect">
             <a:avLst/>
@@ -59589,16 +60733,7 @@
                 </a:solidFill>
                 <a:latin typeface="Calibri"/>
               </a:rPr>
-              <a:t>worklist algorithm</a:t>
-            </a:r>
-            <a:r>
-              <a:rPr sz="1800" b="0" i="0">
-                <a:solidFill>
-                  <a:srgbClr val="2B2F36"/>
-                </a:solidFill>
-                <a:latin typeface="Calibri"/>
-              </a:rPr>
-              <a:t> of Nieuwenhuis &amp; Oliveras, fastest of three variants</a:t>
+              <a:t>one dirty bit per class</a:t>
             </a:r>
           </a:p>
           <a:p>
@@ -59612,13 +60747,13 @@
               <a:buChar char="•"/>
             </a:pPr>
             <a:r>
-              <a:rPr sz="1800" b="1" i="0">
-                <a:solidFill>
-                  <a:srgbClr val="2B2F36"/>
-                </a:solidFill>
-                <a:latin typeface="Calibri"/>
-              </a:rPr>
-              <a:t>signature tables specialized by arity</a:t>
+              <a:rPr sz="1800" b="0" i="0">
+                <a:solidFill>
+                  <a:srgbClr val="2B2F36"/>
+                </a:solidFill>
+                <a:latin typeface="Calibri"/>
+              </a:rPr>
+              <a:t>a merge marks its classes dirty</a:t>
             </a:r>
           </a:p>
           <a:p>
@@ -59632,13 +60767,33 @@
               <a:buChar char="•"/>
             </a:pPr>
             <a:r>
-              <a:rPr sz="1800" b="1" i="0">
-                <a:solidFill>
-                  <a:srgbClr val="2B2F36"/>
-                </a:solidFill>
-                <a:latin typeface="Calibri"/>
-              </a:rPr>
-              <a:t>bump allocator</a:t>
+              <a:rPr sz="1800" b="0" i="0">
+                <a:solidFill>
+                  <a:srgbClr val="2B2F36"/>
+                </a:solidFill>
+                <a:latin typeface="Calibri"/>
+              </a:rPr>
+              <a:t>candidates: filter all terms for a dirty child</a:t>
+            </a:r>
+          </a:p>
+          <a:p>
+            <a:pPr marL="274320" indent="-237744">
+              <a:spcBef>
+                <a:spcPts val="1000"/>
+              </a:spcBef>
+              <a:buClr>
+                <a:srgbClr val="6B717A"/>
+              </a:buClr>
+              <a:buChar char="•"/>
+            </a:pPr>
+            <a:r>
+              <a:rPr sz="1800" b="0" i="0">
+                <a:solidFill>
+                  <a:srgbClr val="2B2F36"/>
+                </a:solidFill>
+                <a:latin typeface="Calibri"/>
+              </a:rPr>
+              <a:t>racing marks are fine: setting a bit is idempotent</a:t>
             </a:r>
           </a:p>
         </p:txBody>
@@ -59651,8 +60806,8 @@
         </p:nvSpPr>
         <p:spPr>
           <a:xfrm>
-            <a:off x="548640" y="3858768"/>
-            <a:ext cx="11155680" cy="365760"/>
+            <a:off x="548640" y="4114800"/>
+            <a:ext cx="11155680" cy="411480"/>
           </a:xfrm>
           <a:prstGeom prst="rect">
             <a:avLst/>
@@ -59667,48 +60822,54 @@
           <a:p>
             <a:pPr algn="l"/>
             <a:r>
-              <a:rPr sz="1400" b="0" i="0">
+              <a:rPr sz="1800" b="0" i="0">
                 <a:solidFill>
                   <a:srgbClr val="6B717A"/>
                 </a:solidFill>
                 <a:latin typeface="Calibri"/>
               </a:rPr>
-              <a:t>semisort: Gu, Shun, Sun &amp; Blelloch, SPAA 2015   ·   concurrent union-find: Alistarh, Fedorov &amp; Koval, OPODIS 2019</a:t>
-            </a:r>
-          </a:p>
-        </p:txBody>
-      </p:sp>
-      <p:sp>
-        <p:nvSpPr>
-          <p:cNvPr id="13" name="TextBox 12"/>
-          <p:cNvSpPr txBox="1"/>
-          <p:nvPr/>
-        </p:nvSpPr>
-        <p:spPr>
-          <a:xfrm>
-            <a:off x="548640" y="4224528"/>
-            <a:ext cx="11155680" cy="365760"/>
-          </a:xfrm>
-          <a:prstGeom prst="rect">
-            <a:avLst/>
-          </a:prstGeom>
-          <a:noFill/>
-        </p:spPr>
-        <p:txBody>
-          <a:bodyPr wrap="square" anchor="t" lIns="45720" rIns="45720" tIns="27432" bIns="27432">
-            <a:spAutoFit/>
-          </a:bodyPr>
-          <a:lstStyle/>
-          <a:p>
-            <a:pPr algn="l"/>
-            <a:r>
-              <a:rPr sz="1400" b="0" i="0">
-                <a:solidFill>
-                  <a:srgbClr val="6B717A"/>
-                </a:solidFill>
-                <a:latin typeface="Calibri"/>
-              </a:rPr>
-              <a:t>C++ with g++ -O3.  Code and benchmarks: github.com/amarshah10/ParallelEgraph</a:t>
+              <a:t>Same candidates every round, same merges, same proofs</a:t>
+            </a:r>
+          </a:p>
+        </p:txBody>
+      </p:sp>
+      <p:sp>
+        <p:nvSpPr>
+          <p:cNvPr id="13" name="Rounded Rectangle 12"/>
+          <p:cNvSpPr/>
+          <p:nvPr/>
+        </p:nvSpPr>
+        <p:spPr>
+          <a:xfrm>
+            <a:off x="548640" y="5596128"/>
+            <a:ext cx="11064240" cy="694944"/>
+          </a:xfrm>
+          <a:prstGeom prst="roundRect">
+            <a:avLst>
+              <a:gd name="adj" fmla="val 15000"/>
+            </a:avLst>
+          </a:prstGeom>
+          <a:solidFill>
+            <a:srgbClr val="1F2A44"/>
+          </a:solidFill>
+          <a:ln>
+            <a:noFill/>
+          </a:ln>
+          <a:effectLst/>
+        </p:spPr>
+        <p:txBody>
+          <a:bodyPr rtlCol="0" anchor="ctr" lIns="54864" rIns="54864" tIns="27432" bIns="27432" wrap="square"/>
+          <a:lstStyle/>
+          <a:p>
+            <a:pPr algn="ctr"/>
+            <a:r>
+              <a:rPr sz="2200" b="1" i="0">
+                <a:solidFill>
+                  <a:srgbClr val="FFFFFF"/>
+                </a:solidFill>
+                <a:latin typeface="Calibri"/>
+              </a:rPr>
+              <a:t>no allocation, but a scan of every term per round: wins when rounds are few</a:t>
             </a:r>
           </a:p>
         </p:txBody>
@@ -59733,31 +60894,36 @@
       <p:grpSpPr/>
       <p:sp>
         <p:nvSpPr>
-          <p:cNvPr id="2" name="Rectangle 1"/>
-          <p:cNvSpPr/>
-          <p:nvPr/>
-        </p:nvSpPr>
-        <p:spPr>
-          <a:xfrm>
-            <a:off x="0" y="0"/>
-            <a:ext cx="12191695" cy="6858000"/>
+          <p:cNvPr id="2" name="TextBox 1"/>
+          <p:cNvSpPr txBox="1"/>
+          <p:nvPr/>
+        </p:nvSpPr>
+        <p:spPr>
+          <a:xfrm>
+            <a:off x="502920" y="292608"/>
+            <a:ext cx="11155680" cy="731520"/>
           </a:xfrm>
           <a:prstGeom prst="rect">
             <a:avLst/>
           </a:prstGeom>
-          <a:solidFill>
-            <a:srgbClr val="1F2A44"/>
-          </a:solidFill>
-          <a:ln>
-            <a:noFill/>
-          </a:ln>
-          <a:effectLst/>
-        </p:spPr>
-        <p:txBody>
-          <a:bodyPr rtlCol="0" anchor="ctr" lIns="54864" rIns="54864" tIns="27432" bIns="27432" wrap="square"/>
-          <a:lstStyle/>
-          <a:p>
-            <a:pPr algn="ctr"/>
+          <a:noFill/>
+        </p:spPr>
+        <p:txBody>
+          <a:bodyPr wrap="square" anchor="ctr" lIns="45720" rIns="45720" tIns="27432" bIns="27432">
+            <a:spAutoFit/>
+          </a:bodyPr>
+          <a:lstStyle/>
+          <a:p>
+            <a:pPr algn="l"/>
+            <a:r>
+              <a:rPr sz="3000" b="1" i="0">
+                <a:solidFill>
+                  <a:srgbClr val="1F2A44"/>
+                </a:solidFill>
+                <a:latin typeface="Calibri"/>
+              </a:rPr>
+              <a:t>Implementation</a:t>
+            </a:r>
           </a:p>
         </p:txBody>
       </p:sp>
@@ -59769,13 +60935,13 @@
         </p:nvCxnSpPr>
         <p:spPr>
           <a:xfrm>
-            <a:off x="822960" y="3246120"/>
-            <a:ext cx="3017520" cy="0"/>
+            <a:off x="566928" y="1024128"/>
+            <a:ext cx="2176272" cy="0"/>
           </a:xfrm>
           <a:prstGeom prst="line">
             <a:avLst/>
           </a:prstGeom>
-          <a:ln w="38100">
+          <a:ln w="31750">
             <a:solidFill>
               <a:srgbClr val="C8501E"/>
             </a:solidFill>
@@ -59791,43 +60957,8 @@
         </p:nvSpPr>
         <p:spPr>
           <a:xfrm>
-            <a:off x="777240" y="2011680"/>
-            <a:ext cx="10515600" cy="1188720"/>
-          </a:xfrm>
-          <a:prstGeom prst="rect">
-            <a:avLst/>
-          </a:prstGeom>
-          <a:noFill/>
-        </p:spPr>
-        <p:txBody>
-          <a:bodyPr wrap="square" anchor="b" lIns="45720" rIns="45720" tIns="27432" bIns="27432">
-            <a:spAutoFit/>
-          </a:bodyPr>
-          <a:lstStyle/>
-          <a:p>
-            <a:pPr algn="l"/>
-            <a:r>
-              <a:rPr sz="4400" b="1" i="0">
-                <a:solidFill>
-                  <a:srgbClr val="FFFFFF"/>
-                </a:solidFill>
-                <a:latin typeface="Calibri"/>
-              </a:rPr>
-              <a:t>Evaluation</a:t>
-            </a:r>
-          </a:p>
-        </p:txBody>
-      </p:sp>
-      <p:sp>
-        <p:nvSpPr>
-          <p:cNvPr id="5" name="TextBox 4"/>
-          <p:cNvSpPr txBox="1"/>
-          <p:nvPr/>
-        </p:nvSpPr>
-        <p:spPr>
-          <a:xfrm>
-            <a:off x="777240" y="3429000"/>
-            <a:ext cx="10058400" cy="548640"/>
+            <a:off x="11064240" y="6345936"/>
+            <a:ext cx="914400" cy="365760"/>
           </a:xfrm>
           <a:prstGeom prst="rect">
             <a:avLst/>
@@ -59840,29 +60971,29 @@
           </a:bodyPr>
           <a:lstStyle/>
           <a:p>
-            <a:pPr algn="l"/>
-            <a:r>
-              <a:rPr sz="2600" b="1" i="0">
-                <a:solidFill>
-                  <a:srgbClr val="FFFFFF"/>
-                </a:solidFill>
-                <a:latin typeface="Calibri"/>
-              </a:rPr>
-              <a:t>Do real instances have width?</a:t>
-            </a:r>
-          </a:p>
-        </p:txBody>
-      </p:sp>
-      <p:sp>
-        <p:nvSpPr>
-          <p:cNvPr id="6" name="TextBox 5"/>
+            <a:pPr algn="r"/>
+            <a:r>
+              <a:rPr sz="1500" b="0" i="0">
+                <a:solidFill>
+                  <a:srgbClr val="2B2F36"/>
+                </a:solidFill>
+                <a:latin typeface="Calibri"/>
+              </a:rPr>
+              <a:t>51</a:t>
+            </a:r>
+          </a:p>
+        </p:txBody>
+      </p:sp>
+      <p:sp>
+        <p:nvSpPr>
+          <p:cNvPr id="5" name="TextBox 4"/>
           <p:cNvSpPr txBox="1"/>
           <p:nvPr/>
         </p:nvSpPr>
         <p:spPr>
           <a:xfrm>
-            <a:off x="777240" y="4023360"/>
-            <a:ext cx="10058400" cy="548640"/>
+            <a:off x="502920" y="6400800"/>
+            <a:ext cx="5486400" cy="320040"/>
           </a:xfrm>
           <a:prstGeom prst="rect">
             <a:avLst/>
@@ -59877,13 +61008,419 @@
           <a:p>
             <a:pPr algn="l"/>
             <a:r>
-              <a:rPr sz="2200" b="0" i="0">
-                <a:solidFill>
-                  <a:srgbClr val="C9D3E6"/>
-                </a:solidFill>
-                <a:latin typeface="Calibri"/>
-              </a:rPr>
-              <a:t>random, synthetic, and circuit-equivalence benchmarks</a:t>
+              <a:rPr sz="1100" b="0" i="0">
+                <a:solidFill>
+                  <a:srgbClr val="6B717A"/>
+                </a:solidFill>
+                <a:latin typeface="Calibri"/>
+              </a:rPr>
+              <a:t>Parallelizing Congruence Closure  ·  FMCAD 2026</a:t>
+            </a:r>
+          </a:p>
+        </p:txBody>
+      </p:sp>
+      <p:sp>
+        <p:nvSpPr>
+          <p:cNvPr id="6" name="Rounded Rectangle 5"/>
+          <p:cNvSpPr/>
+          <p:nvPr/>
+        </p:nvSpPr>
+        <p:spPr>
+          <a:xfrm>
+            <a:off x="548640" y="1371600"/>
+            <a:ext cx="5486400" cy="2377440"/>
+          </a:xfrm>
+          <a:prstGeom prst="roundRect">
+            <a:avLst>
+              <a:gd name="adj" fmla="val 15000"/>
+            </a:avLst>
+          </a:prstGeom>
+          <a:solidFill>
+            <a:srgbClr val="F4F5F7"/>
+          </a:solidFill>
+          <a:ln>
+            <a:noFill/>
+          </a:ln>
+          <a:effectLst/>
+        </p:spPr>
+        <p:txBody>
+          <a:bodyPr rtlCol="0" anchor="ctr" lIns="54864" rIns="54864" tIns="27432" bIns="27432" wrap="square"/>
+          <a:lstStyle/>
+          <a:p>
+            <a:pPr algn="ctr"/>
+          </a:p>
+        </p:txBody>
+      </p:sp>
+      <p:sp>
+        <p:nvSpPr>
+          <p:cNvPr id="7" name="TextBox 6"/>
+          <p:cNvSpPr txBox="1"/>
+          <p:nvPr/>
+        </p:nvSpPr>
+        <p:spPr>
+          <a:xfrm>
+            <a:off x="731520" y="1463040"/>
+            <a:ext cx="5120640" cy="411480"/>
+          </a:xfrm>
+          <a:prstGeom prst="rect">
+            <a:avLst/>
+          </a:prstGeom>
+          <a:noFill/>
+        </p:spPr>
+        <p:txBody>
+          <a:bodyPr wrap="square" anchor="t" lIns="45720" rIns="45720" tIns="27432" bIns="27432">
+            <a:spAutoFit/>
+          </a:bodyPr>
+          <a:lstStyle/>
+          <a:p>
+            <a:pPr algn="l"/>
+            <a:r>
+              <a:rPr sz="2100" b="1" i="0">
+                <a:solidFill>
+                  <a:srgbClr val="1F2A44"/>
+                </a:solidFill>
+                <a:latin typeface="Calibri"/>
+              </a:rPr>
+              <a:t>Parallel algorithms</a:t>
+            </a:r>
+          </a:p>
+        </p:txBody>
+      </p:sp>
+      <p:sp>
+        <p:nvSpPr>
+          <p:cNvPr id="8" name="TextBox 7"/>
+          <p:cNvSpPr txBox="1"/>
+          <p:nvPr/>
+        </p:nvSpPr>
+        <p:spPr>
+          <a:xfrm>
+            <a:off x="640080" y="2057400"/>
+            <a:ext cx="5303520" cy="3108960"/>
+          </a:xfrm>
+          <a:prstGeom prst="rect">
+            <a:avLst/>
+          </a:prstGeom>
+          <a:noFill/>
+        </p:spPr>
+        <p:txBody>
+          <a:bodyPr wrap="square" lIns="45720" rIns="45720">
+            <a:spAutoFit/>
+          </a:bodyPr>
+          <a:lstStyle/>
+          <a:p>
+            <a:pPr marL="274320" indent="-237744">
+              <a:spcBef>
+                <a:spcPts val="1000"/>
+              </a:spcBef>
+              <a:buClr>
+                <a:srgbClr val="6B717A"/>
+              </a:buClr>
+              <a:buChar char="•"/>
+            </a:pPr>
+            <a:r>
+              <a:rPr sz="1800" b="1" i="0">
+                <a:solidFill>
+                  <a:srgbClr val="2B2F36"/>
+                </a:solidFill>
+                <a:latin typeface="Calibri"/>
+              </a:rPr>
+              <a:t>grouping</a:t>
+            </a:r>
+            <a:r>
+              <a:rPr sz="1800" b="0" i="0">
+                <a:solidFill>
+                  <a:srgbClr val="2B2F36"/>
+                </a:solidFill>
+                <a:latin typeface="Calibri"/>
+              </a:rPr>
+              <a:t>: integer sort on signature hashes</a:t>
+            </a:r>
+          </a:p>
+          <a:p>
+            <a:pPr marL="274320" indent="-237744">
+              <a:spcBef>
+                <a:spcPts val="1000"/>
+              </a:spcBef>
+              <a:buClr>
+                <a:srgbClr val="6B717A"/>
+              </a:buClr>
+              <a:buChar char="•"/>
+            </a:pPr>
+            <a:r>
+              <a:rPr sz="1800" b="1" i="0">
+                <a:solidFill>
+                  <a:srgbClr val="2B2F36"/>
+                </a:solidFill>
+                <a:latin typeface="Calibri"/>
+              </a:rPr>
+              <a:t>merging a group</a:t>
+            </a:r>
+            <a:r>
+              <a:rPr sz="1800" b="0" i="0">
+                <a:solidFill>
+                  <a:srgbClr val="2B2F36"/>
+                </a:solidFill>
+                <a:latin typeface="Calibri"/>
+              </a:rPr>
+              <a:t>: divide-and-conquer unions</a:t>
+            </a:r>
+          </a:p>
+          <a:p>
+            <a:pPr marL="274320" indent="-237744">
+              <a:spcBef>
+                <a:spcPts val="1000"/>
+              </a:spcBef>
+              <a:buClr>
+                <a:srgbClr val="6B717A"/>
+              </a:buClr>
+              <a:buChar char="•"/>
+            </a:pPr>
+            <a:r>
+              <a:rPr sz="1800" b="1" i="0">
+                <a:solidFill>
+                  <a:srgbClr val="2B2F36"/>
+                </a:solidFill>
+                <a:latin typeface="Calibri"/>
+              </a:rPr>
+              <a:t>ParlayLib</a:t>
+            </a:r>
+            <a:r>
+              <a:rPr sz="1800" b="0" i="0">
+                <a:solidFill>
+                  <a:srgbClr val="2B2F36"/>
+                </a:solidFill>
+                <a:latin typeface="Calibri"/>
+              </a:rPr>
+              <a:t> for scheduling and primitives</a:t>
+            </a:r>
+          </a:p>
+        </p:txBody>
+      </p:sp>
+      <p:sp>
+        <p:nvSpPr>
+          <p:cNvPr id="9" name="Rounded Rectangle 8"/>
+          <p:cNvSpPr/>
+          <p:nvPr/>
+        </p:nvSpPr>
+        <p:spPr>
+          <a:xfrm>
+            <a:off x="6263640" y="1371600"/>
+            <a:ext cx="5394960" cy="2377440"/>
+          </a:xfrm>
+          <a:prstGeom prst="roundRect">
+            <a:avLst>
+              <a:gd name="adj" fmla="val 15000"/>
+            </a:avLst>
+          </a:prstGeom>
+          <a:solidFill>
+            <a:srgbClr val="F4F5F7"/>
+          </a:solidFill>
+          <a:ln>
+            <a:noFill/>
+          </a:ln>
+          <a:effectLst/>
+        </p:spPr>
+        <p:txBody>
+          <a:bodyPr rtlCol="0" anchor="ctr" lIns="54864" rIns="54864" tIns="27432" bIns="27432" wrap="square"/>
+          <a:lstStyle/>
+          <a:p>
+            <a:pPr algn="ctr"/>
+          </a:p>
+        </p:txBody>
+      </p:sp>
+      <p:sp>
+        <p:nvSpPr>
+          <p:cNvPr id="10" name="TextBox 9"/>
+          <p:cNvSpPr txBox="1"/>
+          <p:nvPr/>
+        </p:nvSpPr>
+        <p:spPr>
+          <a:xfrm>
+            <a:off x="6446520" y="1463040"/>
+            <a:ext cx="5029200" cy="411480"/>
+          </a:xfrm>
+          <a:prstGeom prst="rect">
+            <a:avLst/>
+          </a:prstGeom>
+          <a:noFill/>
+        </p:spPr>
+        <p:txBody>
+          <a:bodyPr wrap="square" anchor="t" lIns="45720" rIns="45720" tIns="27432" bIns="27432">
+            <a:spAutoFit/>
+          </a:bodyPr>
+          <a:lstStyle/>
+          <a:p>
+            <a:pPr algn="l"/>
+            <a:r>
+              <a:rPr sz="2100" b="1" i="0">
+                <a:solidFill>
+                  <a:srgbClr val="1F2A44"/>
+                </a:solidFill>
+                <a:latin typeface="Calibri"/>
+              </a:rPr>
+              <a:t>Sequential baseline, tuned</a:t>
+            </a:r>
+          </a:p>
+        </p:txBody>
+      </p:sp>
+      <p:sp>
+        <p:nvSpPr>
+          <p:cNvPr id="11" name="TextBox 10"/>
+          <p:cNvSpPr txBox="1"/>
+          <p:nvPr/>
+        </p:nvSpPr>
+        <p:spPr>
+          <a:xfrm>
+            <a:off x="6355080" y="2057400"/>
+            <a:ext cx="5212080" cy="3108960"/>
+          </a:xfrm>
+          <a:prstGeom prst="rect">
+            <a:avLst/>
+          </a:prstGeom>
+          <a:noFill/>
+        </p:spPr>
+        <p:txBody>
+          <a:bodyPr wrap="square" lIns="45720" rIns="45720">
+            <a:spAutoFit/>
+          </a:bodyPr>
+          <a:lstStyle/>
+          <a:p>
+            <a:pPr marL="274320" indent="-237744">
+              <a:spcBef>
+                <a:spcPts val="1000"/>
+              </a:spcBef>
+              <a:buClr>
+                <a:srgbClr val="6B717A"/>
+              </a:buClr>
+              <a:buChar char="•"/>
+            </a:pPr>
+            <a:r>
+              <a:rPr sz="1800" b="1" i="0">
+                <a:solidFill>
+                  <a:srgbClr val="2B2F36"/>
+                </a:solidFill>
+                <a:latin typeface="Calibri"/>
+              </a:rPr>
+              <a:t>worklist algorithm</a:t>
+            </a:r>
+            <a:r>
+              <a:rPr sz="1800" b="0" i="0">
+                <a:solidFill>
+                  <a:srgbClr val="2B2F36"/>
+                </a:solidFill>
+                <a:latin typeface="Calibri"/>
+              </a:rPr>
+              <a:t> of Nieuwenhuis &amp; Oliveras, fastest of three variants</a:t>
+            </a:r>
+          </a:p>
+          <a:p>
+            <a:pPr marL="274320" indent="-237744">
+              <a:spcBef>
+                <a:spcPts val="1000"/>
+              </a:spcBef>
+              <a:buClr>
+                <a:srgbClr val="6B717A"/>
+              </a:buClr>
+              <a:buChar char="•"/>
+            </a:pPr>
+            <a:r>
+              <a:rPr sz="1800" b="1" i="0">
+                <a:solidFill>
+                  <a:srgbClr val="2B2F36"/>
+                </a:solidFill>
+                <a:latin typeface="Calibri"/>
+              </a:rPr>
+              <a:t>signature tables specialized by arity</a:t>
+            </a:r>
+          </a:p>
+          <a:p>
+            <a:pPr marL="274320" indent="-237744">
+              <a:spcBef>
+                <a:spcPts val="1000"/>
+              </a:spcBef>
+              <a:buClr>
+                <a:srgbClr val="6B717A"/>
+              </a:buClr>
+              <a:buChar char="•"/>
+            </a:pPr>
+            <a:r>
+              <a:rPr sz="1800" b="1" i="0">
+                <a:solidFill>
+                  <a:srgbClr val="2B2F36"/>
+                </a:solidFill>
+                <a:latin typeface="Calibri"/>
+              </a:rPr>
+              <a:t>bump allocator</a:t>
+            </a:r>
+          </a:p>
+        </p:txBody>
+      </p:sp>
+      <p:sp>
+        <p:nvSpPr>
+          <p:cNvPr id="12" name="TextBox 11"/>
+          <p:cNvSpPr txBox="1"/>
+          <p:nvPr/>
+        </p:nvSpPr>
+        <p:spPr>
+          <a:xfrm>
+            <a:off x="548640" y="3858768"/>
+            <a:ext cx="11155680" cy="365760"/>
+          </a:xfrm>
+          <a:prstGeom prst="rect">
+            <a:avLst/>
+          </a:prstGeom>
+          <a:noFill/>
+        </p:spPr>
+        <p:txBody>
+          <a:bodyPr wrap="square" anchor="t" lIns="45720" rIns="45720" tIns="27432" bIns="27432">
+            <a:spAutoFit/>
+          </a:bodyPr>
+          <a:lstStyle/>
+          <a:p>
+            <a:pPr algn="l"/>
+            <a:r>
+              <a:rPr sz="1400" b="0" i="0">
+                <a:solidFill>
+                  <a:srgbClr val="6B717A"/>
+                </a:solidFill>
+                <a:latin typeface="Calibri"/>
+              </a:rPr>
+              <a:t>semisort: Gu, Shun, Sun &amp; Blelloch, SPAA 2015   ·   concurrent union-find: Alistarh, Fedorov &amp; Koval, OPODIS 2019</a:t>
+            </a:r>
+          </a:p>
+        </p:txBody>
+      </p:sp>
+      <p:sp>
+        <p:nvSpPr>
+          <p:cNvPr id="13" name="TextBox 12"/>
+          <p:cNvSpPr txBox="1"/>
+          <p:nvPr/>
+        </p:nvSpPr>
+        <p:spPr>
+          <a:xfrm>
+            <a:off x="548640" y="4224528"/>
+            <a:ext cx="11155680" cy="365760"/>
+          </a:xfrm>
+          <a:prstGeom prst="rect">
+            <a:avLst/>
+          </a:prstGeom>
+          <a:noFill/>
+        </p:spPr>
+        <p:txBody>
+          <a:bodyPr wrap="square" anchor="t" lIns="45720" rIns="45720" tIns="27432" bIns="27432">
+            <a:spAutoFit/>
+          </a:bodyPr>
+          <a:lstStyle/>
+          <a:p>
+            <a:pPr algn="l"/>
+            <a:r>
+              <a:rPr sz="1400" b="0" i="0">
+                <a:solidFill>
+                  <a:srgbClr val="6B717A"/>
+                </a:solidFill>
+                <a:latin typeface="Calibri"/>
+              </a:rPr>
+              <a:t>C++ with g++ -O3.  Code and benchmarks: github.com/amarshah10/ParallelEgraph</a:t>
             </a:r>
           </a:p>
         </p:txBody>
@@ -59897,6 +61434,181 @@
 </file>
 
 <file path=ppt/slides/slide52.xml><?xml version="1.0" encoding="utf-8"?>
+<p:sld xmlns:a="http://schemas.openxmlformats.org/drawingml/2006/main" xmlns:p="http://schemas.openxmlformats.org/presentationml/2006/main" xmlns:r="http://schemas.openxmlformats.org/officeDocument/2006/relationships">
+  <p:cSld>
+    <p:spTree>
+      <p:nvGrpSpPr>
+        <p:cNvPr id="1" name=""/>
+        <p:cNvGrpSpPr/>
+        <p:nvPr/>
+      </p:nvGrpSpPr>
+      <p:grpSpPr/>
+      <p:sp>
+        <p:nvSpPr>
+          <p:cNvPr id="2" name="Rectangle 1"/>
+          <p:cNvSpPr/>
+          <p:nvPr/>
+        </p:nvSpPr>
+        <p:spPr>
+          <a:xfrm>
+            <a:off x="0" y="0"/>
+            <a:ext cx="12191695" cy="6858000"/>
+          </a:xfrm>
+          <a:prstGeom prst="rect">
+            <a:avLst/>
+          </a:prstGeom>
+          <a:solidFill>
+            <a:srgbClr val="1F2A44"/>
+          </a:solidFill>
+          <a:ln>
+            <a:noFill/>
+          </a:ln>
+          <a:effectLst/>
+        </p:spPr>
+        <p:txBody>
+          <a:bodyPr rtlCol="0" anchor="ctr" lIns="54864" rIns="54864" tIns="27432" bIns="27432" wrap="square"/>
+          <a:lstStyle/>
+          <a:p>
+            <a:pPr algn="ctr"/>
+          </a:p>
+        </p:txBody>
+      </p:sp>
+      <p:cxnSp>
+        <p:nvCxnSpPr>
+          <p:cNvPr id="3" name="Connector 2"/>
+          <p:cNvCxnSpPr/>
+          <p:nvPr/>
+        </p:nvCxnSpPr>
+        <p:spPr>
+          <a:xfrm>
+            <a:off x="822960" y="3246120"/>
+            <a:ext cx="3017520" cy="0"/>
+          </a:xfrm>
+          <a:prstGeom prst="line">
+            <a:avLst/>
+          </a:prstGeom>
+          <a:ln w="38100">
+            <a:solidFill>
+              <a:srgbClr val="C8501E"/>
+            </a:solidFill>
+          </a:ln>
+          <a:effectLst/>
+        </p:spPr>
+      </p:cxnSp>
+      <p:sp>
+        <p:nvSpPr>
+          <p:cNvPr id="4" name="TextBox 3"/>
+          <p:cNvSpPr txBox="1"/>
+          <p:nvPr/>
+        </p:nvSpPr>
+        <p:spPr>
+          <a:xfrm>
+            <a:off x="777240" y="2011680"/>
+            <a:ext cx="10515600" cy="1188720"/>
+          </a:xfrm>
+          <a:prstGeom prst="rect">
+            <a:avLst/>
+          </a:prstGeom>
+          <a:noFill/>
+        </p:spPr>
+        <p:txBody>
+          <a:bodyPr wrap="square" anchor="b" lIns="45720" rIns="45720" tIns="27432" bIns="27432">
+            <a:spAutoFit/>
+          </a:bodyPr>
+          <a:lstStyle/>
+          <a:p>
+            <a:pPr algn="l"/>
+            <a:r>
+              <a:rPr sz="4400" b="1" i="0">
+                <a:solidFill>
+                  <a:srgbClr val="FFFFFF"/>
+                </a:solidFill>
+                <a:latin typeface="Calibri"/>
+              </a:rPr>
+              <a:t>Evaluation</a:t>
+            </a:r>
+          </a:p>
+        </p:txBody>
+      </p:sp>
+      <p:sp>
+        <p:nvSpPr>
+          <p:cNvPr id="5" name="TextBox 4"/>
+          <p:cNvSpPr txBox="1"/>
+          <p:nvPr/>
+        </p:nvSpPr>
+        <p:spPr>
+          <a:xfrm>
+            <a:off x="777240" y="3429000"/>
+            <a:ext cx="10058400" cy="548640"/>
+          </a:xfrm>
+          <a:prstGeom prst="rect">
+            <a:avLst/>
+          </a:prstGeom>
+          <a:noFill/>
+        </p:spPr>
+        <p:txBody>
+          <a:bodyPr wrap="square" anchor="t" lIns="45720" rIns="45720" tIns="27432" bIns="27432">
+            <a:spAutoFit/>
+          </a:bodyPr>
+          <a:lstStyle/>
+          <a:p>
+            <a:pPr algn="l"/>
+            <a:r>
+              <a:rPr sz="2600" b="1" i="0">
+                <a:solidFill>
+                  <a:srgbClr val="FFFFFF"/>
+                </a:solidFill>
+                <a:latin typeface="Calibri"/>
+              </a:rPr>
+              <a:t>Do real instances have width?</a:t>
+            </a:r>
+          </a:p>
+        </p:txBody>
+      </p:sp>
+      <p:sp>
+        <p:nvSpPr>
+          <p:cNvPr id="6" name="TextBox 5"/>
+          <p:cNvSpPr txBox="1"/>
+          <p:nvPr/>
+        </p:nvSpPr>
+        <p:spPr>
+          <a:xfrm>
+            <a:off x="777240" y="4023360"/>
+            <a:ext cx="10058400" cy="548640"/>
+          </a:xfrm>
+          <a:prstGeom prst="rect">
+            <a:avLst/>
+          </a:prstGeom>
+          <a:noFill/>
+        </p:spPr>
+        <p:txBody>
+          <a:bodyPr wrap="square" anchor="t" lIns="45720" rIns="45720" tIns="27432" bIns="27432">
+            <a:spAutoFit/>
+          </a:bodyPr>
+          <a:lstStyle/>
+          <a:p>
+            <a:pPr algn="l"/>
+            <a:r>
+              <a:rPr sz="2200" b="0" i="0">
+                <a:solidFill>
+                  <a:srgbClr val="C9D3E6"/>
+                </a:solidFill>
+                <a:latin typeface="Calibri"/>
+              </a:rPr>
+              <a:t>random, synthetic, and circuit-equivalence benchmarks</a:t>
+            </a:r>
+          </a:p>
+        </p:txBody>
+      </p:sp>
+    </p:spTree>
+  </p:cSld>
+  <p:clrMapOvr>
+    <a:masterClrMapping/>
+  </p:clrMapOvr>
+</p:sld>
+</file>
+
+<file path=ppt/slides/slide53.xml><?xml version="1.0" encoding="utf-8"?>
 <p:sld xmlns:a="http://schemas.openxmlformats.org/drawingml/2006/main" xmlns:p="http://schemas.openxmlformats.org/presentationml/2006/main" xmlns:r="http://schemas.openxmlformats.org/officeDocument/2006/relationships">
   <p:cSld>
     <p:spTree>

--- a/slides/parallelcc-part1.pptx
+++ b/slides/parallelcc-part1.pptx
@@ -3074,7 +3074,7 @@
           <a:lstStyle/>
           <a:p>
             <a:r>
-              <a:t>Same example, same rings as the schedule. Round 0 is the input: union each pair of equated wires, all five at once. No congruence yet, just the equalities we were handed.</a:t>
+              <a:t>Same example. Round 0 is the input: union each pair of equated wires, all five at once. No congruence yet, just the equalities we were handed. The gates are greyed out because nothing happens to them this round.</a:t>
             </a:r>
           </a:p>
         </p:txBody>
@@ -3144,7 +3144,7 @@
           <a:lstStyle/>
           <a:p>
             <a:r>
-              <a:t>Round 1. Phase one, candidates: the first round considers every gate, in amber.</a:t>
+              <a:t>Round 1, phase one: who might have become congruent? The first round considers every gate, so all six are candidates, in yellow.</a:t>
             </a:r>
           </a:p>
         </p:txBody>
@@ -3214,7 +3214,7 @@
           <a:lstStyle/>
           <a:p>
             <a:r>
-              <a:t>Phase two, group them by signature: symbol plus the class of each child, written in brackets above each purple group. The ANDs share a key, the XORs share a key, the ITEs do not yet because a1 and a2 are still in different classes. The grouping is a semisort. Say out loud that this is the step that changes: the sequential algorithm looks each signature up in a hash table, one at a time; here all the signatures of the round are sorted together, in one data-parallel step.</a:t>
+              <a:t>Phase two: group by signature, the symbol plus the class of each child. Same colour, same signature. The two ANDs match: both are AND of the r class and the s class. The two XORs match. The two ITEs do not, because a1 and a2 are still in different classes, so they stay uncoloured. This grouping is the semisort. Say out loud that this is the step that changes from the sequential algorithm: no hash table lookups one at a time, all the signatures of the round sorted together.</a:t>
             </a:r>
           </a:p>
         </p:txBody>
@@ -3284,7 +3284,7 @@
           <a:lstStyle/>
           <a:p>
             <a:r>
-              <a:t>Phase three, merge: both two-member groups merge, concurrently. This is where the parallel run differs from the hand trace: two unions in one round.</a:t>
+              <a:t>Phase three: merge every group, concurrently. Two unions in one round; this is where the parallel run differs from the hand trace.</a:t>
             </a:r>
           </a:p>
         </p:txBody>
@@ -3354,7 +3354,7 @@
           <a:lstStyle/>
           <a:p>
             <a:r>
-              <a:t>Round 2. Candidates are the parents of what just merged: the two ITEs. Their keys now agree, so they form one group.</a:t>
+              <a:t>Round 2. Candidates are the parents of what just merged: the two ITEs. Their signatures now agree, one group.</a:t>
             </a:r>
           </a:p>
         </p:txBody>
@@ -3494,7 +3494,7 @@
           <a:lstStyle/>
           <a:p>
             <a:r>
-              <a:t>The ITEs have no parents, so round 3 has no candidates and the loop stops. Eight merges in three rounds, and the rings are exactly the bulk-synchronous schedule from before: ParentCC found all of the available parallelism.</a:t>
+              <a:t>The ITEs have no parents, so round 3 has no candidates and the loop stops. Eight merges in three rounds, and the rounds are exactly the schedule from before: ParentCC found all of the available parallelism.</a:t>
             </a:r>
           </a:p>
         </p:txBody>
@@ -14853,7 +14853,7 @@
           </a:solidFill>
           <a:ln w="12700">
             <a:solidFill>
-              <a:srgbClr val="4A4F57"/>
+              <a:srgbClr val="C9CDD3"/>
             </a:solidFill>
           </a:ln>
           <a:effectLst/>
@@ -14896,7 +14896,7 @@
           </a:solidFill>
           <a:ln w="12700">
             <a:solidFill>
-              <a:srgbClr val="4A4F57"/>
+              <a:srgbClr val="C9CDD3"/>
             </a:solidFill>
           </a:ln>
           <a:effectLst/>
@@ -14939,7 +14939,7 @@
           </a:solidFill>
           <a:ln w="12700">
             <a:solidFill>
-              <a:srgbClr val="4A4F57"/>
+              <a:srgbClr val="C9CDD3"/>
             </a:solidFill>
           </a:ln>
           <a:effectLst/>
@@ -14982,7 +14982,7 @@
           </a:solidFill>
           <a:ln w="12700">
             <a:solidFill>
-              <a:srgbClr val="4A4F57"/>
+              <a:srgbClr val="C9CDD3"/>
             </a:solidFill>
           </a:ln>
           <a:effectLst/>
@@ -15025,7 +15025,7 @@
           </a:solidFill>
           <a:ln w="12700">
             <a:solidFill>
-              <a:srgbClr val="4A4F57"/>
+              <a:srgbClr val="C9CDD3"/>
             </a:solidFill>
           </a:ln>
           <a:effectLst/>
@@ -15111,7 +15111,7 @@
           </a:solidFill>
           <a:ln w="12700">
             <a:solidFill>
-              <a:srgbClr val="4A4F57"/>
+              <a:srgbClr val="C9CDD3"/>
             </a:solidFill>
           </a:ln>
           <a:effectLst/>
@@ -15154,7 +15154,7 @@
           </a:solidFill>
           <a:ln w="12700">
             <a:solidFill>
-              <a:srgbClr val="4A4F57"/>
+              <a:srgbClr val="C9CDD3"/>
             </a:solidFill>
           </a:ln>
           <a:effectLst/>
@@ -15197,7 +15197,7 @@
           </a:solidFill>
           <a:ln w="12700">
             <a:solidFill>
-              <a:srgbClr val="4A4F57"/>
+              <a:srgbClr val="C9CDD3"/>
             </a:solidFill>
           </a:ln>
           <a:effectLst/>
@@ -15240,7 +15240,7 @@
           </a:solidFill>
           <a:ln w="12700">
             <a:solidFill>
-              <a:srgbClr val="4A4F57"/>
+              <a:srgbClr val="C9CDD3"/>
             </a:solidFill>
           </a:ln>
           <a:effectLst/>
@@ -15283,7 +15283,7 @@
           </a:solidFill>
           <a:ln w="12700">
             <a:solidFill>
-              <a:srgbClr val="4A4F57"/>
+              <a:srgbClr val="C9CDD3"/>
             </a:solidFill>
           </a:ln>
           <a:effectLst/>
@@ -15439,7 +15439,7 @@
           </a:solidFill>
           <a:ln w="12700">
             <a:solidFill>
-              <a:srgbClr val="4A4F57"/>
+              <a:srgbClr val="C9CDD3"/>
             </a:solidFill>
           </a:ln>
           <a:effectLst/>
@@ -15595,7 +15595,7 @@
           </a:solidFill>
           <a:ln w="12700">
             <a:solidFill>
-              <a:srgbClr val="4A4F57"/>
+              <a:srgbClr val="C9CDD3"/>
             </a:solidFill>
           </a:ln>
           <a:effectLst/>
@@ -16273,7 +16273,7 @@
           </a:solidFill>
           <a:ln w="12700">
             <a:solidFill>
-              <a:srgbClr val="4A4F57"/>
+              <a:srgbClr val="C9CDD3"/>
             </a:solidFill>
           </a:ln>
           <a:effectLst/>
@@ -16316,7 +16316,7 @@
           </a:solidFill>
           <a:ln w="12700">
             <a:solidFill>
-              <a:srgbClr val="4A4F57"/>
+              <a:srgbClr val="C9CDD3"/>
             </a:solidFill>
           </a:ln>
           <a:effectLst/>
@@ -16359,7 +16359,7 @@
           </a:solidFill>
           <a:ln w="12700">
             <a:solidFill>
-              <a:srgbClr val="4A4F57"/>
+              <a:srgbClr val="C9CDD3"/>
             </a:solidFill>
           </a:ln>
           <a:effectLst/>
@@ -16402,7 +16402,7 @@
           </a:solidFill>
           <a:ln w="12700">
             <a:solidFill>
-              <a:srgbClr val="4A4F57"/>
+              <a:srgbClr val="C9CDD3"/>
             </a:solidFill>
           </a:ln>
           <a:effectLst/>
@@ -16445,7 +16445,7 @@
           </a:solidFill>
           <a:ln w="12700">
             <a:solidFill>
-              <a:srgbClr val="4A4F57"/>
+              <a:srgbClr val="C9CDD3"/>
             </a:solidFill>
           </a:ln>
           <a:effectLst/>
@@ -16531,7 +16531,7 @@
           </a:solidFill>
           <a:ln w="12700">
             <a:solidFill>
-              <a:srgbClr val="4A4F57"/>
+              <a:srgbClr val="C9CDD3"/>
             </a:solidFill>
           </a:ln>
           <a:effectLst/>
@@ -16574,7 +16574,7 @@
           </a:solidFill>
           <a:ln w="12700">
             <a:solidFill>
-              <a:srgbClr val="4A4F57"/>
+              <a:srgbClr val="C9CDD3"/>
             </a:solidFill>
           </a:ln>
           <a:effectLst/>
@@ -16617,7 +16617,7 @@
           </a:solidFill>
           <a:ln w="12700">
             <a:solidFill>
-              <a:srgbClr val="4A4F57"/>
+              <a:srgbClr val="C9CDD3"/>
             </a:solidFill>
           </a:ln>
           <a:effectLst/>
@@ -16660,7 +16660,7 @@
           </a:solidFill>
           <a:ln w="12700">
             <a:solidFill>
-              <a:srgbClr val="4A4F57"/>
+              <a:srgbClr val="C9CDD3"/>
             </a:solidFill>
           </a:ln>
           <a:effectLst/>
@@ -16703,7 +16703,7 @@
           </a:solidFill>
           <a:ln w="12700">
             <a:solidFill>
-              <a:srgbClr val="4A4F57"/>
+              <a:srgbClr val="C9CDD3"/>
             </a:solidFill>
           </a:ln>
           <a:effectLst/>
@@ -16859,7 +16859,7 @@
           </a:solidFill>
           <a:ln w="12700">
             <a:solidFill>
-              <a:srgbClr val="4A4F57"/>
+              <a:srgbClr val="C9CDD3"/>
             </a:solidFill>
           </a:ln>
           <a:effectLst/>
@@ -17015,7 +17015,7 @@
           </a:solidFill>
           <a:ln w="12700">
             <a:solidFill>
-              <a:srgbClr val="4A4F57"/>
+              <a:srgbClr val="C9CDD3"/>
             </a:solidFill>
           </a:ln>
           <a:effectLst/>
@@ -45968,7 +45968,7 @@
           </a:prstGeom>
           <a:ln w="15875">
             <a:solidFill>
-              <a:srgbClr val="8A8F98"/>
+              <a:srgbClr val="C9CDD3"/>
             </a:solidFill>
           </a:ln>
           <a:effectLst/>
@@ -45990,7 +45990,7 @@
           </a:prstGeom>
           <a:ln w="15875">
             <a:solidFill>
-              <a:srgbClr val="8A8F98"/>
+              <a:srgbClr val="C9CDD3"/>
             </a:solidFill>
           </a:ln>
           <a:effectLst/>
@@ -46012,7 +46012,7 @@
           </a:prstGeom>
           <a:ln w="15875">
             <a:solidFill>
-              <a:srgbClr val="8A8F98"/>
+              <a:srgbClr val="C9CDD3"/>
             </a:solidFill>
           </a:ln>
           <a:effectLst/>
@@ -46034,7 +46034,7 @@
           </a:prstGeom>
           <a:ln w="15875">
             <a:solidFill>
-              <a:srgbClr val="8A8F98"/>
+              <a:srgbClr val="C9CDD3"/>
             </a:solidFill>
           </a:ln>
           <a:effectLst/>
@@ -46056,7 +46056,7 @@
           </a:prstGeom>
           <a:ln w="15875">
             <a:solidFill>
-              <a:srgbClr val="8A8F98"/>
+              <a:srgbClr val="C9CDD3"/>
             </a:solidFill>
           </a:ln>
           <a:effectLst/>
@@ -46078,7 +46078,7 @@
           </a:prstGeom>
           <a:ln w="15875">
             <a:solidFill>
-              <a:srgbClr val="8A8F98"/>
+              <a:srgbClr val="C9CDD3"/>
             </a:solidFill>
           </a:ln>
           <a:effectLst/>
@@ -46100,7 +46100,7 @@
           </a:prstGeom>
           <a:ln w="15875">
             <a:solidFill>
-              <a:srgbClr val="8A8F98"/>
+              <a:srgbClr val="C9CDD3"/>
             </a:solidFill>
           </a:ln>
           <a:effectLst/>
@@ -46122,7 +46122,7 @@
           </a:prstGeom>
           <a:ln w="15875">
             <a:solidFill>
-              <a:srgbClr val="8A8F98"/>
+              <a:srgbClr val="C9CDD3"/>
             </a:solidFill>
           </a:ln>
           <a:effectLst/>
@@ -46144,7 +46144,7 @@
           </a:prstGeom>
           <a:ln w="15875">
             <a:solidFill>
-              <a:srgbClr val="8A8F98"/>
+              <a:srgbClr val="C9CDD3"/>
             </a:solidFill>
           </a:ln>
           <a:effectLst/>
@@ -46166,7 +46166,7 @@
           </a:prstGeom>
           <a:ln w="15875">
             <a:solidFill>
-              <a:srgbClr val="8A8F98"/>
+              <a:srgbClr val="C9CDD3"/>
             </a:solidFill>
           </a:ln>
           <a:effectLst/>
@@ -46188,7 +46188,7 @@
           </a:prstGeom>
           <a:ln w="15875">
             <a:solidFill>
-              <a:srgbClr val="8A8F98"/>
+              <a:srgbClr val="C9CDD3"/>
             </a:solidFill>
           </a:ln>
           <a:effectLst/>
@@ -46210,7 +46210,7 @@
           </a:prstGeom>
           <a:ln w="15875">
             <a:solidFill>
-              <a:srgbClr val="8A8F98"/>
+              <a:srgbClr val="C9CDD3"/>
             </a:solidFill>
           </a:ln>
           <a:effectLst/>
@@ -46232,7 +46232,7 @@
           </a:prstGeom>
           <a:ln w="15875">
             <a:solidFill>
-              <a:srgbClr val="8A8F98"/>
+              <a:srgbClr val="C9CDD3"/>
             </a:solidFill>
           </a:ln>
           <a:effectLst/>
@@ -46254,7 +46254,7 @@
           </a:prstGeom>
           <a:ln w="15875">
             <a:solidFill>
-              <a:srgbClr val="8A8F98"/>
+              <a:srgbClr val="C9CDD3"/>
             </a:solidFill>
           </a:ln>
           <a:effectLst/>
@@ -46277,11 +46277,11 @@
             </a:avLst>
           </a:prstGeom>
           <a:solidFill>
-            <a:srgbClr val="FFF3CC"/>
-          </a:solidFill>
-          <a:ln w="34925">
-            <a:solidFill>
-              <a:srgbClr val="E0A300"/>
+            <a:srgbClr val="FFFFFF"/>
+          </a:solidFill>
+          <a:ln w="12700">
+            <a:solidFill>
+              <a:srgbClr val="4A4F57"/>
             </a:solidFill>
           </a:ln>
           <a:effectLst/>
@@ -46320,11 +46320,11 @@
             </a:avLst>
           </a:prstGeom>
           <a:solidFill>
-            <a:srgbClr val="FFF3CC"/>
-          </a:solidFill>
-          <a:ln w="34925">
-            <a:solidFill>
-              <a:srgbClr val="E0A300"/>
+            <a:srgbClr val="FFFFFF"/>
+          </a:solidFill>
+          <a:ln w="12700">
+            <a:solidFill>
+              <a:srgbClr val="4A4F57"/>
             </a:solidFill>
           </a:ln>
           <a:effectLst/>
@@ -46363,11 +46363,11 @@
             </a:avLst>
           </a:prstGeom>
           <a:solidFill>
-            <a:srgbClr val="FFF3CC"/>
-          </a:solidFill>
-          <a:ln w="34925">
-            <a:solidFill>
-              <a:srgbClr val="E0A300"/>
+            <a:srgbClr val="FFFFFF"/>
+          </a:solidFill>
+          <a:ln w="12700">
+            <a:solidFill>
+              <a:srgbClr val="4A4F57"/>
             </a:solidFill>
           </a:ln>
           <a:effectLst/>
@@ -46406,11 +46406,11 @@
             </a:avLst>
           </a:prstGeom>
           <a:solidFill>
-            <a:srgbClr val="FFF3CC"/>
-          </a:solidFill>
-          <a:ln w="34925">
-            <a:solidFill>
-              <a:srgbClr val="E0A300"/>
+            <a:srgbClr val="FFFFFF"/>
+          </a:solidFill>
+          <a:ln w="12700">
+            <a:solidFill>
+              <a:srgbClr val="4A4F57"/>
             </a:solidFill>
           </a:ln>
           <a:effectLst/>
@@ -46449,11 +46449,11 @@
             </a:avLst>
           </a:prstGeom>
           <a:solidFill>
-            <a:srgbClr val="FFF3CC"/>
-          </a:solidFill>
-          <a:ln w="34925">
-            <a:solidFill>
-              <a:srgbClr val="E0A300"/>
+            <a:srgbClr val="FFFFFF"/>
+          </a:solidFill>
+          <a:ln w="12700">
+            <a:solidFill>
+              <a:srgbClr val="4A4F57"/>
             </a:solidFill>
           </a:ln>
           <a:effectLst/>
@@ -46492,11 +46492,11 @@
             </a:avLst>
           </a:prstGeom>
           <a:solidFill>
-            <a:srgbClr val="FFF3CC"/>
-          </a:solidFill>
-          <a:ln w="34925">
-            <a:solidFill>
-              <a:srgbClr val="E0A300"/>
+            <a:srgbClr val="FFFFFF"/>
+          </a:solidFill>
+          <a:ln w="12700">
+            <a:solidFill>
+              <a:srgbClr val="4A4F57"/>
             </a:solidFill>
           </a:ln>
           <a:effectLst/>
@@ -46535,11 +46535,11 @@
             </a:avLst>
           </a:prstGeom>
           <a:solidFill>
-            <a:srgbClr val="FFF3CC"/>
-          </a:solidFill>
-          <a:ln w="34925">
-            <a:solidFill>
-              <a:srgbClr val="E0A300"/>
+            <a:srgbClr val="FFFFFF"/>
+          </a:solidFill>
+          <a:ln w="12700">
+            <a:solidFill>
+              <a:srgbClr val="4A4F57"/>
             </a:solidFill>
           </a:ln>
           <a:effectLst/>
@@ -46578,11 +46578,11 @@
             </a:avLst>
           </a:prstGeom>
           <a:solidFill>
-            <a:srgbClr val="FFF3CC"/>
-          </a:solidFill>
-          <a:ln w="34925">
-            <a:solidFill>
-              <a:srgbClr val="E0A300"/>
+            <a:srgbClr val="FFFFFF"/>
+          </a:solidFill>
+          <a:ln w="12700">
+            <a:solidFill>
+              <a:srgbClr val="4A4F57"/>
             </a:solidFill>
           </a:ln>
           <a:effectLst/>
@@ -46621,11 +46621,11 @@
             </a:avLst>
           </a:prstGeom>
           <a:solidFill>
-            <a:srgbClr val="FFF3CC"/>
-          </a:solidFill>
-          <a:ln w="34925">
-            <a:solidFill>
-              <a:srgbClr val="E0A300"/>
+            <a:srgbClr val="FFFFFF"/>
+          </a:solidFill>
+          <a:ln w="12700">
+            <a:solidFill>
+              <a:srgbClr val="4A4F57"/>
             </a:solidFill>
           </a:ln>
           <a:effectLst/>
@@ -46664,11 +46664,11 @@
             </a:avLst>
           </a:prstGeom>
           <a:solidFill>
-            <a:srgbClr val="FFF3CC"/>
-          </a:solidFill>
-          <a:ln w="34925">
-            <a:solidFill>
-              <a:srgbClr val="E0A300"/>
+            <a:srgbClr val="FFFFFF"/>
+          </a:solidFill>
+          <a:ln w="12700">
+            <a:solidFill>
+              <a:srgbClr val="4A4F57"/>
             </a:solidFill>
           </a:ln>
           <a:effectLst/>
@@ -46711,7 +46711,7 @@
           </a:solidFill>
           <a:ln w="12700">
             <a:solidFill>
-              <a:srgbClr val="4A4F57"/>
+              <a:srgbClr val="C9CDD3"/>
             </a:solidFill>
           </a:ln>
           <a:effectLst/>
@@ -46724,7 +46724,7 @@
             <a:r>
               <a:rPr sz="1600" b="1" i="0">
                 <a:solidFill>
-                  <a:srgbClr val="2B2F36"/>
+                  <a:srgbClr val="C9CDD3"/>
                 </a:solidFill>
                 <a:latin typeface="Calibri"/>
               </a:rPr>
@@ -46759,7 +46759,7 @@
             <a:r>
               <a:rPr sz="1300" b="1" i="0">
                 <a:solidFill>
-                  <a:srgbClr val="2B2F36"/>
+                  <a:srgbClr val="C9CDD3"/>
                 </a:solidFill>
                 <a:latin typeface="Calibri"/>
               </a:rPr>
@@ -46789,7 +46789,7 @@
           </a:solidFill>
           <a:ln w="12700">
             <a:solidFill>
-              <a:srgbClr val="4A4F57"/>
+              <a:srgbClr val="C9CDD3"/>
             </a:solidFill>
           </a:ln>
           <a:effectLst/>
@@ -46802,7 +46802,7 @@
             <a:r>
               <a:rPr sz="1600" b="1" i="0">
                 <a:solidFill>
-                  <a:srgbClr val="2B2F36"/>
+                  <a:srgbClr val="C9CDD3"/>
                 </a:solidFill>
                 <a:latin typeface="Calibri"/>
               </a:rPr>
@@ -46837,7 +46837,7 @@
             <a:r>
               <a:rPr sz="1300" b="1" i="0">
                 <a:solidFill>
-                  <a:srgbClr val="2B2F36"/>
+                  <a:srgbClr val="C9CDD3"/>
                 </a:solidFill>
                 <a:latin typeface="Calibri"/>
               </a:rPr>
@@ -46867,7 +46867,7 @@
           </a:solidFill>
           <a:ln w="12700">
             <a:solidFill>
-              <a:srgbClr val="4A4F57"/>
+              <a:srgbClr val="C9CDD3"/>
             </a:solidFill>
           </a:ln>
           <a:effectLst/>
@@ -46880,7 +46880,7 @@
             <a:r>
               <a:rPr sz="1600" b="1" i="0">
                 <a:solidFill>
-                  <a:srgbClr val="2B2F36"/>
+                  <a:srgbClr val="C9CDD3"/>
                 </a:solidFill>
                 <a:latin typeface="Calibri"/>
               </a:rPr>
@@ -46915,7 +46915,7 @@
             <a:r>
               <a:rPr sz="1300" b="1" i="0">
                 <a:solidFill>
-                  <a:srgbClr val="2B2F36"/>
+                  <a:srgbClr val="C9CDD3"/>
                 </a:solidFill>
                 <a:latin typeface="Calibri"/>
               </a:rPr>
@@ -46945,7 +46945,7 @@
           </a:solidFill>
           <a:ln w="12700">
             <a:solidFill>
-              <a:srgbClr val="4A4F57"/>
+              <a:srgbClr val="C9CDD3"/>
             </a:solidFill>
           </a:ln>
           <a:effectLst/>
@@ -46958,7 +46958,7 @@
             <a:r>
               <a:rPr sz="1600" b="1" i="0">
                 <a:solidFill>
-                  <a:srgbClr val="2B2F36"/>
+                  <a:srgbClr val="C9CDD3"/>
                 </a:solidFill>
                 <a:latin typeface="Calibri"/>
               </a:rPr>
@@ -46993,7 +46993,7 @@
             <a:r>
               <a:rPr sz="1300" b="1" i="0">
                 <a:solidFill>
-                  <a:srgbClr val="2B2F36"/>
+                  <a:srgbClr val="C9CDD3"/>
                 </a:solidFill>
                 <a:latin typeface="Calibri"/>
               </a:rPr>
@@ -47023,7 +47023,7 @@
           </a:solidFill>
           <a:ln w="12700">
             <a:solidFill>
-              <a:srgbClr val="4A4F57"/>
+              <a:srgbClr val="C9CDD3"/>
             </a:solidFill>
           </a:ln>
           <a:effectLst/>
@@ -47036,7 +47036,7 @@
             <a:r>
               <a:rPr sz="1600" b="1" i="0">
                 <a:solidFill>
-                  <a:srgbClr val="2B2F36"/>
+                  <a:srgbClr val="C9CDD3"/>
                 </a:solidFill>
                 <a:latin typeface="Calibri"/>
               </a:rPr>
@@ -47071,7 +47071,7 @@
             <a:r>
               <a:rPr sz="1300" b="1" i="0">
                 <a:solidFill>
-                  <a:srgbClr val="2B2F36"/>
+                  <a:srgbClr val="C9CDD3"/>
                 </a:solidFill>
                 <a:latin typeface="Calibri"/>
               </a:rPr>
@@ -47101,7 +47101,7 @@
           </a:solidFill>
           <a:ln w="12700">
             <a:solidFill>
-              <a:srgbClr val="4A4F57"/>
+              <a:srgbClr val="C9CDD3"/>
             </a:solidFill>
           </a:ln>
           <a:effectLst/>
@@ -47114,7 +47114,7 @@
             <a:r>
               <a:rPr sz="1600" b="1" i="0">
                 <a:solidFill>
-                  <a:srgbClr val="2B2F36"/>
+                  <a:srgbClr val="C9CDD3"/>
                 </a:solidFill>
                 <a:latin typeface="Calibri"/>
               </a:rPr>
@@ -47149,7 +47149,7 @@
             <a:r>
               <a:rPr sz="1300" b="1" i="0">
                 <a:solidFill>
-                  <a:srgbClr val="2B2F36"/>
+                  <a:srgbClr val="C9CDD3"/>
                 </a:solidFill>
                 <a:latin typeface="Calibri"/>
               </a:rPr>
@@ -47160,47 +47160,14 @@
       </p:sp>
       <p:sp>
         <p:nvSpPr>
-          <p:cNvPr id="47" name="Rounded Rectangle 46"/>
-          <p:cNvSpPr/>
-          <p:nvPr/>
-        </p:nvSpPr>
-        <p:spPr>
-          <a:xfrm>
-            <a:off x="2263139" y="4663440"/>
-            <a:ext cx="7662672" cy="914400"/>
-          </a:xfrm>
-          <a:prstGeom prst="roundRect">
-            <a:avLst>
-              <a:gd name="adj" fmla="val 35000"/>
-            </a:avLst>
-          </a:prstGeom>
-          <a:noFill/>
-          <a:ln w="28575">
-            <a:solidFill>
-              <a:srgbClr val="1F2A44"/>
-            </a:solidFill>
-            <a:prstDash val="lgDash"/>
-          </a:ln>
-          <a:effectLst/>
-        </p:spPr>
-        <p:txBody>
-          <a:bodyPr rtlCol="0" anchor="ctr" lIns="54864" rIns="54864" tIns="27432" bIns="27432" wrap="square"/>
-          <a:lstStyle/>
-          <a:p>
-            <a:pPr algn="ctr"/>
-          </a:p>
-        </p:txBody>
-      </p:sp>
-      <p:sp>
-        <p:nvSpPr>
-          <p:cNvPr id="48" name="TextBox 47"/>
+          <p:cNvPr id="47" name="TextBox 46"/>
           <p:cNvSpPr txBox="1"/>
           <p:nvPr/>
         </p:nvSpPr>
         <p:spPr>
           <a:xfrm>
-            <a:off x="10017252" y="4937759"/>
-            <a:ext cx="1188720" cy="365760"/>
+            <a:off x="2775203" y="5458968"/>
+            <a:ext cx="640080" cy="457200"/>
           </a:xfrm>
           <a:prstGeom prst="rect">
             <a:avLst/>
@@ -47213,28 +47180,28 @@
           </a:bodyPr>
           <a:lstStyle/>
           <a:p>
-            <a:pPr algn="l"/>
-            <a:r>
-              <a:rPr sz="1600" b="1" i="0">
-                <a:solidFill>
-                  <a:srgbClr val="1F2A44"/>
-                </a:solidFill>
-                <a:latin typeface="Calibri"/>
-              </a:rPr>
-              <a:t>round 0</a:t>
-            </a:r>
-          </a:p>
-        </p:txBody>
-      </p:sp>
-      <p:sp>
-        <p:nvSpPr>
-          <p:cNvPr id="49" name="TextBox 48"/>
+            <a:pPr algn="ctr"/>
+            <a:r>
+              <a:rPr sz="2400" b="1" i="0">
+                <a:solidFill>
+                  <a:srgbClr val="C8501E"/>
+                </a:solidFill>
+                <a:latin typeface="Calibri"/>
+              </a:rPr>
+              <a:t>∪</a:t>
+            </a:r>
+          </a:p>
+        </p:txBody>
+      </p:sp>
+      <p:sp>
+        <p:nvSpPr>
+          <p:cNvPr id="48" name="TextBox 47"/>
           <p:cNvSpPr txBox="1"/>
           <p:nvPr/>
         </p:nvSpPr>
         <p:spPr>
           <a:xfrm>
-            <a:off x="2775203" y="5660136"/>
+            <a:off x="4274820" y="5458968"/>
             <a:ext cx="640080" cy="457200"/>
           </a:xfrm>
           <a:prstGeom prst="rect">
@@ -47263,13 +47230,13 @@
       </p:sp>
       <p:sp>
         <p:nvSpPr>
-          <p:cNvPr id="50" name="TextBox 49"/>
+          <p:cNvPr id="49" name="TextBox 48"/>
           <p:cNvSpPr txBox="1"/>
           <p:nvPr/>
         </p:nvSpPr>
         <p:spPr>
           <a:xfrm>
-            <a:off x="4274820" y="5660136"/>
+            <a:off x="5774436" y="5458968"/>
             <a:ext cx="640080" cy="457200"/>
           </a:xfrm>
           <a:prstGeom prst="rect">
@@ -47298,13 +47265,13 @@
       </p:sp>
       <p:sp>
         <p:nvSpPr>
-          <p:cNvPr id="51" name="TextBox 50"/>
+          <p:cNvPr id="50" name="TextBox 49"/>
           <p:cNvSpPr txBox="1"/>
           <p:nvPr/>
         </p:nvSpPr>
         <p:spPr>
           <a:xfrm>
-            <a:off x="5774436" y="5660136"/>
+            <a:off x="7274052" y="5458968"/>
             <a:ext cx="640080" cy="457200"/>
           </a:xfrm>
           <a:prstGeom prst="rect">
@@ -47333,13 +47300,13 @@
       </p:sp>
       <p:sp>
         <p:nvSpPr>
-          <p:cNvPr id="52" name="TextBox 51"/>
+          <p:cNvPr id="51" name="TextBox 50"/>
           <p:cNvSpPr txBox="1"/>
           <p:nvPr/>
         </p:nvSpPr>
         <p:spPr>
           <a:xfrm>
-            <a:off x="7274052" y="5660136"/>
+            <a:off x="8773668" y="5458968"/>
             <a:ext cx="640080" cy="457200"/>
           </a:xfrm>
           <a:prstGeom prst="rect">
@@ -47362,178 +47329,6 @@
                 <a:latin typeface="Calibri"/>
               </a:rPr>
               <a:t>∪</a:t>
-            </a:r>
-          </a:p>
-        </p:txBody>
-      </p:sp>
-      <p:sp>
-        <p:nvSpPr>
-          <p:cNvPr id="53" name="TextBox 52"/>
-          <p:cNvSpPr txBox="1"/>
-          <p:nvPr/>
-        </p:nvSpPr>
-        <p:spPr>
-          <a:xfrm>
-            <a:off x="8773668" y="5660136"/>
-            <a:ext cx="640080" cy="457200"/>
-          </a:xfrm>
-          <a:prstGeom prst="rect">
-            <a:avLst/>
-          </a:prstGeom>
-          <a:noFill/>
-        </p:spPr>
-        <p:txBody>
-          <a:bodyPr wrap="square" anchor="ctr" lIns="45720" rIns="45720" tIns="27432" bIns="27432">
-            <a:spAutoFit/>
-          </a:bodyPr>
-          <a:lstStyle/>
-          <a:p>
-            <a:pPr algn="ctr"/>
-            <a:r>
-              <a:rPr sz="2400" b="1" i="0">
-                <a:solidFill>
-                  <a:srgbClr val="C8501E"/>
-                </a:solidFill>
-                <a:latin typeface="Calibri"/>
-              </a:rPr>
-              <a:t>∪</a:t>
-            </a:r>
-          </a:p>
-        </p:txBody>
-      </p:sp>
-      <p:sp>
-        <p:nvSpPr>
-          <p:cNvPr id="54" name="Rounded Rectangle 53"/>
-          <p:cNvSpPr/>
-          <p:nvPr/>
-        </p:nvSpPr>
-        <p:spPr>
-          <a:xfrm>
-            <a:off x="502920" y="1645920"/>
-            <a:ext cx="329184" cy="219456"/>
-          </a:xfrm>
-          <a:prstGeom prst="roundRect">
-            <a:avLst>
-              <a:gd name="adj" fmla="val 15000"/>
-            </a:avLst>
-          </a:prstGeom>
-          <a:solidFill>
-            <a:srgbClr val="FFF3CC"/>
-          </a:solidFill>
-          <a:ln w="25400">
-            <a:solidFill>
-              <a:srgbClr val="E0A300"/>
-            </a:solidFill>
-          </a:ln>
-          <a:effectLst/>
-        </p:spPr>
-        <p:txBody>
-          <a:bodyPr rtlCol="0" anchor="ctr" lIns="54864" rIns="54864" tIns="27432" bIns="27432" wrap="square"/>
-          <a:lstStyle/>
-          <a:p>
-            <a:pPr algn="ctr"/>
-          </a:p>
-        </p:txBody>
-      </p:sp>
-      <p:sp>
-        <p:nvSpPr>
-          <p:cNvPr id="55" name="TextBox 54"/>
-          <p:cNvSpPr txBox="1"/>
-          <p:nvPr/>
-        </p:nvSpPr>
-        <p:spPr>
-          <a:xfrm>
-            <a:off x="905256" y="1600200"/>
-            <a:ext cx="1563624" cy="320040"/>
-          </a:xfrm>
-          <a:prstGeom prst="rect">
-            <a:avLst/>
-          </a:prstGeom>
-          <a:noFill/>
-        </p:spPr>
-        <p:txBody>
-          <a:bodyPr wrap="square" anchor="ctr" lIns="45720" rIns="45720" tIns="27432" bIns="27432">
-            <a:spAutoFit/>
-          </a:bodyPr>
-          <a:lstStyle/>
-          <a:p>
-            <a:pPr algn="l"/>
-            <a:r>
-              <a:rPr sz="1200" b="0" i="0">
-                <a:solidFill>
-                  <a:srgbClr val="6B717A"/>
-                </a:solidFill>
-                <a:latin typeface="Calibri"/>
-              </a:rPr>
-              <a:t>merged this round</a:t>
-            </a:r>
-          </a:p>
-        </p:txBody>
-      </p:sp>
-      <p:sp>
-        <p:nvSpPr>
-          <p:cNvPr id="56" name="Rounded Rectangle 55"/>
-          <p:cNvSpPr/>
-          <p:nvPr/>
-        </p:nvSpPr>
-        <p:spPr>
-          <a:xfrm>
-            <a:off x="502920" y="2066543"/>
-            <a:ext cx="329184" cy="219456"/>
-          </a:xfrm>
-          <a:prstGeom prst="roundRect">
-            <a:avLst>
-              <a:gd name="adj" fmla="val 15000"/>
-            </a:avLst>
-          </a:prstGeom>
-          <a:noFill/>
-          <a:ln w="28575">
-            <a:solidFill>
-              <a:srgbClr val="1F2A44"/>
-            </a:solidFill>
-            <a:prstDash val="lgDash"/>
-          </a:ln>
-          <a:effectLst/>
-        </p:spPr>
-        <p:txBody>
-          <a:bodyPr rtlCol="0" anchor="ctr" lIns="54864" rIns="54864" tIns="27432" bIns="27432" wrap="square"/>
-          <a:lstStyle/>
-          <a:p>
-            <a:pPr algn="ctr"/>
-          </a:p>
-        </p:txBody>
-      </p:sp>
-      <p:sp>
-        <p:nvSpPr>
-          <p:cNvPr id="57" name="TextBox 56"/>
-          <p:cNvSpPr txBox="1"/>
-          <p:nvPr/>
-        </p:nvSpPr>
-        <p:spPr>
-          <a:xfrm>
-            <a:off x="905256" y="2020824"/>
-            <a:ext cx="1563624" cy="320040"/>
-          </a:xfrm>
-          <a:prstGeom prst="rect">
-            <a:avLst/>
-          </a:prstGeom>
-          <a:noFill/>
-        </p:spPr>
-        <p:txBody>
-          <a:bodyPr wrap="square" anchor="ctr" lIns="45720" rIns="45720" tIns="27432" bIns="27432">
-            <a:spAutoFit/>
-          </a:bodyPr>
-          <a:lstStyle/>
-          <a:p>
-            <a:pPr algn="l"/>
-            <a:r>
-              <a:rPr sz="1200" b="0" i="0">
-                <a:solidFill>
-                  <a:srgbClr val="6B717A"/>
-                </a:solidFill>
-                <a:latin typeface="Calibri"/>
-              </a:rPr>
-              <a:t>round</a:t>
             </a:r>
           </a:p>
         </p:txBody>
@@ -47874,7 +47669,7 @@
           </a:prstGeom>
           <a:ln w="15875">
             <a:solidFill>
-              <a:srgbClr val="8A8F98"/>
+              <a:srgbClr val="C9CDD3"/>
             </a:solidFill>
           </a:ln>
           <a:effectLst/>
@@ -47896,7 +47691,7 @@
           </a:prstGeom>
           <a:ln w="15875">
             <a:solidFill>
-              <a:srgbClr val="8A8F98"/>
+              <a:srgbClr val="C9CDD3"/>
             </a:solidFill>
           </a:ln>
           <a:effectLst/>
@@ -47918,7 +47713,7 @@
           </a:prstGeom>
           <a:ln w="15875">
             <a:solidFill>
-              <a:srgbClr val="8A8F98"/>
+              <a:srgbClr val="C9CDD3"/>
             </a:solidFill>
           </a:ln>
           <a:effectLst/>
@@ -47940,7 +47735,7 @@
           </a:prstGeom>
           <a:ln w="15875">
             <a:solidFill>
-              <a:srgbClr val="8A8F98"/>
+              <a:srgbClr val="C9CDD3"/>
             </a:solidFill>
           </a:ln>
           <a:effectLst/>
@@ -47962,7 +47757,7 @@
           </a:prstGeom>
           <a:ln w="15875">
             <a:solidFill>
-              <a:srgbClr val="8A8F98"/>
+              <a:srgbClr val="C9CDD3"/>
             </a:solidFill>
           </a:ln>
           <a:effectLst/>
@@ -47984,7 +47779,7 @@
           </a:prstGeom>
           <a:ln w="15875">
             <a:solidFill>
-              <a:srgbClr val="8A8F98"/>
+              <a:srgbClr val="C9CDD3"/>
             </a:solidFill>
           </a:ln>
           <a:effectLst/>
@@ -48006,7 +47801,7 @@
           </a:prstGeom>
           <a:ln w="15875">
             <a:solidFill>
-              <a:srgbClr val="8A8F98"/>
+              <a:srgbClr val="C9CDD3"/>
             </a:solidFill>
           </a:ln>
           <a:effectLst/>
@@ -48028,7 +47823,7 @@
           </a:prstGeom>
           <a:ln w="15875">
             <a:solidFill>
-              <a:srgbClr val="8A8F98"/>
+              <a:srgbClr val="C9CDD3"/>
             </a:solidFill>
           </a:ln>
           <a:effectLst/>
@@ -48050,7 +47845,7 @@
           </a:prstGeom>
           <a:ln w="15875">
             <a:solidFill>
-              <a:srgbClr val="8A8F98"/>
+              <a:srgbClr val="C9CDD3"/>
             </a:solidFill>
           </a:ln>
           <a:effectLst/>
@@ -48116,7 +47911,7 @@
           </a:prstGeom>
           <a:ln w="15875">
             <a:solidFill>
-              <a:srgbClr val="8A8F98"/>
+              <a:srgbClr val="C9CDD3"/>
             </a:solidFill>
           </a:ln>
           <a:effectLst/>
@@ -48187,7 +47982,7 @@
           </a:solidFill>
           <a:ln w="12700">
             <a:solidFill>
-              <a:srgbClr val="4A4F57"/>
+              <a:srgbClr val="C9CDD3"/>
             </a:solidFill>
           </a:ln>
           <a:effectLst/>
@@ -48200,7 +47995,7 @@
             <a:r>
               <a:rPr sz="1400" b="1" i="0">
                 <a:solidFill>
-                  <a:srgbClr val="2B2F36"/>
+                  <a:srgbClr val="C9CDD3"/>
                 </a:solidFill>
                 <a:latin typeface="Calibri"/>
               </a:rPr>
@@ -48230,7 +48025,7 @@
           </a:solidFill>
           <a:ln w="12700">
             <a:solidFill>
-              <a:srgbClr val="4A4F57"/>
+              <a:srgbClr val="C9CDD3"/>
             </a:solidFill>
           </a:ln>
           <a:effectLst/>
@@ -48243,7 +48038,7 @@
             <a:r>
               <a:rPr sz="1400" b="1" i="0">
                 <a:solidFill>
-                  <a:srgbClr val="2B2F36"/>
+                  <a:srgbClr val="C9CDD3"/>
                 </a:solidFill>
                 <a:latin typeface="Calibri"/>
               </a:rPr>
@@ -48273,7 +48068,7 @@
           </a:solidFill>
           <a:ln w="12700">
             <a:solidFill>
-              <a:srgbClr val="4A4F57"/>
+              <a:srgbClr val="C9CDD3"/>
             </a:solidFill>
           </a:ln>
           <a:effectLst/>
@@ -48286,7 +48081,7 @@
             <a:r>
               <a:rPr sz="1400" b="1" i="0">
                 <a:solidFill>
-                  <a:srgbClr val="2B2F36"/>
+                  <a:srgbClr val="C9CDD3"/>
                 </a:solidFill>
                 <a:latin typeface="Calibri"/>
               </a:rPr>
@@ -48316,7 +48111,7 @@
           </a:solidFill>
           <a:ln w="12700">
             <a:solidFill>
-              <a:srgbClr val="4A4F57"/>
+              <a:srgbClr val="C9CDD3"/>
             </a:solidFill>
           </a:ln>
           <a:effectLst/>
@@ -48329,7 +48124,7 @@
             <a:r>
               <a:rPr sz="1400" b="1" i="0">
                 <a:solidFill>
-                  <a:srgbClr val="2B2F36"/>
+                  <a:srgbClr val="C9CDD3"/>
                 </a:solidFill>
                 <a:latin typeface="Calibri"/>
               </a:rPr>
@@ -48359,7 +48154,7 @@
           </a:solidFill>
           <a:ln w="12700">
             <a:solidFill>
-              <a:srgbClr val="4A4F57"/>
+              <a:srgbClr val="C9CDD3"/>
             </a:solidFill>
           </a:ln>
           <a:effectLst/>
@@ -48372,7 +48167,7 @@
             <a:r>
               <a:rPr sz="1400" b="1" i="0">
                 <a:solidFill>
-                  <a:srgbClr val="2B2F36"/>
+                  <a:srgbClr val="C9CDD3"/>
                 </a:solidFill>
                 <a:latin typeface="Calibri"/>
               </a:rPr>
@@ -48402,7 +48197,7 @@
           </a:solidFill>
           <a:ln w="12700">
             <a:solidFill>
-              <a:srgbClr val="4A4F57"/>
+              <a:srgbClr val="C9CDD3"/>
             </a:solidFill>
           </a:ln>
           <a:effectLst/>
@@ -48415,7 +48210,7 @@
             <a:r>
               <a:rPr sz="1400" b="1" i="0">
                 <a:solidFill>
-                  <a:srgbClr val="2B2F36"/>
+                  <a:srgbClr val="C9CDD3"/>
                 </a:solidFill>
                 <a:latin typeface="Calibri"/>
               </a:rPr>
@@ -48445,7 +48240,7 @@
           </a:solidFill>
           <a:ln w="12700">
             <a:solidFill>
-              <a:srgbClr val="4A4F57"/>
+              <a:srgbClr val="C9CDD3"/>
             </a:solidFill>
           </a:ln>
           <a:effectLst/>
@@ -48458,7 +48253,7 @@
             <a:r>
               <a:rPr sz="1400" b="1" i="0">
                 <a:solidFill>
-                  <a:srgbClr val="2B2F36"/>
+                  <a:srgbClr val="C9CDD3"/>
                 </a:solidFill>
                 <a:latin typeface="Calibri"/>
               </a:rPr>
@@ -48488,7 +48283,7 @@
           </a:solidFill>
           <a:ln w="12700">
             <a:solidFill>
-              <a:srgbClr val="4A4F57"/>
+              <a:srgbClr val="C9CDD3"/>
             </a:solidFill>
           </a:ln>
           <a:effectLst/>
@@ -48501,7 +48296,7 @@
             <a:r>
               <a:rPr sz="1400" b="1" i="0">
                 <a:solidFill>
-                  <a:srgbClr val="2B2F36"/>
+                  <a:srgbClr val="C9CDD3"/>
                 </a:solidFill>
                 <a:latin typeface="Calibri"/>
               </a:rPr>
@@ -48531,7 +48326,7 @@
           </a:solidFill>
           <a:ln w="12700">
             <a:solidFill>
-              <a:srgbClr val="4A4F57"/>
+              <a:srgbClr val="C9CDD3"/>
             </a:solidFill>
           </a:ln>
           <a:effectLst/>
@@ -48544,7 +48339,7 @@
             <a:r>
               <a:rPr sz="1400" b="1" i="0">
                 <a:solidFill>
-                  <a:srgbClr val="2B2F36"/>
+                  <a:srgbClr val="C9CDD3"/>
                 </a:solidFill>
                 <a:latin typeface="Calibri"/>
               </a:rPr>
@@ -48574,7 +48369,7 @@
           </a:solidFill>
           <a:ln w="12700">
             <a:solidFill>
-              <a:srgbClr val="4A4F57"/>
+              <a:srgbClr val="C9CDD3"/>
             </a:solidFill>
           </a:ln>
           <a:effectLst/>
@@ -48587,7 +48382,7 @@
             <a:r>
               <a:rPr sz="1400" b="1" i="0">
                 <a:solidFill>
-                  <a:srgbClr val="2B2F36"/>
+                  <a:srgbClr val="C9CDD3"/>
                 </a:solidFill>
                 <a:latin typeface="Calibri"/>
               </a:rPr>
@@ -49060,279 +48855,6 @@
                 <a:latin typeface="Calibri"/>
               </a:rPr>
               <a:t>m₂</a:t>
-            </a:r>
-          </a:p>
-        </p:txBody>
-      </p:sp>
-      <p:sp>
-        <p:nvSpPr>
-          <p:cNvPr id="47" name="Rounded Rectangle 46"/>
-          <p:cNvSpPr/>
-          <p:nvPr/>
-        </p:nvSpPr>
-        <p:spPr>
-          <a:xfrm>
-            <a:off x="2263139" y="4663440"/>
-            <a:ext cx="7662672" cy="914400"/>
-          </a:xfrm>
-          <a:prstGeom prst="roundRect">
-            <a:avLst>
-              <a:gd name="adj" fmla="val 35000"/>
-            </a:avLst>
-          </a:prstGeom>
-          <a:noFill/>
-          <a:ln w="28575">
-            <a:solidFill>
-              <a:srgbClr val="1F2A44"/>
-            </a:solidFill>
-            <a:prstDash val="lgDash"/>
-          </a:ln>
-          <a:effectLst/>
-        </p:spPr>
-        <p:txBody>
-          <a:bodyPr rtlCol="0" anchor="ctr" lIns="54864" rIns="54864" tIns="27432" bIns="27432" wrap="square"/>
-          <a:lstStyle/>
-          <a:p>
-            <a:pPr algn="ctr"/>
-          </a:p>
-        </p:txBody>
-      </p:sp>
-      <p:sp>
-        <p:nvSpPr>
-          <p:cNvPr id="48" name="TextBox 47"/>
-          <p:cNvSpPr txBox="1"/>
-          <p:nvPr/>
-        </p:nvSpPr>
-        <p:spPr>
-          <a:xfrm>
-            <a:off x="10017252" y="4937759"/>
-            <a:ext cx="1188720" cy="365760"/>
-          </a:xfrm>
-          <a:prstGeom prst="rect">
-            <a:avLst/>
-          </a:prstGeom>
-          <a:noFill/>
-        </p:spPr>
-        <p:txBody>
-          <a:bodyPr wrap="square" anchor="ctr" lIns="45720" rIns="45720" tIns="27432" bIns="27432">
-            <a:spAutoFit/>
-          </a:bodyPr>
-          <a:lstStyle/>
-          <a:p>
-            <a:pPr algn="l"/>
-            <a:r>
-              <a:rPr sz="1600" b="1" i="0">
-                <a:solidFill>
-                  <a:srgbClr val="1F2A44"/>
-                </a:solidFill>
-                <a:latin typeface="Calibri"/>
-              </a:rPr>
-              <a:t>round 0</a:t>
-            </a:r>
-          </a:p>
-        </p:txBody>
-      </p:sp>
-      <p:sp>
-        <p:nvSpPr>
-          <p:cNvPr id="49" name="Rounded Rectangle 48"/>
-          <p:cNvSpPr/>
-          <p:nvPr/>
-        </p:nvSpPr>
-        <p:spPr>
-          <a:xfrm>
-            <a:off x="2674620" y="2715768"/>
-            <a:ext cx="6830568" cy="1335024"/>
-          </a:xfrm>
-          <a:prstGeom prst="roundRect">
-            <a:avLst>
-              <a:gd name="adj" fmla="val 35000"/>
-            </a:avLst>
-          </a:prstGeom>
-          <a:noFill/>
-          <a:ln w="28575">
-            <a:solidFill>
-              <a:srgbClr val="1F2A44"/>
-            </a:solidFill>
-            <a:prstDash val="lgDash"/>
-          </a:ln>
-          <a:effectLst/>
-        </p:spPr>
-        <p:txBody>
-          <a:bodyPr rtlCol="0" anchor="ctr" lIns="54864" rIns="54864" tIns="27432" bIns="27432" wrap="square"/>
-          <a:lstStyle/>
-          <a:p>
-            <a:pPr algn="ctr"/>
-          </a:p>
-        </p:txBody>
-      </p:sp>
-      <p:sp>
-        <p:nvSpPr>
-          <p:cNvPr id="50" name="TextBox 49"/>
-          <p:cNvSpPr txBox="1"/>
-          <p:nvPr/>
-        </p:nvSpPr>
-        <p:spPr>
-          <a:xfrm>
-            <a:off x="9596628" y="3200399"/>
-            <a:ext cx="1188720" cy="365760"/>
-          </a:xfrm>
-          <a:prstGeom prst="rect">
-            <a:avLst/>
-          </a:prstGeom>
-          <a:noFill/>
-        </p:spPr>
-        <p:txBody>
-          <a:bodyPr wrap="square" anchor="ctr" lIns="45720" rIns="45720" tIns="27432" bIns="27432">
-            <a:spAutoFit/>
-          </a:bodyPr>
-          <a:lstStyle/>
-          <a:p>
-            <a:pPr algn="l"/>
-            <a:r>
-              <a:rPr sz="1600" b="1" i="0">
-                <a:solidFill>
-                  <a:srgbClr val="1F2A44"/>
-                </a:solidFill>
-                <a:latin typeface="Calibri"/>
-              </a:rPr>
-              <a:t>round 1</a:t>
-            </a:r>
-          </a:p>
-        </p:txBody>
-      </p:sp>
-      <p:sp>
-        <p:nvSpPr>
-          <p:cNvPr id="51" name="Rounded Rectangle 50"/>
-          <p:cNvSpPr/>
-          <p:nvPr/>
-        </p:nvSpPr>
-        <p:spPr>
-          <a:xfrm>
-            <a:off x="502920" y="1645920"/>
-            <a:ext cx="329184" cy="219456"/>
-          </a:xfrm>
-          <a:prstGeom prst="roundRect">
-            <a:avLst>
-              <a:gd name="adj" fmla="val 15000"/>
-            </a:avLst>
-          </a:prstGeom>
-          <a:solidFill>
-            <a:srgbClr val="FFF3CC"/>
-          </a:solidFill>
-          <a:ln w="25400">
-            <a:solidFill>
-              <a:srgbClr val="E0A300"/>
-            </a:solidFill>
-          </a:ln>
-          <a:effectLst/>
-        </p:spPr>
-        <p:txBody>
-          <a:bodyPr rtlCol="0" anchor="ctr" lIns="54864" rIns="54864" tIns="27432" bIns="27432" wrap="square"/>
-          <a:lstStyle/>
-          <a:p>
-            <a:pPr algn="ctr"/>
-          </a:p>
-        </p:txBody>
-      </p:sp>
-      <p:sp>
-        <p:nvSpPr>
-          <p:cNvPr id="52" name="TextBox 51"/>
-          <p:cNvSpPr txBox="1"/>
-          <p:nvPr/>
-        </p:nvSpPr>
-        <p:spPr>
-          <a:xfrm>
-            <a:off x="905256" y="1600200"/>
-            <a:ext cx="1563624" cy="320040"/>
-          </a:xfrm>
-          <a:prstGeom prst="rect">
-            <a:avLst/>
-          </a:prstGeom>
-          <a:noFill/>
-        </p:spPr>
-        <p:txBody>
-          <a:bodyPr wrap="square" anchor="ctr" lIns="45720" rIns="45720" tIns="27432" bIns="27432">
-            <a:spAutoFit/>
-          </a:bodyPr>
-          <a:lstStyle/>
-          <a:p>
-            <a:pPr algn="l"/>
-            <a:r>
-              <a:rPr sz="1200" b="0" i="0">
-                <a:solidFill>
-                  <a:srgbClr val="6B717A"/>
-                </a:solidFill>
-                <a:latin typeface="Calibri"/>
-              </a:rPr>
-              <a:t>candidate</a:t>
-            </a:r>
-          </a:p>
-        </p:txBody>
-      </p:sp>
-      <p:sp>
-        <p:nvSpPr>
-          <p:cNvPr id="53" name="Rounded Rectangle 52"/>
-          <p:cNvSpPr/>
-          <p:nvPr/>
-        </p:nvSpPr>
-        <p:spPr>
-          <a:xfrm>
-            <a:off x="502920" y="2066543"/>
-            <a:ext cx="329184" cy="219456"/>
-          </a:xfrm>
-          <a:prstGeom prst="roundRect">
-            <a:avLst>
-              <a:gd name="adj" fmla="val 15000"/>
-            </a:avLst>
-          </a:prstGeom>
-          <a:noFill/>
-          <a:ln w="28575">
-            <a:solidFill>
-              <a:srgbClr val="1F2A44"/>
-            </a:solidFill>
-            <a:prstDash val="lgDash"/>
-          </a:ln>
-          <a:effectLst/>
-        </p:spPr>
-        <p:txBody>
-          <a:bodyPr rtlCol="0" anchor="ctr" lIns="54864" rIns="54864" tIns="27432" bIns="27432" wrap="square"/>
-          <a:lstStyle/>
-          <a:p>
-            <a:pPr algn="ctr"/>
-          </a:p>
-        </p:txBody>
-      </p:sp>
-      <p:sp>
-        <p:nvSpPr>
-          <p:cNvPr id="54" name="TextBox 53"/>
-          <p:cNvSpPr txBox="1"/>
-          <p:nvPr/>
-        </p:nvSpPr>
-        <p:spPr>
-          <a:xfrm>
-            <a:off x="905256" y="2020824"/>
-            <a:ext cx="1563624" cy="320040"/>
-          </a:xfrm>
-          <a:prstGeom prst="rect">
-            <a:avLst/>
-          </a:prstGeom>
-          <a:noFill/>
-        </p:spPr>
-        <p:txBody>
-          <a:bodyPr wrap="square" anchor="ctr" lIns="45720" rIns="45720" tIns="27432" bIns="27432">
-            <a:spAutoFit/>
-          </a:bodyPr>
-          <a:lstStyle/>
-          <a:p>
-            <a:pPr algn="l"/>
-            <a:r>
-              <a:rPr sz="1200" b="0" i="0">
-                <a:solidFill>
-                  <a:srgbClr val="6B717A"/>
-                </a:solidFill>
-                <a:latin typeface="Calibri"/>
-              </a:rPr>
-              <a:t>round</a:t>
             </a:r>
           </a:p>
         </p:txBody>
@@ -49657,138 +49179,94 @@
           </a:p>
         </p:txBody>
       </p:sp>
-      <p:sp>
-        <p:nvSpPr>
-          <p:cNvPr id="11" name="Rounded Rectangle 10"/>
-          <p:cNvSpPr/>
-          <p:nvPr/>
-        </p:nvSpPr>
-        <p:spPr>
-          <a:xfrm>
-            <a:off x="2866644" y="2907791"/>
-            <a:ext cx="2011680" cy="950976"/>
-          </a:xfrm>
-          <a:prstGeom prst="roundRect">
-            <a:avLst>
-              <a:gd name="adj" fmla="val 30000"/>
-            </a:avLst>
-          </a:prstGeom>
-          <a:noFill/>
-          <a:ln w="22225">
-            <a:solidFill>
-              <a:srgbClr val="7B4FB5"/>
-            </a:solidFill>
-            <a:prstDash val="sysDot"/>
-          </a:ln>
-          <a:effectLst/>
-        </p:spPr>
-        <p:txBody>
-          <a:bodyPr rtlCol="0" anchor="ctr" lIns="54864" rIns="54864" tIns="27432" bIns="27432" wrap="square"/>
-          <a:lstStyle/>
-          <a:p>
-            <a:pPr algn="ctr"/>
-          </a:p>
-        </p:txBody>
-      </p:sp>
-      <p:sp>
-        <p:nvSpPr>
-          <p:cNvPr id="12" name="Rounded Rectangle 11"/>
-          <p:cNvSpPr/>
-          <p:nvPr/>
-        </p:nvSpPr>
-        <p:spPr>
-          <a:xfrm>
-            <a:off x="7301483" y="2907791"/>
-            <a:ext cx="2011680" cy="950976"/>
-          </a:xfrm>
-          <a:prstGeom prst="roundRect">
-            <a:avLst>
-              <a:gd name="adj" fmla="val 30000"/>
-            </a:avLst>
-          </a:prstGeom>
-          <a:noFill/>
-          <a:ln w="22225">
-            <a:solidFill>
-              <a:srgbClr val="7B4FB5"/>
-            </a:solidFill>
-            <a:prstDash val="sysDot"/>
-          </a:ln>
-          <a:effectLst/>
-        </p:spPr>
-        <p:txBody>
-          <a:bodyPr rtlCol="0" anchor="ctr" lIns="54864" rIns="54864" tIns="27432" bIns="27432" wrap="square"/>
-          <a:lstStyle/>
-          <a:p>
-            <a:pPr algn="ctr"/>
-          </a:p>
-        </p:txBody>
-      </p:sp>
-      <p:sp>
-        <p:nvSpPr>
-          <p:cNvPr id="13" name="Rounded Rectangle 12"/>
-          <p:cNvSpPr/>
-          <p:nvPr/>
-        </p:nvSpPr>
-        <p:spPr>
-          <a:xfrm>
-            <a:off x="4768596" y="1581912"/>
-            <a:ext cx="1252728" cy="676656"/>
-          </a:xfrm>
-          <a:prstGeom prst="roundRect">
-            <a:avLst>
-              <a:gd name="adj" fmla="val 30000"/>
-            </a:avLst>
-          </a:prstGeom>
-          <a:noFill/>
-          <a:ln w="22225">
-            <a:solidFill>
-              <a:srgbClr val="7B4FB5"/>
-            </a:solidFill>
-            <a:prstDash val="sysDot"/>
-          </a:ln>
-          <a:effectLst/>
-        </p:spPr>
-        <p:txBody>
-          <a:bodyPr rtlCol="0" anchor="ctr" lIns="54864" rIns="54864" tIns="27432" bIns="27432" wrap="square"/>
-          <a:lstStyle/>
-          <a:p>
-            <a:pPr algn="ctr"/>
-          </a:p>
-        </p:txBody>
-      </p:sp>
-      <p:sp>
-        <p:nvSpPr>
-          <p:cNvPr id="14" name="Rounded Rectangle 13"/>
-          <p:cNvSpPr/>
-          <p:nvPr/>
-        </p:nvSpPr>
-        <p:spPr>
-          <a:xfrm>
-            <a:off x="6432804" y="1581912"/>
-            <a:ext cx="1252728" cy="676656"/>
-          </a:xfrm>
-          <a:prstGeom prst="roundRect">
-            <a:avLst>
-              <a:gd name="adj" fmla="val 30000"/>
-            </a:avLst>
-          </a:prstGeom>
-          <a:noFill/>
-          <a:ln w="22225">
-            <a:solidFill>
-              <a:srgbClr val="7B4FB5"/>
-            </a:solidFill>
-            <a:prstDash val="sysDot"/>
-          </a:ln>
-          <a:effectLst/>
-        </p:spPr>
-        <p:txBody>
-          <a:bodyPr rtlCol="0" anchor="ctr" lIns="54864" rIns="54864" tIns="27432" bIns="27432" wrap="square"/>
-          <a:lstStyle/>
-          <a:p>
-            <a:pPr algn="ctr"/>
-          </a:p>
-        </p:txBody>
-      </p:sp>
+      <p:cxnSp>
+        <p:nvCxnSpPr>
+          <p:cNvPr id="11" name="Connector 10"/>
+          <p:cNvCxnSpPr/>
+          <p:nvPr/>
+        </p:nvCxnSpPr>
+        <p:spPr>
+          <a:xfrm flipH="1">
+            <a:off x="2784348" y="3803903"/>
+            <a:ext cx="539496" cy="1106425"/>
+          </a:xfrm>
+          <a:prstGeom prst="line">
+            <a:avLst/>
+          </a:prstGeom>
+          <a:ln w="15875">
+            <a:solidFill>
+              <a:srgbClr val="C9CDD3"/>
+            </a:solidFill>
+          </a:ln>
+          <a:effectLst/>
+        </p:spPr>
+      </p:cxnSp>
+      <p:cxnSp>
+        <p:nvCxnSpPr>
+          <p:cNvPr id="12" name="Connector 11"/>
+          <p:cNvCxnSpPr/>
+          <p:nvPr/>
+        </p:nvCxnSpPr>
+        <p:spPr>
+          <a:xfrm>
+            <a:off x="3323844" y="3803903"/>
+            <a:ext cx="960120" cy="1106425"/>
+          </a:xfrm>
+          <a:prstGeom prst="line">
+            <a:avLst/>
+          </a:prstGeom>
+          <a:ln w="15875">
+            <a:solidFill>
+              <a:srgbClr val="C9CDD3"/>
+            </a:solidFill>
+          </a:ln>
+          <a:effectLst/>
+        </p:spPr>
+      </p:cxnSp>
+      <p:cxnSp>
+        <p:nvCxnSpPr>
+          <p:cNvPr id="13" name="Connector 12"/>
+          <p:cNvCxnSpPr/>
+          <p:nvPr/>
+        </p:nvCxnSpPr>
+        <p:spPr>
+          <a:xfrm flipH="1">
+            <a:off x="3406139" y="3803903"/>
+            <a:ext cx="1014985" cy="1106425"/>
+          </a:xfrm>
+          <a:prstGeom prst="line">
+            <a:avLst/>
+          </a:prstGeom>
+          <a:ln w="15875">
+            <a:solidFill>
+              <a:srgbClr val="C9CDD3"/>
+            </a:solidFill>
+          </a:ln>
+          <a:effectLst/>
+        </p:spPr>
+      </p:cxnSp>
+      <p:cxnSp>
+        <p:nvCxnSpPr>
+          <p:cNvPr id="14" name="Connector 13"/>
+          <p:cNvCxnSpPr/>
+          <p:nvPr/>
+        </p:nvCxnSpPr>
+        <p:spPr>
+          <a:xfrm>
+            <a:off x="4421124" y="3803903"/>
+            <a:ext cx="484632" cy="1106425"/>
+          </a:xfrm>
+          <a:prstGeom prst="line">
+            <a:avLst/>
+          </a:prstGeom>
+          <a:ln w="15875">
+            <a:solidFill>
+              <a:srgbClr val="C9CDD3"/>
+            </a:solidFill>
+          </a:ln>
+          <a:effectLst/>
+        </p:spPr>
+      </p:cxnSp>
       <p:cxnSp>
         <p:nvCxnSpPr>
           <p:cNvPr id="15" name="Connector 14"/>
@@ -49797,15 +49275,15 @@
         </p:nvCxnSpPr>
         <p:spPr>
           <a:xfrm flipH="1">
-            <a:off x="2784348" y="3803903"/>
-            <a:ext cx="539496" cy="1106425"/>
+            <a:off x="7283196" y="3803903"/>
+            <a:ext cx="475487" cy="1106425"/>
           </a:xfrm>
           <a:prstGeom prst="line">
             <a:avLst/>
           </a:prstGeom>
           <a:ln w="15875">
             <a:solidFill>
-              <a:srgbClr val="8A8F98"/>
+              <a:srgbClr val="C9CDD3"/>
             </a:solidFill>
           </a:ln>
           <a:effectLst/>
@@ -49819,15 +49297,15 @@
         </p:nvCxnSpPr>
         <p:spPr>
           <a:xfrm>
-            <a:off x="3323844" y="3803903"/>
-            <a:ext cx="960120" cy="1106425"/>
+            <a:off x="7758683" y="3803903"/>
+            <a:ext cx="1024129" cy="1106425"/>
           </a:xfrm>
           <a:prstGeom prst="line">
             <a:avLst/>
           </a:prstGeom>
           <a:ln w="15875">
             <a:solidFill>
-              <a:srgbClr val="8A8F98"/>
+              <a:srgbClr val="C9CDD3"/>
             </a:solidFill>
           </a:ln>
           <a:effectLst/>
@@ -49841,15 +49319,15 @@
         </p:nvCxnSpPr>
         <p:spPr>
           <a:xfrm flipH="1">
-            <a:off x="3406139" y="3803903"/>
-            <a:ext cx="1014985" cy="1106425"/>
+            <a:off x="7904988" y="3803903"/>
+            <a:ext cx="950975" cy="1106425"/>
           </a:xfrm>
           <a:prstGeom prst="line">
             <a:avLst/>
           </a:prstGeom>
           <a:ln w="15875">
             <a:solidFill>
-              <a:srgbClr val="8A8F98"/>
+              <a:srgbClr val="C9CDD3"/>
             </a:solidFill>
           </a:ln>
           <a:effectLst/>
@@ -49863,15 +49341,15 @@
         </p:nvCxnSpPr>
         <p:spPr>
           <a:xfrm>
-            <a:off x="4421124" y="3803903"/>
-            <a:ext cx="484632" cy="1106425"/>
+            <a:off x="8855963" y="3803903"/>
+            <a:ext cx="548641" cy="1106425"/>
           </a:xfrm>
           <a:prstGeom prst="line">
             <a:avLst/>
           </a:prstGeom>
           <a:ln w="15875">
             <a:solidFill>
-              <a:srgbClr val="8A8F98"/>
+              <a:srgbClr val="C9CDD3"/>
             </a:solidFill>
           </a:ln>
           <a:effectLst/>
@@ -49884,16 +49362,16 @@
           <p:nvPr/>
         </p:nvCxnSpPr>
         <p:spPr>
-          <a:xfrm flipH="1">
-            <a:off x="7283196" y="3803903"/>
-            <a:ext cx="475487" cy="1106425"/>
+          <a:xfrm>
+            <a:off x="5564124" y="2203704"/>
+            <a:ext cx="219455" cy="2706624"/>
           </a:xfrm>
           <a:prstGeom prst="line">
             <a:avLst/>
           </a:prstGeom>
           <a:ln w="15875">
             <a:solidFill>
-              <a:srgbClr val="8A8F98"/>
+              <a:srgbClr val="C9CDD3"/>
             </a:solidFill>
           </a:ln>
           <a:effectLst/>
@@ -49906,9 +49384,9 @@
           <p:nvPr/>
         </p:nvCxnSpPr>
         <p:spPr>
-          <a:xfrm>
-            <a:off x="7758683" y="3803903"/>
-            <a:ext cx="1024129" cy="1106425"/>
+          <a:xfrm flipH="1">
+            <a:off x="3323844" y="2203704"/>
+            <a:ext cx="2240280" cy="749807"/>
           </a:xfrm>
           <a:prstGeom prst="line">
             <a:avLst/>
@@ -49928,9 +49406,9 @@
           <p:nvPr/>
         </p:nvCxnSpPr>
         <p:spPr>
-          <a:xfrm flipH="1">
-            <a:off x="7904988" y="3803903"/>
-            <a:ext cx="950975" cy="1106425"/>
+          <a:xfrm>
+            <a:off x="5564124" y="2203704"/>
+            <a:ext cx="2194559" cy="749807"/>
           </a:xfrm>
           <a:prstGeom prst="line">
             <a:avLst/>
@@ -49950,16 +49428,16 @@
           <p:nvPr/>
         </p:nvCxnSpPr>
         <p:spPr>
-          <a:xfrm>
-            <a:off x="8855963" y="3803903"/>
-            <a:ext cx="548641" cy="1106425"/>
+          <a:xfrm flipH="1">
+            <a:off x="6405372" y="2203704"/>
+            <a:ext cx="484632" cy="2706624"/>
           </a:xfrm>
           <a:prstGeom prst="line">
             <a:avLst/>
           </a:prstGeom>
           <a:ln w="15875">
             <a:solidFill>
-              <a:srgbClr val="8A8F98"/>
+              <a:srgbClr val="C9CDD3"/>
             </a:solidFill>
           </a:ln>
           <a:effectLst/>
@@ -49972,9 +49450,9 @@
           <p:nvPr/>
         </p:nvCxnSpPr>
         <p:spPr>
-          <a:xfrm>
-            <a:off x="5564124" y="2203704"/>
-            <a:ext cx="219455" cy="2706624"/>
+          <a:xfrm flipH="1">
+            <a:off x="4421124" y="2203704"/>
+            <a:ext cx="2468880" cy="749807"/>
           </a:xfrm>
           <a:prstGeom prst="line">
             <a:avLst/>
@@ -49994,94 +49472,6 @@
           <p:nvPr/>
         </p:nvCxnSpPr>
         <p:spPr>
-          <a:xfrm flipH="1">
-            <a:off x="3323844" y="2203704"/>
-            <a:ext cx="2240280" cy="749807"/>
-          </a:xfrm>
-          <a:prstGeom prst="line">
-            <a:avLst/>
-          </a:prstGeom>
-          <a:ln w="15875">
-            <a:solidFill>
-              <a:srgbClr val="8A8F98"/>
-            </a:solidFill>
-          </a:ln>
-          <a:effectLst/>
-        </p:spPr>
-      </p:cxnSp>
-      <p:cxnSp>
-        <p:nvCxnSpPr>
-          <p:cNvPr id="25" name="Connector 24"/>
-          <p:cNvCxnSpPr/>
-          <p:nvPr/>
-        </p:nvCxnSpPr>
-        <p:spPr>
-          <a:xfrm>
-            <a:off x="5564124" y="2203704"/>
-            <a:ext cx="2194559" cy="749807"/>
-          </a:xfrm>
-          <a:prstGeom prst="line">
-            <a:avLst/>
-          </a:prstGeom>
-          <a:ln w="15875">
-            <a:solidFill>
-              <a:srgbClr val="8A8F98"/>
-            </a:solidFill>
-          </a:ln>
-          <a:effectLst/>
-        </p:spPr>
-      </p:cxnSp>
-      <p:cxnSp>
-        <p:nvCxnSpPr>
-          <p:cNvPr id="26" name="Connector 25"/>
-          <p:cNvCxnSpPr/>
-          <p:nvPr/>
-        </p:nvCxnSpPr>
-        <p:spPr>
-          <a:xfrm flipH="1">
-            <a:off x="6405372" y="2203704"/>
-            <a:ext cx="484632" cy="2706624"/>
-          </a:xfrm>
-          <a:prstGeom prst="line">
-            <a:avLst/>
-          </a:prstGeom>
-          <a:ln w="15875">
-            <a:solidFill>
-              <a:srgbClr val="8A8F98"/>
-            </a:solidFill>
-          </a:ln>
-          <a:effectLst/>
-        </p:spPr>
-      </p:cxnSp>
-      <p:cxnSp>
-        <p:nvCxnSpPr>
-          <p:cNvPr id="27" name="Connector 26"/>
-          <p:cNvCxnSpPr/>
-          <p:nvPr/>
-        </p:nvCxnSpPr>
-        <p:spPr>
-          <a:xfrm flipH="1">
-            <a:off x="4421124" y="2203704"/>
-            <a:ext cx="2468880" cy="749807"/>
-          </a:xfrm>
-          <a:prstGeom prst="line">
-            <a:avLst/>
-          </a:prstGeom>
-          <a:ln w="15875">
-            <a:solidFill>
-              <a:srgbClr val="8A8F98"/>
-            </a:solidFill>
-          </a:ln>
-          <a:effectLst/>
-        </p:spPr>
-      </p:cxnSp>
-      <p:cxnSp>
-        <p:nvCxnSpPr>
-          <p:cNvPr id="28" name="Connector 27"/>
-          <p:cNvCxnSpPr/>
-          <p:nvPr/>
-        </p:nvCxnSpPr>
-        <p:spPr>
           <a:xfrm>
             <a:off x="6890004" y="2203704"/>
             <a:ext cx="1965959" cy="749807"/>
@@ -50099,7 +49489,7 @@
       </p:cxnSp>
       <p:sp>
         <p:nvSpPr>
-          <p:cNvPr id="29" name="Rounded Rectangle 28"/>
+          <p:cNvPr id="25" name="Rounded Rectangle 24"/>
           <p:cNvSpPr/>
           <p:nvPr/>
         </p:nvSpPr>
@@ -50118,7 +49508,7 @@
           </a:solidFill>
           <a:ln w="12700">
             <a:solidFill>
-              <a:srgbClr val="4A4F57"/>
+              <a:srgbClr val="C9CDD3"/>
             </a:solidFill>
           </a:ln>
           <a:effectLst/>
@@ -50131,7 +49521,7 @@
             <a:r>
               <a:rPr sz="1400" b="1" i="0">
                 <a:solidFill>
-                  <a:srgbClr val="2B2F36"/>
+                  <a:srgbClr val="C9CDD3"/>
                 </a:solidFill>
                 <a:latin typeface="Calibri"/>
               </a:rPr>
@@ -50142,7 +49532,7 @@
       </p:sp>
       <p:sp>
         <p:nvSpPr>
-          <p:cNvPr id="30" name="Rounded Rectangle 29"/>
+          <p:cNvPr id="26" name="Rounded Rectangle 25"/>
           <p:cNvSpPr/>
           <p:nvPr/>
         </p:nvSpPr>
@@ -50161,7 +49551,7 @@
           </a:solidFill>
           <a:ln w="12700">
             <a:solidFill>
-              <a:srgbClr val="4A4F57"/>
+              <a:srgbClr val="C9CDD3"/>
             </a:solidFill>
           </a:ln>
           <a:effectLst/>
@@ -50174,7 +49564,7 @@
             <a:r>
               <a:rPr sz="1400" b="1" i="0">
                 <a:solidFill>
-                  <a:srgbClr val="2B2F36"/>
+                  <a:srgbClr val="C9CDD3"/>
                 </a:solidFill>
                 <a:latin typeface="Calibri"/>
               </a:rPr>
@@ -50185,7 +49575,7 @@
       </p:sp>
       <p:sp>
         <p:nvSpPr>
-          <p:cNvPr id="31" name="Rounded Rectangle 30"/>
+          <p:cNvPr id="27" name="Rounded Rectangle 26"/>
           <p:cNvSpPr/>
           <p:nvPr/>
         </p:nvSpPr>
@@ -50204,7 +49594,7 @@
           </a:solidFill>
           <a:ln w="12700">
             <a:solidFill>
-              <a:srgbClr val="4A4F57"/>
+              <a:srgbClr val="C9CDD3"/>
             </a:solidFill>
           </a:ln>
           <a:effectLst/>
@@ -50217,7 +49607,7 @@
             <a:r>
               <a:rPr sz="1400" b="1" i="0">
                 <a:solidFill>
-                  <a:srgbClr val="2B2F36"/>
+                  <a:srgbClr val="C9CDD3"/>
                 </a:solidFill>
                 <a:latin typeface="Calibri"/>
               </a:rPr>
@@ -50228,7 +49618,7 @@
       </p:sp>
       <p:sp>
         <p:nvSpPr>
-          <p:cNvPr id="32" name="Rounded Rectangle 31"/>
+          <p:cNvPr id="28" name="Rounded Rectangle 27"/>
           <p:cNvSpPr/>
           <p:nvPr/>
         </p:nvSpPr>
@@ -50247,7 +49637,7 @@
           </a:solidFill>
           <a:ln w="12700">
             <a:solidFill>
-              <a:srgbClr val="4A4F57"/>
+              <a:srgbClr val="C9CDD3"/>
             </a:solidFill>
           </a:ln>
           <a:effectLst/>
@@ -50260,7 +49650,7 @@
             <a:r>
               <a:rPr sz="1400" b="1" i="0">
                 <a:solidFill>
-                  <a:srgbClr val="2B2F36"/>
+                  <a:srgbClr val="C9CDD3"/>
                 </a:solidFill>
                 <a:latin typeface="Calibri"/>
               </a:rPr>
@@ -50271,7 +49661,7 @@
       </p:sp>
       <p:sp>
         <p:nvSpPr>
-          <p:cNvPr id="33" name="Rounded Rectangle 32"/>
+          <p:cNvPr id="29" name="Rounded Rectangle 28"/>
           <p:cNvSpPr/>
           <p:nvPr/>
         </p:nvSpPr>
@@ -50290,7 +49680,7 @@
           </a:solidFill>
           <a:ln w="12700">
             <a:solidFill>
-              <a:srgbClr val="4A4F57"/>
+              <a:srgbClr val="C9CDD3"/>
             </a:solidFill>
           </a:ln>
           <a:effectLst/>
@@ -50303,7 +49693,7 @@
             <a:r>
               <a:rPr sz="1400" b="1" i="0">
                 <a:solidFill>
-                  <a:srgbClr val="2B2F36"/>
+                  <a:srgbClr val="C9CDD3"/>
                 </a:solidFill>
                 <a:latin typeface="Calibri"/>
               </a:rPr>
@@ -50314,7 +49704,7 @@
       </p:sp>
       <p:sp>
         <p:nvSpPr>
-          <p:cNvPr id="34" name="Rounded Rectangle 33"/>
+          <p:cNvPr id="30" name="Rounded Rectangle 29"/>
           <p:cNvSpPr/>
           <p:nvPr/>
         </p:nvSpPr>
@@ -50333,7 +49723,7 @@
           </a:solidFill>
           <a:ln w="12700">
             <a:solidFill>
-              <a:srgbClr val="4A4F57"/>
+              <a:srgbClr val="C9CDD3"/>
             </a:solidFill>
           </a:ln>
           <a:effectLst/>
@@ -50346,7 +49736,7 @@
             <a:r>
               <a:rPr sz="1400" b="1" i="0">
                 <a:solidFill>
-                  <a:srgbClr val="2B2F36"/>
+                  <a:srgbClr val="C9CDD3"/>
                 </a:solidFill>
                 <a:latin typeface="Calibri"/>
               </a:rPr>
@@ -50357,7 +49747,7 @@
       </p:sp>
       <p:sp>
         <p:nvSpPr>
-          <p:cNvPr id="35" name="Rounded Rectangle 34"/>
+          <p:cNvPr id="31" name="Rounded Rectangle 30"/>
           <p:cNvSpPr/>
           <p:nvPr/>
         </p:nvSpPr>
@@ -50376,7 +49766,7 @@
           </a:solidFill>
           <a:ln w="12700">
             <a:solidFill>
-              <a:srgbClr val="4A4F57"/>
+              <a:srgbClr val="C9CDD3"/>
             </a:solidFill>
           </a:ln>
           <a:effectLst/>
@@ -50389,7 +49779,7 @@
             <a:r>
               <a:rPr sz="1400" b="1" i="0">
                 <a:solidFill>
-                  <a:srgbClr val="2B2F36"/>
+                  <a:srgbClr val="C9CDD3"/>
                 </a:solidFill>
                 <a:latin typeface="Calibri"/>
               </a:rPr>
@@ -50400,7 +49790,7 @@
       </p:sp>
       <p:sp>
         <p:nvSpPr>
-          <p:cNvPr id="36" name="Rounded Rectangle 35"/>
+          <p:cNvPr id="32" name="Rounded Rectangle 31"/>
           <p:cNvSpPr/>
           <p:nvPr/>
         </p:nvSpPr>
@@ -50419,7 +49809,7 @@
           </a:solidFill>
           <a:ln w="12700">
             <a:solidFill>
-              <a:srgbClr val="4A4F57"/>
+              <a:srgbClr val="C9CDD3"/>
             </a:solidFill>
           </a:ln>
           <a:effectLst/>
@@ -50432,7 +49822,7 @@
             <a:r>
               <a:rPr sz="1400" b="1" i="0">
                 <a:solidFill>
-                  <a:srgbClr val="2B2F36"/>
+                  <a:srgbClr val="C9CDD3"/>
                 </a:solidFill>
                 <a:latin typeface="Calibri"/>
               </a:rPr>
@@ -50443,7 +49833,7 @@
       </p:sp>
       <p:sp>
         <p:nvSpPr>
-          <p:cNvPr id="37" name="Rounded Rectangle 36"/>
+          <p:cNvPr id="33" name="Rounded Rectangle 32"/>
           <p:cNvSpPr/>
           <p:nvPr/>
         </p:nvSpPr>
@@ -50462,7 +49852,7 @@
           </a:solidFill>
           <a:ln w="12700">
             <a:solidFill>
-              <a:srgbClr val="4A4F57"/>
+              <a:srgbClr val="C9CDD3"/>
             </a:solidFill>
           </a:ln>
           <a:effectLst/>
@@ -50475,7 +49865,7 @@
             <a:r>
               <a:rPr sz="1400" b="1" i="0">
                 <a:solidFill>
-                  <a:srgbClr val="2B2F36"/>
+                  <a:srgbClr val="C9CDD3"/>
                 </a:solidFill>
                 <a:latin typeface="Calibri"/>
               </a:rPr>
@@ -50486,7 +49876,7 @@
       </p:sp>
       <p:sp>
         <p:nvSpPr>
-          <p:cNvPr id="38" name="Rounded Rectangle 37"/>
+          <p:cNvPr id="34" name="Rounded Rectangle 33"/>
           <p:cNvSpPr/>
           <p:nvPr/>
         </p:nvSpPr>
@@ -50505,7 +49895,7 @@
           </a:solidFill>
           <a:ln w="12700">
             <a:solidFill>
-              <a:srgbClr val="4A4F57"/>
+              <a:srgbClr val="C9CDD3"/>
             </a:solidFill>
           </a:ln>
           <a:effectLst/>
@@ -50518,7 +49908,7 @@
             <a:r>
               <a:rPr sz="1400" b="1" i="0">
                 <a:solidFill>
-                  <a:srgbClr val="2B2F36"/>
+                  <a:srgbClr val="C9CDD3"/>
                 </a:solidFill>
                 <a:latin typeface="Calibri"/>
               </a:rPr>
@@ -50529,7 +49919,7 @@
       </p:sp>
       <p:sp>
         <p:nvSpPr>
-          <p:cNvPr id="39" name="Rounded Rectangle 38"/>
+          <p:cNvPr id="35" name="Rounded Rectangle 34"/>
           <p:cNvSpPr/>
           <p:nvPr/>
         </p:nvSpPr>
@@ -50544,11 +49934,11 @@
             </a:avLst>
           </a:prstGeom>
           <a:solidFill>
-            <a:srgbClr val="FFF3CC"/>
+            <a:srgbClr val="DCEAF8"/>
           </a:solidFill>
           <a:ln w="34925">
             <a:solidFill>
-              <a:srgbClr val="E0A300"/>
+              <a:srgbClr val="2E6FB0"/>
             </a:solidFill>
           </a:ln>
           <a:effectLst/>
@@ -50572,7 +49962,7 @@
       </p:sp>
       <p:sp>
         <p:nvSpPr>
-          <p:cNvPr id="40" name="TextBox 39"/>
+          <p:cNvPr id="36" name="TextBox 35"/>
           <p:cNvSpPr txBox="1"/>
           <p:nvPr/>
         </p:nvSpPr>
@@ -50607,7 +49997,7 @@
       </p:sp>
       <p:sp>
         <p:nvSpPr>
-          <p:cNvPr id="41" name="Rounded Rectangle 40"/>
+          <p:cNvPr id="37" name="Rounded Rectangle 36"/>
           <p:cNvSpPr/>
           <p:nvPr/>
         </p:nvSpPr>
@@ -50622,11 +50012,11 @@
             </a:avLst>
           </a:prstGeom>
           <a:solidFill>
-            <a:srgbClr val="FFF3CC"/>
+            <a:srgbClr val="DCEAF8"/>
           </a:solidFill>
           <a:ln w="34925">
             <a:solidFill>
-              <a:srgbClr val="E0A300"/>
+              <a:srgbClr val="2E6FB0"/>
             </a:solidFill>
           </a:ln>
           <a:effectLst/>
@@ -50650,7 +50040,7 @@
       </p:sp>
       <p:sp>
         <p:nvSpPr>
-          <p:cNvPr id="42" name="TextBox 41"/>
+          <p:cNvPr id="38" name="TextBox 37"/>
           <p:cNvSpPr txBox="1"/>
           <p:nvPr/>
         </p:nvSpPr>
@@ -50685,7 +50075,7 @@
       </p:sp>
       <p:sp>
         <p:nvSpPr>
-          <p:cNvPr id="43" name="Rounded Rectangle 42"/>
+          <p:cNvPr id="39" name="Rounded Rectangle 38"/>
           <p:cNvSpPr/>
           <p:nvPr/>
         </p:nvSpPr>
@@ -50700,11 +50090,11 @@
             </a:avLst>
           </a:prstGeom>
           <a:solidFill>
-            <a:srgbClr val="FFF3CC"/>
+            <a:srgbClr val="DDF1E2"/>
           </a:solidFill>
           <a:ln w="34925">
             <a:solidFill>
-              <a:srgbClr val="E0A300"/>
+              <a:srgbClr val="3A9A5B"/>
             </a:solidFill>
           </a:ln>
           <a:effectLst/>
@@ -50728,7 +50118,7 @@
       </p:sp>
       <p:sp>
         <p:nvSpPr>
-          <p:cNvPr id="44" name="TextBox 43"/>
+          <p:cNvPr id="40" name="TextBox 39"/>
           <p:cNvSpPr txBox="1"/>
           <p:nvPr/>
         </p:nvSpPr>
@@ -50763,7 +50153,7 @@
       </p:sp>
       <p:sp>
         <p:nvSpPr>
-          <p:cNvPr id="45" name="Rounded Rectangle 44"/>
+          <p:cNvPr id="41" name="Rounded Rectangle 40"/>
           <p:cNvSpPr/>
           <p:nvPr/>
         </p:nvSpPr>
@@ -50778,11 +50168,11 @@
             </a:avLst>
           </a:prstGeom>
           <a:solidFill>
-            <a:srgbClr val="FFF3CC"/>
+            <a:srgbClr val="DDF1E2"/>
           </a:solidFill>
           <a:ln w="34925">
             <a:solidFill>
-              <a:srgbClr val="E0A300"/>
+              <a:srgbClr val="3A9A5B"/>
             </a:solidFill>
           </a:ln>
           <a:effectLst/>
@@ -50806,7 +50196,7 @@
       </p:sp>
       <p:sp>
         <p:nvSpPr>
-          <p:cNvPr id="46" name="TextBox 45"/>
+          <p:cNvPr id="42" name="TextBox 41"/>
           <p:cNvSpPr txBox="1"/>
           <p:nvPr/>
         </p:nvSpPr>
@@ -50841,7 +50231,7 @@
       </p:sp>
       <p:sp>
         <p:nvSpPr>
-          <p:cNvPr id="47" name="Rounded Rectangle 46"/>
+          <p:cNvPr id="43" name="Rounded Rectangle 42"/>
           <p:cNvSpPr/>
           <p:nvPr/>
         </p:nvSpPr>
@@ -50856,11 +50246,11 @@
             </a:avLst>
           </a:prstGeom>
           <a:solidFill>
-            <a:srgbClr val="FFF3CC"/>
-          </a:solidFill>
-          <a:ln w="34925">
-            <a:solidFill>
-              <a:srgbClr val="E0A300"/>
+            <a:srgbClr val="FFFFFF"/>
+          </a:solidFill>
+          <a:ln w="12700">
+            <a:solidFill>
+              <a:srgbClr val="4A4F57"/>
             </a:solidFill>
           </a:ln>
           <a:effectLst/>
@@ -50884,7 +50274,7 @@
       </p:sp>
       <p:sp>
         <p:nvSpPr>
-          <p:cNvPr id="48" name="TextBox 47"/>
+          <p:cNvPr id="44" name="TextBox 43"/>
           <p:cNvSpPr txBox="1"/>
           <p:nvPr/>
         </p:nvSpPr>
@@ -50919,7 +50309,7 @@
       </p:sp>
       <p:sp>
         <p:nvSpPr>
-          <p:cNvPr id="49" name="Rounded Rectangle 48"/>
+          <p:cNvPr id="45" name="Rounded Rectangle 44"/>
           <p:cNvSpPr/>
           <p:nvPr/>
         </p:nvSpPr>
@@ -50934,11 +50324,11 @@
             </a:avLst>
           </a:prstGeom>
           <a:solidFill>
-            <a:srgbClr val="FFF3CC"/>
-          </a:solidFill>
-          <a:ln w="34925">
-            <a:solidFill>
-              <a:srgbClr val="E0A300"/>
+            <a:srgbClr val="FFFFFF"/>
+          </a:solidFill>
+          <a:ln w="12700">
+            <a:solidFill>
+              <a:srgbClr val="4A4F57"/>
             </a:solidFill>
           </a:ln>
           <a:effectLst/>
@@ -50962,7 +50352,7 @@
       </p:sp>
       <p:sp>
         <p:nvSpPr>
-          <p:cNvPr id="50" name="TextBox 49"/>
+          <p:cNvPr id="46" name="TextBox 45"/>
           <p:cNvSpPr txBox="1"/>
           <p:nvPr/>
         </p:nvSpPr>
@@ -50991,487 +50381,6 @@
                 <a:latin typeface="Calibri"/>
               </a:rPr>
               <a:t>m₂</a:t>
-            </a:r>
-          </a:p>
-        </p:txBody>
-      </p:sp>
-      <p:sp>
-        <p:nvSpPr>
-          <p:cNvPr id="51" name="Rounded Rectangle 50"/>
-          <p:cNvSpPr/>
-          <p:nvPr/>
-        </p:nvSpPr>
-        <p:spPr>
-          <a:xfrm>
-            <a:off x="2263139" y="4663440"/>
-            <a:ext cx="7662672" cy="914400"/>
-          </a:xfrm>
-          <a:prstGeom prst="roundRect">
-            <a:avLst>
-              <a:gd name="adj" fmla="val 35000"/>
-            </a:avLst>
-          </a:prstGeom>
-          <a:noFill/>
-          <a:ln w="28575">
-            <a:solidFill>
-              <a:srgbClr val="1F2A44"/>
-            </a:solidFill>
-            <a:prstDash val="lgDash"/>
-          </a:ln>
-          <a:effectLst/>
-        </p:spPr>
-        <p:txBody>
-          <a:bodyPr rtlCol="0" anchor="ctr" lIns="54864" rIns="54864" tIns="27432" bIns="27432" wrap="square"/>
-          <a:lstStyle/>
-          <a:p>
-            <a:pPr algn="ctr"/>
-          </a:p>
-        </p:txBody>
-      </p:sp>
-      <p:sp>
-        <p:nvSpPr>
-          <p:cNvPr id="52" name="TextBox 51"/>
-          <p:cNvSpPr txBox="1"/>
-          <p:nvPr/>
-        </p:nvSpPr>
-        <p:spPr>
-          <a:xfrm>
-            <a:off x="10017252" y="4937759"/>
-            <a:ext cx="1188720" cy="365760"/>
-          </a:xfrm>
-          <a:prstGeom prst="rect">
-            <a:avLst/>
-          </a:prstGeom>
-          <a:noFill/>
-        </p:spPr>
-        <p:txBody>
-          <a:bodyPr wrap="square" anchor="ctr" lIns="45720" rIns="45720" tIns="27432" bIns="27432">
-            <a:spAutoFit/>
-          </a:bodyPr>
-          <a:lstStyle/>
-          <a:p>
-            <a:pPr algn="l"/>
-            <a:r>
-              <a:rPr sz="1600" b="1" i="0">
-                <a:solidFill>
-                  <a:srgbClr val="1F2A44"/>
-                </a:solidFill>
-                <a:latin typeface="Calibri"/>
-              </a:rPr>
-              <a:t>round 0</a:t>
-            </a:r>
-          </a:p>
-        </p:txBody>
-      </p:sp>
-      <p:sp>
-        <p:nvSpPr>
-          <p:cNvPr id="53" name="Rounded Rectangle 52"/>
-          <p:cNvSpPr/>
-          <p:nvPr/>
-        </p:nvSpPr>
-        <p:spPr>
-          <a:xfrm>
-            <a:off x="2674620" y="2715768"/>
-            <a:ext cx="6830568" cy="1335024"/>
-          </a:xfrm>
-          <a:prstGeom prst="roundRect">
-            <a:avLst>
-              <a:gd name="adj" fmla="val 35000"/>
-            </a:avLst>
-          </a:prstGeom>
-          <a:noFill/>
-          <a:ln w="28575">
-            <a:solidFill>
-              <a:srgbClr val="1F2A44"/>
-            </a:solidFill>
-            <a:prstDash val="lgDash"/>
-          </a:ln>
-          <a:effectLst/>
-        </p:spPr>
-        <p:txBody>
-          <a:bodyPr rtlCol="0" anchor="ctr" lIns="54864" rIns="54864" tIns="27432" bIns="27432" wrap="square"/>
-          <a:lstStyle/>
-          <a:p>
-            <a:pPr algn="ctr"/>
-          </a:p>
-        </p:txBody>
-      </p:sp>
-      <p:sp>
-        <p:nvSpPr>
-          <p:cNvPr id="54" name="TextBox 53"/>
-          <p:cNvSpPr txBox="1"/>
-          <p:nvPr/>
-        </p:nvSpPr>
-        <p:spPr>
-          <a:xfrm>
-            <a:off x="9596628" y="3200399"/>
-            <a:ext cx="1188720" cy="365760"/>
-          </a:xfrm>
-          <a:prstGeom prst="rect">
-            <a:avLst/>
-          </a:prstGeom>
-          <a:noFill/>
-        </p:spPr>
-        <p:txBody>
-          <a:bodyPr wrap="square" anchor="ctr" lIns="45720" rIns="45720" tIns="27432" bIns="27432">
-            <a:spAutoFit/>
-          </a:bodyPr>
-          <a:lstStyle/>
-          <a:p>
-            <a:pPr algn="l"/>
-            <a:r>
-              <a:rPr sz="1600" b="1" i="0">
-                <a:solidFill>
-                  <a:srgbClr val="1F2A44"/>
-                </a:solidFill>
-                <a:latin typeface="Calibri"/>
-              </a:rPr>
-              <a:t>round 1</a:t>
-            </a:r>
-          </a:p>
-        </p:txBody>
-      </p:sp>
-      <p:sp>
-        <p:nvSpPr>
-          <p:cNvPr id="55" name="TextBox 54"/>
-          <p:cNvSpPr txBox="1"/>
-          <p:nvPr/>
-        </p:nvSpPr>
-        <p:spPr>
-          <a:xfrm>
-            <a:off x="2775203" y="2340863"/>
-            <a:ext cx="2194560" cy="274320"/>
-          </a:xfrm>
-          <a:prstGeom prst="rect">
-            <a:avLst/>
-          </a:prstGeom>
-          <a:noFill/>
-        </p:spPr>
-        <p:txBody>
-          <a:bodyPr wrap="square" anchor="ctr" lIns="45720" rIns="45720" tIns="27432" bIns="27432">
-            <a:spAutoFit/>
-          </a:bodyPr>
-          <a:lstStyle/>
-          <a:p>
-            <a:pPr algn="ctr"/>
-            <a:r>
-              <a:rPr sz="1150" b="1" i="0">
-                <a:solidFill>
-                  <a:srgbClr val="7B4FB5"/>
-                </a:solidFill>
-                <a:latin typeface="Calibri"/>
-              </a:rPr>
-              <a:t>AND([r], [s])</a:t>
-            </a:r>
-          </a:p>
-        </p:txBody>
-      </p:sp>
-      <p:sp>
-        <p:nvSpPr>
-          <p:cNvPr id="56" name="TextBox 55"/>
-          <p:cNvSpPr txBox="1"/>
-          <p:nvPr/>
-        </p:nvSpPr>
-        <p:spPr>
-          <a:xfrm>
-            <a:off x="7210044" y="2340863"/>
-            <a:ext cx="2194560" cy="274320"/>
-          </a:xfrm>
-          <a:prstGeom prst="rect">
-            <a:avLst/>
-          </a:prstGeom>
-          <a:noFill/>
-        </p:spPr>
-        <p:txBody>
-          <a:bodyPr wrap="square" anchor="ctr" lIns="45720" rIns="45720" tIns="27432" bIns="27432">
-            <a:spAutoFit/>
-          </a:bodyPr>
-          <a:lstStyle/>
-          <a:p>
-            <a:pPr algn="ctr"/>
-            <a:r>
-              <a:rPr sz="1150" b="1" i="0">
-                <a:solidFill>
-                  <a:srgbClr val="7B4FB5"/>
-                </a:solidFill>
-                <a:latin typeface="Calibri"/>
-              </a:rPr>
-              <a:t>XOR([u], [v])</a:t>
-            </a:r>
-          </a:p>
-        </p:txBody>
-      </p:sp>
-      <p:sp>
-        <p:nvSpPr>
-          <p:cNvPr id="57" name="TextBox 56"/>
-          <p:cNvSpPr txBox="1"/>
-          <p:nvPr/>
-        </p:nvSpPr>
-        <p:spPr>
-          <a:xfrm>
-            <a:off x="4297680" y="1307592"/>
-            <a:ext cx="2194560" cy="274320"/>
-          </a:xfrm>
-          <a:prstGeom prst="rect">
-            <a:avLst/>
-          </a:prstGeom>
-          <a:noFill/>
-        </p:spPr>
-        <p:txBody>
-          <a:bodyPr wrap="square" anchor="ctr" lIns="45720" rIns="45720" tIns="27432" bIns="27432">
-            <a:spAutoFit/>
-          </a:bodyPr>
-          <a:lstStyle/>
-          <a:p>
-            <a:pPr algn="ctr"/>
-            <a:r>
-              <a:rPr sz="1150" b="1" i="0">
-                <a:solidFill>
-                  <a:srgbClr val="7B4FB5"/>
-                </a:solidFill>
-                <a:latin typeface="Calibri"/>
-              </a:rPr>
-              <a:t>ITE([c], [a₁], [x₁])</a:t>
-            </a:r>
-          </a:p>
-        </p:txBody>
-      </p:sp>
-      <p:sp>
-        <p:nvSpPr>
-          <p:cNvPr id="58" name="TextBox 57"/>
-          <p:cNvSpPr txBox="1"/>
-          <p:nvPr/>
-        </p:nvSpPr>
-        <p:spPr>
-          <a:xfrm>
-            <a:off x="5961888" y="1307592"/>
-            <a:ext cx="2194560" cy="274320"/>
-          </a:xfrm>
-          <a:prstGeom prst="rect">
-            <a:avLst/>
-          </a:prstGeom>
-          <a:noFill/>
-        </p:spPr>
-        <p:txBody>
-          <a:bodyPr wrap="square" anchor="ctr" lIns="45720" rIns="45720" tIns="27432" bIns="27432">
-            <a:spAutoFit/>
-          </a:bodyPr>
-          <a:lstStyle/>
-          <a:p>
-            <a:pPr algn="ctr"/>
-            <a:r>
-              <a:rPr sz="1150" b="1" i="0">
-                <a:solidFill>
-                  <a:srgbClr val="7B4FB5"/>
-                </a:solidFill>
-                <a:latin typeface="Calibri"/>
-              </a:rPr>
-              <a:t>ITE([c], [a₂], [x₂])</a:t>
-            </a:r>
-          </a:p>
-        </p:txBody>
-      </p:sp>
-      <p:sp>
-        <p:nvSpPr>
-          <p:cNvPr id="59" name="Rounded Rectangle 58"/>
-          <p:cNvSpPr/>
-          <p:nvPr/>
-        </p:nvSpPr>
-        <p:spPr>
-          <a:xfrm>
-            <a:off x="502920" y="1645920"/>
-            <a:ext cx="329184" cy="219456"/>
-          </a:xfrm>
-          <a:prstGeom prst="roundRect">
-            <a:avLst>
-              <a:gd name="adj" fmla="val 15000"/>
-            </a:avLst>
-          </a:prstGeom>
-          <a:solidFill>
-            <a:srgbClr val="FFF3CC"/>
-          </a:solidFill>
-          <a:ln w="25400">
-            <a:solidFill>
-              <a:srgbClr val="E0A300"/>
-            </a:solidFill>
-          </a:ln>
-          <a:effectLst/>
-        </p:spPr>
-        <p:txBody>
-          <a:bodyPr rtlCol="0" anchor="ctr" lIns="54864" rIns="54864" tIns="27432" bIns="27432" wrap="square"/>
-          <a:lstStyle/>
-          <a:p>
-            <a:pPr algn="ctr"/>
-          </a:p>
-        </p:txBody>
-      </p:sp>
-      <p:sp>
-        <p:nvSpPr>
-          <p:cNvPr id="60" name="TextBox 59"/>
-          <p:cNvSpPr txBox="1"/>
-          <p:nvPr/>
-        </p:nvSpPr>
-        <p:spPr>
-          <a:xfrm>
-            <a:off x="905256" y="1600200"/>
-            <a:ext cx="1563624" cy="320040"/>
-          </a:xfrm>
-          <a:prstGeom prst="rect">
-            <a:avLst/>
-          </a:prstGeom>
-          <a:noFill/>
-        </p:spPr>
-        <p:txBody>
-          <a:bodyPr wrap="square" anchor="ctr" lIns="45720" rIns="45720" tIns="27432" bIns="27432">
-            <a:spAutoFit/>
-          </a:bodyPr>
-          <a:lstStyle/>
-          <a:p>
-            <a:pPr algn="l"/>
-            <a:r>
-              <a:rPr sz="1200" b="0" i="0">
-                <a:solidFill>
-                  <a:srgbClr val="6B717A"/>
-                </a:solidFill>
-                <a:latin typeface="Calibri"/>
-              </a:rPr>
-              <a:t>candidate</a:t>
-            </a:r>
-          </a:p>
-        </p:txBody>
-      </p:sp>
-      <p:sp>
-        <p:nvSpPr>
-          <p:cNvPr id="61" name="Rounded Rectangle 60"/>
-          <p:cNvSpPr/>
-          <p:nvPr/>
-        </p:nvSpPr>
-        <p:spPr>
-          <a:xfrm>
-            <a:off x="502920" y="2066543"/>
-            <a:ext cx="329184" cy="219456"/>
-          </a:xfrm>
-          <a:prstGeom prst="roundRect">
-            <a:avLst>
-              <a:gd name="adj" fmla="val 15000"/>
-            </a:avLst>
-          </a:prstGeom>
-          <a:noFill/>
-          <a:ln w="22225">
-            <a:solidFill>
-              <a:srgbClr val="7B4FB5"/>
-            </a:solidFill>
-            <a:prstDash val="sysDot"/>
-          </a:ln>
-          <a:effectLst/>
-        </p:spPr>
-        <p:txBody>
-          <a:bodyPr rtlCol="0" anchor="ctr" lIns="54864" rIns="54864" tIns="27432" bIns="27432" wrap="square"/>
-          <a:lstStyle/>
-          <a:p>
-            <a:pPr algn="ctr"/>
-          </a:p>
-        </p:txBody>
-      </p:sp>
-      <p:sp>
-        <p:nvSpPr>
-          <p:cNvPr id="62" name="TextBox 61"/>
-          <p:cNvSpPr txBox="1"/>
-          <p:nvPr/>
-        </p:nvSpPr>
-        <p:spPr>
-          <a:xfrm>
-            <a:off x="905256" y="2020824"/>
-            <a:ext cx="1563624" cy="320040"/>
-          </a:xfrm>
-          <a:prstGeom prst="rect">
-            <a:avLst/>
-          </a:prstGeom>
-          <a:noFill/>
-        </p:spPr>
-        <p:txBody>
-          <a:bodyPr wrap="square" anchor="ctr" lIns="45720" rIns="45720" tIns="27432" bIns="27432">
-            <a:spAutoFit/>
-          </a:bodyPr>
-          <a:lstStyle/>
-          <a:p>
-            <a:pPr algn="l"/>
-            <a:r>
-              <a:rPr sz="1200" b="0" i="0">
-                <a:solidFill>
-                  <a:srgbClr val="6B717A"/>
-                </a:solidFill>
-                <a:latin typeface="Calibri"/>
-              </a:rPr>
-              <a:t>signature group</a:t>
-            </a:r>
-          </a:p>
-        </p:txBody>
-      </p:sp>
-      <p:sp>
-        <p:nvSpPr>
-          <p:cNvPr id="63" name="Rounded Rectangle 62"/>
-          <p:cNvSpPr/>
-          <p:nvPr/>
-        </p:nvSpPr>
-        <p:spPr>
-          <a:xfrm>
-            <a:off x="502920" y="2487168"/>
-            <a:ext cx="329184" cy="219456"/>
-          </a:xfrm>
-          <a:prstGeom prst="roundRect">
-            <a:avLst>
-              <a:gd name="adj" fmla="val 15000"/>
-            </a:avLst>
-          </a:prstGeom>
-          <a:noFill/>
-          <a:ln w="28575">
-            <a:solidFill>
-              <a:srgbClr val="1F2A44"/>
-            </a:solidFill>
-            <a:prstDash val="lgDash"/>
-          </a:ln>
-          <a:effectLst/>
-        </p:spPr>
-        <p:txBody>
-          <a:bodyPr rtlCol="0" anchor="ctr" lIns="54864" rIns="54864" tIns="27432" bIns="27432" wrap="square"/>
-          <a:lstStyle/>
-          <a:p>
-            <a:pPr algn="ctr"/>
-          </a:p>
-        </p:txBody>
-      </p:sp>
-      <p:sp>
-        <p:nvSpPr>
-          <p:cNvPr id="64" name="TextBox 63"/>
-          <p:cNvSpPr txBox="1"/>
-          <p:nvPr/>
-        </p:nvSpPr>
-        <p:spPr>
-          <a:xfrm>
-            <a:off x="905256" y="2441448"/>
-            <a:ext cx="1563624" cy="320040"/>
-          </a:xfrm>
-          <a:prstGeom prst="rect">
-            <a:avLst/>
-          </a:prstGeom>
-          <a:noFill/>
-        </p:spPr>
-        <p:txBody>
-          <a:bodyPr wrap="square" anchor="ctr" lIns="45720" rIns="45720" tIns="27432" bIns="27432">
-            <a:spAutoFit/>
-          </a:bodyPr>
-          <a:lstStyle/>
-          <a:p>
-            <a:pPr algn="l"/>
-            <a:r>
-              <a:rPr sz="1200" b="0" i="0">
-                <a:solidFill>
-                  <a:srgbClr val="6B717A"/>
-                </a:solidFill>
-                <a:latin typeface="Calibri"/>
-              </a:rPr>
-              <a:t>round</a:t>
             </a:r>
           </a:p>
         </p:txBody>
@@ -51882,7 +50791,7 @@
           </a:prstGeom>
           <a:ln w="15875">
             <a:solidFill>
-              <a:srgbClr val="8A8F98"/>
+              <a:srgbClr val="C9CDD3"/>
             </a:solidFill>
           </a:ln>
           <a:effectLst/>
@@ -51904,7 +50813,7 @@
           </a:prstGeom>
           <a:ln w="15875">
             <a:solidFill>
-              <a:srgbClr val="8A8F98"/>
+              <a:srgbClr val="C9CDD3"/>
             </a:solidFill>
           </a:ln>
           <a:effectLst/>
@@ -51926,7 +50835,7 @@
           </a:prstGeom>
           <a:ln w="15875">
             <a:solidFill>
-              <a:srgbClr val="8A8F98"/>
+              <a:srgbClr val="C9CDD3"/>
             </a:solidFill>
           </a:ln>
           <a:effectLst/>
@@ -51948,7 +50857,7 @@
           </a:prstGeom>
           <a:ln w="15875">
             <a:solidFill>
-              <a:srgbClr val="8A8F98"/>
+              <a:srgbClr val="C9CDD3"/>
             </a:solidFill>
           </a:ln>
           <a:effectLst/>
@@ -51970,7 +50879,7 @@
           </a:prstGeom>
           <a:ln w="15875">
             <a:solidFill>
-              <a:srgbClr val="8A8F98"/>
+              <a:srgbClr val="C9CDD3"/>
             </a:solidFill>
           </a:ln>
           <a:effectLst/>
@@ -51992,7 +50901,7 @@
           </a:prstGeom>
           <a:ln w="15875">
             <a:solidFill>
-              <a:srgbClr val="8A8F98"/>
+              <a:srgbClr val="C9CDD3"/>
             </a:solidFill>
           </a:ln>
           <a:effectLst/>
@@ -52014,7 +50923,7 @@
           </a:prstGeom>
           <a:ln w="15875">
             <a:solidFill>
-              <a:srgbClr val="8A8F98"/>
+              <a:srgbClr val="C9CDD3"/>
             </a:solidFill>
           </a:ln>
           <a:effectLst/>
@@ -52036,7 +50945,7 @@
           </a:prstGeom>
           <a:ln w="15875">
             <a:solidFill>
-              <a:srgbClr val="8A8F98"/>
+              <a:srgbClr val="C9CDD3"/>
             </a:solidFill>
           </a:ln>
           <a:effectLst/>
@@ -52058,7 +50967,7 @@
           </a:prstGeom>
           <a:ln w="15875">
             <a:solidFill>
-              <a:srgbClr val="8A8F98"/>
+              <a:srgbClr val="C9CDD3"/>
             </a:solidFill>
           </a:ln>
           <a:effectLst/>
@@ -52124,7 +51033,7 @@
           </a:prstGeom>
           <a:ln w="15875">
             <a:solidFill>
-              <a:srgbClr val="8A8F98"/>
+              <a:srgbClr val="C9CDD3"/>
             </a:solidFill>
           </a:ln>
           <a:effectLst/>
@@ -52195,7 +51104,7 @@
           </a:solidFill>
           <a:ln w="12700">
             <a:solidFill>
-              <a:srgbClr val="4A4F57"/>
+              <a:srgbClr val="C9CDD3"/>
             </a:solidFill>
           </a:ln>
           <a:effectLst/>
@@ -52208,7 +51117,7 @@
             <a:r>
               <a:rPr sz="1400" b="1" i="0">
                 <a:solidFill>
-                  <a:srgbClr val="2B2F36"/>
+                  <a:srgbClr val="C9CDD3"/>
                 </a:solidFill>
                 <a:latin typeface="Calibri"/>
               </a:rPr>
@@ -52238,7 +51147,7 @@
           </a:solidFill>
           <a:ln w="12700">
             <a:solidFill>
-              <a:srgbClr val="4A4F57"/>
+              <a:srgbClr val="C9CDD3"/>
             </a:solidFill>
           </a:ln>
           <a:effectLst/>
@@ -52251,7 +51160,7 @@
             <a:r>
               <a:rPr sz="1400" b="1" i="0">
                 <a:solidFill>
-                  <a:srgbClr val="2B2F36"/>
+                  <a:srgbClr val="C9CDD3"/>
                 </a:solidFill>
                 <a:latin typeface="Calibri"/>
               </a:rPr>
@@ -52281,7 +51190,7 @@
           </a:solidFill>
           <a:ln w="12700">
             <a:solidFill>
-              <a:srgbClr val="4A4F57"/>
+              <a:srgbClr val="C9CDD3"/>
             </a:solidFill>
           </a:ln>
           <a:effectLst/>
@@ -52294,7 +51203,7 @@
             <a:r>
               <a:rPr sz="1400" b="1" i="0">
                 <a:solidFill>
-                  <a:srgbClr val="2B2F36"/>
+                  <a:srgbClr val="C9CDD3"/>
                 </a:solidFill>
                 <a:latin typeface="Calibri"/>
               </a:rPr>
@@ -52324,7 +51233,7 @@
           </a:solidFill>
           <a:ln w="12700">
             <a:solidFill>
-              <a:srgbClr val="4A4F57"/>
+              <a:srgbClr val="C9CDD3"/>
             </a:solidFill>
           </a:ln>
           <a:effectLst/>
@@ -52337,7 +51246,7 @@
             <a:r>
               <a:rPr sz="1400" b="1" i="0">
                 <a:solidFill>
-                  <a:srgbClr val="2B2F36"/>
+                  <a:srgbClr val="C9CDD3"/>
                 </a:solidFill>
                 <a:latin typeface="Calibri"/>
               </a:rPr>
@@ -52367,7 +51276,7 @@
           </a:solidFill>
           <a:ln w="12700">
             <a:solidFill>
-              <a:srgbClr val="4A4F57"/>
+              <a:srgbClr val="C9CDD3"/>
             </a:solidFill>
           </a:ln>
           <a:effectLst/>
@@ -52380,7 +51289,7 @@
             <a:r>
               <a:rPr sz="1400" b="1" i="0">
                 <a:solidFill>
-                  <a:srgbClr val="2B2F36"/>
+                  <a:srgbClr val="C9CDD3"/>
                 </a:solidFill>
                 <a:latin typeface="Calibri"/>
               </a:rPr>
@@ -52410,7 +51319,7 @@
           </a:solidFill>
           <a:ln w="12700">
             <a:solidFill>
-              <a:srgbClr val="4A4F57"/>
+              <a:srgbClr val="C9CDD3"/>
             </a:solidFill>
           </a:ln>
           <a:effectLst/>
@@ -52423,7 +51332,7 @@
             <a:r>
               <a:rPr sz="1400" b="1" i="0">
                 <a:solidFill>
-                  <a:srgbClr val="2B2F36"/>
+                  <a:srgbClr val="C9CDD3"/>
                 </a:solidFill>
                 <a:latin typeface="Calibri"/>
               </a:rPr>
@@ -52453,7 +51362,7 @@
           </a:solidFill>
           <a:ln w="12700">
             <a:solidFill>
-              <a:srgbClr val="4A4F57"/>
+              <a:srgbClr val="C9CDD3"/>
             </a:solidFill>
           </a:ln>
           <a:effectLst/>
@@ -52466,7 +51375,7 @@
             <a:r>
               <a:rPr sz="1400" b="1" i="0">
                 <a:solidFill>
-                  <a:srgbClr val="2B2F36"/>
+                  <a:srgbClr val="C9CDD3"/>
                 </a:solidFill>
                 <a:latin typeface="Calibri"/>
               </a:rPr>
@@ -52496,7 +51405,7 @@
           </a:solidFill>
           <a:ln w="12700">
             <a:solidFill>
-              <a:srgbClr val="4A4F57"/>
+              <a:srgbClr val="C9CDD3"/>
             </a:solidFill>
           </a:ln>
           <a:effectLst/>
@@ -52509,7 +51418,7 @@
             <a:r>
               <a:rPr sz="1400" b="1" i="0">
                 <a:solidFill>
-                  <a:srgbClr val="2B2F36"/>
+                  <a:srgbClr val="C9CDD3"/>
                 </a:solidFill>
                 <a:latin typeface="Calibri"/>
               </a:rPr>
@@ -52539,7 +51448,7 @@
           </a:solidFill>
           <a:ln w="12700">
             <a:solidFill>
-              <a:srgbClr val="4A4F57"/>
+              <a:srgbClr val="C9CDD3"/>
             </a:solidFill>
           </a:ln>
           <a:effectLst/>
@@ -52552,7 +51461,7 @@
             <a:r>
               <a:rPr sz="1400" b="1" i="0">
                 <a:solidFill>
-                  <a:srgbClr val="2B2F36"/>
+                  <a:srgbClr val="C9CDD3"/>
                 </a:solidFill>
                 <a:latin typeface="Calibri"/>
               </a:rPr>
@@ -52582,7 +51491,7 @@
           </a:solidFill>
           <a:ln w="12700">
             <a:solidFill>
-              <a:srgbClr val="4A4F57"/>
+              <a:srgbClr val="C9CDD3"/>
             </a:solidFill>
           </a:ln>
           <a:effectLst/>
@@ -52595,7 +51504,7 @@
             <a:r>
               <a:rPr sz="1400" b="1" i="0">
                 <a:solidFill>
-                  <a:srgbClr val="2B2F36"/>
+                  <a:srgbClr val="C9CDD3"/>
                 </a:solidFill>
                 <a:latin typeface="Calibri"/>
               </a:rPr>
@@ -52621,11 +51530,11 @@
             </a:avLst>
           </a:prstGeom>
           <a:solidFill>
-            <a:srgbClr val="FFF3CC"/>
-          </a:solidFill>
-          <a:ln w="34925">
-            <a:solidFill>
-              <a:srgbClr val="E0A300"/>
+            <a:srgbClr val="FFFFFF"/>
+          </a:solidFill>
+          <a:ln w="12700">
+            <a:solidFill>
+              <a:srgbClr val="4A4F57"/>
             </a:solidFill>
           </a:ln>
           <a:effectLst/>
@@ -52699,11 +51608,11 @@
             </a:avLst>
           </a:prstGeom>
           <a:solidFill>
-            <a:srgbClr val="FFF3CC"/>
-          </a:solidFill>
-          <a:ln w="34925">
-            <a:solidFill>
-              <a:srgbClr val="E0A300"/>
+            <a:srgbClr val="FFFFFF"/>
+          </a:solidFill>
+          <a:ln w="12700">
+            <a:solidFill>
+              <a:srgbClr val="4A4F57"/>
             </a:solidFill>
           </a:ln>
           <a:effectLst/>
@@ -52777,11 +51686,11 @@
             </a:avLst>
           </a:prstGeom>
           <a:solidFill>
-            <a:srgbClr val="FFF3CC"/>
-          </a:solidFill>
-          <a:ln w="34925">
-            <a:solidFill>
-              <a:srgbClr val="E0A300"/>
+            <a:srgbClr val="FFFFFF"/>
+          </a:solidFill>
+          <a:ln w="12700">
+            <a:solidFill>
+              <a:srgbClr val="4A4F57"/>
             </a:solidFill>
           </a:ln>
           <a:effectLst/>
@@ -52855,11 +51764,11 @@
             </a:avLst>
           </a:prstGeom>
           <a:solidFill>
-            <a:srgbClr val="FFF3CC"/>
-          </a:solidFill>
-          <a:ln w="34925">
-            <a:solidFill>
-              <a:srgbClr val="E0A300"/>
+            <a:srgbClr val="FFFFFF"/>
+          </a:solidFill>
+          <a:ln w="12700">
+            <a:solidFill>
+              <a:srgbClr val="4A4F57"/>
             </a:solidFill>
           </a:ln>
           <a:effectLst/>
@@ -53074,47 +51983,14 @@
       </p:sp>
       <p:sp>
         <p:nvSpPr>
-          <p:cNvPr id="49" name="Rounded Rectangle 48"/>
-          <p:cNvSpPr/>
-          <p:nvPr/>
-        </p:nvSpPr>
-        <p:spPr>
-          <a:xfrm>
-            <a:off x="2263139" y="4663440"/>
-            <a:ext cx="7662672" cy="914400"/>
-          </a:xfrm>
-          <a:prstGeom prst="roundRect">
-            <a:avLst>
-              <a:gd name="adj" fmla="val 35000"/>
-            </a:avLst>
-          </a:prstGeom>
-          <a:noFill/>
-          <a:ln w="28575">
-            <a:solidFill>
-              <a:srgbClr val="1F2A44"/>
-            </a:solidFill>
-            <a:prstDash val="lgDash"/>
-          </a:ln>
-          <a:effectLst/>
-        </p:spPr>
-        <p:txBody>
-          <a:bodyPr rtlCol="0" anchor="ctr" lIns="54864" rIns="54864" tIns="27432" bIns="27432" wrap="square"/>
-          <a:lstStyle/>
-          <a:p>
-            <a:pPr algn="ctr"/>
-          </a:p>
-        </p:txBody>
-      </p:sp>
-      <p:sp>
-        <p:nvSpPr>
-          <p:cNvPr id="50" name="TextBox 49"/>
+          <p:cNvPr id="49" name="TextBox 48"/>
           <p:cNvSpPr txBox="1"/>
           <p:nvPr/>
         </p:nvSpPr>
         <p:spPr>
           <a:xfrm>
-            <a:off x="10017252" y="4937759"/>
-            <a:ext cx="1188720" cy="365760"/>
+            <a:off x="3506723" y="3246120"/>
+            <a:ext cx="731520" cy="548640"/>
           </a:xfrm>
           <a:prstGeom prst="rect">
             <a:avLst/>
@@ -53127,62 +52003,29 @@
           </a:bodyPr>
           <a:lstStyle/>
           <a:p>
-            <a:pPr algn="l"/>
-            <a:r>
-              <a:rPr sz="1600" b="1" i="0">
-                <a:solidFill>
-                  <a:srgbClr val="1F2A44"/>
-                </a:solidFill>
-                <a:latin typeface="Calibri"/>
-              </a:rPr>
-              <a:t>round 0</a:t>
-            </a:r>
-          </a:p>
-        </p:txBody>
-      </p:sp>
-      <p:sp>
-        <p:nvSpPr>
-          <p:cNvPr id="51" name="Rounded Rectangle 50"/>
-          <p:cNvSpPr/>
-          <p:nvPr/>
-        </p:nvSpPr>
-        <p:spPr>
-          <a:xfrm>
-            <a:off x="2674620" y="2715768"/>
-            <a:ext cx="6830568" cy="1335024"/>
-          </a:xfrm>
-          <a:prstGeom prst="roundRect">
-            <a:avLst>
-              <a:gd name="adj" fmla="val 35000"/>
-            </a:avLst>
-          </a:prstGeom>
-          <a:noFill/>
-          <a:ln w="28575">
-            <a:solidFill>
-              <a:srgbClr val="1F2A44"/>
-            </a:solidFill>
-            <a:prstDash val="lgDash"/>
-          </a:ln>
-          <a:effectLst/>
-        </p:spPr>
-        <p:txBody>
-          <a:bodyPr rtlCol="0" anchor="ctr" lIns="54864" rIns="54864" tIns="27432" bIns="27432" wrap="square"/>
-          <a:lstStyle/>
-          <a:p>
-            <a:pPr algn="ctr"/>
-          </a:p>
-        </p:txBody>
-      </p:sp>
-      <p:sp>
-        <p:nvSpPr>
-          <p:cNvPr id="52" name="TextBox 51"/>
+            <a:pPr algn="ctr"/>
+            <a:r>
+              <a:rPr sz="2200" b="1" i="0">
+                <a:solidFill>
+                  <a:srgbClr val="C8501E"/>
+                </a:solidFill>
+                <a:latin typeface="Calibri"/>
+              </a:rPr>
+              <a:t>∪</a:t>
+            </a:r>
+          </a:p>
+        </p:txBody>
+      </p:sp>
+      <p:sp>
+        <p:nvSpPr>
+          <p:cNvPr id="50" name="TextBox 49"/>
           <p:cNvSpPr txBox="1"/>
           <p:nvPr/>
         </p:nvSpPr>
         <p:spPr>
           <a:xfrm>
-            <a:off x="9596628" y="3200399"/>
-            <a:ext cx="1188720" cy="365760"/>
+            <a:off x="7941563" y="3246120"/>
+            <a:ext cx="731520" cy="548640"/>
           </a:xfrm>
           <a:prstGeom prst="rect">
             <a:avLst/>
@@ -53195,41 +52038,6 @@
           </a:bodyPr>
           <a:lstStyle/>
           <a:p>
-            <a:pPr algn="l"/>
-            <a:r>
-              <a:rPr sz="1600" b="1" i="0">
-                <a:solidFill>
-                  <a:srgbClr val="1F2A44"/>
-                </a:solidFill>
-                <a:latin typeface="Calibri"/>
-              </a:rPr>
-              <a:t>round 1</a:t>
-            </a:r>
-          </a:p>
-        </p:txBody>
-      </p:sp>
-      <p:sp>
-        <p:nvSpPr>
-          <p:cNvPr id="53" name="TextBox 52"/>
-          <p:cNvSpPr txBox="1"/>
-          <p:nvPr/>
-        </p:nvSpPr>
-        <p:spPr>
-          <a:xfrm>
-            <a:off x="3506723" y="3246120"/>
-            <a:ext cx="731520" cy="548640"/>
-          </a:xfrm>
-          <a:prstGeom prst="rect">
-            <a:avLst/>
-          </a:prstGeom>
-          <a:noFill/>
-        </p:spPr>
-        <p:txBody>
-          <a:bodyPr wrap="square" anchor="ctr" lIns="45720" rIns="45720" tIns="27432" bIns="27432">
-            <a:spAutoFit/>
-          </a:bodyPr>
-          <a:lstStyle/>
-          <a:p>
             <a:pPr algn="ctr"/>
             <a:r>
               <a:rPr sz="2200" b="1" i="0">
@@ -53239,178 +52047,6 @@
                 <a:latin typeface="Calibri"/>
               </a:rPr>
               <a:t>∪</a:t>
-            </a:r>
-          </a:p>
-        </p:txBody>
-      </p:sp>
-      <p:sp>
-        <p:nvSpPr>
-          <p:cNvPr id="54" name="TextBox 53"/>
-          <p:cNvSpPr txBox="1"/>
-          <p:nvPr/>
-        </p:nvSpPr>
-        <p:spPr>
-          <a:xfrm>
-            <a:off x="7941563" y="3246120"/>
-            <a:ext cx="731520" cy="548640"/>
-          </a:xfrm>
-          <a:prstGeom prst="rect">
-            <a:avLst/>
-          </a:prstGeom>
-          <a:noFill/>
-        </p:spPr>
-        <p:txBody>
-          <a:bodyPr wrap="square" anchor="ctr" lIns="45720" rIns="45720" tIns="27432" bIns="27432">
-            <a:spAutoFit/>
-          </a:bodyPr>
-          <a:lstStyle/>
-          <a:p>
-            <a:pPr algn="ctr"/>
-            <a:r>
-              <a:rPr sz="2200" b="1" i="0">
-                <a:solidFill>
-                  <a:srgbClr val="C8501E"/>
-                </a:solidFill>
-                <a:latin typeface="Calibri"/>
-              </a:rPr>
-              <a:t>∪</a:t>
-            </a:r>
-          </a:p>
-        </p:txBody>
-      </p:sp>
-      <p:sp>
-        <p:nvSpPr>
-          <p:cNvPr id="55" name="Rounded Rectangle 54"/>
-          <p:cNvSpPr/>
-          <p:nvPr/>
-        </p:nvSpPr>
-        <p:spPr>
-          <a:xfrm>
-            <a:off x="502920" y="1645920"/>
-            <a:ext cx="329184" cy="219456"/>
-          </a:xfrm>
-          <a:prstGeom prst="roundRect">
-            <a:avLst>
-              <a:gd name="adj" fmla="val 15000"/>
-            </a:avLst>
-          </a:prstGeom>
-          <a:solidFill>
-            <a:srgbClr val="FFF3CC"/>
-          </a:solidFill>
-          <a:ln w="25400">
-            <a:solidFill>
-              <a:srgbClr val="E0A300"/>
-            </a:solidFill>
-          </a:ln>
-          <a:effectLst/>
-        </p:spPr>
-        <p:txBody>
-          <a:bodyPr rtlCol="0" anchor="ctr" lIns="54864" rIns="54864" tIns="27432" bIns="27432" wrap="square"/>
-          <a:lstStyle/>
-          <a:p>
-            <a:pPr algn="ctr"/>
-          </a:p>
-        </p:txBody>
-      </p:sp>
-      <p:sp>
-        <p:nvSpPr>
-          <p:cNvPr id="56" name="TextBox 55"/>
-          <p:cNvSpPr txBox="1"/>
-          <p:nvPr/>
-        </p:nvSpPr>
-        <p:spPr>
-          <a:xfrm>
-            <a:off x="905256" y="1600200"/>
-            <a:ext cx="1563624" cy="320040"/>
-          </a:xfrm>
-          <a:prstGeom prst="rect">
-            <a:avLst/>
-          </a:prstGeom>
-          <a:noFill/>
-        </p:spPr>
-        <p:txBody>
-          <a:bodyPr wrap="square" anchor="ctr" lIns="45720" rIns="45720" tIns="27432" bIns="27432">
-            <a:spAutoFit/>
-          </a:bodyPr>
-          <a:lstStyle/>
-          <a:p>
-            <a:pPr algn="l"/>
-            <a:r>
-              <a:rPr sz="1200" b="0" i="0">
-                <a:solidFill>
-                  <a:srgbClr val="6B717A"/>
-                </a:solidFill>
-                <a:latin typeface="Calibri"/>
-              </a:rPr>
-              <a:t>merged this round</a:t>
-            </a:r>
-          </a:p>
-        </p:txBody>
-      </p:sp>
-      <p:sp>
-        <p:nvSpPr>
-          <p:cNvPr id="57" name="Rounded Rectangle 56"/>
-          <p:cNvSpPr/>
-          <p:nvPr/>
-        </p:nvSpPr>
-        <p:spPr>
-          <a:xfrm>
-            <a:off x="502920" y="2066543"/>
-            <a:ext cx="329184" cy="219456"/>
-          </a:xfrm>
-          <a:prstGeom prst="roundRect">
-            <a:avLst>
-              <a:gd name="adj" fmla="val 15000"/>
-            </a:avLst>
-          </a:prstGeom>
-          <a:noFill/>
-          <a:ln w="28575">
-            <a:solidFill>
-              <a:srgbClr val="1F2A44"/>
-            </a:solidFill>
-            <a:prstDash val="lgDash"/>
-          </a:ln>
-          <a:effectLst/>
-        </p:spPr>
-        <p:txBody>
-          <a:bodyPr rtlCol="0" anchor="ctr" lIns="54864" rIns="54864" tIns="27432" bIns="27432" wrap="square"/>
-          <a:lstStyle/>
-          <a:p>
-            <a:pPr algn="ctr"/>
-          </a:p>
-        </p:txBody>
-      </p:sp>
-      <p:sp>
-        <p:nvSpPr>
-          <p:cNvPr id="58" name="TextBox 57"/>
-          <p:cNvSpPr txBox="1"/>
-          <p:nvPr/>
-        </p:nvSpPr>
-        <p:spPr>
-          <a:xfrm>
-            <a:off x="905256" y="2020824"/>
-            <a:ext cx="1563624" cy="320040"/>
-          </a:xfrm>
-          <a:prstGeom prst="rect">
-            <a:avLst/>
-          </a:prstGeom>
-          <a:noFill/>
-        </p:spPr>
-        <p:txBody>
-          <a:bodyPr wrap="square" anchor="ctr" lIns="45720" rIns="45720" tIns="27432" bIns="27432">
-            <a:spAutoFit/>
-          </a:bodyPr>
-          <a:lstStyle/>
-          <a:p>
-            <a:pPr algn="l"/>
-            <a:r>
-              <a:rPr sz="1200" b="0" i="0">
-                <a:solidFill>
-                  <a:srgbClr val="6B717A"/>
-                </a:solidFill>
-                <a:latin typeface="Calibri"/>
-              </a:rPr>
-              <a:t>round</a:t>
             </a:r>
           </a:p>
         </p:txBody>
@@ -53805,39 +52441,28 @@
           </a:p>
         </p:txBody>
       </p:sp>
-      <p:sp>
-        <p:nvSpPr>
-          <p:cNvPr id="13" name="Rounded Rectangle 12"/>
-          <p:cNvSpPr/>
-          <p:nvPr/>
-        </p:nvSpPr>
-        <p:spPr>
-          <a:xfrm>
-            <a:off x="4768596" y="1581912"/>
-            <a:ext cx="2916936" cy="676656"/>
-          </a:xfrm>
-          <a:prstGeom prst="roundRect">
-            <a:avLst>
-              <a:gd name="adj" fmla="val 30000"/>
-            </a:avLst>
-          </a:prstGeom>
-          <a:noFill/>
-          <a:ln w="22225">
-            <a:solidFill>
-              <a:srgbClr val="7B4FB5"/>
-            </a:solidFill>
-            <a:prstDash val="sysDot"/>
-          </a:ln>
-          <a:effectLst/>
-        </p:spPr>
-        <p:txBody>
-          <a:bodyPr rtlCol="0" anchor="ctr" lIns="54864" rIns="54864" tIns="27432" bIns="27432" wrap="square"/>
-          <a:lstStyle/>
-          <a:p>
-            <a:pPr algn="ctr"/>
-          </a:p>
-        </p:txBody>
-      </p:sp>
+      <p:cxnSp>
+        <p:nvCxnSpPr>
+          <p:cNvPr id="13" name="Connector 12"/>
+          <p:cNvCxnSpPr/>
+          <p:nvPr/>
+        </p:nvCxnSpPr>
+        <p:spPr>
+          <a:xfrm flipH="1">
+            <a:off x="2784348" y="3803903"/>
+            <a:ext cx="539496" cy="1106425"/>
+          </a:xfrm>
+          <a:prstGeom prst="line">
+            <a:avLst/>
+          </a:prstGeom>
+          <a:ln w="15875">
+            <a:solidFill>
+              <a:srgbClr val="C9CDD3"/>
+            </a:solidFill>
+          </a:ln>
+          <a:effectLst/>
+        </p:spPr>
+      </p:cxnSp>
       <p:cxnSp>
         <p:nvCxnSpPr>
           <p:cNvPr id="14" name="Connector 13"/>
@@ -53845,16 +52470,16 @@
           <p:nvPr/>
         </p:nvCxnSpPr>
         <p:spPr>
-          <a:xfrm flipH="1">
-            <a:off x="2784348" y="3803903"/>
-            <a:ext cx="539496" cy="1106425"/>
+          <a:xfrm>
+            <a:off x="3323844" y="3803903"/>
+            <a:ext cx="960120" cy="1106425"/>
           </a:xfrm>
           <a:prstGeom prst="line">
             <a:avLst/>
           </a:prstGeom>
           <a:ln w="15875">
             <a:solidFill>
-              <a:srgbClr val="8A8F98"/>
+              <a:srgbClr val="C9CDD3"/>
             </a:solidFill>
           </a:ln>
           <a:effectLst/>
@@ -53867,16 +52492,16 @@
           <p:nvPr/>
         </p:nvCxnSpPr>
         <p:spPr>
-          <a:xfrm>
-            <a:off x="3323844" y="3803903"/>
-            <a:ext cx="960120" cy="1106425"/>
+          <a:xfrm flipH="1">
+            <a:off x="3406139" y="3803903"/>
+            <a:ext cx="1014985" cy="1106425"/>
           </a:xfrm>
           <a:prstGeom prst="line">
             <a:avLst/>
           </a:prstGeom>
           <a:ln w="15875">
             <a:solidFill>
-              <a:srgbClr val="8A8F98"/>
+              <a:srgbClr val="C9CDD3"/>
             </a:solidFill>
           </a:ln>
           <a:effectLst/>
@@ -53889,16 +52514,16 @@
           <p:nvPr/>
         </p:nvCxnSpPr>
         <p:spPr>
-          <a:xfrm flipH="1">
-            <a:off x="3406139" y="3803903"/>
-            <a:ext cx="1014985" cy="1106425"/>
+          <a:xfrm>
+            <a:off x="4421124" y="3803903"/>
+            <a:ext cx="484632" cy="1106425"/>
           </a:xfrm>
           <a:prstGeom prst="line">
             <a:avLst/>
           </a:prstGeom>
           <a:ln w="15875">
             <a:solidFill>
-              <a:srgbClr val="8A8F98"/>
+              <a:srgbClr val="C9CDD3"/>
             </a:solidFill>
           </a:ln>
           <a:effectLst/>
@@ -53911,16 +52536,16 @@
           <p:nvPr/>
         </p:nvCxnSpPr>
         <p:spPr>
-          <a:xfrm>
-            <a:off x="4421124" y="3803903"/>
-            <a:ext cx="484632" cy="1106425"/>
+          <a:xfrm flipH="1">
+            <a:off x="7283196" y="3803903"/>
+            <a:ext cx="475487" cy="1106425"/>
           </a:xfrm>
           <a:prstGeom prst="line">
             <a:avLst/>
           </a:prstGeom>
           <a:ln w="15875">
             <a:solidFill>
-              <a:srgbClr val="8A8F98"/>
+              <a:srgbClr val="C9CDD3"/>
             </a:solidFill>
           </a:ln>
           <a:effectLst/>
@@ -53933,16 +52558,16 @@
           <p:nvPr/>
         </p:nvCxnSpPr>
         <p:spPr>
-          <a:xfrm flipH="1">
-            <a:off x="7283196" y="3803903"/>
-            <a:ext cx="475487" cy="1106425"/>
+          <a:xfrm>
+            <a:off x="7758683" y="3803903"/>
+            <a:ext cx="1024129" cy="1106425"/>
           </a:xfrm>
           <a:prstGeom prst="line">
             <a:avLst/>
           </a:prstGeom>
           <a:ln w="15875">
             <a:solidFill>
-              <a:srgbClr val="8A8F98"/>
+              <a:srgbClr val="C9CDD3"/>
             </a:solidFill>
           </a:ln>
           <a:effectLst/>
@@ -53955,16 +52580,16 @@
           <p:nvPr/>
         </p:nvCxnSpPr>
         <p:spPr>
-          <a:xfrm>
-            <a:off x="7758683" y="3803903"/>
-            <a:ext cx="1024129" cy="1106425"/>
+          <a:xfrm flipH="1">
+            <a:off x="7904988" y="3803903"/>
+            <a:ext cx="950975" cy="1106425"/>
           </a:xfrm>
           <a:prstGeom prst="line">
             <a:avLst/>
           </a:prstGeom>
           <a:ln w="15875">
             <a:solidFill>
-              <a:srgbClr val="8A8F98"/>
+              <a:srgbClr val="C9CDD3"/>
             </a:solidFill>
           </a:ln>
           <a:effectLst/>
@@ -53977,16 +52602,16 @@
           <p:nvPr/>
         </p:nvCxnSpPr>
         <p:spPr>
-          <a:xfrm flipH="1">
-            <a:off x="7904988" y="3803903"/>
-            <a:ext cx="950975" cy="1106425"/>
+          <a:xfrm>
+            <a:off x="8855963" y="3803903"/>
+            <a:ext cx="548641" cy="1106425"/>
           </a:xfrm>
           <a:prstGeom prst="line">
             <a:avLst/>
           </a:prstGeom>
           <a:ln w="15875">
             <a:solidFill>
-              <a:srgbClr val="8A8F98"/>
+              <a:srgbClr val="C9CDD3"/>
             </a:solidFill>
           </a:ln>
           <a:effectLst/>
@@ -54000,15 +52625,15 @@
         </p:nvCxnSpPr>
         <p:spPr>
           <a:xfrm>
-            <a:off x="8855963" y="3803903"/>
-            <a:ext cx="548641" cy="1106425"/>
+            <a:off x="5564124" y="2203704"/>
+            <a:ext cx="219455" cy="2706624"/>
           </a:xfrm>
           <a:prstGeom prst="line">
             <a:avLst/>
           </a:prstGeom>
           <a:ln w="15875">
             <a:solidFill>
-              <a:srgbClr val="8A8F98"/>
+              <a:srgbClr val="C9CDD3"/>
             </a:solidFill>
           </a:ln>
           <a:effectLst/>
@@ -54021,16 +52646,16 @@
           <p:nvPr/>
         </p:nvCxnSpPr>
         <p:spPr>
-          <a:xfrm>
-            <a:off x="5564124" y="2203704"/>
-            <a:ext cx="219455" cy="2706624"/>
+          <a:xfrm flipH="1">
+            <a:off x="3323844" y="2203704"/>
+            <a:ext cx="2240280" cy="749807"/>
           </a:xfrm>
           <a:prstGeom prst="line">
             <a:avLst/>
           </a:prstGeom>
           <a:ln w="15875">
             <a:solidFill>
-              <a:srgbClr val="8A8F98"/>
+              <a:srgbClr val="C9CDD3"/>
             </a:solidFill>
           </a:ln>
           <a:effectLst/>
@@ -54043,16 +52668,16 @@
           <p:nvPr/>
         </p:nvCxnSpPr>
         <p:spPr>
-          <a:xfrm flipH="1">
-            <a:off x="3323844" y="2203704"/>
-            <a:ext cx="2240280" cy="749807"/>
+          <a:xfrm>
+            <a:off x="5564124" y="2203704"/>
+            <a:ext cx="2194559" cy="749807"/>
           </a:xfrm>
           <a:prstGeom prst="line">
             <a:avLst/>
           </a:prstGeom>
           <a:ln w="15875">
             <a:solidFill>
-              <a:srgbClr val="8A8F98"/>
+              <a:srgbClr val="C9CDD3"/>
             </a:solidFill>
           </a:ln>
           <a:effectLst/>
@@ -54065,16 +52690,16 @@
           <p:nvPr/>
         </p:nvCxnSpPr>
         <p:spPr>
-          <a:xfrm>
-            <a:off x="5564124" y="2203704"/>
-            <a:ext cx="2194559" cy="749807"/>
+          <a:xfrm flipH="1">
+            <a:off x="6405372" y="2203704"/>
+            <a:ext cx="484632" cy="2706624"/>
           </a:xfrm>
           <a:prstGeom prst="line">
             <a:avLst/>
           </a:prstGeom>
           <a:ln w="15875">
             <a:solidFill>
-              <a:srgbClr val="8A8F98"/>
+              <a:srgbClr val="C9CDD3"/>
             </a:solidFill>
           </a:ln>
           <a:effectLst/>
@@ -54088,15 +52713,15 @@
         </p:nvCxnSpPr>
         <p:spPr>
           <a:xfrm flipH="1">
-            <a:off x="6405372" y="2203704"/>
-            <a:ext cx="484632" cy="2706624"/>
+            <a:off x="4421124" y="2203704"/>
+            <a:ext cx="2468880" cy="749807"/>
           </a:xfrm>
           <a:prstGeom prst="line">
             <a:avLst/>
           </a:prstGeom>
           <a:ln w="15875">
             <a:solidFill>
-              <a:srgbClr val="8A8F98"/>
+              <a:srgbClr val="C9CDD3"/>
             </a:solidFill>
           </a:ln>
           <a:effectLst/>
@@ -54109,28 +52734,6 @@
           <p:nvPr/>
         </p:nvCxnSpPr>
         <p:spPr>
-          <a:xfrm flipH="1">
-            <a:off x="4421124" y="2203704"/>
-            <a:ext cx="2468880" cy="749807"/>
-          </a:xfrm>
-          <a:prstGeom prst="line">
-            <a:avLst/>
-          </a:prstGeom>
-          <a:ln w="15875">
-            <a:solidFill>
-              <a:srgbClr val="8A8F98"/>
-            </a:solidFill>
-          </a:ln>
-          <a:effectLst/>
-        </p:spPr>
-      </p:cxnSp>
-      <p:cxnSp>
-        <p:nvCxnSpPr>
-          <p:cNvPr id="27" name="Connector 26"/>
-          <p:cNvCxnSpPr/>
-          <p:nvPr/>
-        </p:nvCxnSpPr>
-        <p:spPr>
           <a:xfrm>
             <a:off x="6890004" y="2203704"/>
             <a:ext cx="1965959" cy="749807"/>
@@ -54140,7 +52743,7 @@
           </a:prstGeom>
           <a:ln w="15875">
             <a:solidFill>
-              <a:srgbClr val="8A8F98"/>
+              <a:srgbClr val="C9CDD3"/>
             </a:solidFill>
           </a:ln>
           <a:effectLst/>
@@ -54148,7 +52751,7 @@
       </p:cxnSp>
       <p:sp>
         <p:nvSpPr>
-          <p:cNvPr id="28" name="Rounded Rectangle 27"/>
+          <p:cNvPr id="27" name="Rounded Rectangle 26"/>
           <p:cNvSpPr/>
           <p:nvPr/>
         </p:nvSpPr>
@@ -54167,7 +52770,7 @@
           </a:solidFill>
           <a:ln w="12700">
             <a:solidFill>
-              <a:srgbClr val="4A4F57"/>
+              <a:srgbClr val="C9CDD3"/>
             </a:solidFill>
           </a:ln>
           <a:effectLst/>
@@ -54180,7 +52783,7 @@
             <a:r>
               <a:rPr sz="1400" b="1" i="0">
                 <a:solidFill>
-                  <a:srgbClr val="2B2F36"/>
+                  <a:srgbClr val="C9CDD3"/>
                 </a:solidFill>
                 <a:latin typeface="Calibri"/>
               </a:rPr>
@@ -54191,7 +52794,7 @@
       </p:sp>
       <p:sp>
         <p:nvSpPr>
-          <p:cNvPr id="29" name="Rounded Rectangle 28"/>
+          <p:cNvPr id="28" name="Rounded Rectangle 27"/>
           <p:cNvSpPr/>
           <p:nvPr/>
         </p:nvSpPr>
@@ -54210,7 +52813,7 @@
           </a:solidFill>
           <a:ln w="12700">
             <a:solidFill>
-              <a:srgbClr val="4A4F57"/>
+              <a:srgbClr val="C9CDD3"/>
             </a:solidFill>
           </a:ln>
           <a:effectLst/>
@@ -54223,7 +52826,7 @@
             <a:r>
               <a:rPr sz="1400" b="1" i="0">
                 <a:solidFill>
-                  <a:srgbClr val="2B2F36"/>
+                  <a:srgbClr val="C9CDD3"/>
                 </a:solidFill>
                 <a:latin typeface="Calibri"/>
               </a:rPr>
@@ -54234,7 +52837,7 @@
       </p:sp>
       <p:sp>
         <p:nvSpPr>
-          <p:cNvPr id="30" name="Rounded Rectangle 29"/>
+          <p:cNvPr id="29" name="Rounded Rectangle 28"/>
           <p:cNvSpPr/>
           <p:nvPr/>
         </p:nvSpPr>
@@ -54253,7 +52856,7 @@
           </a:solidFill>
           <a:ln w="12700">
             <a:solidFill>
-              <a:srgbClr val="4A4F57"/>
+              <a:srgbClr val="C9CDD3"/>
             </a:solidFill>
           </a:ln>
           <a:effectLst/>
@@ -54266,7 +52869,7 @@
             <a:r>
               <a:rPr sz="1400" b="1" i="0">
                 <a:solidFill>
-                  <a:srgbClr val="2B2F36"/>
+                  <a:srgbClr val="C9CDD3"/>
                 </a:solidFill>
                 <a:latin typeface="Calibri"/>
               </a:rPr>
@@ -54277,7 +52880,7 @@
       </p:sp>
       <p:sp>
         <p:nvSpPr>
-          <p:cNvPr id="31" name="Rounded Rectangle 30"/>
+          <p:cNvPr id="30" name="Rounded Rectangle 29"/>
           <p:cNvSpPr/>
           <p:nvPr/>
         </p:nvSpPr>
@@ -54296,7 +52899,7 @@
           </a:solidFill>
           <a:ln w="12700">
             <a:solidFill>
-              <a:srgbClr val="4A4F57"/>
+              <a:srgbClr val="C9CDD3"/>
             </a:solidFill>
           </a:ln>
           <a:effectLst/>
@@ -54309,7 +52912,7 @@
             <a:r>
               <a:rPr sz="1400" b="1" i="0">
                 <a:solidFill>
-                  <a:srgbClr val="2B2F36"/>
+                  <a:srgbClr val="C9CDD3"/>
                 </a:solidFill>
                 <a:latin typeface="Calibri"/>
               </a:rPr>
@@ -54320,7 +52923,7 @@
       </p:sp>
       <p:sp>
         <p:nvSpPr>
-          <p:cNvPr id="32" name="Rounded Rectangle 31"/>
+          <p:cNvPr id="31" name="Rounded Rectangle 30"/>
           <p:cNvSpPr/>
           <p:nvPr/>
         </p:nvSpPr>
@@ -54339,7 +52942,7 @@
           </a:solidFill>
           <a:ln w="12700">
             <a:solidFill>
-              <a:srgbClr val="4A4F57"/>
+              <a:srgbClr val="C9CDD3"/>
             </a:solidFill>
           </a:ln>
           <a:effectLst/>
@@ -54352,7 +52955,7 @@
             <a:r>
               <a:rPr sz="1400" b="1" i="0">
                 <a:solidFill>
-                  <a:srgbClr val="2B2F36"/>
+                  <a:srgbClr val="C9CDD3"/>
                 </a:solidFill>
                 <a:latin typeface="Calibri"/>
               </a:rPr>
@@ -54363,7 +52966,7 @@
       </p:sp>
       <p:sp>
         <p:nvSpPr>
-          <p:cNvPr id="33" name="Rounded Rectangle 32"/>
+          <p:cNvPr id="32" name="Rounded Rectangle 31"/>
           <p:cNvSpPr/>
           <p:nvPr/>
         </p:nvSpPr>
@@ -54382,7 +52985,7 @@
           </a:solidFill>
           <a:ln w="12700">
             <a:solidFill>
-              <a:srgbClr val="4A4F57"/>
+              <a:srgbClr val="C9CDD3"/>
             </a:solidFill>
           </a:ln>
           <a:effectLst/>
@@ -54395,7 +52998,7 @@
             <a:r>
               <a:rPr sz="1400" b="1" i="0">
                 <a:solidFill>
-                  <a:srgbClr val="2B2F36"/>
+                  <a:srgbClr val="C9CDD3"/>
                 </a:solidFill>
                 <a:latin typeface="Calibri"/>
               </a:rPr>
@@ -54406,7 +53009,7 @@
       </p:sp>
       <p:sp>
         <p:nvSpPr>
-          <p:cNvPr id="34" name="Rounded Rectangle 33"/>
+          <p:cNvPr id="33" name="Rounded Rectangle 32"/>
           <p:cNvSpPr/>
           <p:nvPr/>
         </p:nvSpPr>
@@ -54425,7 +53028,7 @@
           </a:solidFill>
           <a:ln w="12700">
             <a:solidFill>
-              <a:srgbClr val="4A4F57"/>
+              <a:srgbClr val="C9CDD3"/>
             </a:solidFill>
           </a:ln>
           <a:effectLst/>
@@ -54438,7 +53041,7 @@
             <a:r>
               <a:rPr sz="1400" b="1" i="0">
                 <a:solidFill>
-                  <a:srgbClr val="2B2F36"/>
+                  <a:srgbClr val="C9CDD3"/>
                 </a:solidFill>
                 <a:latin typeface="Calibri"/>
               </a:rPr>
@@ -54449,7 +53052,7 @@
       </p:sp>
       <p:sp>
         <p:nvSpPr>
-          <p:cNvPr id="35" name="Rounded Rectangle 34"/>
+          <p:cNvPr id="34" name="Rounded Rectangle 33"/>
           <p:cNvSpPr/>
           <p:nvPr/>
         </p:nvSpPr>
@@ -54468,7 +53071,7 @@
           </a:solidFill>
           <a:ln w="12700">
             <a:solidFill>
-              <a:srgbClr val="4A4F57"/>
+              <a:srgbClr val="C9CDD3"/>
             </a:solidFill>
           </a:ln>
           <a:effectLst/>
@@ -54481,7 +53084,7 @@
             <a:r>
               <a:rPr sz="1400" b="1" i="0">
                 <a:solidFill>
-                  <a:srgbClr val="2B2F36"/>
+                  <a:srgbClr val="C9CDD3"/>
                 </a:solidFill>
                 <a:latin typeface="Calibri"/>
               </a:rPr>
@@ -54492,7 +53095,7 @@
       </p:sp>
       <p:sp>
         <p:nvSpPr>
-          <p:cNvPr id="36" name="Rounded Rectangle 35"/>
+          <p:cNvPr id="35" name="Rounded Rectangle 34"/>
           <p:cNvSpPr/>
           <p:nvPr/>
         </p:nvSpPr>
@@ -54511,7 +53114,7 @@
           </a:solidFill>
           <a:ln w="12700">
             <a:solidFill>
-              <a:srgbClr val="4A4F57"/>
+              <a:srgbClr val="C9CDD3"/>
             </a:solidFill>
           </a:ln>
           <a:effectLst/>
@@ -54524,7 +53127,7 @@
             <a:r>
               <a:rPr sz="1400" b="1" i="0">
                 <a:solidFill>
-                  <a:srgbClr val="2B2F36"/>
+                  <a:srgbClr val="C9CDD3"/>
                 </a:solidFill>
                 <a:latin typeface="Calibri"/>
               </a:rPr>
@@ -54535,7 +53138,7 @@
       </p:sp>
       <p:sp>
         <p:nvSpPr>
-          <p:cNvPr id="37" name="Rounded Rectangle 36"/>
+          <p:cNvPr id="36" name="Rounded Rectangle 35"/>
           <p:cNvSpPr/>
           <p:nvPr/>
         </p:nvSpPr>
@@ -54554,7 +53157,7 @@
           </a:solidFill>
           <a:ln w="12700">
             <a:solidFill>
-              <a:srgbClr val="4A4F57"/>
+              <a:srgbClr val="C9CDD3"/>
             </a:solidFill>
           </a:ln>
           <a:effectLst/>
@@ -54567,7 +53170,7 @@
             <a:r>
               <a:rPr sz="1400" b="1" i="0">
                 <a:solidFill>
-                  <a:srgbClr val="2B2F36"/>
+                  <a:srgbClr val="C9CDD3"/>
                 </a:solidFill>
                 <a:latin typeface="Calibri"/>
               </a:rPr>
@@ -54578,7 +53181,7 @@
       </p:sp>
       <p:sp>
         <p:nvSpPr>
-          <p:cNvPr id="38" name="Rounded Rectangle 37"/>
+          <p:cNvPr id="37" name="Rounded Rectangle 36"/>
           <p:cNvSpPr/>
           <p:nvPr/>
         </p:nvSpPr>
@@ -54597,7 +53200,7 @@
           </a:solidFill>
           <a:ln w="12700">
             <a:solidFill>
-              <a:srgbClr val="4A4F57"/>
+              <a:srgbClr val="C9CDD3"/>
             </a:solidFill>
           </a:ln>
           <a:effectLst/>
@@ -54610,7 +53213,7 @@
             <a:r>
               <a:rPr sz="1600" b="1" i="0">
                 <a:solidFill>
-                  <a:srgbClr val="2B2F36"/>
+                  <a:srgbClr val="C9CDD3"/>
                 </a:solidFill>
                 <a:latin typeface="Calibri"/>
               </a:rPr>
@@ -54621,7 +53224,7 @@
       </p:sp>
       <p:sp>
         <p:nvSpPr>
-          <p:cNvPr id="39" name="TextBox 38"/>
+          <p:cNvPr id="38" name="TextBox 37"/>
           <p:cNvSpPr txBox="1"/>
           <p:nvPr/>
         </p:nvSpPr>
@@ -54645,7 +53248,7 @@
             <a:r>
               <a:rPr sz="1300" b="1" i="0">
                 <a:solidFill>
-                  <a:srgbClr val="2B2F36"/>
+                  <a:srgbClr val="C9CDD3"/>
                 </a:solidFill>
                 <a:latin typeface="Calibri"/>
               </a:rPr>
@@ -54656,7 +53259,7 @@
       </p:sp>
       <p:sp>
         <p:nvSpPr>
-          <p:cNvPr id="40" name="Rounded Rectangle 39"/>
+          <p:cNvPr id="39" name="Rounded Rectangle 38"/>
           <p:cNvSpPr/>
           <p:nvPr/>
         </p:nvSpPr>
@@ -54675,7 +53278,7 @@
           </a:solidFill>
           <a:ln w="12700">
             <a:solidFill>
-              <a:srgbClr val="4A4F57"/>
+              <a:srgbClr val="C9CDD3"/>
             </a:solidFill>
           </a:ln>
           <a:effectLst/>
@@ -54688,7 +53291,7 @@
             <a:r>
               <a:rPr sz="1600" b="1" i="0">
                 <a:solidFill>
-                  <a:srgbClr val="2B2F36"/>
+                  <a:srgbClr val="C9CDD3"/>
                 </a:solidFill>
                 <a:latin typeface="Calibri"/>
               </a:rPr>
@@ -54699,7 +53302,7 @@
       </p:sp>
       <p:sp>
         <p:nvSpPr>
-          <p:cNvPr id="41" name="TextBox 40"/>
+          <p:cNvPr id="40" name="TextBox 39"/>
           <p:cNvSpPr txBox="1"/>
           <p:nvPr/>
         </p:nvSpPr>
@@ -54723,7 +53326,7 @@
             <a:r>
               <a:rPr sz="1300" b="1" i="0">
                 <a:solidFill>
-                  <a:srgbClr val="2B2F36"/>
+                  <a:srgbClr val="C9CDD3"/>
                 </a:solidFill>
                 <a:latin typeface="Calibri"/>
               </a:rPr>
@@ -54734,7 +53337,7 @@
       </p:sp>
       <p:sp>
         <p:nvSpPr>
-          <p:cNvPr id="42" name="Rounded Rectangle 41"/>
+          <p:cNvPr id="41" name="Rounded Rectangle 40"/>
           <p:cNvSpPr/>
           <p:nvPr/>
         </p:nvSpPr>
@@ -54753,7 +53356,7 @@
           </a:solidFill>
           <a:ln w="12700">
             <a:solidFill>
-              <a:srgbClr val="4A4F57"/>
+              <a:srgbClr val="C9CDD3"/>
             </a:solidFill>
           </a:ln>
           <a:effectLst/>
@@ -54766,7 +53369,7 @@
             <a:r>
               <a:rPr sz="1600" b="1" i="0">
                 <a:solidFill>
-                  <a:srgbClr val="2B2F36"/>
+                  <a:srgbClr val="C9CDD3"/>
                 </a:solidFill>
                 <a:latin typeface="Calibri"/>
               </a:rPr>
@@ -54777,7 +53380,7 @@
       </p:sp>
       <p:sp>
         <p:nvSpPr>
-          <p:cNvPr id="43" name="TextBox 42"/>
+          <p:cNvPr id="42" name="TextBox 41"/>
           <p:cNvSpPr txBox="1"/>
           <p:nvPr/>
         </p:nvSpPr>
@@ -54801,7 +53404,7 @@
             <a:r>
               <a:rPr sz="1300" b="1" i="0">
                 <a:solidFill>
-                  <a:srgbClr val="2B2F36"/>
+                  <a:srgbClr val="C9CDD3"/>
                 </a:solidFill>
                 <a:latin typeface="Calibri"/>
               </a:rPr>
@@ -54812,7 +53415,7 @@
       </p:sp>
       <p:sp>
         <p:nvSpPr>
-          <p:cNvPr id="44" name="Rounded Rectangle 43"/>
+          <p:cNvPr id="43" name="Rounded Rectangle 42"/>
           <p:cNvSpPr/>
           <p:nvPr/>
         </p:nvSpPr>
@@ -54831,7 +53434,7 @@
           </a:solidFill>
           <a:ln w="12700">
             <a:solidFill>
-              <a:srgbClr val="4A4F57"/>
+              <a:srgbClr val="C9CDD3"/>
             </a:solidFill>
           </a:ln>
           <a:effectLst/>
@@ -54844,7 +53447,7 @@
             <a:r>
               <a:rPr sz="1600" b="1" i="0">
                 <a:solidFill>
-                  <a:srgbClr val="2B2F36"/>
+                  <a:srgbClr val="C9CDD3"/>
                 </a:solidFill>
                 <a:latin typeface="Calibri"/>
               </a:rPr>
@@ -54855,7 +53458,7 @@
       </p:sp>
       <p:sp>
         <p:nvSpPr>
-          <p:cNvPr id="45" name="TextBox 44"/>
+          <p:cNvPr id="44" name="TextBox 43"/>
           <p:cNvSpPr txBox="1"/>
           <p:nvPr/>
         </p:nvSpPr>
@@ -54879,7 +53482,7 @@
             <a:r>
               <a:rPr sz="1300" b="1" i="0">
                 <a:solidFill>
-                  <a:srgbClr val="2B2F36"/>
+                  <a:srgbClr val="C9CDD3"/>
                 </a:solidFill>
                 <a:latin typeface="Calibri"/>
               </a:rPr>
@@ -54890,7 +53493,7 @@
       </p:sp>
       <p:sp>
         <p:nvSpPr>
-          <p:cNvPr id="46" name="Rounded Rectangle 45"/>
+          <p:cNvPr id="45" name="Rounded Rectangle 44"/>
           <p:cNvSpPr/>
           <p:nvPr/>
         </p:nvSpPr>
@@ -54933,7 +53536,7 @@
       </p:sp>
       <p:sp>
         <p:nvSpPr>
-          <p:cNvPr id="47" name="TextBox 46"/>
+          <p:cNvPr id="46" name="TextBox 45"/>
           <p:cNvSpPr txBox="1"/>
           <p:nvPr/>
         </p:nvSpPr>
@@ -54968,7 +53571,7 @@
       </p:sp>
       <p:sp>
         <p:nvSpPr>
-          <p:cNvPr id="48" name="Rounded Rectangle 47"/>
+          <p:cNvPr id="47" name="Rounded Rectangle 46"/>
           <p:cNvSpPr/>
           <p:nvPr/>
         </p:nvSpPr>
@@ -55011,7 +53614,7 @@
       </p:sp>
       <p:sp>
         <p:nvSpPr>
-          <p:cNvPr id="49" name="TextBox 48"/>
+          <p:cNvPr id="48" name="TextBox 47"/>
           <p:cNvSpPr txBox="1"/>
           <p:nvPr/>
         </p:nvSpPr>
@@ -55040,450 +53643,6 @@
                 <a:latin typeface="Calibri"/>
               </a:rPr>
               <a:t>m₂</a:t>
-            </a:r>
-          </a:p>
-        </p:txBody>
-      </p:sp>
-      <p:sp>
-        <p:nvSpPr>
-          <p:cNvPr id="50" name="Rounded Rectangle 49"/>
-          <p:cNvSpPr/>
-          <p:nvPr/>
-        </p:nvSpPr>
-        <p:spPr>
-          <a:xfrm>
-            <a:off x="2263139" y="4663440"/>
-            <a:ext cx="7662672" cy="914400"/>
-          </a:xfrm>
-          <a:prstGeom prst="roundRect">
-            <a:avLst>
-              <a:gd name="adj" fmla="val 35000"/>
-            </a:avLst>
-          </a:prstGeom>
-          <a:noFill/>
-          <a:ln w="28575">
-            <a:solidFill>
-              <a:srgbClr val="1F2A44"/>
-            </a:solidFill>
-            <a:prstDash val="lgDash"/>
-          </a:ln>
-          <a:effectLst/>
-        </p:spPr>
-        <p:txBody>
-          <a:bodyPr rtlCol="0" anchor="ctr" lIns="54864" rIns="54864" tIns="27432" bIns="27432" wrap="square"/>
-          <a:lstStyle/>
-          <a:p>
-            <a:pPr algn="ctr"/>
-          </a:p>
-        </p:txBody>
-      </p:sp>
-      <p:sp>
-        <p:nvSpPr>
-          <p:cNvPr id="51" name="TextBox 50"/>
-          <p:cNvSpPr txBox="1"/>
-          <p:nvPr/>
-        </p:nvSpPr>
-        <p:spPr>
-          <a:xfrm>
-            <a:off x="10017252" y="4937759"/>
-            <a:ext cx="1188720" cy="365760"/>
-          </a:xfrm>
-          <a:prstGeom prst="rect">
-            <a:avLst/>
-          </a:prstGeom>
-          <a:noFill/>
-        </p:spPr>
-        <p:txBody>
-          <a:bodyPr wrap="square" anchor="ctr" lIns="45720" rIns="45720" tIns="27432" bIns="27432">
-            <a:spAutoFit/>
-          </a:bodyPr>
-          <a:lstStyle/>
-          <a:p>
-            <a:pPr algn="l"/>
-            <a:r>
-              <a:rPr sz="1600" b="1" i="0">
-                <a:solidFill>
-                  <a:srgbClr val="1F2A44"/>
-                </a:solidFill>
-                <a:latin typeface="Calibri"/>
-              </a:rPr>
-              <a:t>round 0</a:t>
-            </a:r>
-          </a:p>
-        </p:txBody>
-      </p:sp>
-      <p:sp>
-        <p:nvSpPr>
-          <p:cNvPr id="52" name="Rounded Rectangle 51"/>
-          <p:cNvSpPr/>
-          <p:nvPr/>
-        </p:nvSpPr>
-        <p:spPr>
-          <a:xfrm>
-            <a:off x="2674620" y="2715768"/>
-            <a:ext cx="6830568" cy="1335024"/>
-          </a:xfrm>
-          <a:prstGeom prst="roundRect">
-            <a:avLst>
-              <a:gd name="adj" fmla="val 35000"/>
-            </a:avLst>
-          </a:prstGeom>
-          <a:noFill/>
-          <a:ln w="28575">
-            <a:solidFill>
-              <a:srgbClr val="1F2A44"/>
-            </a:solidFill>
-            <a:prstDash val="lgDash"/>
-          </a:ln>
-          <a:effectLst/>
-        </p:spPr>
-        <p:txBody>
-          <a:bodyPr rtlCol="0" anchor="ctr" lIns="54864" rIns="54864" tIns="27432" bIns="27432" wrap="square"/>
-          <a:lstStyle/>
-          <a:p>
-            <a:pPr algn="ctr"/>
-          </a:p>
-        </p:txBody>
-      </p:sp>
-      <p:sp>
-        <p:nvSpPr>
-          <p:cNvPr id="53" name="TextBox 52"/>
-          <p:cNvSpPr txBox="1"/>
-          <p:nvPr/>
-        </p:nvSpPr>
-        <p:spPr>
-          <a:xfrm>
-            <a:off x="9596628" y="3200399"/>
-            <a:ext cx="1188720" cy="365760"/>
-          </a:xfrm>
-          <a:prstGeom prst="rect">
-            <a:avLst/>
-          </a:prstGeom>
-          <a:noFill/>
-        </p:spPr>
-        <p:txBody>
-          <a:bodyPr wrap="square" anchor="ctr" lIns="45720" rIns="45720" tIns="27432" bIns="27432">
-            <a:spAutoFit/>
-          </a:bodyPr>
-          <a:lstStyle/>
-          <a:p>
-            <a:pPr algn="l"/>
-            <a:r>
-              <a:rPr sz="1600" b="1" i="0">
-                <a:solidFill>
-                  <a:srgbClr val="1F2A44"/>
-                </a:solidFill>
-                <a:latin typeface="Calibri"/>
-              </a:rPr>
-              <a:t>round 1</a:t>
-            </a:r>
-          </a:p>
-        </p:txBody>
-      </p:sp>
-      <p:sp>
-        <p:nvSpPr>
-          <p:cNvPr id="54" name="Rounded Rectangle 53"/>
-          <p:cNvSpPr/>
-          <p:nvPr/>
-        </p:nvSpPr>
-        <p:spPr>
-          <a:xfrm>
-            <a:off x="4576572" y="1389888"/>
-            <a:ext cx="3300984" cy="1060704"/>
-          </a:xfrm>
-          <a:prstGeom prst="roundRect">
-            <a:avLst>
-              <a:gd name="adj" fmla="val 35000"/>
-            </a:avLst>
-          </a:prstGeom>
-          <a:noFill/>
-          <a:ln w="28575">
-            <a:solidFill>
-              <a:srgbClr val="1F2A44"/>
-            </a:solidFill>
-            <a:prstDash val="lgDash"/>
-          </a:ln>
-          <a:effectLst/>
-        </p:spPr>
-        <p:txBody>
-          <a:bodyPr rtlCol="0" anchor="ctr" lIns="54864" rIns="54864" tIns="27432" bIns="27432" wrap="square"/>
-          <a:lstStyle/>
-          <a:p>
-            <a:pPr algn="ctr"/>
-          </a:p>
-        </p:txBody>
-      </p:sp>
-      <p:sp>
-        <p:nvSpPr>
-          <p:cNvPr id="55" name="TextBox 54"/>
-          <p:cNvSpPr txBox="1"/>
-          <p:nvPr/>
-        </p:nvSpPr>
-        <p:spPr>
-          <a:xfrm>
-            <a:off x="7968996" y="1737360"/>
-            <a:ext cx="1188720" cy="365760"/>
-          </a:xfrm>
-          <a:prstGeom prst="rect">
-            <a:avLst/>
-          </a:prstGeom>
-          <a:noFill/>
-        </p:spPr>
-        <p:txBody>
-          <a:bodyPr wrap="square" anchor="ctr" lIns="45720" rIns="45720" tIns="27432" bIns="27432">
-            <a:spAutoFit/>
-          </a:bodyPr>
-          <a:lstStyle/>
-          <a:p>
-            <a:pPr algn="l"/>
-            <a:r>
-              <a:rPr sz="1600" b="1" i="0">
-                <a:solidFill>
-                  <a:srgbClr val="1F2A44"/>
-                </a:solidFill>
-                <a:latin typeface="Calibri"/>
-              </a:rPr>
-              <a:t>round 2</a:t>
-            </a:r>
-          </a:p>
-        </p:txBody>
-      </p:sp>
-      <p:sp>
-        <p:nvSpPr>
-          <p:cNvPr id="56" name="TextBox 55"/>
-          <p:cNvSpPr txBox="1"/>
-          <p:nvPr/>
-        </p:nvSpPr>
-        <p:spPr>
-          <a:xfrm>
-            <a:off x="5129784" y="1014983"/>
-            <a:ext cx="2194560" cy="274320"/>
-          </a:xfrm>
-          <a:prstGeom prst="rect">
-            <a:avLst/>
-          </a:prstGeom>
-          <a:noFill/>
-        </p:spPr>
-        <p:txBody>
-          <a:bodyPr wrap="square" anchor="ctr" lIns="45720" rIns="45720" tIns="27432" bIns="27432">
-            <a:spAutoFit/>
-          </a:bodyPr>
-          <a:lstStyle/>
-          <a:p>
-            <a:pPr algn="ctr"/>
-            <a:r>
-              <a:rPr sz="1150" b="1" i="0">
-                <a:solidFill>
-                  <a:srgbClr val="7B4FB5"/>
-                </a:solidFill>
-                <a:latin typeface="Calibri"/>
-              </a:rPr>
-              <a:t>ITE([c], [a₁], [x₁])</a:t>
-            </a:r>
-          </a:p>
-        </p:txBody>
-      </p:sp>
-      <p:sp>
-        <p:nvSpPr>
-          <p:cNvPr id="57" name="Rounded Rectangle 56"/>
-          <p:cNvSpPr/>
-          <p:nvPr/>
-        </p:nvSpPr>
-        <p:spPr>
-          <a:xfrm>
-            <a:off x="502920" y="1645920"/>
-            <a:ext cx="329184" cy="219456"/>
-          </a:xfrm>
-          <a:prstGeom prst="roundRect">
-            <a:avLst>
-              <a:gd name="adj" fmla="val 15000"/>
-            </a:avLst>
-          </a:prstGeom>
-          <a:solidFill>
-            <a:srgbClr val="FFF3CC"/>
-          </a:solidFill>
-          <a:ln w="25400">
-            <a:solidFill>
-              <a:srgbClr val="E0A300"/>
-            </a:solidFill>
-          </a:ln>
-          <a:effectLst/>
-        </p:spPr>
-        <p:txBody>
-          <a:bodyPr rtlCol="0" anchor="ctr" lIns="54864" rIns="54864" tIns="27432" bIns="27432" wrap="square"/>
-          <a:lstStyle/>
-          <a:p>
-            <a:pPr algn="ctr"/>
-          </a:p>
-        </p:txBody>
-      </p:sp>
-      <p:sp>
-        <p:nvSpPr>
-          <p:cNvPr id="58" name="TextBox 57"/>
-          <p:cNvSpPr txBox="1"/>
-          <p:nvPr/>
-        </p:nvSpPr>
-        <p:spPr>
-          <a:xfrm>
-            <a:off x="905256" y="1600200"/>
-            <a:ext cx="1563624" cy="320040"/>
-          </a:xfrm>
-          <a:prstGeom prst="rect">
-            <a:avLst/>
-          </a:prstGeom>
-          <a:noFill/>
-        </p:spPr>
-        <p:txBody>
-          <a:bodyPr wrap="square" anchor="ctr" lIns="45720" rIns="45720" tIns="27432" bIns="27432">
-            <a:spAutoFit/>
-          </a:bodyPr>
-          <a:lstStyle/>
-          <a:p>
-            <a:pPr algn="l"/>
-            <a:r>
-              <a:rPr sz="1200" b="0" i="0">
-                <a:solidFill>
-                  <a:srgbClr val="6B717A"/>
-                </a:solidFill>
-                <a:latin typeface="Calibri"/>
-              </a:rPr>
-              <a:t>candidate</a:t>
-            </a:r>
-          </a:p>
-        </p:txBody>
-      </p:sp>
-      <p:sp>
-        <p:nvSpPr>
-          <p:cNvPr id="59" name="Rounded Rectangle 58"/>
-          <p:cNvSpPr/>
-          <p:nvPr/>
-        </p:nvSpPr>
-        <p:spPr>
-          <a:xfrm>
-            <a:off x="502920" y="2066543"/>
-            <a:ext cx="329184" cy="219456"/>
-          </a:xfrm>
-          <a:prstGeom prst="roundRect">
-            <a:avLst>
-              <a:gd name="adj" fmla="val 15000"/>
-            </a:avLst>
-          </a:prstGeom>
-          <a:noFill/>
-          <a:ln w="22225">
-            <a:solidFill>
-              <a:srgbClr val="7B4FB5"/>
-            </a:solidFill>
-            <a:prstDash val="sysDot"/>
-          </a:ln>
-          <a:effectLst/>
-        </p:spPr>
-        <p:txBody>
-          <a:bodyPr rtlCol="0" anchor="ctr" lIns="54864" rIns="54864" tIns="27432" bIns="27432" wrap="square"/>
-          <a:lstStyle/>
-          <a:p>
-            <a:pPr algn="ctr"/>
-          </a:p>
-        </p:txBody>
-      </p:sp>
-      <p:sp>
-        <p:nvSpPr>
-          <p:cNvPr id="60" name="TextBox 59"/>
-          <p:cNvSpPr txBox="1"/>
-          <p:nvPr/>
-        </p:nvSpPr>
-        <p:spPr>
-          <a:xfrm>
-            <a:off x="905256" y="2020824"/>
-            <a:ext cx="1563624" cy="320040"/>
-          </a:xfrm>
-          <a:prstGeom prst="rect">
-            <a:avLst/>
-          </a:prstGeom>
-          <a:noFill/>
-        </p:spPr>
-        <p:txBody>
-          <a:bodyPr wrap="square" anchor="ctr" lIns="45720" rIns="45720" tIns="27432" bIns="27432">
-            <a:spAutoFit/>
-          </a:bodyPr>
-          <a:lstStyle/>
-          <a:p>
-            <a:pPr algn="l"/>
-            <a:r>
-              <a:rPr sz="1200" b="0" i="0">
-                <a:solidFill>
-                  <a:srgbClr val="6B717A"/>
-                </a:solidFill>
-                <a:latin typeface="Calibri"/>
-              </a:rPr>
-              <a:t>signature group</a:t>
-            </a:r>
-          </a:p>
-        </p:txBody>
-      </p:sp>
-      <p:sp>
-        <p:nvSpPr>
-          <p:cNvPr id="61" name="Rounded Rectangle 60"/>
-          <p:cNvSpPr/>
-          <p:nvPr/>
-        </p:nvSpPr>
-        <p:spPr>
-          <a:xfrm>
-            <a:off x="502920" y="2487168"/>
-            <a:ext cx="329184" cy="219456"/>
-          </a:xfrm>
-          <a:prstGeom prst="roundRect">
-            <a:avLst>
-              <a:gd name="adj" fmla="val 15000"/>
-            </a:avLst>
-          </a:prstGeom>
-          <a:noFill/>
-          <a:ln w="28575">
-            <a:solidFill>
-              <a:srgbClr val="1F2A44"/>
-            </a:solidFill>
-            <a:prstDash val="lgDash"/>
-          </a:ln>
-          <a:effectLst/>
-        </p:spPr>
-        <p:txBody>
-          <a:bodyPr rtlCol="0" anchor="ctr" lIns="54864" rIns="54864" tIns="27432" bIns="27432" wrap="square"/>
-          <a:lstStyle/>
-          <a:p>
-            <a:pPr algn="ctr"/>
-          </a:p>
-        </p:txBody>
-      </p:sp>
-      <p:sp>
-        <p:nvSpPr>
-          <p:cNvPr id="62" name="TextBox 61"/>
-          <p:cNvSpPr txBox="1"/>
-          <p:nvPr/>
-        </p:nvSpPr>
-        <p:spPr>
-          <a:xfrm>
-            <a:off x="905256" y="2441448"/>
-            <a:ext cx="1563624" cy="320040"/>
-          </a:xfrm>
-          <a:prstGeom prst="rect">
-            <a:avLst/>
-          </a:prstGeom>
-          <a:noFill/>
-        </p:spPr>
-        <p:txBody>
-          <a:bodyPr wrap="square" anchor="ctr" lIns="45720" rIns="45720" tIns="27432" bIns="27432">
-            <a:spAutoFit/>
-          </a:bodyPr>
-          <a:lstStyle/>
-          <a:p>
-            <a:pPr algn="l"/>
-            <a:r>
-              <a:rPr sz="1200" b="0" i="0">
-                <a:solidFill>
-                  <a:srgbClr val="6B717A"/>
-                </a:solidFill>
-                <a:latin typeface="Calibri"/>
-              </a:rPr>
-              <a:t>round</a:t>
             </a:r>
           </a:p>
         </p:txBody>
@@ -55929,7 +54088,7 @@
           </a:prstGeom>
           <a:ln w="15875">
             <a:solidFill>
-              <a:srgbClr val="8A8F98"/>
+              <a:srgbClr val="C9CDD3"/>
             </a:solidFill>
           </a:ln>
           <a:effectLst/>
@@ -55951,7 +54110,7 @@
           </a:prstGeom>
           <a:ln w="15875">
             <a:solidFill>
-              <a:srgbClr val="8A8F98"/>
+              <a:srgbClr val="C9CDD3"/>
             </a:solidFill>
           </a:ln>
           <a:effectLst/>
@@ -55973,7 +54132,7 @@
           </a:prstGeom>
           <a:ln w="15875">
             <a:solidFill>
-              <a:srgbClr val="8A8F98"/>
+              <a:srgbClr val="C9CDD3"/>
             </a:solidFill>
           </a:ln>
           <a:effectLst/>
@@ -55995,7 +54154,7 @@
           </a:prstGeom>
           <a:ln w="15875">
             <a:solidFill>
-              <a:srgbClr val="8A8F98"/>
+              <a:srgbClr val="C9CDD3"/>
             </a:solidFill>
           </a:ln>
           <a:effectLst/>
@@ -56017,7 +54176,7 @@
           </a:prstGeom>
           <a:ln w="15875">
             <a:solidFill>
-              <a:srgbClr val="8A8F98"/>
+              <a:srgbClr val="C9CDD3"/>
             </a:solidFill>
           </a:ln>
           <a:effectLst/>
@@ -56039,7 +54198,7 @@
           </a:prstGeom>
           <a:ln w="15875">
             <a:solidFill>
-              <a:srgbClr val="8A8F98"/>
+              <a:srgbClr val="C9CDD3"/>
             </a:solidFill>
           </a:ln>
           <a:effectLst/>
@@ -56061,7 +54220,7 @@
           </a:prstGeom>
           <a:ln w="15875">
             <a:solidFill>
-              <a:srgbClr val="8A8F98"/>
+              <a:srgbClr val="C9CDD3"/>
             </a:solidFill>
           </a:ln>
           <a:effectLst/>
@@ -56083,7 +54242,7 @@
           </a:prstGeom>
           <a:ln w="15875">
             <a:solidFill>
-              <a:srgbClr val="8A8F98"/>
+              <a:srgbClr val="C9CDD3"/>
             </a:solidFill>
           </a:ln>
           <a:effectLst/>
@@ -56105,7 +54264,7 @@
           </a:prstGeom>
           <a:ln w="15875">
             <a:solidFill>
-              <a:srgbClr val="8A8F98"/>
+              <a:srgbClr val="C9CDD3"/>
             </a:solidFill>
           </a:ln>
           <a:effectLst/>
@@ -56127,7 +54286,7 @@
           </a:prstGeom>
           <a:ln w="15875">
             <a:solidFill>
-              <a:srgbClr val="8A8F98"/>
+              <a:srgbClr val="C9CDD3"/>
             </a:solidFill>
           </a:ln>
           <a:effectLst/>
@@ -56149,7 +54308,7 @@
           </a:prstGeom>
           <a:ln w="15875">
             <a:solidFill>
-              <a:srgbClr val="8A8F98"/>
+              <a:srgbClr val="C9CDD3"/>
             </a:solidFill>
           </a:ln>
           <a:effectLst/>
@@ -56171,7 +54330,7 @@
           </a:prstGeom>
           <a:ln w="15875">
             <a:solidFill>
-              <a:srgbClr val="8A8F98"/>
+              <a:srgbClr val="C9CDD3"/>
             </a:solidFill>
           </a:ln>
           <a:effectLst/>
@@ -56193,7 +54352,7 @@
           </a:prstGeom>
           <a:ln w="15875">
             <a:solidFill>
-              <a:srgbClr val="8A8F98"/>
+              <a:srgbClr val="C9CDD3"/>
             </a:solidFill>
           </a:ln>
           <a:effectLst/>
@@ -56215,7 +54374,7 @@
           </a:prstGeom>
           <a:ln w="15875">
             <a:solidFill>
-              <a:srgbClr val="8A8F98"/>
+              <a:srgbClr val="C9CDD3"/>
             </a:solidFill>
           </a:ln>
           <a:effectLst/>
@@ -56242,7 +54401,7 @@
           </a:solidFill>
           <a:ln w="12700">
             <a:solidFill>
-              <a:srgbClr val="4A4F57"/>
+              <a:srgbClr val="C9CDD3"/>
             </a:solidFill>
           </a:ln>
           <a:effectLst/>
@@ -56255,7 +54414,7 @@
             <a:r>
               <a:rPr sz="1400" b="1" i="0">
                 <a:solidFill>
-                  <a:srgbClr val="2B2F36"/>
+                  <a:srgbClr val="C9CDD3"/>
                 </a:solidFill>
                 <a:latin typeface="Calibri"/>
               </a:rPr>
@@ -56285,7 +54444,7 @@
           </a:solidFill>
           <a:ln w="12700">
             <a:solidFill>
-              <a:srgbClr val="4A4F57"/>
+              <a:srgbClr val="C9CDD3"/>
             </a:solidFill>
           </a:ln>
           <a:effectLst/>
@@ -56298,7 +54457,7 @@
             <a:r>
               <a:rPr sz="1400" b="1" i="0">
                 <a:solidFill>
-                  <a:srgbClr val="2B2F36"/>
+                  <a:srgbClr val="C9CDD3"/>
                 </a:solidFill>
                 <a:latin typeface="Calibri"/>
               </a:rPr>
@@ -56328,7 +54487,7 @@
           </a:solidFill>
           <a:ln w="12700">
             <a:solidFill>
-              <a:srgbClr val="4A4F57"/>
+              <a:srgbClr val="C9CDD3"/>
             </a:solidFill>
           </a:ln>
           <a:effectLst/>
@@ -56341,7 +54500,7 @@
             <a:r>
               <a:rPr sz="1400" b="1" i="0">
                 <a:solidFill>
-                  <a:srgbClr val="2B2F36"/>
+                  <a:srgbClr val="C9CDD3"/>
                 </a:solidFill>
                 <a:latin typeface="Calibri"/>
               </a:rPr>
@@ -56371,7 +54530,7 @@
           </a:solidFill>
           <a:ln w="12700">
             <a:solidFill>
-              <a:srgbClr val="4A4F57"/>
+              <a:srgbClr val="C9CDD3"/>
             </a:solidFill>
           </a:ln>
           <a:effectLst/>
@@ -56384,7 +54543,7 @@
             <a:r>
               <a:rPr sz="1400" b="1" i="0">
                 <a:solidFill>
-                  <a:srgbClr val="2B2F36"/>
+                  <a:srgbClr val="C9CDD3"/>
                 </a:solidFill>
                 <a:latin typeface="Calibri"/>
               </a:rPr>
@@ -56414,7 +54573,7 @@
           </a:solidFill>
           <a:ln w="12700">
             <a:solidFill>
-              <a:srgbClr val="4A4F57"/>
+              <a:srgbClr val="C9CDD3"/>
             </a:solidFill>
           </a:ln>
           <a:effectLst/>
@@ -56427,7 +54586,7 @@
             <a:r>
               <a:rPr sz="1400" b="1" i="0">
                 <a:solidFill>
-                  <a:srgbClr val="2B2F36"/>
+                  <a:srgbClr val="C9CDD3"/>
                 </a:solidFill>
                 <a:latin typeface="Calibri"/>
               </a:rPr>
@@ -56457,7 +54616,7 @@
           </a:solidFill>
           <a:ln w="12700">
             <a:solidFill>
-              <a:srgbClr val="4A4F57"/>
+              <a:srgbClr val="C9CDD3"/>
             </a:solidFill>
           </a:ln>
           <a:effectLst/>
@@ -56470,7 +54629,7 @@
             <a:r>
               <a:rPr sz="1400" b="1" i="0">
                 <a:solidFill>
-                  <a:srgbClr val="2B2F36"/>
+                  <a:srgbClr val="C9CDD3"/>
                 </a:solidFill>
                 <a:latin typeface="Calibri"/>
               </a:rPr>
@@ -56500,7 +54659,7 @@
           </a:solidFill>
           <a:ln w="12700">
             <a:solidFill>
-              <a:srgbClr val="4A4F57"/>
+              <a:srgbClr val="C9CDD3"/>
             </a:solidFill>
           </a:ln>
           <a:effectLst/>
@@ -56513,7 +54672,7 @@
             <a:r>
               <a:rPr sz="1400" b="1" i="0">
                 <a:solidFill>
-                  <a:srgbClr val="2B2F36"/>
+                  <a:srgbClr val="C9CDD3"/>
                 </a:solidFill>
                 <a:latin typeface="Calibri"/>
               </a:rPr>
@@ -56543,7 +54702,7 @@
           </a:solidFill>
           <a:ln w="12700">
             <a:solidFill>
-              <a:srgbClr val="4A4F57"/>
+              <a:srgbClr val="C9CDD3"/>
             </a:solidFill>
           </a:ln>
           <a:effectLst/>
@@ -56556,7 +54715,7 @@
             <a:r>
               <a:rPr sz="1400" b="1" i="0">
                 <a:solidFill>
-                  <a:srgbClr val="2B2F36"/>
+                  <a:srgbClr val="C9CDD3"/>
                 </a:solidFill>
                 <a:latin typeface="Calibri"/>
               </a:rPr>
@@ -56586,7 +54745,7 @@
           </a:solidFill>
           <a:ln w="12700">
             <a:solidFill>
-              <a:srgbClr val="4A4F57"/>
+              <a:srgbClr val="C9CDD3"/>
             </a:solidFill>
           </a:ln>
           <a:effectLst/>
@@ -56599,7 +54758,7 @@
             <a:r>
               <a:rPr sz="1400" b="1" i="0">
                 <a:solidFill>
-                  <a:srgbClr val="2B2F36"/>
+                  <a:srgbClr val="C9CDD3"/>
                 </a:solidFill>
                 <a:latin typeface="Calibri"/>
               </a:rPr>
@@ -56629,7 +54788,7 @@
           </a:solidFill>
           <a:ln w="12700">
             <a:solidFill>
-              <a:srgbClr val="4A4F57"/>
+              <a:srgbClr val="C9CDD3"/>
             </a:solidFill>
           </a:ln>
           <a:effectLst/>
@@ -56642,7 +54801,7 @@
             <a:r>
               <a:rPr sz="1400" b="1" i="0">
                 <a:solidFill>
-                  <a:srgbClr val="2B2F36"/>
+                  <a:srgbClr val="C9CDD3"/>
                 </a:solidFill>
                 <a:latin typeface="Calibri"/>
               </a:rPr>
@@ -56672,7 +54831,7 @@
           </a:solidFill>
           <a:ln w="12700">
             <a:solidFill>
-              <a:srgbClr val="4A4F57"/>
+              <a:srgbClr val="C9CDD3"/>
             </a:solidFill>
           </a:ln>
           <a:effectLst/>
@@ -56685,7 +54844,7 @@
             <a:r>
               <a:rPr sz="1600" b="1" i="0">
                 <a:solidFill>
-                  <a:srgbClr val="2B2F36"/>
+                  <a:srgbClr val="C9CDD3"/>
                 </a:solidFill>
                 <a:latin typeface="Calibri"/>
               </a:rPr>
@@ -56720,7 +54879,7 @@
             <a:r>
               <a:rPr sz="1300" b="1" i="0">
                 <a:solidFill>
-                  <a:srgbClr val="2B2F36"/>
+                  <a:srgbClr val="C9CDD3"/>
                 </a:solidFill>
                 <a:latin typeface="Calibri"/>
               </a:rPr>
@@ -56750,7 +54909,7 @@
           </a:solidFill>
           <a:ln w="12700">
             <a:solidFill>
-              <a:srgbClr val="4A4F57"/>
+              <a:srgbClr val="C9CDD3"/>
             </a:solidFill>
           </a:ln>
           <a:effectLst/>
@@ -56763,7 +54922,7 @@
             <a:r>
               <a:rPr sz="1600" b="1" i="0">
                 <a:solidFill>
-                  <a:srgbClr val="2B2F36"/>
+                  <a:srgbClr val="C9CDD3"/>
                 </a:solidFill>
                 <a:latin typeface="Calibri"/>
               </a:rPr>
@@ -56798,7 +54957,7 @@
             <a:r>
               <a:rPr sz="1300" b="1" i="0">
                 <a:solidFill>
-                  <a:srgbClr val="2B2F36"/>
+                  <a:srgbClr val="C9CDD3"/>
                 </a:solidFill>
                 <a:latin typeface="Calibri"/>
               </a:rPr>
@@ -56828,7 +54987,7 @@
           </a:solidFill>
           <a:ln w="12700">
             <a:solidFill>
-              <a:srgbClr val="4A4F57"/>
+              <a:srgbClr val="C9CDD3"/>
             </a:solidFill>
           </a:ln>
           <a:effectLst/>
@@ -56841,7 +55000,7 @@
             <a:r>
               <a:rPr sz="1600" b="1" i="0">
                 <a:solidFill>
-                  <a:srgbClr val="2B2F36"/>
+                  <a:srgbClr val="C9CDD3"/>
                 </a:solidFill>
                 <a:latin typeface="Calibri"/>
               </a:rPr>
@@ -56876,7 +55035,7 @@
             <a:r>
               <a:rPr sz="1300" b="1" i="0">
                 <a:solidFill>
-                  <a:srgbClr val="2B2F36"/>
+                  <a:srgbClr val="C9CDD3"/>
                 </a:solidFill>
                 <a:latin typeface="Calibri"/>
               </a:rPr>
@@ -56906,7 +55065,7 @@
           </a:solidFill>
           <a:ln w="12700">
             <a:solidFill>
-              <a:srgbClr val="4A4F57"/>
+              <a:srgbClr val="C9CDD3"/>
             </a:solidFill>
           </a:ln>
           <a:effectLst/>
@@ -56919,7 +55078,7 @@
             <a:r>
               <a:rPr sz="1600" b="1" i="0">
                 <a:solidFill>
-                  <a:srgbClr val="2B2F36"/>
+                  <a:srgbClr val="C9CDD3"/>
                 </a:solidFill>
                 <a:latin typeface="Calibri"/>
               </a:rPr>
@@ -56954,7 +55113,7 @@
             <a:r>
               <a:rPr sz="1300" b="1" i="0">
                 <a:solidFill>
-                  <a:srgbClr val="2B2F36"/>
+                  <a:srgbClr val="C9CDD3"/>
                 </a:solidFill>
                 <a:latin typeface="Calibri"/>
               </a:rPr>
@@ -56980,11 +55139,11 @@
             </a:avLst>
           </a:prstGeom>
           <a:solidFill>
-            <a:srgbClr val="FFF3CC"/>
-          </a:solidFill>
-          <a:ln w="34925">
-            <a:solidFill>
-              <a:srgbClr val="E0A300"/>
+            <a:srgbClr val="FFFFFF"/>
+          </a:solidFill>
+          <a:ln w="12700">
+            <a:solidFill>
+              <a:srgbClr val="4A4F57"/>
             </a:solidFill>
           </a:ln>
           <a:effectLst/>
@@ -57058,11 +55217,11 @@
             </a:avLst>
           </a:prstGeom>
           <a:solidFill>
-            <a:srgbClr val="FFF3CC"/>
-          </a:solidFill>
-          <a:ln w="34925">
-            <a:solidFill>
-              <a:srgbClr val="E0A300"/>
+            <a:srgbClr val="FFFFFF"/>
+          </a:solidFill>
+          <a:ln w="12700">
+            <a:solidFill>
+              <a:srgbClr val="4A4F57"/>
             </a:solidFill>
           </a:ln>
           <a:effectLst/>
@@ -57121,47 +55280,14 @@
       </p:sp>
       <p:sp>
         <p:nvSpPr>
-          <p:cNvPr id="50" name="Rounded Rectangle 49"/>
-          <p:cNvSpPr/>
-          <p:nvPr/>
-        </p:nvSpPr>
-        <p:spPr>
-          <a:xfrm>
-            <a:off x="2263139" y="4663440"/>
-            <a:ext cx="7662672" cy="914400"/>
-          </a:xfrm>
-          <a:prstGeom prst="roundRect">
-            <a:avLst>
-              <a:gd name="adj" fmla="val 35000"/>
-            </a:avLst>
-          </a:prstGeom>
-          <a:noFill/>
-          <a:ln w="28575">
-            <a:solidFill>
-              <a:srgbClr val="1F2A44"/>
-            </a:solidFill>
-            <a:prstDash val="lgDash"/>
-          </a:ln>
-          <a:effectLst/>
-        </p:spPr>
-        <p:txBody>
-          <a:bodyPr rtlCol="0" anchor="ctr" lIns="54864" rIns="54864" tIns="27432" bIns="27432" wrap="square"/>
-          <a:lstStyle/>
-          <a:p>
-            <a:pPr algn="ctr"/>
-          </a:p>
-        </p:txBody>
-      </p:sp>
-      <p:sp>
-        <p:nvSpPr>
-          <p:cNvPr id="51" name="TextBox 50"/>
+          <p:cNvPr id="50" name="TextBox 49"/>
           <p:cNvSpPr txBox="1"/>
           <p:nvPr/>
         </p:nvSpPr>
         <p:spPr>
           <a:xfrm>
-            <a:off x="10017252" y="4937759"/>
-            <a:ext cx="1188720" cy="365760"/>
+            <a:off x="5861304" y="1645920"/>
+            <a:ext cx="731520" cy="548640"/>
           </a:xfrm>
           <a:prstGeom prst="rect">
             <a:avLst/>
@@ -57174,177 +55300,6 @@
           </a:bodyPr>
           <a:lstStyle/>
           <a:p>
-            <a:pPr algn="l"/>
-            <a:r>
-              <a:rPr sz="1600" b="1" i="0">
-                <a:solidFill>
-                  <a:srgbClr val="1F2A44"/>
-                </a:solidFill>
-                <a:latin typeface="Calibri"/>
-              </a:rPr>
-              <a:t>round 0</a:t>
-            </a:r>
-          </a:p>
-        </p:txBody>
-      </p:sp>
-      <p:sp>
-        <p:nvSpPr>
-          <p:cNvPr id="52" name="Rounded Rectangle 51"/>
-          <p:cNvSpPr/>
-          <p:nvPr/>
-        </p:nvSpPr>
-        <p:spPr>
-          <a:xfrm>
-            <a:off x="2674620" y="2715768"/>
-            <a:ext cx="6830568" cy="1335024"/>
-          </a:xfrm>
-          <a:prstGeom prst="roundRect">
-            <a:avLst>
-              <a:gd name="adj" fmla="val 35000"/>
-            </a:avLst>
-          </a:prstGeom>
-          <a:noFill/>
-          <a:ln w="28575">
-            <a:solidFill>
-              <a:srgbClr val="1F2A44"/>
-            </a:solidFill>
-            <a:prstDash val="lgDash"/>
-          </a:ln>
-          <a:effectLst/>
-        </p:spPr>
-        <p:txBody>
-          <a:bodyPr rtlCol="0" anchor="ctr" lIns="54864" rIns="54864" tIns="27432" bIns="27432" wrap="square"/>
-          <a:lstStyle/>
-          <a:p>
-            <a:pPr algn="ctr"/>
-          </a:p>
-        </p:txBody>
-      </p:sp>
-      <p:sp>
-        <p:nvSpPr>
-          <p:cNvPr id="53" name="TextBox 52"/>
-          <p:cNvSpPr txBox="1"/>
-          <p:nvPr/>
-        </p:nvSpPr>
-        <p:spPr>
-          <a:xfrm>
-            <a:off x="9596628" y="3200399"/>
-            <a:ext cx="1188720" cy="365760"/>
-          </a:xfrm>
-          <a:prstGeom prst="rect">
-            <a:avLst/>
-          </a:prstGeom>
-          <a:noFill/>
-        </p:spPr>
-        <p:txBody>
-          <a:bodyPr wrap="square" anchor="ctr" lIns="45720" rIns="45720" tIns="27432" bIns="27432">
-            <a:spAutoFit/>
-          </a:bodyPr>
-          <a:lstStyle/>
-          <a:p>
-            <a:pPr algn="l"/>
-            <a:r>
-              <a:rPr sz="1600" b="1" i="0">
-                <a:solidFill>
-                  <a:srgbClr val="1F2A44"/>
-                </a:solidFill>
-                <a:latin typeface="Calibri"/>
-              </a:rPr>
-              <a:t>round 1</a:t>
-            </a:r>
-          </a:p>
-        </p:txBody>
-      </p:sp>
-      <p:sp>
-        <p:nvSpPr>
-          <p:cNvPr id="54" name="Rounded Rectangle 53"/>
-          <p:cNvSpPr/>
-          <p:nvPr/>
-        </p:nvSpPr>
-        <p:spPr>
-          <a:xfrm>
-            <a:off x="4576572" y="1389888"/>
-            <a:ext cx="3300984" cy="1060704"/>
-          </a:xfrm>
-          <a:prstGeom prst="roundRect">
-            <a:avLst>
-              <a:gd name="adj" fmla="val 35000"/>
-            </a:avLst>
-          </a:prstGeom>
-          <a:noFill/>
-          <a:ln w="28575">
-            <a:solidFill>
-              <a:srgbClr val="1F2A44"/>
-            </a:solidFill>
-            <a:prstDash val="lgDash"/>
-          </a:ln>
-          <a:effectLst/>
-        </p:spPr>
-        <p:txBody>
-          <a:bodyPr rtlCol="0" anchor="ctr" lIns="54864" rIns="54864" tIns="27432" bIns="27432" wrap="square"/>
-          <a:lstStyle/>
-          <a:p>
-            <a:pPr algn="ctr"/>
-          </a:p>
-        </p:txBody>
-      </p:sp>
-      <p:sp>
-        <p:nvSpPr>
-          <p:cNvPr id="55" name="TextBox 54"/>
-          <p:cNvSpPr txBox="1"/>
-          <p:nvPr/>
-        </p:nvSpPr>
-        <p:spPr>
-          <a:xfrm>
-            <a:off x="7968996" y="1737360"/>
-            <a:ext cx="1188720" cy="365760"/>
-          </a:xfrm>
-          <a:prstGeom prst="rect">
-            <a:avLst/>
-          </a:prstGeom>
-          <a:noFill/>
-        </p:spPr>
-        <p:txBody>
-          <a:bodyPr wrap="square" anchor="ctr" lIns="45720" rIns="45720" tIns="27432" bIns="27432">
-            <a:spAutoFit/>
-          </a:bodyPr>
-          <a:lstStyle/>
-          <a:p>
-            <a:pPr algn="l"/>
-            <a:r>
-              <a:rPr sz="1600" b="1" i="0">
-                <a:solidFill>
-                  <a:srgbClr val="1F2A44"/>
-                </a:solidFill>
-                <a:latin typeface="Calibri"/>
-              </a:rPr>
-              <a:t>round 2</a:t>
-            </a:r>
-          </a:p>
-        </p:txBody>
-      </p:sp>
-      <p:sp>
-        <p:nvSpPr>
-          <p:cNvPr id="56" name="TextBox 55"/>
-          <p:cNvSpPr txBox="1"/>
-          <p:nvPr/>
-        </p:nvSpPr>
-        <p:spPr>
-          <a:xfrm>
-            <a:off x="5861304" y="1645920"/>
-            <a:ext cx="731520" cy="548640"/>
-          </a:xfrm>
-          <a:prstGeom prst="rect">
-            <a:avLst/>
-          </a:prstGeom>
-          <a:noFill/>
-        </p:spPr>
-        <p:txBody>
-          <a:bodyPr wrap="square" anchor="ctr" lIns="45720" rIns="45720" tIns="27432" bIns="27432">
-            <a:spAutoFit/>
-          </a:bodyPr>
-          <a:lstStyle/>
-          <a:p>
             <a:pPr algn="ctr"/>
             <a:r>
               <a:rPr sz="2200" b="1" i="0">
@@ -57354,143 +55309,6 @@
                 <a:latin typeface="Calibri"/>
               </a:rPr>
               <a:t>∪</a:t>
-            </a:r>
-          </a:p>
-        </p:txBody>
-      </p:sp>
-      <p:sp>
-        <p:nvSpPr>
-          <p:cNvPr id="57" name="Rounded Rectangle 56"/>
-          <p:cNvSpPr/>
-          <p:nvPr/>
-        </p:nvSpPr>
-        <p:spPr>
-          <a:xfrm>
-            <a:off x="502920" y="1645920"/>
-            <a:ext cx="329184" cy="219456"/>
-          </a:xfrm>
-          <a:prstGeom prst="roundRect">
-            <a:avLst>
-              <a:gd name="adj" fmla="val 15000"/>
-            </a:avLst>
-          </a:prstGeom>
-          <a:solidFill>
-            <a:srgbClr val="FFF3CC"/>
-          </a:solidFill>
-          <a:ln w="25400">
-            <a:solidFill>
-              <a:srgbClr val="E0A300"/>
-            </a:solidFill>
-          </a:ln>
-          <a:effectLst/>
-        </p:spPr>
-        <p:txBody>
-          <a:bodyPr rtlCol="0" anchor="ctr" lIns="54864" rIns="54864" tIns="27432" bIns="27432" wrap="square"/>
-          <a:lstStyle/>
-          <a:p>
-            <a:pPr algn="ctr"/>
-          </a:p>
-        </p:txBody>
-      </p:sp>
-      <p:sp>
-        <p:nvSpPr>
-          <p:cNvPr id="58" name="TextBox 57"/>
-          <p:cNvSpPr txBox="1"/>
-          <p:nvPr/>
-        </p:nvSpPr>
-        <p:spPr>
-          <a:xfrm>
-            <a:off x="905256" y="1600200"/>
-            <a:ext cx="1563624" cy="320040"/>
-          </a:xfrm>
-          <a:prstGeom prst="rect">
-            <a:avLst/>
-          </a:prstGeom>
-          <a:noFill/>
-        </p:spPr>
-        <p:txBody>
-          <a:bodyPr wrap="square" anchor="ctr" lIns="45720" rIns="45720" tIns="27432" bIns="27432">
-            <a:spAutoFit/>
-          </a:bodyPr>
-          <a:lstStyle/>
-          <a:p>
-            <a:pPr algn="l"/>
-            <a:r>
-              <a:rPr sz="1200" b="0" i="0">
-                <a:solidFill>
-                  <a:srgbClr val="6B717A"/>
-                </a:solidFill>
-                <a:latin typeface="Calibri"/>
-              </a:rPr>
-              <a:t>merged this round</a:t>
-            </a:r>
-          </a:p>
-        </p:txBody>
-      </p:sp>
-      <p:sp>
-        <p:nvSpPr>
-          <p:cNvPr id="59" name="Rounded Rectangle 58"/>
-          <p:cNvSpPr/>
-          <p:nvPr/>
-        </p:nvSpPr>
-        <p:spPr>
-          <a:xfrm>
-            <a:off x="502920" y="2066543"/>
-            <a:ext cx="329184" cy="219456"/>
-          </a:xfrm>
-          <a:prstGeom prst="roundRect">
-            <a:avLst>
-              <a:gd name="adj" fmla="val 15000"/>
-            </a:avLst>
-          </a:prstGeom>
-          <a:noFill/>
-          <a:ln w="28575">
-            <a:solidFill>
-              <a:srgbClr val="1F2A44"/>
-            </a:solidFill>
-            <a:prstDash val="lgDash"/>
-          </a:ln>
-          <a:effectLst/>
-        </p:spPr>
-        <p:txBody>
-          <a:bodyPr rtlCol="0" anchor="ctr" lIns="54864" rIns="54864" tIns="27432" bIns="27432" wrap="square"/>
-          <a:lstStyle/>
-          <a:p>
-            <a:pPr algn="ctr"/>
-          </a:p>
-        </p:txBody>
-      </p:sp>
-      <p:sp>
-        <p:nvSpPr>
-          <p:cNvPr id="60" name="TextBox 59"/>
-          <p:cNvSpPr txBox="1"/>
-          <p:nvPr/>
-        </p:nvSpPr>
-        <p:spPr>
-          <a:xfrm>
-            <a:off x="905256" y="2020824"/>
-            <a:ext cx="1563624" cy="320040"/>
-          </a:xfrm>
-          <a:prstGeom prst="rect">
-            <a:avLst/>
-          </a:prstGeom>
-          <a:noFill/>
-        </p:spPr>
-        <p:txBody>
-          <a:bodyPr wrap="square" anchor="ctr" lIns="45720" rIns="45720" tIns="27432" bIns="27432">
-            <a:spAutoFit/>
-          </a:bodyPr>
-          <a:lstStyle/>
-          <a:p>
-            <a:pPr algn="l"/>
-            <a:r>
-              <a:rPr sz="1200" b="0" i="0">
-                <a:solidFill>
-                  <a:srgbClr val="6B717A"/>
-                </a:solidFill>
-                <a:latin typeface="Calibri"/>
-              </a:rPr>
-              <a:t>round</a:t>
             </a:r>
           </a:p>
         </p:txBody>

--- a/slides/parallelcc-part1.pptx
+++ b/slides/parallelcc-part1.pptx
@@ -47333,6 +47333,111 @@
           </a:p>
         </p:txBody>
       </p:sp>
+      <p:sp>
+        <p:nvSpPr>
+          <p:cNvPr id="52" name="Rounded Rectangle 51"/>
+          <p:cNvSpPr/>
+          <p:nvPr/>
+        </p:nvSpPr>
+        <p:spPr>
+          <a:xfrm>
+            <a:off x="502920" y="1645920"/>
+            <a:ext cx="329184" cy="219456"/>
+          </a:xfrm>
+          <a:prstGeom prst="roundRect">
+            <a:avLst>
+              <a:gd name="adj" fmla="val 15000"/>
+            </a:avLst>
+          </a:prstGeom>
+          <a:solidFill>
+            <a:srgbClr val="EEF0F3"/>
+          </a:solidFill>
+          <a:ln w="19050">
+            <a:solidFill>
+              <a:srgbClr val="9AA0A8"/>
+            </a:solidFill>
+            <a:prstDash val="dash"/>
+          </a:ln>
+          <a:effectLst/>
+        </p:spPr>
+        <p:txBody>
+          <a:bodyPr rtlCol="0" anchor="ctr" lIns="54864" rIns="54864" tIns="27432" bIns="27432" wrap="square"/>
+          <a:lstStyle/>
+          <a:p>
+            <a:pPr algn="ctr"/>
+          </a:p>
+        </p:txBody>
+      </p:sp>
+      <p:sp>
+        <p:nvSpPr>
+          <p:cNvPr id="53" name="TextBox 52"/>
+          <p:cNvSpPr txBox="1"/>
+          <p:nvPr/>
+        </p:nvSpPr>
+        <p:spPr>
+          <a:xfrm>
+            <a:off x="905256" y="1600200"/>
+            <a:ext cx="1563624" cy="320040"/>
+          </a:xfrm>
+          <a:prstGeom prst="rect">
+            <a:avLst/>
+          </a:prstGeom>
+          <a:noFill/>
+        </p:spPr>
+        <p:txBody>
+          <a:bodyPr wrap="square" anchor="ctr" lIns="45720" rIns="45720" tIns="27432" bIns="27432">
+            <a:spAutoFit/>
+          </a:bodyPr>
+          <a:lstStyle/>
+          <a:p>
+            <a:pPr algn="l"/>
+            <a:r>
+              <a:rPr sz="1200" b="0" i="0">
+                <a:solidFill>
+                  <a:srgbClr val="6B717A"/>
+                </a:solidFill>
+                <a:latin typeface="Calibri"/>
+              </a:rPr>
+              <a:t>equivalence class</a:t>
+            </a:r>
+          </a:p>
+        </p:txBody>
+      </p:sp>
+      <p:sp>
+        <p:nvSpPr>
+          <p:cNvPr id="54" name="TextBox 53"/>
+          <p:cNvSpPr txBox="1"/>
+          <p:nvPr/>
+        </p:nvSpPr>
+        <p:spPr>
+          <a:xfrm>
+            <a:off x="502920" y="2788920"/>
+            <a:ext cx="2103120" cy="731520"/>
+          </a:xfrm>
+          <a:prstGeom prst="rect">
+            <a:avLst/>
+          </a:prstGeom>
+          <a:noFill/>
+        </p:spPr>
+        <p:txBody>
+          <a:bodyPr wrap="square" anchor="t" lIns="45720" rIns="45720" tIns="27432" bIns="27432">
+            <a:spAutoFit/>
+          </a:bodyPr>
+          <a:lstStyle/>
+          <a:p>
+            <a:pPr algn="l"/>
+            <a:r>
+              <a:rPr sz="1500" b="0" i="0">
+                <a:solidFill>
+                  <a:srgbClr val="6B717A"/>
+                </a:solidFill>
+                <a:latin typeface="Calibri"/>
+              </a:rPr>
+              <a:t>union input equalities</a:t>
+            </a:r>
+          </a:p>
+        </p:txBody>
+      </p:sp>
     </p:spTree>
   </p:cSld>
   <p:clrMapOvr>
@@ -48859,6 +48964,180 @@
           </a:p>
         </p:txBody>
       </p:sp>
+      <p:sp>
+        <p:nvSpPr>
+          <p:cNvPr id="47" name="Rounded Rectangle 46"/>
+          <p:cNvSpPr/>
+          <p:nvPr/>
+        </p:nvSpPr>
+        <p:spPr>
+          <a:xfrm>
+            <a:off x="502920" y="1645920"/>
+            <a:ext cx="329184" cy="219456"/>
+          </a:xfrm>
+          <a:prstGeom prst="roundRect">
+            <a:avLst>
+              <a:gd name="adj" fmla="val 15000"/>
+            </a:avLst>
+          </a:prstGeom>
+          <a:solidFill>
+            <a:srgbClr val="EEF0F3"/>
+          </a:solidFill>
+          <a:ln w="19050">
+            <a:solidFill>
+              <a:srgbClr val="9AA0A8"/>
+            </a:solidFill>
+            <a:prstDash val="dash"/>
+          </a:ln>
+          <a:effectLst/>
+        </p:spPr>
+        <p:txBody>
+          <a:bodyPr rtlCol="0" anchor="ctr" lIns="54864" rIns="54864" tIns="27432" bIns="27432" wrap="square"/>
+          <a:lstStyle/>
+          <a:p>
+            <a:pPr algn="ctr"/>
+          </a:p>
+        </p:txBody>
+      </p:sp>
+      <p:sp>
+        <p:nvSpPr>
+          <p:cNvPr id="48" name="TextBox 47"/>
+          <p:cNvSpPr txBox="1"/>
+          <p:nvPr/>
+        </p:nvSpPr>
+        <p:spPr>
+          <a:xfrm>
+            <a:off x="905256" y="1600200"/>
+            <a:ext cx="1563624" cy="320040"/>
+          </a:xfrm>
+          <a:prstGeom prst="rect">
+            <a:avLst/>
+          </a:prstGeom>
+          <a:noFill/>
+        </p:spPr>
+        <p:txBody>
+          <a:bodyPr wrap="square" anchor="ctr" lIns="45720" rIns="45720" tIns="27432" bIns="27432">
+            <a:spAutoFit/>
+          </a:bodyPr>
+          <a:lstStyle/>
+          <a:p>
+            <a:pPr algn="l"/>
+            <a:r>
+              <a:rPr sz="1200" b="0" i="0">
+                <a:solidFill>
+                  <a:srgbClr val="6B717A"/>
+                </a:solidFill>
+                <a:latin typeface="Calibri"/>
+              </a:rPr>
+              <a:t>equivalence class</a:t>
+            </a:r>
+          </a:p>
+        </p:txBody>
+      </p:sp>
+      <p:sp>
+        <p:nvSpPr>
+          <p:cNvPr id="49" name="Rounded Rectangle 48"/>
+          <p:cNvSpPr/>
+          <p:nvPr/>
+        </p:nvSpPr>
+        <p:spPr>
+          <a:xfrm>
+            <a:off x="502920" y="2066543"/>
+            <a:ext cx="329184" cy="219456"/>
+          </a:xfrm>
+          <a:prstGeom prst="roundRect">
+            <a:avLst>
+              <a:gd name="adj" fmla="val 15000"/>
+            </a:avLst>
+          </a:prstGeom>
+          <a:solidFill>
+            <a:srgbClr val="FFF3CC"/>
+          </a:solidFill>
+          <a:ln w="25400">
+            <a:solidFill>
+              <a:srgbClr val="E0A300"/>
+            </a:solidFill>
+          </a:ln>
+          <a:effectLst/>
+        </p:spPr>
+        <p:txBody>
+          <a:bodyPr rtlCol="0" anchor="ctr" lIns="54864" rIns="54864" tIns="27432" bIns="27432" wrap="square"/>
+          <a:lstStyle/>
+          <a:p>
+            <a:pPr algn="ctr"/>
+          </a:p>
+        </p:txBody>
+      </p:sp>
+      <p:sp>
+        <p:nvSpPr>
+          <p:cNvPr id="50" name="TextBox 49"/>
+          <p:cNvSpPr txBox="1"/>
+          <p:nvPr/>
+        </p:nvSpPr>
+        <p:spPr>
+          <a:xfrm>
+            <a:off x="905256" y="2020824"/>
+            <a:ext cx="1563624" cy="320040"/>
+          </a:xfrm>
+          <a:prstGeom prst="rect">
+            <a:avLst/>
+          </a:prstGeom>
+          <a:noFill/>
+        </p:spPr>
+        <p:txBody>
+          <a:bodyPr wrap="square" anchor="ctr" lIns="45720" rIns="45720" tIns="27432" bIns="27432">
+            <a:spAutoFit/>
+          </a:bodyPr>
+          <a:lstStyle/>
+          <a:p>
+            <a:pPr algn="l"/>
+            <a:r>
+              <a:rPr sz="1200" b="0" i="0">
+                <a:solidFill>
+                  <a:srgbClr val="6B717A"/>
+                </a:solidFill>
+                <a:latin typeface="Calibri"/>
+              </a:rPr>
+              <a:t>candidate</a:t>
+            </a:r>
+          </a:p>
+        </p:txBody>
+      </p:sp>
+      <p:sp>
+        <p:nvSpPr>
+          <p:cNvPr id="51" name="TextBox 50"/>
+          <p:cNvSpPr txBox="1"/>
+          <p:nvPr/>
+        </p:nvSpPr>
+        <p:spPr>
+          <a:xfrm>
+            <a:off x="502920" y="2788920"/>
+            <a:ext cx="2103120" cy="731520"/>
+          </a:xfrm>
+          <a:prstGeom prst="rect">
+            <a:avLst/>
+          </a:prstGeom>
+          <a:noFill/>
+        </p:spPr>
+        <p:txBody>
+          <a:bodyPr wrap="square" anchor="t" lIns="45720" rIns="45720" tIns="27432" bIns="27432">
+            <a:spAutoFit/>
+          </a:bodyPr>
+          <a:lstStyle/>
+          <a:p>
+            <a:pPr algn="l"/>
+            <a:r>
+              <a:rPr sz="1500" b="0" i="0">
+                <a:solidFill>
+                  <a:srgbClr val="6B717A"/>
+                </a:solidFill>
+                <a:latin typeface="Calibri"/>
+              </a:rPr>
+              <a:t>candidates: all terms</a:t>
+            </a:r>
+          </a:p>
+        </p:txBody>
+      </p:sp>
     </p:spTree>
   </p:cSld>
   <p:clrMapOvr>
@@ -50385,6 +50664,214 @@
           </a:p>
         </p:txBody>
       </p:sp>
+      <p:sp>
+        <p:nvSpPr>
+          <p:cNvPr id="47" name="Rounded Rectangle 46"/>
+          <p:cNvSpPr/>
+          <p:nvPr/>
+        </p:nvSpPr>
+        <p:spPr>
+          <a:xfrm>
+            <a:off x="502920" y="1645920"/>
+            <a:ext cx="329184" cy="219456"/>
+          </a:xfrm>
+          <a:prstGeom prst="roundRect">
+            <a:avLst>
+              <a:gd name="adj" fmla="val 15000"/>
+            </a:avLst>
+          </a:prstGeom>
+          <a:solidFill>
+            <a:srgbClr val="EEF0F3"/>
+          </a:solidFill>
+          <a:ln w="19050">
+            <a:solidFill>
+              <a:srgbClr val="9AA0A8"/>
+            </a:solidFill>
+            <a:prstDash val="dash"/>
+          </a:ln>
+          <a:effectLst/>
+        </p:spPr>
+        <p:txBody>
+          <a:bodyPr rtlCol="0" anchor="ctr" lIns="54864" rIns="54864" tIns="27432" bIns="27432" wrap="square"/>
+          <a:lstStyle/>
+          <a:p>
+            <a:pPr algn="ctr"/>
+          </a:p>
+        </p:txBody>
+      </p:sp>
+      <p:sp>
+        <p:nvSpPr>
+          <p:cNvPr id="48" name="TextBox 47"/>
+          <p:cNvSpPr txBox="1"/>
+          <p:nvPr/>
+        </p:nvSpPr>
+        <p:spPr>
+          <a:xfrm>
+            <a:off x="905256" y="1600200"/>
+            <a:ext cx="1563624" cy="320040"/>
+          </a:xfrm>
+          <a:prstGeom prst="rect">
+            <a:avLst/>
+          </a:prstGeom>
+          <a:noFill/>
+        </p:spPr>
+        <p:txBody>
+          <a:bodyPr wrap="square" anchor="ctr" lIns="45720" rIns="45720" tIns="27432" bIns="27432">
+            <a:spAutoFit/>
+          </a:bodyPr>
+          <a:lstStyle/>
+          <a:p>
+            <a:pPr algn="l"/>
+            <a:r>
+              <a:rPr sz="1200" b="0" i="0">
+                <a:solidFill>
+                  <a:srgbClr val="6B717A"/>
+                </a:solidFill>
+                <a:latin typeface="Calibri"/>
+              </a:rPr>
+              <a:t>equivalence class</a:t>
+            </a:r>
+          </a:p>
+        </p:txBody>
+      </p:sp>
+      <p:sp>
+        <p:nvSpPr>
+          <p:cNvPr id="49" name="Rounded Rectangle 48"/>
+          <p:cNvSpPr/>
+          <p:nvPr/>
+        </p:nvSpPr>
+        <p:spPr>
+          <a:xfrm>
+            <a:off x="502920" y="2066543"/>
+            <a:ext cx="146304" cy="219456"/>
+          </a:xfrm>
+          <a:prstGeom prst="roundRect">
+            <a:avLst>
+              <a:gd name="adj" fmla="val 30000"/>
+            </a:avLst>
+          </a:prstGeom>
+          <a:solidFill>
+            <a:srgbClr val="DCEAF8"/>
+          </a:solidFill>
+          <a:ln w="19050">
+            <a:solidFill>
+              <a:srgbClr val="2E6FB0"/>
+            </a:solidFill>
+          </a:ln>
+          <a:effectLst/>
+        </p:spPr>
+        <p:txBody>
+          <a:bodyPr rtlCol="0" anchor="ctr" lIns="54864" rIns="54864" tIns="27432" bIns="27432" wrap="square"/>
+          <a:lstStyle/>
+          <a:p>
+            <a:pPr algn="ctr"/>
+          </a:p>
+        </p:txBody>
+      </p:sp>
+      <p:sp>
+        <p:nvSpPr>
+          <p:cNvPr id="50" name="Rounded Rectangle 49"/>
+          <p:cNvSpPr/>
+          <p:nvPr/>
+        </p:nvSpPr>
+        <p:spPr>
+          <a:xfrm>
+            <a:off x="685800" y="2066543"/>
+            <a:ext cx="146304" cy="219456"/>
+          </a:xfrm>
+          <a:prstGeom prst="roundRect">
+            <a:avLst>
+              <a:gd name="adj" fmla="val 30000"/>
+            </a:avLst>
+          </a:prstGeom>
+          <a:solidFill>
+            <a:srgbClr val="DDF1E2"/>
+          </a:solidFill>
+          <a:ln w="19050">
+            <a:solidFill>
+              <a:srgbClr val="3A9A5B"/>
+            </a:solidFill>
+          </a:ln>
+          <a:effectLst/>
+        </p:spPr>
+        <p:txBody>
+          <a:bodyPr rtlCol="0" anchor="ctr" lIns="54864" rIns="54864" tIns="27432" bIns="27432" wrap="square"/>
+          <a:lstStyle/>
+          <a:p>
+            <a:pPr algn="ctr"/>
+          </a:p>
+        </p:txBody>
+      </p:sp>
+      <p:sp>
+        <p:nvSpPr>
+          <p:cNvPr id="51" name="TextBox 50"/>
+          <p:cNvSpPr txBox="1"/>
+          <p:nvPr/>
+        </p:nvSpPr>
+        <p:spPr>
+          <a:xfrm>
+            <a:off x="905256" y="2020824"/>
+            <a:ext cx="1563624" cy="320040"/>
+          </a:xfrm>
+          <a:prstGeom prst="rect">
+            <a:avLst/>
+          </a:prstGeom>
+          <a:noFill/>
+        </p:spPr>
+        <p:txBody>
+          <a:bodyPr wrap="square" anchor="ctr" lIns="45720" rIns="45720" tIns="27432" bIns="27432">
+            <a:spAutoFit/>
+          </a:bodyPr>
+          <a:lstStyle/>
+          <a:p>
+            <a:pPr algn="l"/>
+            <a:r>
+              <a:rPr sz="1200" b="0" i="0">
+                <a:solidFill>
+                  <a:srgbClr val="6B717A"/>
+                </a:solidFill>
+                <a:latin typeface="Calibri"/>
+              </a:rPr>
+              <a:t>same signature</a:t>
+            </a:r>
+          </a:p>
+        </p:txBody>
+      </p:sp>
+      <p:sp>
+        <p:nvSpPr>
+          <p:cNvPr id="52" name="TextBox 51"/>
+          <p:cNvSpPr txBox="1"/>
+          <p:nvPr/>
+        </p:nvSpPr>
+        <p:spPr>
+          <a:xfrm>
+            <a:off x="502920" y="2788920"/>
+            <a:ext cx="2103120" cy="731520"/>
+          </a:xfrm>
+          <a:prstGeom prst="rect">
+            <a:avLst/>
+          </a:prstGeom>
+          <a:noFill/>
+        </p:spPr>
+        <p:txBody>
+          <a:bodyPr wrap="square" anchor="t" lIns="45720" rIns="45720" tIns="27432" bIns="27432">
+            <a:spAutoFit/>
+          </a:bodyPr>
+          <a:lstStyle/>
+          <a:p>
+            <a:pPr algn="l"/>
+            <a:r>
+              <a:rPr sz="1500" b="0" i="0">
+                <a:solidFill>
+                  <a:srgbClr val="6B717A"/>
+                </a:solidFill>
+                <a:latin typeface="Calibri"/>
+              </a:rPr>
+              <a:t>group by signature</a:t>
+            </a:r>
+          </a:p>
+        </p:txBody>
+      </p:sp>
     </p:spTree>
   </p:cSld>
   <p:clrMapOvr>
@@ -51983,14 +52470,49 @@
       </p:sp>
       <p:sp>
         <p:nvSpPr>
-          <p:cNvPr id="49" name="TextBox 48"/>
+          <p:cNvPr id="49" name="Rounded Rectangle 48"/>
+          <p:cNvSpPr/>
+          <p:nvPr/>
+        </p:nvSpPr>
+        <p:spPr>
+          <a:xfrm>
+            <a:off x="502920" y="1645920"/>
+            <a:ext cx="329184" cy="219456"/>
+          </a:xfrm>
+          <a:prstGeom prst="roundRect">
+            <a:avLst>
+              <a:gd name="adj" fmla="val 15000"/>
+            </a:avLst>
+          </a:prstGeom>
+          <a:solidFill>
+            <a:srgbClr val="EEF0F3"/>
+          </a:solidFill>
+          <a:ln w="19050">
+            <a:solidFill>
+              <a:srgbClr val="9AA0A8"/>
+            </a:solidFill>
+            <a:prstDash val="dash"/>
+          </a:ln>
+          <a:effectLst/>
+        </p:spPr>
+        <p:txBody>
+          <a:bodyPr rtlCol="0" anchor="ctr" lIns="54864" rIns="54864" tIns="27432" bIns="27432" wrap="square"/>
+          <a:lstStyle/>
+          <a:p>
+            <a:pPr algn="ctr"/>
+          </a:p>
+        </p:txBody>
+      </p:sp>
+      <p:sp>
+        <p:nvSpPr>
+          <p:cNvPr id="50" name="TextBox 49"/>
           <p:cNvSpPr txBox="1"/>
           <p:nvPr/>
         </p:nvSpPr>
         <p:spPr>
           <a:xfrm>
-            <a:off x="3506723" y="3246120"/>
-            <a:ext cx="731520" cy="548640"/>
+            <a:off x="905256" y="1600200"/>
+            <a:ext cx="1563624" cy="320040"/>
           </a:xfrm>
           <a:prstGeom prst="rect">
             <a:avLst/>
@@ -52003,6 +52525,76 @@
           </a:bodyPr>
           <a:lstStyle/>
           <a:p>
+            <a:pPr algn="l"/>
+            <a:r>
+              <a:rPr sz="1200" b="0" i="0">
+                <a:solidFill>
+                  <a:srgbClr val="6B717A"/>
+                </a:solidFill>
+                <a:latin typeface="Calibri"/>
+              </a:rPr>
+              <a:t>equivalence class</a:t>
+            </a:r>
+          </a:p>
+        </p:txBody>
+      </p:sp>
+      <p:sp>
+        <p:nvSpPr>
+          <p:cNvPr id="51" name="TextBox 50"/>
+          <p:cNvSpPr txBox="1"/>
+          <p:nvPr/>
+        </p:nvSpPr>
+        <p:spPr>
+          <a:xfrm>
+            <a:off x="502920" y="2788920"/>
+            <a:ext cx="2103120" cy="731520"/>
+          </a:xfrm>
+          <a:prstGeom prst="rect">
+            <a:avLst/>
+          </a:prstGeom>
+          <a:noFill/>
+        </p:spPr>
+        <p:txBody>
+          <a:bodyPr wrap="square" anchor="t" lIns="45720" rIns="45720" tIns="27432" bIns="27432">
+            <a:spAutoFit/>
+          </a:bodyPr>
+          <a:lstStyle/>
+          <a:p>
+            <a:pPr algn="l"/>
+            <a:r>
+              <a:rPr sz="1500" b="0" i="0">
+                <a:solidFill>
+                  <a:srgbClr val="6B717A"/>
+                </a:solidFill>
+                <a:latin typeface="Calibri"/>
+              </a:rPr>
+              <a:t>merge groups</a:t>
+            </a:r>
+          </a:p>
+        </p:txBody>
+      </p:sp>
+      <p:sp>
+        <p:nvSpPr>
+          <p:cNvPr id="52" name="TextBox 51"/>
+          <p:cNvSpPr txBox="1"/>
+          <p:nvPr/>
+        </p:nvSpPr>
+        <p:spPr>
+          <a:xfrm>
+            <a:off x="3506723" y="3246120"/>
+            <a:ext cx="731520" cy="548640"/>
+          </a:xfrm>
+          <a:prstGeom prst="rect">
+            <a:avLst/>
+          </a:prstGeom>
+          <a:noFill/>
+        </p:spPr>
+        <p:txBody>
+          <a:bodyPr wrap="square" anchor="ctr" lIns="45720" rIns="45720" tIns="27432" bIns="27432">
+            <a:spAutoFit/>
+          </a:bodyPr>
+          <a:lstStyle/>
+          <a:p>
             <a:pPr algn="ctr"/>
             <a:r>
               <a:rPr sz="2200" b="1" i="0">
@@ -52018,7 +52610,7 @@
       </p:sp>
       <p:sp>
         <p:nvSpPr>
-          <p:cNvPr id="50" name="TextBox 49"/>
+          <p:cNvPr id="53" name="TextBox 52"/>
           <p:cNvSpPr txBox="1"/>
           <p:nvPr/>
         </p:nvSpPr>
@@ -53647,6 +54239,180 @@
           </a:p>
         </p:txBody>
       </p:sp>
+      <p:sp>
+        <p:nvSpPr>
+          <p:cNvPr id="49" name="Rounded Rectangle 48"/>
+          <p:cNvSpPr/>
+          <p:nvPr/>
+        </p:nvSpPr>
+        <p:spPr>
+          <a:xfrm>
+            <a:off x="502920" y="1645920"/>
+            <a:ext cx="329184" cy="219456"/>
+          </a:xfrm>
+          <a:prstGeom prst="roundRect">
+            <a:avLst>
+              <a:gd name="adj" fmla="val 15000"/>
+            </a:avLst>
+          </a:prstGeom>
+          <a:solidFill>
+            <a:srgbClr val="EEF0F3"/>
+          </a:solidFill>
+          <a:ln w="19050">
+            <a:solidFill>
+              <a:srgbClr val="9AA0A8"/>
+            </a:solidFill>
+            <a:prstDash val="dash"/>
+          </a:ln>
+          <a:effectLst/>
+        </p:spPr>
+        <p:txBody>
+          <a:bodyPr rtlCol="0" anchor="ctr" lIns="54864" rIns="54864" tIns="27432" bIns="27432" wrap="square"/>
+          <a:lstStyle/>
+          <a:p>
+            <a:pPr algn="ctr"/>
+          </a:p>
+        </p:txBody>
+      </p:sp>
+      <p:sp>
+        <p:nvSpPr>
+          <p:cNvPr id="50" name="TextBox 49"/>
+          <p:cNvSpPr txBox="1"/>
+          <p:nvPr/>
+        </p:nvSpPr>
+        <p:spPr>
+          <a:xfrm>
+            <a:off x="905256" y="1600200"/>
+            <a:ext cx="1563624" cy="320040"/>
+          </a:xfrm>
+          <a:prstGeom prst="rect">
+            <a:avLst/>
+          </a:prstGeom>
+          <a:noFill/>
+        </p:spPr>
+        <p:txBody>
+          <a:bodyPr wrap="square" anchor="ctr" lIns="45720" rIns="45720" tIns="27432" bIns="27432">
+            <a:spAutoFit/>
+          </a:bodyPr>
+          <a:lstStyle/>
+          <a:p>
+            <a:pPr algn="l"/>
+            <a:r>
+              <a:rPr sz="1200" b="0" i="0">
+                <a:solidFill>
+                  <a:srgbClr val="6B717A"/>
+                </a:solidFill>
+                <a:latin typeface="Calibri"/>
+              </a:rPr>
+              <a:t>equivalence class</a:t>
+            </a:r>
+          </a:p>
+        </p:txBody>
+      </p:sp>
+      <p:sp>
+        <p:nvSpPr>
+          <p:cNvPr id="51" name="Rounded Rectangle 50"/>
+          <p:cNvSpPr/>
+          <p:nvPr/>
+        </p:nvSpPr>
+        <p:spPr>
+          <a:xfrm>
+            <a:off x="502920" y="2066543"/>
+            <a:ext cx="329184" cy="219456"/>
+          </a:xfrm>
+          <a:prstGeom prst="roundRect">
+            <a:avLst>
+              <a:gd name="adj" fmla="val 15000"/>
+            </a:avLst>
+          </a:prstGeom>
+          <a:solidFill>
+            <a:srgbClr val="FFF3CC"/>
+          </a:solidFill>
+          <a:ln w="25400">
+            <a:solidFill>
+              <a:srgbClr val="E0A300"/>
+            </a:solidFill>
+          </a:ln>
+          <a:effectLst/>
+        </p:spPr>
+        <p:txBody>
+          <a:bodyPr rtlCol="0" anchor="ctr" lIns="54864" rIns="54864" tIns="27432" bIns="27432" wrap="square"/>
+          <a:lstStyle/>
+          <a:p>
+            <a:pPr algn="ctr"/>
+          </a:p>
+        </p:txBody>
+      </p:sp>
+      <p:sp>
+        <p:nvSpPr>
+          <p:cNvPr id="52" name="TextBox 51"/>
+          <p:cNvSpPr txBox="1"/>
+          <p:nvPr/>
+        </p:nvSpPr>
+        <p:spPr>
+          <a:xfrm>
+            <a:off x="905256" y="2020824"/>
+            <a:ext cx="1563624" cy="320040"/>
+          </a:xfrm>
+          <a:prstGeom prst="rect">
+            <a:avLst/>
+          </a:prstGeom>
+          <a:noFill/>
+        </p:spPr>
+        <p:txBody>
+          <a:bodyPr wrap="square" anchor="ctr" lIns="45720" rIns="45720" tIns="27432" bIns="27432">
+            <a:spAutoFit/>
+          </a:bodyPr>
+          <a:lstStyle/>
+          <a:p>
+            <a:pPr algn="l"/>
+            <a:r>
+              <a:rPr sz="1200" b="0" i="0">
+                <a:solidFill>
+                  <a:srgbClr val="6B717A"/>
+                </a:solidFill>
+                <a:latin typeface="Calibri"/>
+              </a:rPr>
+              <a:t>candidate</a:t>
+            </a:r>
+          </a:p>
+        </p:txBody>
+      </p:sp>
+      <p:sp>
+        <p:nvSpPr>
+          <p:cNvPr id="53" name="TextBox 52"/>
+          <p:cNvSpPr txBox="1"/>
+          <p:nvPr/>
+        </p:nvSpPr>
+        <p:spPr>
+          <a:xfrm>
+            <a:off x="502920" y="2788920"/>
+            <a:ext cx="2103120" cy="731520"/>
+          </a:xfrm>
+          <a:prstGeom prst="rect">
+            <a:avLst/>
+          </a:prstGeom>
+          <a:noFill/>
+        </p:spPr>
+        <p:txBody>
+          <a:bodyPr wrap="square" anchor="t" lIns="45720" rIns="45720" tIns="27432" bIns="27432">
+            <a:spAutoFit/>
+          </a:bodyPr>
+          <a:lstStyle/>
+          <a:p>
+            <a:pPr algn="l"/>
+            <a:r>
+              <a:rPr sz="1500" b="0" i="0">
+                <a:solidFill>
+                  <a:srgbClr val="6B717A"/>
+                </a:solidFill>
+                <a:latin typeface="Calibri"/>
+              </a:rPr>
+              <a:t>candidates: parents of merged</a:t>
+            </a:r>
+          </a:p>
+        </p:txBody>
+      </p:sp>
     </p:spTree>
   </p:cSld>
   <p:clrMapOvr>
@@ -55280,7 +56046,112 @@
       </p:sp>
       <p:sp>
         <p:nvSpPr>
-          <p:cNvPr id="50" name="TextBox 49"/>
+          <p:cNvPr id="50" name="Rounded Rectangle 49"/>
+          <p:cNvSpPr/>
+          <p:nvPr/>
+        </p:nvSpPr>
+        <p:spPr>
+          <a:xfrm>
+            <a:off x="502920" y="1645920"/>
+            <a:ext cx="329184" cy="219456"/>
+          </a:xfrm>
+          <a:prstGeom prst="roundRect">
+            <a:avLst>
+              <a:gd name="adj" fmla="val 15000"/>
+            </a:avLst>
+          </a:prstGeom>
+          <a:solidFill>
+            <a:srgbClr val="EEF0F3"/>
+          </a:solidFill>
+          <a:ln w="19050">
+            <a:solidFill>
+              <a:srgbClr val="9AA0A8"/>
+            </a:solidFill>
+            <a:prstDash val="dash"/>
+          </a:ln>
+          <a:effectLst/>
+        </p:spPr>
+        <p:txBody>
+          <a:bodyPr rtlCol="0" anchor="ctr" lIns="54864" rIns="54864" tIns="27432" bIns="27432" wrap="square"/>
+          <a:lstStyle/>
+          <a:p>
+            <a:pPr algn="ctr"/>
+          </a:p>
+        </p:txBody>
+      </p:sp>
+      <p:sp>
+        <p:nvSpPr>
+          <p:cNvPr id="51" name="TextBox 50"/>
+          <p:cNvSpPr txBox="1"/>
+          <p:nvPr/>
+        </p:nvSpPr>
+        <p:spPr>
+          <a:xfrm>
+            <a:off x="905256" y="1600200"/>
+            <a:ext cx="1563624" cy="320040"/>
+          </a:xfrm>
+          <a:prstGeom prst="rect">
+            <a:avLst/>
+          </a:prstGeom>
+          <a:noFill/>
+        </p:spPr>
+        <p:txBody>
+          <a:bodyPr wrap="square" anchor="ctr" lIns="45720" rIns="45720" tIns="27432" bIns="27432">
+            <a:spAutoFit/>
+          </a:bodyPr>
+          <a:lstStyle/>
+          <a:p>
+            <a:pPr algn="l"/>
+            <a:r>
+              <a:rPr sz="1200" b="0" i="0">
+                <a:solidFill>
+                  <a:srgbClr val="6B717A"/>
+                </a:solidFill>
+                <a:latin typeface="Calibri"/>
+              </a:rPr>
+              <a:t>equivalence class</a:t>
+            </a:r>
+          </a:p>
+        </p:txBody>
+      </p:sp>
+      <p:sp>
+        <p:nvSpPr>
+          <p:cNvPr id="52" name="TextBox 51"/>
+          <p:cNvSpPr txBox="1"/>
+          <p:nvPr/>
+        </p:nvSpPr>
+        <p:spPr>
+          <a:xfrm>
+            <a:off x="502920" y="2788920"/>
+            <a:ext cx="2103120" cy="731520"/>
+          </a:xfrm>
+          <a:prstGeom prst="rect">
+            <a:avLst/>
+          </a:prstGeom>
+          <a:noFill/>
+        </p:spPr>
+        <p:txBody>
+          <a:bodyPr wrap="square" anchor="t" lIns="45720" rIns="45720" tIns="27432" bIns="27432">
+            <a:spAutoFit/>
+          </a:bodyPr>
+          <a:lstStyle/>
+          <a:p>
+            <a:pPr algn="l"/>
+            <a:r>
+              <a:rPr sz="1500" b="0" i="0">
+                <a:solidFill>
+                  <a:srgbClr val="6B717A"/>
+                </a:solidFill>
+                <a:latin typeface="Calibri"/>
+              </a:rPr>
+              <a:t>group, merge</a:t>
+            </a:r>
+          </a:p>
+        </p:txBody>
+      </p:sp>
+      <p:sp>
+        <p:nvSpPr>
+          <p:cNvPr id="53" name="TextBox 52"/>
           <p:cNvSpPr txBox="1"/>
           <p:nvPr/>
         </p:nvSpPr>
@@ -57156,8 +58027,8 @@
         </p:nvSpPr>
         <p:spPr>
           <a:xfrm>
-            <a:off x="548640" y="5596128"/>
-            <a:ext cx="11064240" cy="694944"/>
+            <a:off x="502920" y="1645920"/>
+            <a:ext cx="329184" cy="219456"/>
           </a:xfrm>
           <a:prstGeom prst="roundRect">
             <a:avLst>
@@ -57165,10 +58036,13 @@
             </a:avLst>
           </a:prstGeom>
           <a:solidFill>
-            <a:srgbClr val="1F2A44"/>
-          </a:solidFill>
-          <a:ln>
-            <a:noFill/>
+            <a:srgbClr val="EEF0F3"/>
+          </a:solidFill>
+          <a:ln w="19050">
+            <a:solidFill>
+              <a:srgbClr val="9AA0A8"/>
+            </a:solidFill>
+            <a:prstDash val="dash"/>
           </a:ln>
           <a:effectLst/>
         </p:spPr>
@@ -57177,14 +58051,143 @@
           <a:lstStyle/>
           <a:p>
             <a:pPr algn="ctr"/>
-            <a:r>
-              <a:rPr sz="2600" b="1" i="0">
-                <a:solidFill>
-                  <a:srgbClr val="FFFFFF"/>
-                </a:solidFill>
-                <a:latin typeface="Calibri"/>
-              </a:rPr>
-              <a:t>Round 3: no candidates.  Done</a:t>
+          </a:p>
+        </p:txBody>
+      </p:sp>
+      <p:sp>
+        <p:nvSpPr>
+          <p:cNvPr id="57" name="TextBox 56"/>
+          <p:cNvSpPr txBox="1"/>
+          <p:nvPr/>
+        </p:nvSpPr>
+        <p:spPr>
+          <a:xfrm>
+            <a:off x="905256" y="1600200"/>
+            <a:ext cx="1563624" cy="320040"/>
+          </a:xfrm>
+          <a:prstGeom prst="rect">
+            <a:avLst/>
+          </a:prstGeom>
+          <a:noFill/>
+        </p:spPr>
+        <p:txBody>
+          <a:bodyPr wrap="square" anchor="ctr" lIns="45720" rIns="45720" tIns="27432" bIns="27432">
+            <a:spAutoFit/>
+          </a:bodyPr>
+          <a:lstStyle/>
+          <a:p>
+            <a:pPr algn="l"/>
+            <a:r>
+              <a:rPr sz="1200" b="0" i="0">
+                <a:solidFill>
+                  <a:srgbClr val="6B717A"/>
+                </a:solidFill>
+                <a:latin typeface="Calibri"/>
+              </a:rPr>
+              <a:t>equivalence class</a:t>
+            </a:r>
+          </a:p>
+        </p:txBody>
+      </p:sp>
+      <p:sp>
+        <p:nvSpPr>
+          <p:cNvPr id="58" name="Rounded Rectangle 57"/>
+          <p:cNvSpPr/>
+          <p:nvPr/>
+        </p:nvSpPr>
+        <p:spPr>
+          <a:xfrm>
+            <a:off x="502920" y="2066543"/>
+            <a:ext cx="329184" cy="219456"/>
+          </a:xfrm>
+          <a:prstGeom prst="roundRect">
+            <a:avLst>
+              <a:gd name="adj" fmla="val 15000"/>
+            </a:avLst>
+          </a:prstGeom>
+          <a:noFill/>
+          <a:ln w="28575">
+            <a:solidFill>
+              <a:srgbClr val="1F2A44"/>
+            </a:solidFill>
+            <a:prstDash val="lgDash"/>
+          </a:ln>
+          <a:effectLst/>
+        </p:spPr>
+        <p:txBody>
+          <a:bodyPr rtlCol="0" anchor="ctr" lIns="54864" rIns="54864" tIns="27432" bIns="27432" wrap="square"/>
+          <a:lstStyle/>
+          <a:p>
+            <a:pPr algn="ctr"/>
+          </a:p>
+        </p:txBody>
+      </p:sp>
+      <p:sp>
+        <p:nvSpPr>
+          <p:cNvPr id="59" name="TextBox 58"/>
+          <p:cNvSpPr txBox="1"/>
+          <p:nvPr/>
+        </p:nvSpPr>
+        <p:spPr>
+          <a:xfrm>
+            <a:off x="905256" y="2020824"/>
+            <a:ext cx="1563624" cy="320040"/>
+          </a:xfrm>
+          <a:prstGeom prst="rect">
+            <a:avLst/>
+          </a:prstGeom>
+          <a:noFill/>
+        </p:spPr>
+        <p:txBody>
+          <a:bodyPr wrap="square" anchor="ctr" lIns="45720" rIns="45720" tIns="27432" bIns="27432">
+            <a:spAutoFit/>
+          </a:bodyPr>
+          <a:lstStyle/>
+          <a:p>
+            <a:pPr algn="l"/>
+            <a:r>
+              <a:rPr sz="1200" b="0" i="0">
+                <a:solidFill>
+                  <a:srgbClr val="6B717A"/>
+                </a:solidFill>
+                <a:latin typeface="Calibri"/>
+              </a:rPr>
+              <a:t>round</a:t>
+            </a:r>
+          </a:p>
+        </p:txBody>
+      </p:sp>
+      <p:sp>
+        <p:nvSpPr>
+          <p:cNvPr id="60" name="TextBox 59"/>
+          <p:cNvSpPr txBox="1"/>
+          <p:nvPr/>
+        </p:nvSpPr>
+        <p:spPr>
+          <a:xfrm>
+            <a:off x="502920" y="2788920"/>
+            <a:ext cx="2103120" cy="731520"/>
+          </a:xfrm>
+          <a:prstGeom prst="rect">
+            <a:avLst/>
+          </a:prstGeom>
+          <a:noFill/>
+        </p:spPr>
+        <p:txBody>
+          <a:bodyPr wrap="square" anchor="t" lIns="45720" rIns="45720" tIns="27432" bIns="27432">
+            <a:spAutoFit/>
+          </a:bodyPr>
+          <a:lstStyle/>
+          <a:p>
+            <a:pPr algn="l"/>
+            <a:r>
+              <a:rPr sz="1500" b="0" i="0">
+                <a:solidFill>
+                  <a:srgbClr val="6B717A"/>
+                </a:solidFill>
+                <a:latin typeface="Calibri"/>
+              </a:rPr>
+              <a:t>no candidates: stop</a:t>
             </a:r>
           </a:p>
         </p:txBody>
